--- a/Powerpoint.pptx
+++ b/Powerpoint.pptx
@@ -370,7 +370,7 @@
           <a:p>
             <a:fld id="{D608700A-2A06-4DE6-993D-330A4DDF3764}" type="datetime1">
               <a:rPr lang="de-DE" smtClean="0"/>
-              <a:t>21.11.2022</a:t>
+              <a:t>23.11.2022</a:t>
             </a:fld>
             <a:endParaRPr lang="de-DE" dirty="0"/>
           </a:p>
@@ -695,7 +695,7 @@
           <a:p>
             <a:fld id="{D608700A-2A06-4DE6-993D-330A4DDF3764}" type="datetime1">
               <a:rPr lang="de-DE" smtClean="0"/>
-              <a:t>21.11.2022</a:t>
+              <a:t>23.11.2022</a:t>
             </a:fld>
             <a:endParaRPr lang="de-DE" dirty="0"/>
           </a:p>
@@ -1025,35 +1025,7 @@
           <a:bodyPr/>
           <a:lstStyle/>
           <a:p>
-            <a:r>
-              <a:rPr lang="de-DE" dirty="0"/>
-              <a:t>Brauchen wir zu den Aufgaben jeweils eine Lösungsfolie, oder machen wir das auf der Tonspur?</a:t>
-            </a:r>
-          </a:p>
-          <a:p>
             <a:endParaRPr lang="de-DE" dirty="0"/>
-          </a:p>
-          <a:p>
-            <a:r>
-              <a:rPr lang="de-DE" dirty="0"/>
-              <a:t>Wenn wir die Lösungen auf der Tonspur machen würde ich trotzdem die Musterlösung für uns irgendwo dokumentieren. </a:t>
-            </a:r>
-            <a:r>
-              <a:rPr lang="de-DE" dirty="0" err="1"/>
-              <a:t>Vlt</a:t>
-            </a:r>
-            <a:r>
-              <a:rPr lang="de-DE" dirty="0"/>
-              <a:t> können wir dazu das </a:t>
-            </a:r>
-            <a:r>
-              <a:rPr lang="de-DE" dirty="0" err="1"/>
-              <a:t>Markdownfile</a:t>
-            </a:r>
-            <a:r>
-              <a:rPr lang="de-DE" dirty="0"/>
-              <a:t> weiternutzen</a:t>
-            </a:r>
           </a:p>
         </p:txBody>
       </p:sp>
@@ -1121,12 +1093,7 @@
             <p:ph type="sldImg"/>
           </p:nvPr>
         </p:nvSpPr>
-        <p:spPr>
-          <a:xfrm>
-            <a:off x="2459038" y="1143000"/>
-            <a:ext cx="3862387" cy="2060575"/>
-          </a:xfrm>
-        </p:spPr>
+        <p:spPr/>
       </p:sp>
       <p:sp>
         <p:nvSpPr>
@@ -1143,310 +1110,95 @@
           <a:bodyPr/>
           <a:lstStyle/>
           <a:p>
-            <a:r>
-              <a:rPr lang="de-DE" b="0" dirty="0">
-                <a:solidFill>
-                  <a:srgbClr val="D4D4D4"/>
-                </a:solidFill>
-                <a:effectLst/>
-                <a:latin typeface="Consolas" panose="020B0609020204030204" pitchFamily="49" charset="0"/>
-              </a:rPr>
-              <a:t>Die Berechtigungen stehen nach dem ersten Buchstaben als 3er-Blöcke für jeweils lesen, schreiben, ausführen.</a:t>
-            </a:r>
-          </a:p>
-          <a:p>
-            <a:r>
-              <a:rPr lang="de-DE" b="0" dirty="0">
-                <a:solidFill>
-                  <a:srgbClr val="D4D4D4"/>
-                </a:solidFill>
-                <a:effectLst/>
-                <a:latin typeface="Consolas" panose="020B0609020204030204" pitchFamily="49" charset="0"/>
-              </a:rPr>
-              <a:t>Davon gibt es jeweils drei Blöcke: Besitzer, Gruppe, Jeder.</a:t>
-            </a:r>
-          </a:p>
-          <a:p>
-            <a:r>
-              <a:rPr lang="de-DE" b="0" dirty="0">
-                <a:solidFill>
-                  <a:srgbClr val="CE9178"/>
-                </a:solidFill>
-                <a:effectLst/>
-                <a:latin typeface="Consolas" panose="020B0609020204030204" pitchFamily="49" charset="0"/>
-              </a:rPr>
-              <a:t>`r`</a:t>
-            </a:r>
-            <a:r>
-              <a:rPr lang="de-DE" b="0" dirty="0">
-                <a:solidFill>
-                  <a:srgbClr val="D4D4D4"/>
-                </a:solidFill>
-                <a:effectLst/>
-                <a:latin typeface="Consolas" panose="020B0609020204030204" pitchFamily="49" charset="0"/>
-              </a:rPr>
-              <a:t> steht für lesen, </a:t>
-            </a:r>
-            <a:r>
-              <a:rPr lang="de-DE" b="0" dirty="0">
-                <a:solidFill>
-                  <a:srgbClr val="CE9178"/>
-                </a:solidFill>
-                <a:effectLst/>
-                <a:latin typeface="Consolas" panose="020B0609020204030204" pitchFamily="49" charset="0"/>
-              </a:rPr>
-              <a:t>`w`</a:t>
-            </a:r>
-            <a:r>
-              <a:rPr lang="de-DE" b="0" dirty="0">
-                <a:solidFill>
-                  <a:srgbClr val="D4D4D4"/>
-                </a:solidFill>
-                <a:effectLst/>
-                <a:latin typeface="Consolas" panose="020B0609020204030204" pitchFamily="49" charset="0"/>
-              </a:rPr>
-              <a:t> für schreiben und </a:t>
-            </a:r>
-            <a:r>
-              <a:rPr lang="de-DE" b="0" dirty="0">
-                <a:solidFill>
-                  <a:srgbClr val="CE9178"/>
-                </a:solidFill>
-                <a:effectLst/>
-                <a:latin typeface="Consolas" panose="020B0609020204030204" pitchFamily="49" charset="0"/>
-              </a:rPr>
-              <a:t>`x`</a:t>
-            </a:r>
-            <a:r>
-              <a:rPr lang="de-DE" b="0" dirty="0">
-                <a:solidFill>
-                  <a:srgbClr val="D4D4D4"/>
-                </a:solidFill>
-                <a:effectLst/>
-                <a:latin typeface="Consolas" panose="020B0609020204030204" pitchFamily="49" charset="0"/>
-              </a:rPr>
-              <a:t> für ausführen. </a:t>
-            </a:r>
-            <a:r>
-              <a:rPr lang="de-DE" b="0" dirty="0">
-                <a:solidFill>
-                  <a:srgbClr val="CE9178"/>
-                </a:solidFill>
-                <a:effectLst/>
-                <a:latin typeface="Consolas" panose="020B0609020204030204" pitchFamily="49" charset="0"/>
-              </a:rPr>
-              <a:t>`-`</a:t>
-            </a:r>
-            <a:r>
-              <a:rPr lang="de-DE" b="0" dirty="0">
-                <a:solidFill>
-                  <a:srgbClr val="D4D4D4"/>
-                </a:solidFill>
-                <a:effectLst/>
-                <a:latin typeface="Consolas" panose="020B0609020204030204" pitchFamily="49" charset="0"/>
-              </a:rPr>
-              <a:t>bedeutet keine Berechtigung an dieser Stelle.</a:t>
-            </a:r>
-          </a:p>
-          <a:p>
-            <a:r>
-              <a:rPr lang="de-DE" b="0" dirty="0">
-                <a:solidFill>
-                  <a:srgbClr val="D4D4D4"/>
-                </a:solidFill>
-                <a:effectLst/>
-                <a:latin typeface="Consolas" panose="020B0609020204030204" pitchFamily="49" charset="0"/>
-              </a:rPr>
-              <a:t>Im Beispiel oben hat </a:t>
-            </a:r>
-            <a:r>
-              <a:rPr lang="de-DE" b="0" dirty="0" err="1">
-                <a:solidFill>
-                  <a:srgbClr val="D4D4D4"/>
-                </a:solidFill>
-                <a:effectLst/>
-                <a:latin typeface="Consolas" panose="020B0609020204030204" pitchFamily="49" charset="0"/>
-              </a:rPr>
-              <a:t>john</a:t>
-            </a:r>
-            <a:r>
-              <a:rPr lang="de-DE" b="0" dirty="0">
-                <a:solidFill>
-                  <a:srgbClr val="D4D4D4"/>
-                </a:solidFill>
-                <a:effectLst/>
-                <a:latin typeface="Consolas" panose="020B0609020204030204" pitchFamily="49" charset="0"/>
-              </a:rPr>
-              <a:t> für die Datei die Berechtigungen lesen und schreiben. Die Gruppe </a:t>
-            </a:r>
-            <a:r>
-              <a:rPr lang="de-DE" b="0" dirty="0" err="1">
-                <a:solidFill>
-                  <a:srgbClr val="D4D4D4"/>
-                </a:solidFill>
-                <a:effectLst/>
-                <a:latin typeface="Consolas" panose="020B0609020204030204" pitchFamily="49" charset="0"/>
-              </a:rPr>
-              <a:t>user</a:t>
-            </a:r>
-            <a:r>
-              <a:rPr lang="de-DE" b="0" dirty="0">
-                <a:solidFill>
-                  <a:srgbClr val="D4D4D4"/>
-                </a:solidFill>
-                <a:effectLst/>
-                <a:latin typeface="Consolas" panose="020B0609020204030204" pitchFamily="49" charset="0"/>
-              </a:rPr>
-              <a:t> darf lesen und alle anderen dürfen gar nichts.</a:t>
-            </a:r>
-          </a:p>
-          <a:p>
-            <a:endParaRPr lang="de-DE" b="0" dirty="0">
-              <a:solidFill>
-                <a:srgbClr val="D4D4D4"/>
-              </a:solidFill>
-              <a:effectLst/>
-              <a:latin typeface="Consolas" panose="020B0609020204030204" pitchFamily="49" charset="0"/>
-            </a:endParaRPr>
-          </a:p>
-          <a:p>
-            <a:pPr marL="0" marR="0" lvl="0" indent="0" algn="l" defTabSz="874258" rtl="0" eaLnBrk="1" fontAlgn="auto" latinLnBrk="0" hangingPunct="1">
-              <a:lnSpc>
-                <a:spcPct val="100000"/>
-              </a:lnSpc>
-              <a:spcBef>
-                <a:spcPts val="600"/>
-              </a:spcBef>
-              <a:spcAft>
-                <a:spcPts val="0"/>
-              </a:spcAft>
-              <a:buClrTx/>
-              <a:buSzTx/>
-              <a:buFontTx/>
-              <a:buNone/>
-              <a:tabLst/>
-              <a:defRPr/>
-            </a:pPr>
-            <a:r>
-              <a:rPr lang="de-DE" b="0" dirty="0">
-                <a:solidFill>
-                  <a:srgbClr val="D4D4D4"/>
-                </a:solidFill>
-                <a:effectLst/>
-                <a:latin typeface="Consolas" panose="020B0609020204030204" pitchFamily="49" charset="0"/>
-              </a:rPr>
-              <a:t>Manchmal sieht man im Besitzer- oder Gruppenblock einer Datei anstelle des </a:t>
-            </a:r>
-            <a:r>
-              <a:rPr lang="de-DE" b="0" dirty="0">
-                <a:solidFill>
-                  <a:srgbClr val="CE9178"/>
-                </a:solidFill>
-                <a:effectLst/>
-                <a:latin typeface="Consolas" panose="020B0609020204030204" pitchFamily="49" charset="0"/>
-              </a:rPr>
-              <a:t>`x`</a:t>
-            </a:r>
-            <a:r>
-              <a:rPr lang="de-DE" b="0" dirty="0">
-                <a:solidFill>
-                  <a:srgbClr val="D4D4D4"/>
-                </a:solidFill>
-                <a:effectLst/>
-                <a:latin typeface="Consolas" panose="020B0609020204030204" pitchFamily="49" charset="0"/>
-              </a:rPr>
-              <a:t> ein </a:t>
-            </a:r>
-            <a:r>
-              <a:rPr lang="de-DE" b="0" dirty="0">
-                <a:solidFill>
-                  <a:srgbClr val="CE9178"/>
-                </a:solidFill>
-                <a:effectLst/>
-                <a:latin typeface="Consolas" panose="020B0609020204030204" pitchFamily="49" charset="0"/>
-              </a:rPr>
-              <a:t>`s`</a:t>
-            </a:r>
-            <a:r>
-              <a:rPr lang="de-DE" b="0" dirty="0">
-                <a:solidFill>
-                  <a:srgbClr val="D4D4D4"/>
-                </a:solidFill>
-                <a:effectLst/>
-                <a:latin typeface="Consolas" panose="020B0609020204030204" pitchFamily="49" charset="0"/>
-              </a:rPr>
-              <a:t>. Das ist dann das SUID-, bzw. SGID-Bit. Es besagt, dass diese Datei mit den Rechten des Besitzers, bzw. mit den der Gruppe. Im Beispiel unten ist das Programm </a:t>
-            </a:r>
-            <a:r>
-              <a:rPr lang="de-DE" b="0" dirty="0" err="1">
-                <a:solidFill>
-                  <a:srgbClr val="D4D4D4"/>
-                </a:solidFill>
-                <a:effectLst/>
-                <a:latin typeface="Consolas" panose="020B0609020204030204" pitchFamily="49" charset="0"/>
-              </a:rPr>
-              <a:t>passwd</a:t>
-            </a:r>
-            <a:r>
-              <a:rPr lang="de-DE" b="0" dirty="0">
-                <a:solidFill>
-                  <a:srgbClr val="D4D4D4"/>
-                </a:solidFill>
-                <a:effectLst/>
-                <a:latin typeface="Consolas" panose="020B0609020204030204" pitchFamily="49" charset="0"/>
-              </a:rPr>
-              <a:t> mit dem SUID Bit versehen, denn ein normaler User soll es ausführen können, um sein Passwort zu ändern, aber dafür muss eine geschützte Datei bearbeitet werden (/</a:t>
-            </a:r>
-            <a:r>
-              <a:rPr lang="de-DE" b="0" dirty="0" err="1">
-                <a:solidFill>
-                  <a:srgbClr val="D4D4D4"/>
-                </a:solidFill>
-                <a:effectLst/>
-                <a:latin typeface="Consolas" panose="020B0609020204030204" pitchFamily="49" charset="0"/>
-              </a:rPr>
-              <a:t>etc</a:t>
-            </a:r>
-            <a:r>
-              <a:rPr lang="de-DE" b="0" dirty="0">
-                <a:solidFill>
-                  <a:srgbClr val="D4D4D4"/>
-                </a:solidFill>
-                <a:effectLst/>
-                <a:latin typeface="Consolas" panose="020B0609020204030204" pitchFamily="49" charset="0"/>
-              </a:rPr>
-              <a:t>/</a:t>
-            </a:r>
-            <a:r>
-              <a:rPr lang="de-DE" b="0" dirty="0" err="1">
-                <a:solidFill>
-                  <a:srgbClr val="D4D4D4"/>
-                </a:solidFill>
-                <a:effectLst/>
-                <a:latin typeface="Consolas" panose="020B0609020204030204" pitchFamily="49" charset="0"/>
-              </a:rPr>
-              <a:t>shadow</a:t>
-            </a:r>
-            <a:r>
-              <a:rPr lang="de-DE" b="0" dirty="0">
-                <a:solidFill>
-                  <a:srgbClr val="D4D4D4"/>
-                </a:solidFill>
-                <a:effectLst/>
-                <a:latin typeface="Consolas" panose="020B0609020204030204" pitchFamily="49" charset="0"/>
-              </a:rPr>
-              <a:t>), die er sonst nicht bearbeiten darf.</a:t>
-            </a:r>
-          </a:p>
-          <a:p>
-            <a:endParaRPr lang="de-DE" b="0" dirty="0">
-              <a:solidFill>
-                <a:srgbClr val="D4D4D4"/>
-              </a:solidFill>
-              <a:effectLst/>
-              <a:latin typeface="Consolas" panose="020B0609020204030204" pitchFamily="49" charset="0"/>
-            </a:endParaRPr>
-          </a:p>
+            <a:endParaRPr lang="de-DE" dirty="0"/>
+          </a:p>
+        </p:txBody>
+      </p:sp>
+      <p:sp>
+        <p:nvSpPr>
+          <p:cNvPr id="4" name="Foliennummernplatzhalter 3"/>
+          <p:cNvSpPr>
+            <a:spLocks noGrp="1"/>
+          </p:cNvSpPr>
+          <p:nvPr>
+            <p:ph type="sldNum" sz="quarter" idx="5"/>
+          </p:nvPr>
+        </p:nvSpPr>
+        <p:spPr/>
+        <p:txBody>
+          <a:bodyPr/>
+          <a:lstStyle/>
+          <a:p>
+            <a:fld id="{F86FCC4D-0438-154F-9910-1CF4711F776F}" type="slidenum">
+              <a:rPr lang="de-DE" smtClean="0"/>
+              <a:pPr/>
+              <a:t>14</a:t>
+            </a:fld>
+            <a:endParaRPr lang="de-DE" dirty="0"/>
+          </a:p>
+        </p:txBody>
+      </p:sp>
+    </p:spTree>
+    <p:extLst>
+      <p:ext uri="{BB962C8B-B14F-4D97-AF65-F5344CB8AC3E}">
+        <p14:creationId xmlns:p14="http://schemas.microsoft.com/office/powerpoint/2010/main" val="3765480756"/>
+      </p:ext>
+    </p:extLst>
+  </p:cSld>
+  <p:clrMapOvr>
+    <a:masterClrMapping/>
+  </p:clrMapOvr>
+</p:notes>
+</file>
+
+<file path=ppt/notesSlides/notesSlide12.xml><?xml version="1.0" encoding="utf-8"?>
+<p:notes xmlns:a="http://schemas.openxmlformats.org/drawingml/2006/main" xmlns:r="http://schemas.openxmlformats.org/officeDocument/2006/relationships" xmlns:p="http://schemas.openxmlformats.org/presentationml/2006/main">
+  <p:cSld>
+    <p:spTree>
+      <p:nvGrpSpPr>
+        <p:cNvPr id="1" name=""/>
+        <p:cNvGrpSpPr/>
+        <p:nvPr/>
+      </p:nvGrpSpPr>
+      <p:grpSpPr>
+        <a:xfrm>
+          <a:off x="0" y="0"/>
+          <a:ext cx="0" cy="0"/>
+          <a:chOff x="0" y="0"/>
+          <a:chExt cx="0" cy="0"/>
+        </a:xfrm>
+      </p:grpSpPr>
+      <p:sp>
+        <p:nvSpPr>
+          <p:cNvPr id="2" name="Folienbildplatzhalter 1"/>
+          <p:cNvSpPr>
+            <a:spLocks noGrp="1" noRot="1" noChangeAspect="1"/>
+          </p:cNvSpPr>
+          <p:nvPr>
+            <p:ph type="sldImg"/>
+          </p:nvPr>
+        </p:nvSpPr>
+        <p:spPr>
+          <a:xfrm>
+            <a:off x="2459038" y="1143000"/>
+            <a:ext cx="3862387" cy="2060575"/>
+          </a:xfrm>
+        </p:spPr>
+      </p:sp>
+      <p:sp>
+        <p:nvSpPr>
+          <p:cNvPr id="3" name="Notizenplatzhalter 2"/>
+          <p:cNvSpPr>
+            <a:spLocks noGrp="1"/>
+          </p:cNvSpPr>
+          <p:nvPr>
+            <p:ph type="body" idx="1"/>
+          </p:nvPr>
+        </p:nvSpPr>
+        <p:spPr/>
+        <p:txBody>
+          <a:bodyPr/>
+          <a:lstStyle/>
           <a:p>
             <a:endParaRPr lang="de-DE" dirty="0"/>
           </a:p>
@@ -1538,10 +1290,7 @@
           <a:bodyPr/>
           <a:lstStyle/>
           <a:p>
-            <a:r>
-              <a:rPr lang="de-DE" dirty="0"/>
-              <a:t>Allgemein ist mir das noch zu viel Text auf den Folien, aber ich fände es auch cool, wenn wir die Folien und den Container nach dem Termin intern veröffentlichen und die Leute selbstständig die Aufgaben nachspielen können und alle notwendigen Infos in den Folien finden</a:t>
-            </a:r>
+            <a:endParaRPr lang="de-DE" dirty="0"/>
           </a:p>
         </p:txBody>
       </p:sp>
@@ -1631,18 +1380,7 @@
           <a:bodyPr/>
           <a:lstStyle/>
           <a:p>
-            <a:r>
-              <a:rPr lang="de-DE" dirty="0"/>
-              <a:t>Hier 5 Minuten ausprobieren: jeder startet den </a:t>
-            </a:r>
-            <a:r>
-              <a:rPr lang="de-DE" dirty="0" err="1"/>
-              <a:t>Dockercontainer</a:t>
-            </a:r>
-            <a:r>
-              <a:rPr lang="de-DE" dirty="0"/>
-              <a:t> lokal und kann ein paar der Befehle ausprobieren und sich mit dem Setup vertraut zu machen</a:t>
-            </a:r>
+            <a:endParaRPr lang="de-DE" dirty="0"/>
           </a:p>
         </p:txBody>
       </p:sp>
@@ -1732,44 +1470,7 @@
           <a:bodyPr/>
           <a:lstStyle/>
           <a:p>
-            <a:r>
-              <a:rPr lang="de-DE" dirty="0" err="1"/>
-              <a:t>Evtl</a:t>
-            </a:r>
-            <a:r>
-              <a:rPr lang="de-DE" dirty="0"/>
-              <a:t>: Miniübung: </a:t>
-            </a:r>
-            <a:r>
-              <a:rPr lang="de-DE" dirty="0" err="1"/>
-              <a:t>file</a:t>
-            </a:r>
-            <a:r>
-              <a:rPr lang="de-DE" dirty="0"/>
-              <a:t> mit </a:t>
-            </a:r>
-            <a:r>
-              <a:rPr lang="de-DE" dirty="0" err="1"/>
-              <a:t>Flag</a:t>
-            </a:r>
-            <a:r>
-              <a:rPr lang="de-DE" dirty="0"/>
-              <a:t> irgendwo im System verstecken, aber noch keine Rechte einschränken ?</a:t>
-            </a:r>
-          </a:p>
-          <a:p>
-            <a:r>
-              <a:rPr lang="de-DE" dirty="0"/>
-              <a:t>Findet jeder die Datei mit dem </a:t>
-            </a:r>
-            <a:r>
-              <a:rPr lang="de-DE" dirty="0" err="1"/>
-              <a:t>findbefehl</a:t>
-            </a:r>
-            <a:r>
-              <a:rPr lang="de-DE" dirty="0"/>
-              <a:t>?</a:t>
-            </a:r>
+            <a:endParaRPr lang="de-DE" dirty="0"/>
           </a:p>
         </p:txBody>
       </p:sp>
@@ -2233,42 +1934,7 @@
           <a:bodyPr/>
           <a:lstStyle/>
           <a:p>
-            <a:r>
-              <a:rPr lang="de-DE" dirty="0"/>
-              <a:t>Aufgabe: mit </a:t>
-            </a:r>
-            <a:r>
-              <a:rPr lang="de-DE" dirty="0" err="1"/>
-              <a:t>sudo</a:t>
-            </a:r>
-            <a:r>
-              <a:rPr lang="de-DE" dirty="0"/>
-              <a:t> –l Programme mit </a:t>
-            </a:r>
-            <a:r>
-              <a:rPr lang="de-DE" dirty="0" err="1"/>
-              <a:t>Sudorechten</a:t>
-            </a:r>
-            <a:r>
-              <a:rPr lang="de-DE" dirty="0"/>
-              <a:t> auflisten lassen und auf gtfobins.github.io nach diesen Programmen suchen wie wir mit </a:t>
-            </a:r>
-            <a:r>
-              <a:rPr lang="de-DE" dirty="0" err="1"/>
-              <a:t>sudo</a:t>
-            </a:r>
-            <a:r>
-              <a:rPr lang="de-DE" dirty="0"/>
-              <a:t> eine </a:t>
-            </a:r>
-            <a:r>
-              <a:rPr lang="de-DE" dirty="0" err="1"/>
-              <a:t>rootshell</a:t>
-            </a:r>
-            <a:r>
-              <a:rPr lang="de-DE" dirty="0"/>
-              <a:t> bekommen</a:t>
-            </a:r>
+            <a:endParaRPr lang="de-DE" dirty="0"/>
           </a:p>
         </p:txBody>
       </p:sp>
@@ -6403,7 +6069,7 @@
           <a:p>
             <a:fld id="{6BFD534B-F63A-4FE4-9015-92A27060C8AD}" type="datetime1">
               <a:rPr lang="de-DE" smtClean="0"/>
-              <a:t>21.11.2022</a:t>
+              <a:t>23.11.2022</a:t>
             </a:fld>
             <a:endParaRPr lang="de-DE" dirty="0"/>
           </a:p>
@@ -6633,7 +6299,7 @@
           <a:p>
             <a:fld id="{AEEAB1A6-B42D-444A-BA01-E2A0CDAF0C12}" type="datetime1">
               <a:rPr lang="de-DE" smtClean="0"/>
-              <a:t>21.11.2022</a:t>
+              <a:t>23.11.2022</a:t>
             </a:fld>
             <a:endParaRPr lang="de-DE" dirty="0"/>
           </a:p>
@@ -7191,7 +6857,7 @@
           <a:p>
             <a:fld id="{F5EA72DA-67F4-4020-9469-4E4E9FF0FAE3}" type="datetime1">
               <a:rPr lang="de-DE" smtClean="0"/>
-              <a:t>21.11.2022</a:t>
+              <a:t>23.11.2022</a:t>
             </a:fld>
             <a:endParaRPr lang="de-DE" dirty="0"/>
           </a:p>
@@ -7713,7 +7379,7 @@
           <a:p>
             <a:fld id="{37182B96-7925-4771-93DE-8B1B8082EFD3}" type="datetime1">
               <a:rPr lang="de-DE" smtClean="0"/>
-              <a:t>21.11.2022</a:t>
+              <a:t>23.11.2022</a:t>
             </a:fld>
             <a:endParaRPr lang="de-DE" dirty="0"/>
           </a:p>
@@ -8408,7 +8074,7 @@
           <a:p>
             <a:fld id="{348977A5-57CA-4B01-BBF8-7EB342665798}" type="datetime1">
               <a:rPr lang="de-DE" smtClean="0"/>
-              <a:t>21.11.2022</a:t>
+              <a:t>23.11.2022</a:t>
             </a:fld>
             <a:endParaRPr lang="de-DE" dirty="0"/>
           </a:p>
@@ -9045,7 +8711,7 @@
           <a:p>
             <a:fld id="{69545B60-613F-44AB-9BBA-A7C4A96C2337}" type="datetime1">
               <a:rPr lang="de-DE" smtClean="0"/>
-              <a:t>21.11.2022</a:t>
+              <a:t>23.11.2022</a:t>
             </a:fld>
             <a:endParaRPr lang="de-DE" dirty="0"/>
           </a:p>
@@ -9892,7 +9558,7 @@
           <a:p>
             <a:fld id="{5B908BB5-A6C0-4681-8C6B-456EB5A79A77}" type="datetime1">
               <a:rPr lang="de-DE" smtClean="0"/>
-              <a:t>21.11.2022</a:t>
+              <a:t>23.11.2022</a:t>
             </a:fld>
             <a:endParaRPr lang="de-DE" dirty="0"/>
           </a:p>
@@ -10591,7 +10257,7 @@
           <a:p>
             <a:fld id="{5DC9953B-096E-4D14-9CB5-13648C592BB5}" type="datetime1">
               <a:rPr lang="de-DE" smtClean="0"/>
-              <a:t>21.11.2022</a:t>
+              <a:t>23.11.2022</a:t>
             </a:fld>
             <a:endParaRPr lang="de-DE" dirty="0"/>
           </a:p>
@@ -11146,7 +10812,7 @@
           <a:p>
             <a:fld id="{447B6824-9184-4112-988E-A9CAC95B17D4}" type="datetime1">
               <a:rPr lang="de-DE" smtClean="0"/>
-              <a:t>21.11.2022</a:t>
+              <a:t>23.11.2022</a:t>
             </a:fld>
             <a:endParaRPr lang="de-DE" dirty="0"/>
           </a:p>
@@ -12835,7 +12501,7 @@
           <a:p>
             <a:fld id="{264998E9-DCB6-41C2-B27F-B52903506692}" type="datetime1">
               <a:rPr lang="de-DE" smtClean="0"/>
-              <a:t>21.11.2022</a:t>
+              <a:t>23.11.2022</a:t>
             </a:fld>
             <a:endParaRPr lang="de-DE" dirty="0"/>
           </a:p>
@@ -13155,7 +12821,7 @@
           <a:p>
             <a:fld id="{E76C59FC-CF29-4249-9035-7A23B21336EC}" type="datetime1">
               <a:rPr lang="de-DE" smtClean="0"/>
-              <a:t>21.11.2022</a:t>
+              <a:t>23.11.2022</a:t>
             </a:fld>
             <a:endParaRPr lang="de-DE" dirty="0"/>
           </a:p>
@@ -13620,7 +13286,7 @@
           <a:p>
             <a:fld id="{AD939BAD-BF39-439D-A27E-BD4F1859CC12}" type="datetime1">
               <a:rPr lang="de-DE" smtClean="0"/>
-              <a:t>21.11.2022</a:t>
+              <a:t>23.11.2022</a:t>
             </a:fld>
             <a:endParaRPr lang="de-DE" dirty="0"/>
           </a:p>
@@ -13918,7 +13584,7 @@
           <a:p>
             <a:fld id="{89D17397-378C-4476-9D54-76830C4DF2D0}" type="datetime1">
               <a:rPr lang="de-DE" smtClean="0"/>
-              <a:t>21.11.2022</a:t>
+              <a:t>23.11.2022</a:t>
             </a:fld>
             <a:endParaRPr lang="de-DE" dirty="0"/>
           </a:p>
@@ -14338,7 +14004,7 @@
           <a:p>
             <a:fld id="{9D434BC3-9B8C-4240-96F6-E627A781F44A}" type="datetime1">
               <a:rPr lang="de-DE" smtClean="0"/>
-              <a:t>21.11.2022</a:t>
+              <a:t>23.11.2022</a:t>
             </a:fld>
             <a:endParaRPr lang="de-DE" dirty="0"/>
           </a:p>
@@ -15276,7 +14942,7 @@
           <a:p>
             <a:fld id="{C48D8331-E567-462E-94AD-787FA16D6F16}" type="datetime1">
               <a:rPr lang="de-DE" smtClean="0"/>
-              <a:t>21.11.2022</a:t>
+              <a:t>23.11.2022</a:t>
             </a:fld>
             <a:endParaRPr lang="de-DE" dirty="0"/>
           </a:p>
@@ -15993,7 +15659,7 @@
           <a:p>
             <a:fld id="{C48D8331-E567-462E-94AD-787FA16D6F16}" type="datetime1">
               <a:rPr lang="de-DE" smtClean="0"/>
-              <a:t>21.11.2022</a:t>
+              <a:t>23.11.2022</a:t>
             </a:fld>
             <a:endParaRPr lang="de-DE" dirty="0"/>
           </a:p>
@@ -16535,7 +16201,7 @@
           <a:p>
             <a:fld id="{C48D8331-E567-462E-94AD-787FA16D6F16}" type="datetime1">
               <a:rPr lang="de-DE" smtClean="0"/>
-              <a:t>21.11.2022</a:t>
+              <a:t>23.11.2022</a:t>
             </a:fld>
             <a:endParaRPr lang="de-DE" dirty="0"/>
           </a:p>
@@ -16859,7 +16525,7 @@
           <a:p>
             <a:fld id="{5F1B96A3-1CDF-4855-8485-3D1B7E5C03A2}" type="datetime1">
               <a:rPr lang="de-DE" smtClean="0"/>
-              <a:t>21.11.2022</a:t>
+              <a:t>23.11.2022</a:t>
             </a:fld>
             <a:endParaRPr lang="de-DE" dirty="0"/>
           </a:p>
@@ -17146,7 +16812,7 @@
           <a:p>
             <a:fld id="{96FB8F6A-5859-443E-8B2A-D2F039304B53}" type="datetime1">
               <a:rPr lang="de-DE" smtClean="0"/>
-              <a:t>21.11.2022</a:t>
+              <a:t>23.11.2022</a:t>
             </a:fld>
             <a:endParaRPr lang="de-DE" dirty="0"/>
           </a:p>
@@ -18810,7 +18476,7 @@
           <a:p>
             <a:fld id="{A3F66D55-4B1D-4C98-990B-01ADFD59D8FA}" type="datetime1">
               <a:rPr lang="de-DE" smtClean="0"/>
-              <a:t>21.11.2022</a:t>
+              <a:t>23.11.2022</a:t>
             </a:fld>
             <a:endParaRPr lang="de-DE" dirty="0"/>
           </a:p>
@@ -19230,7 +18896,7 @@
           <a:p>
             <a:fld id="{B109EC5C-DD42-4431-B72B-68D8FA8194AB}" type="datetime1">
               <a:rPr lang="de-DE" smtClean="0"/>
-              <a:t>21.11.2022</a:t>
+              <a:t>23.11.2022</a:t>
             </a:fld>
             <a:endParaRPr lang="de-DE" dirty="0"/>
           </a:p>
@@ -19716,7 +19382,7 @@
           <a:p>
             <a:fld id="{0DB296D1-AC28-442F-8944-ABF7A8FC9C50}" type="datetime1">
               <a:rPr lang="de-DE" smtClean="0"/>
-              <a:t>21.11.2022</a:t>
+              <a:t>23.11.2022</a:t>
             </a:fld>
             <a:endParaRPr lang="de-DE" dirty="0"/>
           </a:p>
@@ -21471,7 +21137,7 @@
           <a:p>
             <a:fld id="{CDA89288-CEC7-47F4-BD46-D4D4AF3B3418}" type="datetime1">
               <a:rPr lang="de-DE" smtClean="0"/>
-              <a:t>21.11.2022</a:t>
+              <a:t>23.11.2022</a:t>
             </a:fld>
             <a:endParaRPr lang="de-DE" dirty="0"/>
           </a:p>
@@ -21733,7 +21399,7 @@
           <a:p>
             <a:fld id="{DBFBE6E0-B045-4B0E-A7CC-D5879E3A5B44}" type="datetime1">
               <a:rPr lang="de-DE" smtClean="0"/>
-              <a:t>21.11.2022</a:t>
+              <a:t>23.11.2022</a:t>
             </a:fld>
             <a:endParaRPr lang="de-DE" dirty="0"/>
           </a:p>
@@ -22499,7 +22165,7 @@
           <a:p>
             <a:fld id="{2DFD45D6-8702-4897-A8AE-AAB58A790F28}" type="datetime1">
               <a:rPr lang="de-DE" smtClean="0"/>
-              <a:t>21.11.2022</a:t>
+              <a:t>23.11.2022</a:t>
             </a:fld>
             <a:endParaRPr lang="de-DE" dirty="0"/>
           </a:p>
@@ -23028,7 +22694,7 @@
           <a:p>
             <a:fld id="{2C07F75F-C63B-4ADF-9E2E-EF69BCA50BAB}" type="datetime1">
               <a:rPr lang="de-DE" smtClean="0"/>
-              <a:t>21.11.2022</a:t>
+              <a:t>23.11.2022</a:t>
             </a:fld>
             <a:endParaRPr lang="de-DE" dirty="0"/>
           </a:p>
@@ -25076,7 +24742,7 @@
           <a:p>
             <a:fld id="{52C9CF1C-F2A0-49AE-94EF-8FFE6F4A7F1D}" type="datetime1">
               <a:rPr lang="de-DE" smtClean="0"/>
-              <a:t>21.11.2022</a:t>
+              <a:t>23.11.2022</a:t>
             </a:fld>
             <a:endParaRPr lang="de-DE" dirty="0"/>
           </a:p>
@@ -26788,7 +26454,7 @@
           <a:p>
             <a:fld id="{029B9DB6-AD97-41EF-A73B-AB5745E7E129}" type="datetime1">
               <a:rPr lang="de-DE" smtClean="0"/>
-              <a:t>21.11.2022</a:t>
+              <a:t>23.11.2022</a:t>
             </a:fld>
             <a:endParaRPr lang="de-DE" dirty="0"/>
           </a:p>
@@ -28654,7 +28320,7 @@
           <a:p>
             <a:fld id="{029B9DB6-AD97-41EF-A73B-AB5745E7E129}" type="datetime1">
               <a:rPr lang="de-DE" smtClean="0"/>
-              <a:t>21.11.2022</a:t>
+              <a:t>23.11.2022</a:t>
             </a:fld>
             <a:endParaRPr lang="de-DE" dirty="0"/>
           </a:p>
@@ -30881,7 +30547,7 @@
           <a:p>
             <a:fld id="{029B9DB6-AD97-41EF-A73B-AB5745E7E129}" type="datetime1">
               <a:rPr lang="de-DE" smtClean="0"/>
-              <a:t>21.11.2022</a:t>
+              <a:t>23.11.2022</a:t>
             </a:fld>
             <a:endParaRPr lang="de-DE" dirty="0"/>
           </a:p>
@@ -32424,7 +32090,7 @@
             <a:fld id="{029B9DB6-AD97-41EF-A73B-AB5745E7E129}" type="datetime1">
               <a:rPr lang="de-DE" smtClean="0"/>
               <a:pPr/>
-              <a:t>21.11.2022</a:t>
+              <a:t>23.11.2022</a:t>
             </a:fld>
             <a:endParaRPr lang="de-DE" dirty="0"/>
           </a:p>
@@ -39810,7 +39476,7 @@
           <a:p>
             <a:fld id="{029B9DB6-AD97-41EF-A73B-AB5745E7E129}" type="datetime1">
               <a:rPr lang="de-DE" smtClean="0"/>
-              <a:t>21.11.2022</a:t>
+              <a:t>23.11.2022</a:t>
             </a:fld>
             <a:endParaRPr lang="de-DE" dirty="0"/>
           </a:p>
@@ -41020,7 +40686,7 @@
           <a:p>
             <a:fld id="{FB195ED1-4338-49C6-B09A-7897958CE3AA}" type="datetime1">
               <a:rPr lang="de-DE" smtClean="0"/>
-              <a:t>21.11.2022</a:t>
+              <a:t>23.11.2022</a:t>
             </a:fld>
             <a:r>
               <a:rPr lang="de-DE" dirty="0"/>
@@ -41281,7 +40947,7 @@
           <a:p>
             <a:fld id="{5DC9953B-096E-4D14-9CB5-13648C592BB5}" type="datetime1">
               <a:rPr lang="de-DE" smtClean="0"/>
-              <a:t>21.11.2022</a:t>
+              <a:t>23.11.2022</a:t>
             </a:fld>
             <a:endParaRPr lang="de-DE" dirty="0"/>
           </a:p>
@@ -41487,11 +41153,11 @@
   <p:clrMapOvr>
     <a:masterClrMapping/>
   </p:clrMapOvr>
-  <mc:AlternateContent xmlns:mc="http://schemas.openxmlformats.org/markup-compatibility/2006">
-    <mc:Choice xmlns:p14="http://schemas.microsoft.com/office/powerpoint/2010/main" Requires="p14">
+  <mc:AlternateContent xmlns:mc="http://schemas.openxmlformats.org/markup-compatibility/2006" xmlns:p14="http://schemas.microsoft.com/office/powerpoint/2010/main">
+    <mc:Choice Requires="p14">
       <p:transition p14:dur="10"/>
     </mc:Choice>
-    <mc:Fallback>
+    <mc:Fallback xmlns="">
       <p:transition/>
     </mc:Fallback>
   </mc:AlternateContent>
@@ -41764,7 +41430,7 @@
           <a:p>
             <a:fld id="{5DC9953B-096E-4D14-9CB5-13648C592BB5}" type="datetime1">
               <a:rPr lang="de-DE" smtClean="0"/>
-              <a:t>21.11.2022</a:t>
+              <a:t>23.11.2022</a:t>
             </a:fld>
             <a:endParaRPr lang="de-DE" dirty="0"/>
           </a:p>
@@ -42320,7 +41986,7 @@
           <a:p>
             <a:fld id="{5DC9953B-096E-4D14-9CB5-13648C592BB5}" type="datetime1">
               <a:rPr lang="de-DE" smtClean="0"/>
-              <a:t>21.11.2022</a:t>
+              <a:t>23.11.2022</a:t>
             </a:fld>
             <a:endParaRPr lang="de-DE" dirty="0"/>
           </a:p>
@@ -42763,7 +42429,7 @@
           <a:p>
             <a:fld id="{5DC9953B-096E-4D14-9CB5-13648C592BB5}" type="datetime1">
               <a:rPr lang="de-DE" smtClean="0"/>
-              <a:t>21.11.2022</a:t>
+              <a:t>23.11.2022</a:t>
             </a:fld>
             <a:endParaRPr lang="de-DE" dirty="0"/>
           </a:p>
@@ -43030,11 +42696,11 @@
   <p:clrMapOvr>
     <a:masterClrMapping/>
   </p:clrMapOvr>
-  <mc:AlternateContent xmlns:mc="http://schemas.openxmlformats.org/markup-compatibility/2006">
-    <mc:Choice xmlns:p14="http://schemas.microsoft.com/office/powerpoint/2010/main" Requires="p14">
+  <mc:AlternateContent xmlns:mc="http://schemas.openxmlformats.org/markup-compatibility/2006" xmlns:p14="http://schemas.microsoft.com/office/powerpoint/2010/main">
+    <mc:Choice Requires="p14">
       <p:transition p14:dur="10"/>
     </mc:Choice>
-    <mc:Fallback>
+    <mc:Fallback xmlns="">
       <p:transition/>
     </mc:Fallback>
   </mc:AlternateContent>
@@ -43165,7 +42831,7 @@
           <a:p>
             <a:fld id="{5DC9953B-096E-4D14-9CB5-13648C592BB5}" type="datetime1">
               <a:rPr lang="de-DE" smtClean="0"/>
-              <a:t>21.11.2022</a:t>
+              <a:t>23.11.2022</a:t>
             </a:fld>
             <a:endParaRPr lang="de-DE" dirty="0"/>
           </a:p>
@@ -43426,7 +43092,7 @@
           <a:p>
             <a:fld id="{5DC9953B-096E-4D14-9CB5-13648C592BB5}" type="datetime1">
               <a:rPr lang="de-DE" smtClean="0"/>
-              <a:t>21.11.2022</a:t>
+              <a:t>23.11.2022</a:t>
             </a:fld>
             <a:endParaRPr lang="de-DE" dirty="0"/>
           </a:p>
@@ -44103,7 +43769,7 @@
           <a:p>
             <a:fld id="{5DC9953B-096E-4D14-9CB5-13648C592BB5}" type="datetime1">
               <a:rPr lang="de-DE" smtClean="0"/>
-              <a:t>21.11.2022</a:t>
+              <a:t>23.11.2022</a:t>
             </a:fld>
             <a:endParaRPr lang="de-DE" dirty="0"/>
           </a:p>
@@ -44548,7 +44214,7 @@
           <a:p>
             <a:fld id="{5DC9953B-096E-4D14-9CB5-13648C592BB5}" type="datetime1">
               <a:rPr lang="de-DE" smtClean="0"/>
-              <a:t>21.11.2022</a:t>
+              <a:t>23.11.2022</a:t>
             </a:fld>
             <a:endParaRPr lang="de-DE" dirty="0"/>
           </a:p>
@@ -44801,11 +44467,11 @@
   <p:clrMapOvr>
     <a:masterClrMapping/>
   </p:clrMapOvr>
-  <mc:AlternateContent xmlns:mc="http://schemas.openxmlformats.org/markup-compatibility/2006">
-    <mc:Choice xmlns:p14="http://schemas.microsoft.com/office/powerpoint/2010/main" Requires="p14">
+  <mc:AlternateContent xmlns:mc="http://schemas.openxmlformats.org/markup-compatibility/2006" xmlns:p14="http://schemas.microsoft.com/office/powerpoint/2010/main">
+    <mc:Choice Requires="p14">
       <p:transition p14:dur="10"/>
     </mc:Choice>
-    <mc:Fallback>
+    <mc:Fallback xmlns="">
       <p:transition/>
     </mc:Fallback>
   </mc:AlternateContent>
@@ -44885,7 +44551,7 @@
           <a:p>
             <a:fld id="{5DC9953B-096E-4D14-9CB5-13648C592BB5}" type="datetime1">
               <a:rPr lang="de-DE" smtClean="0"/>
-              <a:t>21.11.2022</a:t>
+              <a:t>23.11.2022</a:t>
             </a:fld>
             <a:endParaRPr lang="de-DE" dirty="0"/>
           </a:p>
@@ -45288,7 +44954,7 @@
             <a:fld id="{A08A1C78-06F3-42EE-A611-DC03295AE284}" type="datetime1">
               <a:rPr lang="de-DE" smtClean="0"/>
               <a:pPr/>
-              <a:t>21.11.2022</a:t>
+              <a:t>23.11.2022</a:t>
             </a:fld>
             <a:endParaRPr lang="de-DE" dirty="0"/>
           </a:p>
@@ -45771,7 +45437,7 @@
           <a:p>
             <a:fld id="{5DC9953B-096E-4D14-9CB5-13648C592BB5}" type="datetime1">
               <a:rPr lang="de-DE" smtClean="0"/>
-              <a:t>21.11.2022</a:t>
+              <a:t>23.11.2022</a:t>
             </a:fld>
             <a:endParaRPr lang="de-DE" dirty="0"/>
           </a:p>
@@ -45987,7 +45653,7 @@
           <a:p>
             <a:fld id="{69545B60-613F-44AB-9BBA-A7C4A96C2337}" type="datetime1">
               <a:rPr lang="de-DE" smtClean="0"/>
-              <a:t>21.11.2022</a:t>
+              <a:t>23.11.2022</a:t>
             </a:fld>
             <a:endParaRPr lang="de-DE" dirty="0"/>
           </a:p>
@@ -46783,7 +46449,7 @@
             <a:fld id="{A08A1C78-06F3-42EE-A611-DC03295AE284}" type="datetime1">
               <a:rPr lang="de-DE" smtClean="0"/>
               <a:pPr/>
-              <a:t>21.11.2022</a:t>
+              <a:t>23.11.2022</a:t>
             </a:fld>
             <a:endParaRPr lang="de-DE" dirty="0"/>
           </a:p>
@@ -47471,7 +47137,7 @@
             <a:fld id="{A08A1C78-06F3-42EE-A611-DC03295AE284}" type="datetime1">
               <a:rPr lang="de-DE" smtClean="0"/>
               <a:pPr/>
-              <a:t>21.11.2022</a:t>
+              <a:t>23.11.2022</a:t>
             </a:fld>
             <a:endParaRPr lang="de-DE" dirty="0"/>
           </a:p>
@@ -48198,7 +47864,7 @@
           <a:p>
             <a:fld id="{5DC9953B-096E-4D14-9CB5-13648C592BB5}" type="datetime1">
               <a:rPr lang="de-DE" smtClean="0"/>
-              <a:t>21.11.2022</a:t>
+              <a:t>23.11.2022</a:t>
             </a:fld>
             <a:endParaRPr lang="de-DE" dirty="0"/>
           </a:p>
@@ -49179,6 +48845,15 @@
 </file>
 
 <file path=customXml/item1.xml><?xml version="1.0" encoding="utf-8"?>
+<?mso-contentType ?>
+<FormTemplates xmlns="http://schemas.microsoft.com/sharepoint/v3/contenttype/forms">
+  <Display>DocumentLibraryForm</Display>
+  <Edit>DocumentLibraryForm</Edit>
+  <New>DocumentLibraryForm</New>
+</FormTemplates>
+</file>
+
+<file path=customXml/item2.xml><?xml version="1.0" encoding="utf-8"?>
 <ct:contentTypeSchema xmlns:ct="http://schemas.microsoft.com/office/2006/metadata/contentType" xmlns:ma="http://schemas.microsoft.com/office/2006/metadata/properties/metaAttributes" ct:_="" ma:_="" ma:contentTypeName="Dokument" ma:contentTypeID="0x01010084720F72846DC14788103D9800CA5632" ma:contentTypeVersion="5" ma:contentTypeDescription="Ein neues Dokument erstellen." ma:contentTypeScope="" ma:versionID="e4c3b777011aa1f420e943642ed86295">
   <xsd:schema xmlns:xsd="http://www.w3.org/2001/XMLSchema" xmlns:xs="http://www.w3.org/2001/XMLSchema" xmlns:p="http://schemas.microsoft.com/office/2006/metadata/properties" xmlns:ns2="d148daf0-ee5c-47d6-9481-8c15ce1c989e" xmlns:ns3="72b4b0d6-01dc-4b6d-af3a-4bfa39839b5f" targetNamespace="http://schemas.microsoft.com/office/2006/metadata/properties" ma:root="true" ma:fieldsID="11872dca7b7de2113cea18ab46e7d6a6" ns2:_="" ns3:_="">
     <xsd:import namespace="d148daf0-ee5c-47d6-9481-8c15ce1c989e"/>
@@ -49351,15 +49026,6 @@
 </ct:contentTypeSchema>
 </file>
 
-<file path=customXml/item2.xml><?xml version="1.0" encoding="utf-8"?>
-<?mso-contentType ?>
-<FormTemplates xmlns="http://schemas.microsoft.com/sharepoint/v3/contenttype/forms">
-  <Display>DocumentLibraryForm</Display>
-  <Edit>DocumentLibraryForm</Edit>
-  <New>DocumentLibraryForm</New>
-</FormTemplates>
-</file>
-
 <file path=customXml/item3.xml><?xml version="1.0" encoding="utf-8"?>
 <p:properties xmlns:p="http://schemas.microsoft.com/office/2006/metadata/properties" xmlns:xsi="http://www.w3.org/2001/XMLSchema-instance" xmlns:pc="http://schemas.microsoft.com/office/infopath/2007/PartnerControls">
   <documentManagement>
@@ -49369,6 +49035,14 @@
 </file>
 
 <file path=customXml/itemProps1.xml><?xml version="1.0" encoding="utf-8"?>
+<ds:datastoreItem xmlns:ds="http://schemas.openxmlformats.org/officeDocument/2006/customXml" ds:itemID="{F7BC3940-3EE7-47AF-9BE0-C2B78D8BCB9A}">
+  <ds:schemaRefs>
+    <ds:schemaRef ds:uri="http://schemas.microsoft.com/sharepoint/v3/contenttype/forms"/>
+  </ds:schemaRefs>
+</ds:datastoreItem>
+</file>
+
+<file path=customXml/itemProps2.xml><?xml version="1.0" encoding="utf-8"?>
 <ds:datastoreItem xmlns:ds="http://schemas.openxmlformats.org/officeDocument/2006/customXml" ds:itemID="{BC80EBF0-749E-4228-8968-8A7B7E1BCE90}">
   <ds:schemaRefs>
     <ds:schemaRef ds:uri="http://schemas.microsoft.com/office/2006/metadata/contentType"/>
@@ -49383,14 +49057,6 @@
     <ds:schemaRef ds:uri="http://purl.org/dc/elements/1.1/"/>
     <ds:schemaRef ds:uri="http://purl.org/dc/terms/"/>
     <ds:schemaRef ds:uri="http://schemas.microsoft.com/internal/obd"/>
-  </ds:schemaRefs>
-</ds:datastoreItem>
-</file>
-
-<file path=customXml/itemProps2.xml><?xml version="1.0" encoding="utf-8"?>
-<ds:datastoreItem xmlns:ds="http://schemas.openxmlformats.org/officeDocument/2006/customXml" ds:itemID="{F7BC3940-3EE7-47AF-9BE0-C2B78D8BCB9A}">
-  <ds:schemaRefs>
-    <ds:schemaRef ds:uri="http://schemas.microsoft.com/sharepoint/v3/contenttype/forms"/>
   </ds:schemaRefs>
 </ds:datastoreItem>
 </file>

--- a/Powerpoint.pptx
+++ b/Powerpoint.pptx
@@ -5,10 +5,10 @@
     <p:sldMasterId id="2147483672" r:id="rId4"/>
   </p:sldMasterIdLst>
   <p:notesMasterIdLst>
-    <p:notesMasterId r:id="rId24"/>
+    <p:notesMasterId r:id="rId23"/>
   </p:notesMasterIdLst>
   <p:handoutMasterIdLst>
-    <p:handoutMasterId r:id="rId25"/>
+    <p:handoutMasterId r:id="rId24"/>
   </p:handoutMasterIdLst>
   <p:sldIdLst>
     <p:sldId id="417" r:id="rId5"/>
@@ -23,18 +23,17 @@
     <p:sldId id="489" r:id="rId14"/>
     <p:sldId id="488" r:id="rId15"/>
     <p:sldId id="487" r:id="rId16"/>
-    <p:sldId id="485" r:id="rId17"/>
-    <p:sldId id="477" r:id="rId18"/>
-    <p:sldId id="478" r:id="rId19"/>
-    <p:sldId id="479" r:id="rId20"/>
-    <p:sldId id="486" r:id="rId21"/>
-    <p:sldId id="480" r:id="rId22"/>
-    <p:sldId id="470" r:id="rId23"/>
+    <p:sldId id="477" r:id="rId17"/>
+    <p:sldId id="478" r:id="rId18"/>
+    <p:sldId id="479" r:id="rId19"/>
+    <p:sldId id="480" r:id="rId20"/>
+    <p:sldId id="490" r:id="rId21"/>
+    <p:sldId id="470" r:id="rId22"/>
   </p:sldIdLst>
   <p:sldSz cx="11879263" cy="6335713"/>
   <p:notesSz cx="6858000" cy="9144000"/>
   <p:custDataLst>
-    <p:tags r:id="rId26"/>
+    <p:tags r:id="rId25"/>
   </p:custDataLst>
   <p:defaultTextStyle>
     <a:defPPr>
@@ -148,12 +147,11 @@
             <p14:sldId id="489"/>
             <p14:sldId id="488"/>
             <p14:sldId id="487"/>
-            <p14:sldId id="485"/>
             <p14:sldId id="477"/>
             <p14:sldId id="478"/>
             <p14:sldId id="479"/>
-            <p14:sldId id="486"/>
             <p14:sldId id="480"/>
+            <p14:sldId id="490"/>
             <p14:sldId id="470"/>
           </p14:sldIdLst>
         </p14:section>
@@ -281,7 +279,7 @@
             <a:fld id="{F86FCC4D-0438-154F-9910-1CF4711F776F}" type="slidenum">
               <a:rPr lang="de-DE" smtClean="0"/>
               <a:pPr/>
-              <a:t>‹Nr.›</a:t>
+              <a:t>‹#›</a:t>
             </a:fld>
             <a:endParaRPr lang="de-DE" dirty="0"/>
           </a:p>
@@ -370,7 +368,7 @@
           <a:p>
             <a:fld id="{D608700A-2A06-4DE6-993D-330A4DDF3764}" type="datetime1">
               <a:rPr lang="de-DE" smtClean="0"/>
-              <a:t>23.11.2022</a:t>
+              <a:t>24.11.22</a:t>
             </a:fld>
             <a:endParaRPr lang="de-DE" dirty="0"/>
           </a:p>
@@ -606,7 +604,7 @@
             <a:fld id="{F86FCC4D-0438-154F-9910-1CF4711F776F}" type="slidenum">
               <a:rPr lang="de-DE" smtClean="0"/>
               <a:pPr/>
-              <a:t>‹Nr.›</a:t>
+              <a:t>‹#›</a:t>
             </a:fld>
             <a:endParaRPr lang="de-DE" dirty="0"/>
           </a:p>
@@ -695,7 +693,7 @@
           <a:p>
             <a:fld id="{D608700A-2A06-4DE6-993D-330A4DDF3764}" type="datetime1">
               <a:rPr lang="de-DE" smtClean="0"/>
-              <a:t>23.11.2022</a:t>
+              <a:t>24.11.22</a:t>
             </a:fld>
             <a:endParaRPr lang="de-DE" dirty="0"/>
           </a:p>
@@ -1056,7 +1054,7 @@
     </p:spTree>
     <p:extLst>
       <p:ext uri="{BB962C8B-B14F-4D97-AF65-F5344CB8AC3E}">
-        <p14:creationId xmlns:p14="http://schemas.microsoft.com/office/powerpoint/2010/main" val="3650940336"/>
+        <p14:creationId xmlns:p14="http://schemas.microsoft.com/office/powerpoint/2010/main" val="3765480756"/>
       </p:ext>
     </p:extLst>
   </p:cSld>
@@ -1093,7 +1091,12 @@
             <p:ph type="sldImg"/>
           </p:nvPr>
         </p:nvSpPr>
-        <p:spPr/>
+        <p:spPr>
+          <a:xfrm>
+            <a:off x="2459038" y="1143000"/>
+            <a:ext cx="3862387" cy="2060575"/>
+          </a:xfrm>
+        </p:spPr>
       </p:sp>
       <p:sp>
         <p:nvSpPr>
@@ -1141,7 +1144,7 @@
     </p:spTree>
     <p:extLst>
       <p:ext uri="{BB962C8B-B14F-4D97-AF65-F5344CB8AC3E}">
-        <p14:creationId xmlns:p14="http://schemas.microsoft.com/office/powerpoint/2010/main" val="3765480756"/>
+        <p14:creationId xmlns:p14="http://schemas.microsoft.com/office/powerpoint/2010/main" val="232081343"/>
       </p:ext>
     </p:extLst>
   </p:cSld>
@@ -1170,7 +1173,7 @@
       </p:grpSpPr>
       <p:sp>
         <p:nvSpPr>
-          <p:cNvPr id="2" name="Folienbildplatzhalter 1"/>
+          <p:cNvPr id="2" name="Slide Image Placeholder 1"/>
           <p:cNvSpPr>
             <a:spLocks noGrp="1" noRot="1" noChangeAspect="1"/>
           </p:cNvSpPr>
@@ -1178,6 +1181,91 @@
             <p:ph type="sldImg"/>
           </p:nvPr>
         </p:nvSpPr>
+        <p:spPr/>
+      </p:sp>
+      <p:sp>
+        <p:nvSpPr>
+          <p:cNvPr id="3" name="Notes Placeholder 2"/>
+          <p:cNvSpPr>
+            <a:spLocks noGrp="1"/>
+          </p:cNvSpPr>
+          <p:nvPr>
+            <p:ph type="body" idx="1"/>
+          </p:nvPr>
+        </p:nvSpPr>
+        <p:spPr/>
+        <p:txBody>
+          <a:bodyPr/>
+          <a:lstStyle/>
+          <a:p>
+            <a:endParaRPr lang="en-DE" dirty="0"/>
+          </a:p>
+        </p:txBody>
+      </p:sp>
+      <p:sp>
+        <p:nvSpPr>
+          <p:cNvPr id="4" name="Slide Number Placeholder 3"/>
+          <p:cNvSpPr>
+            <a:spLocks noGrp="1"/>
+          </p:cNvSpPr>
+          <p:nvPr>
+            <p:ph type="sldNum" sz="quarter" idx="5"/>
+          </p:nvPr>
+        </p:nvSpPr>
+        <p:spPr/>
+        <p:txBody>
+          <a:bodyPr/>
+          <a:lstStyle/>
+          <a:p>
+            <a:fld id="{F86FCC4D-0438-154F-9910-1CF4711F776F}" type="slidenum">
+              <a:rPr lang="de-DE" smtClean="0"/>
+              <a:pPr/>
+              <a:t>16</a:t>
+            </a:fld>
+            <a:endParaRPr lang="de-DE" dirty="0"/>
+          </a:p>
+        </p:txBody>
+      </p:sp>
+    </p:spTree>
+    <p:extLst>
+      <p:ext uri="{BB962C8B-B14F-4D97-AF65-F5344CB8AC3E}">
+        <p14:creationId xmlns:p14="http://schemas.microsoft.com/office/powerpoint/2010/main" val="3084094081"/>
+      </p:ext>
+    </p:extLst>
+  </p:cSld>
+  <p:clrMapOvr>
+    <a:masterClrMapping/>
+  </p:clrMapOvr>
+</p:notes>
+</file>
+
+<file path=ppt/notesSlides/notesSlide13.xml><?xml version="1.0" encoding="utf-8"?>
+<p:notes xmlns:a="http://schemas.openxmlformats.org/drawingml/2006/main" xmlns:r="http://schemas.openxmlformats.org/officeDocument/2006/relationships" xmlns:p="http://schemas.openxmlformats.org/presentationml/2006/main">
+  <p:cSld>
+    <p:spTree>
+      <p:nvGrpSpPr>
+        <p:cNvPr id="1" name=""/>
+        <p:cNvGrpSpPr/>
+        <p:nvPr/>
+      </p:nvGrpSpPr>
+      <p:grpSpPr>
+        <a:xfrm>
+          <a:off x="0" y="0"/>
+          <a:ext cx="0" cy="0"/>
+          <a:chOff x="0" y="0"/>
+          <a:chExt cx="0" cy="0"/>
+        </a:xfrm>
+      </p:grpSpPr>
+      <p:sp>
+        <p:nvSpPr>
+          <p:cNvPr id="2" name="Slide Image Placeholder 1"/>
+          <p:cNvSpPr>
+            <a:spLocks noGrp="1" noRot="1" noChangeAspect="1"/>
+          </p:cNvSpPr>
+          <p:nvPr>
+            <p:ph type="sldImg"/>
+          </p:nvPr>
+        </p:nvSpPr>
         <p:spPr>
           <a:xfrm>
             <a:off x="2459038" y="1143000"/>
@@ -1187,7 +1275,7 @@
       </p:sp>
       <p:sp>
         <p:nvSpPr>
-          <p:cNvPr id="3" name="Notizenplatzhalter 2"/>
+          <p:cNvPr id="3" name="Notes Placeholder 2"/>
           <p:cNvSpPr>
             <a:spLocks noGrp="1"/>
           </p:cNvSpPr>
@@ -1200,13 +1288,13 @@
           <a:bodyPr/>
           <a:lstStyle/>
           <a:p>
-            <a:endParaRPr lang="de-DE" dirty="0"/>
-          </a:p>
-        </p:txBody>
-      </p:sp>
-      <p:sp>
-        <p:nvSpPr>
-          <p:cNvPr id="4" name="Foliennummernplatzhalter 3"/>
+            <a:endParaRPr lang="en-DE" dirty="0"/>
+          </a:p>
+        </p:txBody>
+      </p:sp>
+      <p:sp>
+        <p:nvSpPr>
+          <p:cNvPr id="4" name="Slide Number Placeholder 3"/>
           <p:cNvSpPr>
             <a:spLocks noGrp="1"/>
           </p:cNvSpPr>
@@ -1222,7 +1310,7 @@
             <a:fld id="{F86FCC4D-0438-154F-9910-1CF4711F776F}" type="slidenum">
               <a:rPr lang="de-DE" smtClean="0"/>
               <a:pPr/>
-              <a:t>15</a:t>
+              <a:t>17</a:t>
             </a:fld>
             <a:endParaRPr lang="de-DE" dirty="0"/>
           </a:p>
@@ -1231,7 +1319,92 @@
     </p:spTree>
     <p:extLst>
       <p:ext uri="{BB962C8B-B14F-4D97-AF65-F5344CB8AC3E}">
-        <p14:creationId xmlns:p14="http://schemas.microsoft.com/office/powerpoint/2010/main" val="232081343"/>
+        <p14:creationId xmlns:p14="http://schemas.microsoft.com/office/powerpoint/2010/main" val="2281653358"/>
+      </p:ext>
+    </p:extLst>
+  </p:cSld>
+  <p:clrMapOvr>
+    <a:masterClrMapping/>
+  </p:clrMapOvr>
+</p:notes>
+</file>
+
+<file path=ppt/notesSlides/notesSlide14.xml><?xml version="1.0" encoding="utf-8"?>
+<p:notes xmlns:a="http://schemas.openxmlformats.org/drawingml/2006/main" xmlns:r="http://schemas.openxmlformats.org/officeDocument/2006/relationships" xmlns:p="http://schemas.openxmlformats.org/presentationml/2006/main">
+  <p:cSld>
+    <p:spTree>
+      <p:nvGrpSpPr>
+        <p:cNvPr id="1" name=""/>
+        <p:cNvGrpSpPr/>
+        <p:nvPr/>
+      </p:nvGrpSpPr>
+      <p:grpSpPr>
+        <a:xfrm>
+          <a:off x="0" y="0"/>
+          <a:ext cx="0" cy="0"/>
+          <a:chOff x="0" y="0"/>
+          <a:chExt cx="0" cy="0"/>
+        </a:xfrm>
+      </p:grpSpPr>
+      <p:sp>
+        <p:nvSpPr>
+          <p:cNvPr id="2" name="Slide Image Placeholder 1"/>
+          <p:cNvSpPr>
+            <a:spLocks noGrp="1" noRot="1" noChangeAspect="1"/>
+          </p:cNvSpPr>
+          <p:nvPr>
+            <p:ph type="sldImg"/>
+          </p:nvPr>
+        </p:nvSpPr>
+        <p:spPr/>
+      </p:sp>
+      <p:sp>
+        <p:nvSpPr>
+          <p:cNvPr id="3" name="Notes Placeholder 2"/>
+          <p:cNvSpPr>
+            <a:spLocks noGrp="1"/>
+          </p:cNvSpPr>
+          <p:nvPr>
+            <p:ph type="body" idx="1"/>
+          </p:nvPr>
+        </p:nvSpPr>
+        <p:spPr/>
+        <p:txBody>
+          <a:bodyPr/>
+          <a:lstStyle/>
+          <a:p>
+            <a:endParaRPr lang="en-DE"/>
+          </a:p>
+        </p:txBody>
+      </p:sp>
+      <p:sp>
+        <p:nvSpPr>
+          <p:cNvPr id="4" name="Slide Number Placeholder 3"/>
+          <p:cNvSpPr>
+            <a:spLocks noGrp="1"/>
+          </p:cNvSpPr>
+          <p:nvPr>
+            <p:ph type="sldNum" sz="quarter" idx="5"/>
+          </p:nvPr>
+        </p:nvSpPr>
+        <p:spPr/>
+        <p:txBody>
+          <a:bodyPr/>
+          <a:lstStyle/>
+          <a:p>
+            <a:fld id="{F86FCC4D-0438-154F-9910-1CF4711F776F}" type="slidenum">
+              <a:rPr lang="de-DE" smtClean="0"/>
+              <a:pPr/>
+              <a:t>18</a:t>
+            </a:fld>
+            <a:endParaRPr lang="de-DE" dirty="0"/>
+          </a:p>
+        </p:txBody>
+      </p:sp>
+    </p:spTree>
+    <p:extLst>
+      <p:ext uri="{BB962C8B-B14F-4D97-AF65-F5344CB8AC3E}">
+        <p14:creationId xmlns:p14="http://schemas.microsoft.com/office/powerpoint/2010/main" val="1457020752"/>
       </p:ext>
     </p:extLst>
   </p:cSld>
@@ -6069,7 +6242,7 @@
           <a:p>
             <a:fld id="{6BFD534B-F63A-4FE4-9015-92A27060C8AD}" type="datetime1">
               <a:rPr lang="de-DE" smtClean="0"/>
-              <a:t>23.11.2022</a:t>
+              <a:t>24.11.22</a:t>
             </a:fld>
             <a:endParaRPr lang="de-DE" dirty="0"/>
           </a:p>
@@ -6127,7 +6300,7 @@
             <a:fld id="{F86FCC4D-0438-154F-9910-1CF4711F776F}" type="slidenum">
               <a:rPr lang="de-DE" smtClean="0"/>
               <a:pPr/>
-              <a:t>‹Nr.›</a:t>
+              <a:t>‹#›</a:t>
             </a:fld>
             <a:endParaRPr lang="de-DE" dirty="0"/>
           </a:p>
@@ -6299,7 +6472,7 @@
           <a:p>
             <a:fld id="{AEEAB1A6-B42D-444A-BA01-E2A0CDAF0C12}" type="datetime1">
               <a:rPr lang="de-DE" smtClean="0"/>
-              <a:t>23.11.2022</a:t>
+              <a:t>24.11.22</a:t>
             </a:fld>
             <a:endParaRPr lang="de-DE" dirty="0"/>
           </a:p>
@@ -6357,7 +6530,7 @@
             <a:fld id="{F86FCC4D-0438-154F-9910-1CF4711F776F}" type="slidenum">
               <a:rPr lang="de-DE" smtClean="0"/>
               <a:pPr/>
-              <a:t>‹Nr.›</a:t>
+              <a:t>‹#›</a:t>
             </a:fld>
             <a:endParaRPr lang="de-DE" dirty="0"/>
           </a:p>
@@ -6857,7 +7030,7 @@
           <a:p>
             <a:fld id="{F5EA72DA-67F4-4020-9469-4E4E9FF0FAE3}" type="datetime1">
               <a:rPr lang="de-DE" smtClean="0"/>
-              <a:t>23.11.2022</a:t>
+              <a:t>24.11.22</a:t>
             </a:fld>
             <a:endParaRPr lang="de-DE" dirty="0"/>
           </a:p>
@@ -6915,7 +7088,7 @@
             <a:fld id="{F86FCC4D-0438-154F-9910-1CF4711F776F}" type="slidenum">
               <a:rPr lang="de-DE" smtClean="0"/>
               <a:pPr/>
-              <a:t>‹Nr.›</a:t>
+              <a:t>‹#›</a:t>
             </a:fld>
             <a:endParaRPr lang="de-DE" dirty="0"/>
           </a:p>
@@ -7379,7 +7552,7 @@
           <a:p>
             <a:fld id="{37182B96-7925-4771-93DE-8B1B8082EFD3}" type="datetime1">
               <a:rPr lang="de-DE" smtClean="0"/>
-              <a:t>23.11.2022</a:t>
+              <a:t>24.11.22</a:t>
             </a:fld>
             <a:endParaRPr lang="de-DE" dirty="0"/>
           </a:p>
@@ -7437,7 +7610,7 @@
             <a:fld id="{F86FCC4D-0438-154F-9910-1CF4711F776F}" type="slidenum">
               <a:rPr lang="de-DE" smtClean="0"/>
               <a:pPr/>
-              <a:t>‹Nr.›</a:t>
+              <a:t>‹#›</a:t>
             </a:fld>
             <a:endParaRPr lang="de-DE" dirty="0"/>
           </a:p>
@@ -8074,7 +8247,7 @@
           <a:p>
             <a:fld id="{348977A5-57CA-4B01-BBF8-7EB342665798}" type="datetime1">
               <a:rPr lang="de-DE" smtClean="0"/>
-              <a:t>23.11.2022</a:t>
+              <a:t>24.11.22</a:t>
             </a:fld>
             <a:endParaRPr lang="de-DE" dirty="0"/>
           </a:p>
@@ -8156,7 +8329,7 @@
             <a:fld id="{F86FCC4D-0438-154F-9910-1CF4711F776F}" type="slidenum">
               <a:rPr lang="de-DE" smtClean="0"/>
               <a:pPr/>
-              <a:t>‹Nr.›</a:t>
+              <a:t>‹#›</a:t>
             </a:fld>
             <a:endParaRPr lang="de-DE" dirty="0"/>
           </a:p>
@@ -8711,7 +8884,7 @@
           <a:p>
             <a:fld id="{69545B60-613F-44AB-9BBA-A7C4A96C2337}" type="datetime1">
               <a:rPr lang="de-DE" smtClean="0"/>
-              <a:t>23.11.2022</a:t>
+              <a:t>24.11.22</a:t>
             </a:fld>
             <a:endParaRPr lang="de-DE" dirty="0"/>
           </a:p>
@@ -8793,7 +8966,7 @@
             <a:fld id="{F86FCC4D-0438-154F-9910-1CF4711F776F}" type="slidenum">
               <a:rPr lang="de-DE" smtClean="0"/>
               <a:pPr/>
-              <a:t>‹Nr.›</a:t>
+              <a:t>‹#›</a:t>
             </a:fld>
             <a:endParaRPr lang="de-DE" dirty="0"/>
           </a:p>
@@ -9558,7 +9731,7 @@
           <a:p>
             <a:fld id="{5B908BB5-A6C0-4681-8C6B-456EB5A79A77}" type="datetime1">
               <a:rPr lang="de-DE" smtClean="0"/>
-              <a:t>23.11.2022</a:t>
+              <a:t>24.11.22</a:t>
             </a:fld>
             <a:endParaRPr lang="de-DE" dirty="0"/>
           </a:p>
@@ -9616,7 +9789,7 @@
             <a:fld id="{F86FCC4D-0438-154F-9910-1CF4711F776F}" type="slidenum">
               <a:rPr lang="de-DE" smtClean="0"/>
               <a:pPr/>
-              <a:t>‹Nr.›</a:t>
+              <a:t>‹#›</a:t>
             </a:fld>
             <a:endParaRPr lang="de-DE" dirty="0"/>
           </a:p>
@@ -10257,7 +10430,7 @@
           <a:p>
             <a:fld id="{5DC9953B-096E-4D14-9CB5-13648C592BB5}" type="datetime1">
               <a:rPr lang="de-DE" smtClean="0"/>
-              <a:t>23.11.2022</a:t>
+              <a:t>24.11.22</a:t>
             </a:fld>
             <a:endParaRPr lang="de-DE" dirty="0"/>
           </a:p>
@@ -10315,7 +10488,7 @@
             <a:fld id="{F86FCC4D-0438-154F-9910-1CF4711F776F}" type="slidenum">
               <a:rPr lang="de-DE" smtClean="0"/>
               <a:pPr/>
-              <a:t>‹Nr.›</a:t>
+              <a:t>‹#›</a:t>
             </a:fld>
             <a:endParaRPr lang="de-DE" dirty="0"/>
           </a:p>
@@ -10812,7 +10985,7 @@
           <a:p>
             <a:fld id="{447B6824-9184-4112-988E-A9CAC95B17D4}" type="datetime1">
               <a:rPr lang="de-DE" smtClean="0"/>
-              <a:t>23.11.2022</a:t>
+              <a:t>24.11.22</a:t>
             </a:fld>
             <a:endParaRPr lang="de-DE" dirty="0"/>
           </a:p>
@@ -10886,7 +11059,7 @@
             <a:fld id="{F86FCC4D-0438-154F-9910-1CF4711F776F}" type="slidenum">
               <a:rPr lang="de-DE" smtClean="0"/>
               <a:pPr/>
-              <a:t>‹Nr.›</a:t>
+              <a:t>‹#›</a:t>
             </a:fld>
             <a:endParaRPr lang="de-DE" dirty="0"/>
           </a:p>
@@ -12501,7 +12674,7 @@
           <a:p>
             <a:fld id="{264998E9-DCB6-41C2-B27F-B52903506692}" type="datetime1">
               <a:rPr lang="de-DE" smtClean="0"/>
-              <a:t>23.11.2022</a:t>
+              <a:t>24.11.22</a:t>
             </a:fld>
             <a:endParaRPr lang="de-DE" dirty="0"/>
           </a:p>
@@ -12559,7 +12732,7 @@
             <a:fld id="{F86FCC4D-0438-154F-9910-1CF4711F776F}" type="slidenum">
               <a:rPr lang="de-DE" smtClean="0"/>
               <a:pPr/>
-              <a:t>‹Nr.›</a:t>
+              <a:t>‹#›</a:t>
             </a:fld>
             <a:endParaRPr lang="de-DE" dirty="0"/>
           </a:p>
@@ -12821,7 +12994,7 @@
           <a:p>
             <a:fld id="{E76C59FC-CF29-4249-9035-7A23B21336EC}" type="datetime1">
               <a:rPr lang="de-DE" smtClean="0"/>
-              <a:t>23.11.2022</a:t>
+              <a:t>24.11.22</a:t>
             </a:fld>
             <a:endParaRPr lang="de-DE" dirty="0"/>
           </a:p>
@@ -12879,7 +13052,7 @@
             <a:fld id="{F86FCC4D-0438-154F-9910-1CF4711F776F}" type="slidenum">
               <a:rPr lang="de-DE" smtClean="0"/>
               <a:pPr/>
-              <a:t>‹Nr.›</a:t>
+              <a:t>‹#›</a:t>
             </a:fld>
             <a:endParaRPr lang="de-DE" dirty="0"/>
           </a:p>
@@ -13286,7 +13459,7 @@
           <a:p>
             <a:fld id="{AD939BAD-BF39-439D-A27E-BD4F1859CC12}" type="datetime1">
               <a:rPr lang="de-DE" smtClean="0"/>
-              <a:t>23.11.2022</a:t>
+              <a:t>24.11.22</a:t>
             </a:fld>
             <a:endParaRPr lang="de-DE" dirty="0"/>
           </a:p>
@@ -13344,7 +13517,7 @@
             <a:fld id="{F86FCC4D-0438-154F-9910-1CF4711F776F}" type="slidenum">
               <a:rPr lang="de-DE" smtClean="0"/>
               <a:pPr/>
-              <a:t>‹Nr.›</a:t>
+              <a:t>‹#›</a:t>
             </a:fld>
             <a:endParaRPr lang="de-DE" dirty="0"/>
           </a:p>
@@ -13584,7 +13757,7 @@
           <a:p>
             <a:fld id="{89D17397-378C-4476-9D54-76830C4DF2D0}" type="datetime1">
               <a:rPr lang="de-DE" smtClean="0"/>
-              <a:t>23.11.2022</a:t>
+              <a:t>24.11.22</a:t>
             </a:fld>
             <a:endParaRPr lang="de-DE" dirty="0"/>
           </a:p>
@@ -13642,7 +13815,7 @@
             <a:fld id="{F86FCC4D-0438-154F-9910-1CF4711F776F}" type="slidenum">
               <a:rPr lang="de-DE" smtClean="0"/>
               <a:pPr/>
-              <a:t>‹Nr.›</a:t>
+              <a:t>‹#›</a:t>
             </a:fld>
             <a:endParaRPr lang="de-DE" dirty="0"/>
           </a:p>
@@ -14004,7 +14177,7 @@
           <a:p>
             <a:fld id="{9D434BC3-9B8C-4240-96F6-E627A781F44A}" type="datetime1">
               <a:rPr lang="de-DE" smtClean="0"/>
-              <a:t>23.11.2022</a:t>
+              <a:t>24.11.22</a:t>
             </a:fld>
             <a:endParaRPr lang="de-DE" dirty="0"/>
           </a:p>
@@ -14062,7 +14235,7 @@
             <a:fld id="{F86FCC4D-0438-154F-9910-1CF4711F776F}" type="slidenum">
               <a:rPr lang="de-DE" smtClean="0"/>
               <a:pPr/>
-              <a:t>‹Nr.›</a:t>
+              <a:t>‹#›</a:t>
             </a:fld>
             <a:endParaRPr lang="de-DE" dirty="0"/>
           </a:p>
@@ -14942,7 +15115,7 @@
           <a:p>
             <a:fld id="{C48D8331-E567-462E-94AD-787FA16D6F16}" type="datetime1">
               <a:rPr lang="de-DE" smtClean="0"/>
-              <a:t>23.11.2022</a:t>
+              <a:t>24.11.22</a:t>
             </a:fld>
             <a:endParaRPr lang="de-DE" dirty="0"/>
           </a:p>
@@ -15021,7 +15194,7 @@
             <a:fld id="{F86FCC4D-0438-154F-9910-1CF4711F776F}" type="slidenum">
               <a:rPr lang="de-DE" smtClean="0"/>
               <a:pPr/>
-              <a:t>‹Nr.›</a:t>
+              <a:t>‹#›</a:t>
             </a:fld>
             <a:endParaRPr lang="de-DE" dirty="0"/>
           </a:p>
@@ -15659,7 +15832,7 @@
           <a:p>
             <a:fld id="{C48D8331-E567-462E-94AD-787FA16D6F16}" type="datetime1">
               <a:rPr lang="de-DE" smtClean="0"/>
-              <a:t>23.11.2022</a:t>
+              <a:t>24.11.22</a:t>
             </a:fld>
             <a:endParaRPr lang="de-DE" dirty="0"/>
           </a:p>
@@ -15738,7 +15911,7 @@
             <a:fld id="{F86FCC4D-0438-154F-9910-1CF4711F776F}" type="slidenum">
               <a:rPr lang="de-DE" smtClean="0"/>
               <a:pPr/>
-              <a:t>‹Nr.›</a:t>
+              <a:t>‹#›</a:t>
             </a:fld>
             <a:endParaRPr lang="de-DE" dirty="0"/>
           </a:p>
@@ -16201,7 +16374,7 @@
           <a:p>
             <a:fld id="{C48D8331-E567-462E-94AD-787FA16D6F16}" type="datetime1">
               <a:rPr lang="de-DE" smtClean="0"/>
-              <a:t>23.11.2022</a:t>
+              <a:t>24.11.22</a:t>
             </a:fld>
             <a:endParaRPr lang="de-DE" dirty="0"/>
           </a:p>
@@ -16280,7 +16453,7 @@
             <a:fld id="{F86FCC4D-0438-154F-9910-1CF4711F776F}" type="slidenum">
               <a:rPr lang="de-DE" smtClean="0"/>
               <a:pPr/>
-              <a:t>‹Nr.›</a:t>
+              <a:t>‹#›</a:t>
             </a:fld>
             <a:endParaRPr lang="de-DE" dirty="0"/>
           </a:p>
@@ -16525,7 +16698,7 @@
           <a:p>
             <a:fld id="{5F1B96A3-1CDF-4855-8485-3D1B7E5C03A2}" type="datetime1">
               <a:rPr lang="de-DE" smtClean="0"/>
-              <a:t>23.11.2022</a:t>
+              <a:t>24.11.22</a:t>
             </a:fld>
             <a:endParaRPr lang="de-DE" dirty="0"/>
           </a:p>
@@ -16583,7 +16756,7 @@
             <a:fld id="{F86FCC4D-0438-154F-9910-1CF4711F776F}" type="slidenum">
               <a:rPr lang="de-DE" smtClean="0"/>
               <a:pPr/>
-              <a:t>‹Nr.›</a:t>
+              <a:t>‹#›</a:t>
             </a:fld>
             <a:endParaRPr lang="de-DE" dirty="0"/>
           </a:p>
@@ -16812,7 +16985,7 @@
           <a:p>
             <a:fld id="{96FB8F6A-5859-443E-8B2A-D2F039304B53}" type="datetime1">
               <a:rPr lang="de-DE" smtClean="0"/>
-              <a:t>23.11.2022</a:t>
+              <a:t>24.11.22</a:t>
             </a:fld>
             <a:endParaRPr lang="de-DE" dirty="0"/>
           </a:p>
@@ -16870,7 +17043,7 @@
             <a:fld id="{F86FCC4D-0438-154F-9910-1CF4711F776F}" type="slidenum">
               <a:rPr lang="de-DE" smtClean="0"/>
               <a:pPr/>
-              <a:t>‹Nr.›</a:t>
+              <a:t>‹#›</a:t>
             </a:fld>
             <a:endParaRPr lang="de-DE" dirty="0"/>
           </a:p>
@@ -18476,7 +18649,7 @@
           <a:p>
             <a:fld id="{A3F66D55-4B1D-4C98-990B-01ADFD59D8FA}" type="datetime1">
               <a:rPr lang="de-DE" smtClean="0"/>
-              <a:t>23.11.2022</a:t>
+              <a:t>24.11.22</a:t>
             </a:fld>
             <a:endParaRPr lang="de-DE" dirty="0"/>
           </a:p>
@@ -18534,7 +18707,7 @@
             <a:fld id="{F86FCC4D-0438-154F-9910-1CF4711F776F}" type="slidenum">
               <a:rPr lang="de-DE" smtClean="0"/>
               <a:pPr/>
-              <a:t>‹Nr.›</a:t>
+              <a:t>‹#›</a:t>
             </a:fld>
             <a:endParaRPr lang="de-DE" dirty="0"/>
           </a:p>
@@ -18896,7 +19069,7 @@
           <a:p>
             <a:fld id="{B109EC5C-DD42-4431-B72B-68D8FA8194AB}" type="datetime1">
               <a:rPr lang="de-DE" smtClean="0"/>
-              <a:t>23.11.2022</a:t>
+              <a:t>24.11.22</a:t>
             </a:fld>
             <a:endParaRPr lang="de-DE" dirty="0"/>
           </a:p>
@@ -18954,7 +19127,7 @@
             <a:fld id="{F86FCC4D-0438-154F-9910-1CF4711F776F}" type="slidenum">
               <a:rPr lang="de-DE" smtClean="0"/>
               <a:pPr/>
-              <a:t>‹Nr.›</a:t>
+              <a:t>‹#›</a:t>
             </a:fld>
             <a:endParaRPr lang="de-DE" dirty="0"/>
           </a:p>
@@ -19382,7 +19555,7 @@
           <a:p>
             <a:fld id="{0DB296D1-AC28-442F-8944-ABF7A8FC9C50}" type="datetime1">
               <a:rPr lang="de-DE" smtClean="0"/>
-              <a:t>23.11.2022</a:t>
+              <a:t>24.11.22</a:t>
             </a:fld>
             <a:endParaRPr lang="de-DE" dirty="0"/>
           </a:p>
@@ -19440,7 +19613,7 @@
             <a:fld id="{F86FCC4D-0438-154F-9910-1CF4711F776F}" type="slidenum">
               <a:rPr lang="de-DE" smtClean="0"/>
               <a:pPr/>
-              <a:t>‹Nr.›</a:t>
+              <a:t>‹#›</a:t>
             </a:fld>
             <a:endParaRPr lang="de-DE" dirty="0"/>
           </a:p>
@@ -21137,7 +21310,7 @@
           <a:p>
             <a:fld id="{CDA89288-CEC7-47F4-BD46-D4D4AF3B3418}" type="datetime1">
               <a:rPr lang="de-DE" smtClean="0"/>
-              <a:t>23.11.2022</a:t>
+              <a:t>24.11.22</a:t>
             </a:fld>
             <a:endParaRPr lang="de-DE" dirty="0"/>
           </a:p>
@@ -21195,7 +21368,7 @@
             <a:fld id="{F86FCC4D-0438-154F-9910-1CF4711F776F}" type="slidenum">
               <a:rPr lang="de-DE" smtClean="0"/>
               <a:pPr/>
-              <a:t>‹Nr.›</a:t>
+              <a:t>‹#›</a:t>
             </a:fld>
             <a:endParaRPr lang="de-DE" dirty="0"/>
           </a:p>
@@ -21399,7 +21572,7 @@
           <a:p>
             <a:fld id="{DBFBE6E0-B045-4B0E-A7CC-D5879E3A5B44}" type="datetime1">
               <a:rPr lang="de-DE" smtClean="0"/>
-              <a:t>23.11.2022</a:t>
+              <a:t>24.11.22</a:t>
             </a:fld>
             <a:endParaRPr lang="de-DE" dirty="0"/>
           </a:p>
@@ -21457,7 +21630,7 @@
             <a:fld id="{F86FCC4D-0438-154F-9910-1CF4711F776F}" type="slidenum">
               <a:rPr lang="de-DE" smtClean="0"/>
               <a:pPr/>
-              <a:t>‹Nr.›</a:t>
+              <a:t>‹#›</a:t>
             </a:fld>
             <a:endParaRPr lang="de-DE" dirty="0"/>
           </a:p>
@@ -22165,7 +22338,7 @@
           <a:p>
             <a:fld id="{2DFD45D6-8702-4897-A8AE-AAB58A790F28}" type="datetime1">
               <a:rPr lang="de-DE" smtClean="0"/>
-              <a:t>23.11.2022</a:t>
+              <a:t>24.11.22</a:t>
             </a:fld>
             <a:endParaRPr lang="de-DE" dirty="0"/>
           </a:p>
@@ -22223,7 +22396,7 @@
             <a:fld id="{F86FCC4D-0438-154F-9910-1CF4711F776F}" type="slidenum">
               <a:rPr lang="de-DE" smtClean="0"/>
               <a:pPr/>
-              <a:t>‹Nr.›</a:t>
+              <a:t>‹#›</a:t>
             </a:fld>
             <a:endParaRPr lang="de-DE" dirty="0"/>
           </a:p>
@@ -22694,7 +22867,7 @@
           <a:p>
             <a:fld id="{2C07F75F-C63B-4ADF-9E2E-EF69BCA50BAB}" type="datetime1">
               <a:rPr lang="de-DE" smtClean="0"/>
-              <a:t>23.11.2022</a:t>
+              <a:t>24.11.22</a:t>
             </a:fld>
             <a:endParaRPr lang="de-DE" dirty="0"/>
           </a:p>
@@ -22752,7 +22925,7 @@
             <a:fld id="{F86FCC4D-0438-154F-9910-1CF4711F776F}" type="slidenum">
               <a:rPr lang="de-DE" smtClean="0"/>
               <a:pPr/>
-              <a:t>‹Nr.›</a:t>
+              <a:t>‹#›</a:t>
             </a:fld>
             <a:endParaRPr lang="de-DE" dirty="0"/>
           </a:p>
@@ -24742,7 +24915,7 @@
           <a:p>
             <a:fld id="{52C9CF1C-F2A0-49AE-94EF-8FFE6F4A7F1D}" type="datetime1">
               <a:rPr lang="de-DE" smtClean="0"/>
-              <a:t>23.11.2022</a:t>
+              <a:t>24.11.22</a:t>
             </a:fld>
             <a:endParaRPr lang="de-DE" dirty="0"/>
           </a:p>
@@ -24800,7 +24973,7 @@
             <a:fld id="{F86FCC4D-0438-154F-9910-1CF4711F776F}" type="slidenum">
               <a:rPr lang="de-DE" smtClean="0"/>
               <a:pPr/>
-              <a:t>‹Nr.›</a:t>
+              <a:t>‹#›</a:t>
             </a:fld>
             <a:endParaRPr lang="de-DE" dirty="0"/>
           </a:p>
@@ -26454,7 +26627,7 @@
           <a:p>
             <a:fld id="{029B9DB6-AD97-41EF-A73B-AB5745E7E129}" type="datetime1">
               <a:rPr lang="de-DE" smtClean="0"/>
-              <a:t>23.11.2022</a:t>
+              <a:t>24.11.22</a:t>
             </a:fld>
             <a:endParaRPr lang="de-DE" dirty="0"/>
           </a:p>
@@ -26513,7 +26686,7 @@
             <a:fld id="{F86FCC4D-0438-154F-9910-1CF4711F776F}" type="slidenum">
               <a:rPr lang="de-DE" smtClean="0"/>
               <a:pPr/>
-              <a:t>‹Nr.›</a:t>
+              <a:t>‹#›</a:t>
             </a:fld>
             <a:endParaRPr lang="de-DE" dirty="0"/>
           </a:p>
@@ -28320,7 +28493,7 @@
           <a:p>
             <a:fld id="{029B9DB6-AD97-41EF-A73B-AB5745E7E129}" type="datetime1">
               <a:rPr lang="de-DE" smtClean="0"/>
-              <a:t>23.11.2022</a:t>
+              <a:t>24.11.22</a:t>
             </a:fld>
             <a:endParaRPr lang="de-DE" dirty="0"/>
           </a:p>
@@ -28379,7 +28552,7 @@
             <a:fld id="{F86FCC4D-0438-154F-9910-1CF4711F776F}" type="slidenum">
               <a:rPr lang="de-DE" smtClean="0"/>
               <a:pPr/>
-              <a:t>‹Nr.›</a:t>
+              <a:t>‹#›</a:t>
             </a:fld>
             <a:endParaRPr lang="de-DE" dirty="0"/>
           </a:p>
@@ -30547,7 +30720,7 @@
           <a:p>
             <a:fld id="{029B9DB6-AD97-41EF-A73B-AB5745E7E129}" type="datetime1">
               <a:rPr lang="de-DE" smtClean="0"/>
-              <a:t>23.11.2022</a:t>
+              <a:t>24.11.22</a:t>
             </a:fld>
             <a:endParaRPr lang="de-DE" dirty="0"/>
           </a:p>
@@ -30606,7 +30779,7 @@
             <a:fld id="{F86FCC4D-0438-154F-9910-1CF4711F776F}" type="slidenum">
               <a:rPr lang="de-DE" smtClean="0"/>
               <a:pPr/>
-              <a:t>‹Nr.›</a:t>
+              <a:t>‹#›</a:t>
             </a:fld>
             <a:endParaRPr lang="de-DE" dirty="0"/>
           </a:p>
@@ -32090,7 +32263,7 @@
             <a:fld id="{029B9DB6-AD97-41EF-A73B-AB5745E7E129}" type="datetime1">
               <a:rPr lang="de-DE" smtClean="0"/>
               <a:pPr/>
-              <a:t>23.11.2022</a:t>
+              <a:t>24.11.22</a:t>
             </a:fld>
             <a:endParaRPr lang="de-DE" dirty="0"/>
           </a:p>
@@ -32165,7 +32338,7 @@
             <a:fld id="{F86FCC4D-0438-154F-9910-1CF4711F776F}" type="slidenum">
               <a:rPr lang="de-DE" smtClean="0"/>
               <a:pPr/>
-              <a:t>‹Nr.›</a:t>
+              <a:t>‹#›</a:t>
             </a:fld>
             <a:endParaRPr lang="de-DE" dirty="0"/>
           </a:p>
@@ -39379,7 +39552,7 @@
             <a:fld id="{F86FCC4D-0438-154F-9910-1CF4711F776F}" type="slidenum">
               <a:rPr lang="de-DE" smtClean="0"/>
               <a:pPr/>
-              <a:t>‹Nr.›</a:t>
+              <a:t>‹#›</a:t>
             </a:fld>
             <a:endParaRPr lang="de-DE" dirty="0"/>
           </a:p>
@@ -39476,7 +39649,7 @@
           <a:p>
             <a:fld id="{029B9DB6-AD97-41EF-A73B-AB5745E7E129}" type="datetime1">
               <a:rPr lang="de-DE" smtClean="0"/>
-              <a:t>23.11.2022</a:t>
+              <a:t>24.11.22</a:t>
             </a:fld>
             <a:endParaRPr lang="de-DE" dirty="0"/>
           </a:p>
@@ -40686,7 +40859,7 @@
           <a:p>
             <a:fld id="{FB195ED1-4338-49C6-B09A-7897958CE3AA}" type="datetime1">
               <a:rPr lang="de-DE" smtClean="0"/>
-              <a:t>23.11.2022</a:t>
+              <a:t>24.11.22</a:t>
             </a:fld>
             <a:r>
               <a:rPr lang="de-DE" dirty="0"/>
@@ -40947,7 +41120,7 @@
           <a:p>
             <a:fld id="{5DC9953B-096E-4D14-9CB5-13648C592BB5}" type="datetime1">
               <a:rPr lang="de-DE" smtClean="0"/>
-              <a:t>23.11.2022</a:t>
+              <a:t>24.11.22</a:t>
             </a:fld>
             <a:endParaRPr lang="de-DE" dirty="0"/>
           </a:p>
@@ -41430,7 +41603,7 @@
           <a:p>
             <a:fld id="{5DC9953B-096E-4D14-9CB5-13648C592BB5}" type="datetime1">
               <a:rPr lang="de-DE" smtClean="0"/>
-              <a:t>23.11.2022</a:t>
+              <a:t>24.11.22</a:t>
             </a:fld>
             <a:endParaRPr lang="de-DE" dirty="0"/>
           </a:p>
@@ -41986,7 +42159,7 @@
           <a:p>
             <a:fld id="{5DC9953B-096E-4D14-9CB5-13648C592BB5}" type="datetime1">
               <a:rPr lang="de-DE" smtClean="0"/>
-              <a:t>23.11.2022</a:t>
+              <a:t>24.11.22</a:t>
             </a:fld>
             <a:endParaRPr lang="de-DE" dirty="0"/>
           </a:p>
@@ -42262,7 +42435,7 @@
 </file>
 
 <file path=ppt/slides/slide13.xml><?xml version="1.0" encoding="utf-8"?>
-<p:sld xmlns:a="http://schemas.openxmlformats.org/drawingml/2006/main" xmlns:r="http://schemas.openxmlformats.org/officeDocument/2006/relationships" xmlns:p="http://schemas.openxmlformats.org/presentationml/2006/main" show="0">
+<p:sld xmlns:a="http://schemas.openxmlformats.org/drawingml/2006/main" xmlns:r="http://schemas.openxmlformats.org/officeDocument/2006/relationships" xmlns:p="http://schemas.openxmlformats.org/presentationml/2006/main">
   <p:cSld>
     <p:spTree>
       <p:nvGrpSpPr>
@@ -42301,107 +42474,73 @@
           <a:p>
             <a:r>
               <a:rPr lang="de-DE" dirty="0"/>
-              <a:t>Mit dem Befehl `</a:t>
+              <a:t>LD_PRELOAD erlaubt es Programmen, geteilte Bibliotheken (sog. </a:t>
             </a:r>
             <a:r>
               <a:rPr lang="de-DE" dirty="0" err="1"/>
-              <a:t>sudo</a:t>
-            </a:r>
-            <a:r>
-              <a:rPr lang="de-DE" dirty="0"/>
-              <a:t> –l` sehen wir das wir z.B. den Befehl find mit </a:t>
+              <a:t>shared</a:t>
+            </a:r>
+            <a:r>
+              <a:rPr lang="de-DE" dirty="0"/>
+              <a:t> </a:t>
             </a:r>
             <a:r>
               <a:rPr lang="de-DE" dirty="0" err="1"/>
-              <a:t>sudo</a:t>
-            </a:r>
-            <a:r>
-              <a:rPr lang="de-DE" dirty="0"/>
-              <a:t> ausführen dürfen</a:t>
-            </a:r>
-          </a:p>
-          <a:p>
-            <a:r>
-              <a:rPr lang="de-DE" dirty="0"/>
-              <a:t>Auf </a:t>
-            </a:r>
-            <a:r>
-              <a:rPr lang="de-DE" dirty="0" err="1">
-                <a:hlinkClick r:id="rId3"/>
-              </a:rPr>
-              <a:t>gtfobin</a:t>
-            </a:r>
-            <a:r>
-              <a:rPr lang="de-DE" dirty="0"/>
-              <a:t> finden wir einen Angriffsvektor dafür</a:t>
-            </a:r>
-          </a:p>
-          <a:p>
-            <a:r>
-              <a:rPr lang="de-DE" dirty="0"/>
-              <a:t>Mit dem Befehl `</a:t>
-            </a:r>
-            <a:r>
-              <a:rPr lang="en-US" dirty="0" err="1"/>
-              <a:t>sudo</a:t>
-            </a:r>
-            <a:r>
-              <a:rPr lang="en-US" dirty="0"/>
-              <a:t> find . -exec /bin/</a:t>
-            </a:r>
-            <a:r>
-              <a:rPr lang="en-US" dirty="0" err="1"/>
-              <a:t>sh</a:t>
-            </a:r>
-            <a:r>
-              <a:rPr lang="en-US" dirty="0"/>
-              <a:t> \; -quit’ </a:t>
-            </a:r>
-            <a:r>
-              <a:rPr lang="en-US" dirty="0" err="1"/>
-              <a:t>können</a:t>
-            </a:r>
-            <a:r>
-              <a:rPr lang="en-US" dirty="0"/>
-              <a:t> </a:t>
-            </a:r>
-            <a:r>
-              <a:rPr lang="en-US" dirty="0" err="1"/>
-              <a:t>wir</a:t>
-            </a:r>
-            <a:r>
-              <a:rPr lang="en-US" dirty="0"/>
-              <a:t> </a:t>
-            </a:r>
-            <a:r>
-              <a:rPr lang="en-US" dirty="0" err="1"/>
-              <a:t>eine</a:t>
-            </a:r>
-            <a:r>
-              <a:rPr lang="en-US" dirty="0"/>
-              <a:t> </a:t>
-            </a:r>
-            <a:r>
-              <a:rPr lang="en-US" dirty="0" err="1"/>
-              <a:t>Rootshell</a:t>
-            </a:r>
-            <a:r>
-              <a:rPr lang="en-US" dirty="0"/>
-              <a:t> </a:t>
-            </a:r>
-            <a:r>
-              <a:rPr lang="en-US" dirty="0" err="1"/>
-              <a:t>spawnen</a:t>
-            </a:r>
-            <a:endParaRPr lang="en-US" dirty="0"/>
+              <a:t>objects</a:t>
+            </a:r>
+            <a:r>
+              <a:rPr lang="de-DE" dirty="0"/>
+              <a:t>) zu verwenden</a:t>
+            </a:r>
+          </a:p>
+          <a:p>
+            <a:r>
+              <a:rPr lang="de-DE" dirty="0" err="1"/>
+              <a:t>Konfigurtiert</a:t>
+            </a:r>
+            <a:r>
+              <a:rPr lang="de-DE" dirty="0"/>
+              <a:t> in /</a:t>
+            </a:r>
+            <a:r>
+              <a:rPr lang="de-DE" dirty="0" err="1"/>
+              <a:t>etc</a:t>
+            </a:r>
+            <a:r>
+              <a:rPr lang="de-DE" dirty="0"/>
+              <a:t>/</a:t>
+            </a:r>
+            <a:r>
+              <a:rPr lang="de-DE" dirty="0" err="1"/>
+              <a:t>sudoers</a:t>
+            </a:r>
+            <a:endParaRPr lang="de-DE" dirty="0"/>
+          </a:p>
+          <a:p>
+            <a:pPr lvl="2"/>
+            <a:r>
+              <a:rPr lang="de-DE" dirty="0"/>
+              <a:t>Wenn die Datei nicht lesbar ist, bleibt nur ausprobieren</a:t>
+            </a:r>
+          </a:p>
+          <a:p>
+            <a:r>
+              <a:rPr lang="de-DE" dirty="0"/>
+              <a:t>Aufgabe: nutzt </a:t>
+            </a:r>
+            <a:r>
+              <a:rPr lang="de-DE" dirty="0" err="1"/>
+              <a:t>gtfobins</a:t>
+            </a:r>
+            <a:r>
+              <a:rPr lang="de-DE" dirty="0"/>
+              <a:t> um herauszufinden wie ihr das ausnutzen könnt</a:t>
+            </a:r>
           </a:p>
           <a:p>
             <a:pPr marL="0" indent="0">
               <a:buNone/>
             </a:pPr>
-            <a:endParaRPr lang="de-DE" dirty="0"/>
-          </a:p>
-          <a:p>
             <a:endParaRPr lang="de-DE" dirty="0"/>
           </a:p>
         </p:txBody>
@@ -42429,7 +42568,7 @@
           <a:p>
             <a:fld id="{5DC9953B-096E-4D14-9CB5-13648C592BB5}" type="datetime1">
               <a:rPr lang="de-DE" smtClean="0"/>
-              <a:t>23.11.2022</a:t>
+              <a:t>24.11.22</a:t>
             </a:fld>
             <a:endParaRPr lang="de-DE" dirty="0"/>
           </a:p>
@@ -42548,22 +42687,18 @@
           <a:lstStyle/>
           <a:p>
             <a:r>
-              <a:rPr lang="de-DE" dirty="0" err="1"/>
-              <a:t>Sudo</a:t>
-            </a:r>
-            <a:r>
-              <a:rPr lang="de-DE" dirty="0"/>
-              <a:t> (Lösung)</a:t>
-            </a:r>
-          </a:p>
-        </p:txBody>
-      </p:sp>
-      <p:sp>
-        <p:nvSpPr>
-          <p:cNvPr id="11" name="Textfeld 10">
-            <a:extLst>
-              <a:ext uri="{FF2B5EF4-FFF2-40B4-BE49-F238E27FC236}">
-                <a16:creationId xmlns:a16="http://schemas.microsoft.com/office/drawing/2014/main" id="{F94D0C8C-57FA-4FD3-E7BF-D59E98F3F4C2}"/>
+              <a:rPr lang="de-DE" dirty="0"/>
+              <a:t>LD_PRELOAD</a:t>
+            </a:r>
+          </a:p>
+        </p:txBody>
+      </p:sp>
+      <p:sp>
+        <p:nvSpPr>
+          <p:cNvPr id="8" name="Textfeld 7">
+            <a:extLst>
+              <a:ext uri="{FF2B5EF4-FFF2-40B4-BE49-F238E27FC236}">
+                <a16:creationId xmlns:a16="http://schemas.microsoft.com/office/drawing/2014/main" id="{E8884E0F-A724-A931-0722-7B2684337CA9}"/>
               </a:ext>
             </a:extLst>
           </p:cNvPr>
@@ -42573,7 +42708,7 @@
         <p:spPr>
           <a:xfrm>
             <a:off x="611039" y="662834"/>
-            <a:ext cx="2880320" cy="3757439"/>
+            <a:ext cx="2880320" cy="246221"/>
           </a:xfrm>
           <a:prstGeom prst="rect">
             <a:avLst/>
@@ -42593,103 +42728,21 @@
               <a:buSzPct val="100000"/>
             </a:pPr>
             <a:r>
-              <a:rPr lang="de-DE" sz="1600" dirty="0" err="1">
+              <a:rPr lang="de-DE" sz="1600" dirty="0">
                 <a:solidFill>
                   <a:srgbClr val="00B050"/>
                 </a:solidFill>
                 <a:latin typeface="Lucida Sans Typewriter" panose="020B0509030504030204" pitchFamily="49" charset="0"/>
               </a:rPr>
-              <a:t>Sudo</a:t>
-            </a:r>
-            <a:r>
-              <a:rPr lang="de-DE" sz="1600" dirty="0">
-                <a:solidFill>
-                  <a:srgbClr val="00B050"/>
-                </a:solidFill>
-                <a:latin typeface="Lucida Sans Typewriter" panose="020B0509030504030204" pitchFamily="49" charset="0"/>
-              </a:rPr>
-              <a:t> erlaubt es einem Anwender Programme mit root-Rechten auszuführen.</a:t>
-            </a:r>
-          </a:p>
-          <a:p>
-            <a:pPr algn="l">
-              <a:spcBef>
-                <a:spcPts val="60"/>
-              </a:spcBef>
-              <a:buSzPct val="100000"/>
-            </a:pPr>
-            <a:endParaRPr lang="de-DE" sz="1600" dirty="0">
-              <a:solidFill>
-                <a:srgbClr val="00B050"/>
-              </a:solidFill>
-              <a:latin typeface="Lucida Sans Typewriter" panose="020B0509030504030204" pitchFamily="49" charset="0"/>
-            </a:endParaRPr>
-          </a:p>
-          <a:p>
-            <a:pPr algn="l">
-              <a:spcBef>
-                <a:spcPts val="60"/>
-              </a:spcBef>
-              <a:buSzPct val="100000"/>
-            </a:pPr>
-            <a:r>
-              <a:rPr lang="de-DE" sz="1600" dirty="0">
-                <a:solidFill>
-                  <a:srgbClr val="00B050"/>
-                </a:solidFill>
-                <a:latin typeface="Lucida Sans Typewriter" panose="020B0509030504030204" pitchFamily="49" charset="0"/>
-              </a:rPr>
-              <a:t>So kann ein Administrator einzelnen Anwendern die Möglichkeit geben trotz eingeschränktem Zugriff bestimmte Programme ausführen zu können.</a:t>
-            </a:r>
-          </a:p>
-          <a:p>
-            <a:pPr algn="l">
-              <a:spcBef>
-                <a:spcPts val="60"/>
-              </a:spcBef>
-              <a:buSzPct val="100000"/>
-            </a:pPr>
-            <a:endParaRPr lang="de-DE" sz="1600" dirty="0">
-              <a:solidFill>
-                <a:srgbClr val="00B050"/>
-              </a:solidFill>
-              <a:latin typeface="Lucida Sans Typewriter" panose="020B0509030504030204" pitchFamily="49" charset="0"/>
-            </a:endParaRPr>
-          </a:p>
-          <a:p>
-            <a:pPr algn="l">
-              <a:spcBef>
-                <a:spcPts val="60"/>
-              </a:spcBef>
-              <a:buSzPct val="100000"/>
-            </a:pPr>
-            <a:endParaRPr lang="de-DE" sz="1600" dirty="0">
-              <a:solidFill>
-                <a:srgbClr val="00B050"/>
-              </a:solidFill>
-              <a:latin typeface="Lucida Sans Typewriter" panose="020B0509030504030204" pitchFamily="49" charset="0"/>
-            </a:endParaRPr>
-          </a:p>
-          <a:p>
-            <a:pPr algn="l">
-              <a:spcBef>
-                <a:spcPts val="60"/>
-              </a:spcBef>
-              <a:buSzPct val="100000"/>
-            </a:pPr>
-            <a:endParaRPr lang="de-DE" sz="1600" dirty="0">
-              <a:solidFill>
-                <a:srgbClr val="00B050"/>
-              </a:solidFill>
-              <a:latin typeface="Lucida Sans Typewriter" panose="020B0509030504030204" pitchFamily="49" charset="0"/>
-            </a:endParaRPr>
+              <a:t>TODO</a:t>
+            </a:r>
           </a:p>
         </p:txBody>
       </p:sp>
     </p:spTree>
     <p:extLst>
       <p:ext uri="{BB962C8B-B14F-4D97-AF65-F5344CB8AC3E}">
-        <p14:creationId xmlns:p14="http://schemas.microsoft.com/office/powerpoint/2010/main" val="3303368604"/>
+        <p14:creationId xmlns:p14="http://schemas.microsoft.com/office/powerpoint/2010/main" val="3601666898"/>
       </p:ext>
     </p:extLst>
   </p:cSld>
@@ -42724,90 +42777,35 @@
           <a:chExt cx="0" cy="0"/>
         </a:xfrm>
       </p:grpSpPr>
-      <p:sp>
-        <p:nvSpPr>
-          <p:cNvPr id="2" name="Inhaltsplatzhalter 1">
-            <a:extLst>
-              <a:ext uri="{FF2B5EF4-FFF2-40B4-BE49-F238E27FC236}">
-                <a16:creationId xmlns:a16="http://schemas.microsoft.com/office/drawing/2014/main" id="{DE1EE909-DD3A-58D2-3F07-57F08C0C8F5A}"/>
-              </a:ext>
-            </a:extLst>
-          </p:cNvPr>
-          <p:cNvSpPr>
-            <a:spLocks noGrp="1"/>
-          </p:cNvSpPr>
+      <p:pic>
+        <p:nvPicPr>
+          <p:cNvPr id="10" name="Inhaltsplatzhalter 9">
+            <a:extLst>
+              <a:ext uri="{FF2B5EF4-FFF2-40B4-BE49-F238E27FC236}">
+                <a16:creationId xmlns:a16="http://schemas.microsoft.com/office/drawing/2014/main" id="{5C58D52D-47ED-FD04-0F85-F0222E18496B}"/>
+              </a:ext>
+            </a:extLst>
+          </p:cNvPr>
+          <p:cNvPicPr>
+            <a:picLocks noGrp="1" noChangeAspect="1"/>
+          </p:cNvPicPr>
           <p:nvPr>
             <p:ph sz="quarter" idx="17"/>
           </p:nvPr>
-        </p:nvSpPr>
-        <p:spPr/>
-        <p:txBody>
-          <a:bodyPr/>
-          <a:lstStyle/>
-          <a:p>
-            <a:r>
-              <a:rPr lang="de-DE" dirty="0"/>
-              <a:t>LD_PRELOAD erlaubt es Programmen, geteilte Bibliotheken (sog. </a:t>
-            </a:r>
-            <a:r>
-              <a:rPr lang="de-DE" dirty="0" err="1"/>
-              <a:t>shared</a:t>
-            </a:r>
-            <a:r>
-              <a:rPr lang="de-DE" dirty="0"/>
-              <a:t> </a:t>
-            </a:r>
-            <a:r>
-              <a:rPr lang="de-DE" dirty="0" err="1"/>
-              <a:t>objects</a:t>
-            </a:r>
-            <a:r>
-              <a:rPr lang="de-DE" dirty="0"/>
-              <a:t>) zu verwenden</a:t>
-            </a:r>
-          </a:p>
-          <a:p>
-            <a:r>
-              <a:rPr lang="de-DE" dirty="0"/>
-              <a:t>TODO: wie finden wir heraus, dass das aktiviert ist?</a:t>
-            </a:r>
-          </a:p>
-          <a:p>
-            <a:endParaRPr lang="de-DE" dirty="0"/>
-          </a:p>
-          <a:p>
-            <a:r>
-              <a:rPr lang="de-DE" dirty="0"/>
-              <a:t>Aufgabe: nutzt </a:t>
-            </a:r>
-            <a:r>
-              <a:rPr lang="de-DE" dirty="0" err="1"/>
-              <a:t>gtfobins</a:t>
-            </a:r>
-            <a:r>
-              <a:rPr lang="de-DE" dirty="0"/>
-              <a:t> um herauszufinden wie ihr das ausnutzen könnt</a:t>
-            </a:r>
-          </a:p>
-          <a:p>
-            <a:endParaRPr lang="de-DE" dirty="0"/>
-          </a:p>
-          <a:p>
-            <a:r>
-              <a:rPr lang="de-DE" dirty="0"/>
-              <a:t>TODO: </a:t>
-            </a:r>
-            <a:r>
-              <a:rPr lang="de-DE" dirty="0" err="1"/>
-              <a:t>ggf</a:t>
-            </a:r>
-            <a:r>
-              <a:rPr lang="de-DE" dirty="0"/>
-              <a:t> Hilfestellung, das ist schon etwas komplexer?</a:t>
-            </a:r>
-          </a:p>
-        </p:txBody>
-      </p:sp>
+        </p:nvPicPr>
+        <p:blipFill>
+          <a:blip r:embed="rId3"/>
+          <a:stretch>
+            <a:fillRect/>
+          </a:stretch>
+        </p:blipFill>
+        <p:spPr>
+          <a:xfrm>
+            <a:off x="4337806" y="2165809"/>
+            <a:ext cx="6732588" cy="706279"/>
+          </a:xfrm>
+        </p:spPr>
+      </p:pic>
       <p:sp>
         <p:nvSpPr>
           <p:cNvPr id="3" name="Datumsplatzhalter 2">
@@ -42831,7 +42829,7 @@
           <a:p>
             <a:fld id="{5DC9953B-096E-4D14-9CB5-13648C592BB5}" type="datetime1">
               <a:rPr lang="de-DE" smtClean="0"/>
-              <a:t>23.11.2022</a:t>
+              <a:t>24.11.22</a:t>
             </a:fld>
             <a:endParaRPr lang="de-DE" dirty="0"/>
           </a:p>
@@ -42951,7 +42949,7 @@
           <a:p>
             <a:r>
               <a:rPr lang="de-DE" dirty="0"/>
-              <a:t>LD_PRELOAD</a:t>
+              <a:t>SUID/SGID</a:t>
             </a:r>
           </a:p>
         </p:txBody>
@@ -42961,7 +42959,7 @@
           <p:cNvPr id="8" name="Textfeld 7">
             <a:extLst>
               <a:ext uri="{FF2B5EF4-FFF2-40B4-BE49-F238E27FC236}">
-                <a16:creationId xmlns:a16="http://schemas.microsoft.com/office/drawing/2014/main" id="{E8884E0F-A724-A931-0722-7B2684337CA9}"/>
+                <a16:creationId xmlns:a16="http://schemas.microsoft.com/office/drawing/2014/main" id="{66155F9D-C599-4607-1C5B-3CFA704DD5AF}"/>
               </a:ext>
             </a:extLst>
           </p:cNvPr>
@@ -42971,7 +42969,7 @@
         <p:spPr>
           <a:xfrm>
             <a:off x="611039" y="662834"/>
-            <a:ext cx="2880320" cy="246221"/>
+            <a:ext cx="2880320" cy="3005951"/>
           </a:xfrm>
           <a:prstGeom prst="rect">
             <a:avLst/>
@@ -42997,15 +42995,357 @@
                 </a:solidFill>
                 <a:latin typeface="Lucida Sans Typewriter" panose="020B0509030504030204" pitchFamily="49" charset="0"/>
               </a:rPr>
-              <a:t>TODO</a:t>
-            </a:r>
+              <a:t>Berechtigungen ob ein User eine Datei lesen, schreiben oder ausführen darf hängen an den Dateien selbst.</a:t>
+            </a:r>
+          </a:p>
+          <a:p>
+            <a:pPr algn="l">
+              <a:spcBef>
+                <a:spcPts val="60"/>
+              </a:spcBef>
+              <a:buSzPct val="100000"/>
+            </a:pPr>
+            <a:endParaRPr lang="de-DE" sz="1600" dirty="0">
+              <a:solidFill>
+                <a:srgbClr val="00B050"/>
+              </a:solidFill>
+              <a:latin typeface="Lucida Sans Typewriter" panose="020B0509030504030204" pitchFamily="49" charset="0"/>
+            </a:endParaRPr>
+          </a:p>
+          <a:p>
+            <a:pPr algn="l">
+              <a:spcBef>
+                <a:spcPts val="60"/>
+              </a:spcBef>
+              <a:buSzPct val="100000"/>
+            </a:pPr>
+            <a:r>
+              <a:rPr lang="de-DE" sz="1600" dirty="0">
+                <a:solidFill>
+                  <a:srgbClr val="00B050"/>
+                </a:solidFill>
+                <a:latin typeface="Lucida Sans Typewriter" panose="020B0509030504030204" pitchFamily="49" charset="0"/>
+              </a:rPr>
+              <a:t>Mit dem Befehl `</a:t>
+            </a:r>
+            <a:r>
+              <a:rPr lang="de-DE" sz="1600" dirty="0" err="1">
+                <a:solidFill>
+                  <a:srgbClr val="00B050"/>
+                </a:solidFill>
+                <a:latin typeface="Lucida Sans Typewriter" panose="020B0509030504030204" pitchFamily="49" charset="0"/>
+              </a:rPr>
+              <a:t>ls</a:t>
+            </a:r>
+            <a:r>
+              <a:rPr lang="de-DE" sz="1600" dirty="0">
+                <a:solidFill>
+                  <a:srgbClr val="00B050"/>
+                </a:solidFill>
+                <a:latin typeface="Lucida Sans Typewriter" panose="020B0509030504030204" pitchFamily="49" charset="0"/>
+              </a:rPr>
+              <a:t> -l` kann man sich diese Berechtigungen anzeigen lassen.</a:t>
+            </a:r>
+          </a:p>
+          <a:p>
+            <a:pPr algn="l">
+              <a:spcBef>
+                <a:spcPts val="60"/>
+              </a:spcBef>
+              <a:buSzPct val="100000"/>
+            </a:pPr>
+            <a:endParaRPr lang="de-DE" sz="1600" dirty="0">
+              <a:solidFill>
+                <a:srgbClr val="00B050"/>
+              </a:solidFill>
+              <a:latin typeface="Lucida Sans Typewriter" panose="020B0509030504030204" pitchFamily="49" charset="0"/>
+            </a:endParaRPr>
+          </a:p>
+          <a:p>
+            <a:pPr algn="l">
+              <a:spcBef>
+                <a:spcPts val="60"/>
+              </a:spcBef>
+              <a:buSzPct val="100000"/>
+            </a:pPr>
+            <a:endParaRPr lang="de-DE" sz="1600" dirty="0">
+              <a:solidFill>
+                <a:srgbClr val="00B050"/>
+              </a:solidFill>
+              <a:latin typeface="Lucida Sans Typewriter" panose="020B0509030504030204" pitchFamily="49" charset="0"/>
+            </a:endParaRPr>
+          </a:p>
+        </p:txBody>
+      </p:sp>
+      <p:sp>
+        <p:nvSpPr>
+          <p:cNvPr id="11" name="Textfeld 10">
+            <a:extLst>
+              <a:ext uri="{FF2B5EF4-FFF2-40B4-BE49-F238E27FC236}">
+                <a16:creationId xmlns:a16="http://schemas.microsoft.com/office/drawing/2014/main" id="{C2AEE6D3-1A0A-F38D-8927-D6766E860DA3}"/>
+              </a:ext>
+            </a:extLst>
+          </p:cNvPr>
+          <p:cNvSpPr txBox="1"/>
+          <p:nvPr/>
+        </p:nvSpPr>
+        <p:spPr>
+          <a:xfrm>
+            <a:off x="4356689" y="3463625"/>
+            <a:ext cx="5615390" cy="2539157"/>
+          </a:xfrm>
+          <a:prstGeom prst="rect">
+            <a:avLst/>
+          </a:prstGeom>
+          <a:noFill/>
+        </p:spPr>
+        <p:txBody>
+          <a:bodyPr wrap="square" lIns="0" tIns="0" rIns="0" bIns="0" rtlCol="0">
+            <a:spAutoFit/>
+          </a:bodyPr>
+          <a:lstStyle/>
+          <a:p>
+            <a:pPr marL="144000" indent="-144000" algn="l">
+              <a:spcBef>
+                <a:spcPts val="60"/>
+              </a:spcBef>
+              <a:buSzPct val="100000"/>
+              <a:buFont typeface="Wingdings" panose="05000000000000000000" pitchFamily="2" charset="2"/>
+              <a:buChar char="§"/>
+            </a:pPr>
+            <a:r>
+              <a:rPr lang="de-DE" sz="1600" dirty="0"/>
+              <a:t>Dateien mit SUID-Bit werden immer mit den Rechten des </a:t>
+            </a:r>
+            <a:r>
+              <a:rPr lang="de-DE" sz="1600" dirty="0" err="1"/>
+              <a:t>Owners</a:t>
+            </a:r>
+            <a:r>
+              <a:rPr lang="de-DE" sz="1600" dirty="0"/>
+              <a:t> der Datei ausgeführt</a:t>
+            </a:r>
+          </a:p>
+          <a:p>
+            <a:pPr marL="144000" indent="-144000" algn="l">
+              <a:spcBef>
+                <a:spcPts val="60"/>
+              </a:spcBef>
+              <a:buSzPct val="100000"/>
+              <a:buFont typeface="Wingdings" panose="05000000000000000000" pitchFamily="2" charset="2"/>
+              <a:buChar char="§"/>
+            </a:pPr>
+            <a:r>
+              <a:rPr lang="de-DE" sz="1600" dirty="0"/>
+              <a:t>Dateien die mit dem SUID-/ SGID-Bit lassen sich mit dem find Befehl aufspüren:</a:t>
+            </a:r>
+          </a:p>
+          <a:p>
+            <a:pPr marL="144000" indent="-144000" algn="l">
+              <a:spcBef>
+                <a:spcPts val="60"/>
+              </a:spcBef>
+              <a:buSzPct val="100000"/>
+              <a:buFont typeface="Wingdings" panose="05000000000000000000" pitchFamily="2" charset="2"/>
+              <a:buChar char="§"/>
+            </a:pPr>
+            <a:endParaRPr lang="de-DE" sz="1600" dirty="0"/>
+          </a:p>
+          <a:p>
+            <a:pPr algn="l">
+              <a:spcBef>
+                <a:spcPts val="60"/>
+              </a:spcBef>
+              <a:buSzPct val="100000"/>
+            </a:pPr>
+            <a:r>
+              <a:rPr lang="en-US" sz="1600" b="0" i="0" dirty="0">
+                <a:solidFill>
+                  <a:srgbClr val="D7BA7D"/>
+                </a:solidFill>
+                <a:effectLst/>
+                <a:latin typeface="Consolas" panose="020B0609020204030204" pitchFamily="49" charset="0"/>
+              </a:rPr>
+              <a:t>find / -perm -u=s -user root 2&gt;/dev/null</a:t>
+            </a:r>
+          </a:p>
+          <a:p>
+            <a:pPr algn="l">
+              <a:spcBef>
+                <a:spcPts val="60"/>
+              </a:spcBef>
+              <a:buSzPct val="100000"/>
+            </a:pPr>
+            <a:endParaRPr lang="en-US" sz="1600" dirty="0">
+              <a:solidFill>
+                <a:srgbClr val="D7BA7D"/>
+              </a:solidFill>
+              <a:latin typeface="Consolas" panose="020B0609020204030204" pitchFamily="49" charset="0"/>
+            </a:endParaRPr>
+          </a:p>
+          <a:p>
+            <a:pPr algn="l">
+              <a:spcBef>
+                <a:spcPts val="60"/>
+              </a:spcBef>
+              <a:buSzPct val="100000"/>
+            </a:pPr>
+            <a:endParaRPr lang="en-US" sz="1600" dirty="0">
+              <a:solidFill>
+                <a:srgbClr val="D7BA7D"/>
+              </a:solidFill>
+              <a:latin typeface="Consolas" panose="020B0609020204030204" pitchFamily="49" charset="0"/>
+            </a:endParaRPr>
+          </a:p>
+          <a:p>
+            <a:pPr algn="l">
+              <a:spcBef>
+                <a:spcPts val="60"/>
+              </a:spcBef>
+              <a:buSzPct val="100000"/>
+            </a:pPr>
+            <a:r>
+              <a:rPr lang="en-US" sz="1600" dirty="0">
+                <a:latin typeface="+mj-lt"/>
+              </a:rPr>
+              <a:t>Aufgabe: </a:t>
+            </a:r>
+            <a:r>
+              <a:rPr lang="en-US" sz="1600" dirty="0" err="1">
+                <a:latin typeface="+mj-lt"/>
+              </a:rPr>
+              <a:t>findet</a:t>
+            </a:r>
+            <a:r>
+              <a:rPr lang="en-US" sz="1600" dirty="0">
+                <a:latin typeface="+mj-lt"/>
+              </a:rPr>
+              <a:t> </a:t>
+            </a:r>
+            <a:r>
+              <a:rPr lang="en-US" sz="1600" dirty="0" err="1">
+                <a:latin typeface="+mj-lt"/>
+              </a:rPr>
+              <a:t>heraus</a:t>
+            </a:r>
+            <a:r>
+              <a:rPr lang="en-US" sz="1600" dirty="0">
+                <a:latin typeface="+mj-lt"/>
+              </a:rPr>
+              <a:t>, </a:t>
+            </a:r>
+            <a:r>
+              <a:rPr lang="en-US" sz="1600" dirty="0" err="1">
+                <a:latin typeface="+mj-lt"/>
+              </a:rPr>
+              <a:t>wie</a:t>
+            </a:r>
+            <a:r>
+              <a:rPr lang="en-US" sz="1600" dirty="0">
+                <a:latin typeface="+mj-lt"/>
+              </a:rPr>
+              <a:t> </a:t>
+            </a:r>
+            <a:r>
+              <a:rPr lang="en-US" sz="1600" dirty="0" err="1">
+                <a:latin typeface="+mj-lt"/>
+              </a:rPr>
+              <a:t>Ihr</a:t>
+            </a:r>
+            <a:r>
+              <a:rPr lang="en-US" sz="1600" dirty="0">
+                <a:latin typeface="+mj-lt"/>
+              </a:rPr>
+              <a:t> </a:t>
+            </a:r>
+            <a:r>
+              <a:rPr lang="en-US" sz="1600" dirty="0" err="1">
+                <a:latin typeface="+mj-lt"/>
+              </a:rPr>
+              <a:t>mit</a:t>
+            </a:r>
+            <a:r>
+              <a:rPr lang="en-US" sz="1600" dirty="0">
+                <a:latin typeface="+mj-lt"/>
+              </a:rPr>
+              <a:t> den </a:t>
+            </a:r>
+            <a:r>
+              <a:rPr lang="en-US" sz="1600" dirty="0" err="1">
+                <a:latin typeface="+mj-lt"/>
+              </a:rPr>
+              <a:t>gefundenen</a:t>
+            </a:r>
+            <a:r>
+              <a:rPr lang="en-US" sz="1600" dirty="0">
+                <a:latin typeface="+mj-lt"/>
+              </a:rPr>
+              <a:t> </a:t>
+            </a:r>
+            <a:r>
+              <a:rPr lang="en-US" sz="1600" dirty="0" err="1">
+                <a:latin typeface="+mj-lt"/>
+              </a:rPr>
+              <a:t>Programmen</a:t>
+            </a:r>
+            <a:r>
+              <a:rPr lang="en-US" sz="1600" dirty="0">
+                <a:latin typeface="+mj-lt"/>
+              </a:rPr>
+              <a:t> </a:t>
+            </a:r>
+            <a:r>
+              <a:rPr lang="en-US" sz="1600" dirty="0" err="1">
+                <a:latin typeface="+mj-lt"/>
+              </a:rPr>
+              <a:t>eine</a:t>
+            </a:r>
+            <a:r>
+              <a:rPr lang="en-US" sz="1600" dirty="0">
+                <a:latin typeface="+mj-lt"/>
+              </a:rPr>
+              <a:t> </a:t>
+            </a:r>
+            <a:r>
+              <a:rPr lang="en-US" sz="1600" dirty="0" err="1">
+                <a:latin typeface="+mj-lt"/>
+              </a:rPr>
+              <a:t>rootshell</a:t>
+            </a:r>
+            <a:r>
+              <a:rPr lang="en-US" sz="1600" dirty="0">
+                <a:latin typeface="+mj-lt"/>
+              </a:rPr>
+              <a:t> </a:t>
+            </a:r>
+            <a:r>
+              <a:rPr lang="en-US" sz="1600" dirty="0" err="1">
+                <a:latin typeface="+mj-lt"/>
+              </a:rPr>
+              <a:t>spawnen</a:t>
+            </a:r>
+            <a:r>
+              <a:rPr lang="en-US" sz="1600" dirty="0">
+                <a:latin typeface="+mj-lt"/>
+              </a:rPr>
+              <a:t> </a:t>
+            </a:r>
+            <a:r>
+              <a:rPr lang="en-US" sz="1600" dirty="0" err="1">
+                <a:latin typeface="+mj-lt"/>
+              </a:rPr>
+              <a:t>könnt</a:t>
+            </a:r>
+            <a:endParaRPr lang="de-DE" sz="1600" dirty="0" err="1">
+              <a:latin typeface="+mj-lt"/>
+            </a:endParaRPr>
           </a:p>
         </p:txBody>
       </p:sp>
     </p:spTree>
     <p:extLst>
       <p:ext uri="{BB962C8B-B14F-4D97-AF65-F5344CB8AC3E}">
-        <p14:creationId xmlns:p14="http://schemas.microsoft.com/office/powerpoint/2010/main" val="3601666898"/>
+        <p14:creationId xmlns:p14="http://schemas.microsoft.com/office/powerpoint/2010/main" val="821384128"/>
       </p:ext>
     </p:extLst>
   </p:cSld>
@@ -43040,35 +43380,112 @@
           <a:chExt cx="0" cy="0"/>
         </a:xfrm>
       </p:grpSpPr>
-      <p:pic>
-        <p:nvPicPr>
-          <p:cNvPr id="10" name="Inhaltsplatzhalter 9">
-            <a:extLst>
-              <a:ext uri="{FF2B5EF4-FFF2-40B4-BE49-F238E27FC236}">
-                <a16:creationId xmlns:a16="http://schemas.microsoft.com/office/drawing/2014/main" id="{5C58D52D-47ED-FD04-0F85-F0222E18496B}"/>
-              </a:ext>
-            </a:extLst>
-          </p:cNvPr>
-          <p:cNvPicPr>
-            <a:picLocks noGrp="1" noChangeAspect="1"/>
-          </p:cNvPicPr>
+      <p:sp>
+        <p:nvSpPr>
+          <p:cNvPr id="2" name="Inhaltsplatzhalter 1">
+            <a:extLst>
+              <a:ext uri="{FF2B5EF4-FFF2-40B4-BE49-F238E27FC236}">
+                <a16:creationId xmlns:a16="http://schemas.microsoft.com/office/drawing/2014/main" id="{DE1EE909-DD3A-58D2-3F07-57F08C0C8F5A}"/>
+              </a:ext>
+            </a:extLst>
+          </p:cNvPr>
+          <p:cNvSpPr>
+            <a:spLocks noGrp="1"/>
+          </p:cNvSpPr>
           <p:nvPr>
             <p:ph sz="quarter" idx="17"/>
           </p:nvPr>
-        </p:nvPicPr>
-        <p:blipFill>
-          <a:blip r:embed="rId3"/>
-          <a:stretch>
-            <a:fillRect/>
-          </a:stretch>
-        </p:blipFill>
-        <p:spPr>
-          <a:xfrm>
-            <a:off x="4337806" y="2165809"/>
-            <a:ext cx="6732588" cy="706279"/>
-          </a:xfrm>
-        </p:spPr>
-      </p:pic>
+        </p:nvSpPr>
+        <p:spPr/>
+        <p:txBody>
+          <a:bodyPr/>
+          <a:lstStyle/>
+          <a:p>
+            <a:endParaRPr lang="de-DE" dirty="0"/>
+          </a:p>
+          <a:p>
+            <a:r>
+              <a:rPr lang="de-DE" dirty="0"/>
+              <a:t>Mit dem Befehl `</a:t>
+            </a:r>
+            <a:r>
+              <a:rPr lang="de-DE" dirty="0" err="1"/>
+              <a:t>getcap</a:t>
+            </a:r>
+            <a:r>
+              <a:rPr lang="de-DE" dirty="0"/>
+              <a:t>` lassen sich </a:t>
+            </a:r>
+            <a:r>
+              <a:rPr lang="de-DE" dirty="0" err="1"/>
+              <a:t>Executables</a:t>
+            </a:r>
+            <a:r>
+              <a:rPr lang="de-DE" dirty="0"/>
+              <a:t> mit erweiterten </a:t>
+            </a:r>
+            <a:r>
+              <a:rPr lang="de-DE" dirty="0" err="1"/>
+              <a:t>Capabilities</a:t>
+            </a:r>
+            <a:r>
+              <a:rPr lang="de-DE" dirty="0"/>
+              <a:t> aufspüren. (Um die Ausgabe kompakt zu halten werfen wir die Fehlerausgaben weg `2&gt;/</a:t>
+            </a:r>
+            <a:r>
+              <a:rPr lang="de-DE" dirty="0" err="1"/>
+              <a:t>dev</a:t>
+            </a:r>
+            <a:r>
+              <a:rPr lang="de-DE" dirty="0"/>
+              <a:t>/null`)</a:t>
+            </a:r>
+          </a:p>
+          <a:p>
+            <a:r>
+              <a:rPr lang="de-DE" dirty="0"/>
+              <a:t>`</a:t>
+            </a:r>
+            <a:r>
+              <a:rPr lang="de-DE" dirty="0" err="1"/>
+              <a:t>getcap</a:t>
+            </a:r>
+            <a:r>
+              <a:rPr lang="de-DE" dirty="0"/>
+              <a:t> -r / 2&gt;/</a:t>
+            </a:r>
+            <a:r>
+              <a:rPr lang="de-DE" dirty="0" err="1"/>
+              <a:t>dev</a:t>
+            </a:r>
+            <a:r>
+              <a:rPr lang="de-DE" dirty="0"/>
+              <a:t>/null`</a:t>
+            </a:r>
+          </a:p>
+          <a:p>
+            <a:endParaRPr lang="de-DE" dirty="0"/>
+          </a:p>
+          <a:p>
+            <a:endParaRPr lang="de-DE" dirty="0"/>
+          </a:p>
+          <a:p>
+            <a:endParaRPr lang="de-DE" dirty="0"/>
+          </a:p>
+          <a:p>
+            <a:endParaRPr lang="de-DE" dirty="0"/>
+          </a:p>
+          <a:p>
+            <a:endParaRPr lang="de-DE" dirty="0"/>
+          </a:p>
+          <a:p>
+            <a:r>
+              <a:rPr lang="de-DE" dirty="0"/>
+              <a:t>Aufgabe: Ihr kennt das Spiel ;)</a:t>
+            </a:r>
+          </a:p>
+        </p:txBody>
+      </p:sp>
       <p:sp>
         <p:nvSpPr>
           <p:cNvPr id="3" name="Datumsplatzhalter 2">
@@ -43092,7 +43509,7 @@
           <a:p>
             <a:fld id="{5DC9953B-096E-4D14-9CB5-13648C592BB5}" type="datetime1">
               <a:rPr lang="de-DE" smtClean="0"/>
-              <a:t>23.11.2022</a:t>
+              <a:t>24.11.22</a:t>
             </a:fld>
             <a:endParaRPr lang="de-DE" dirty="0"/>
           </a:p>
@@ -43211,9 +43628,10 @@
           <a:lstStyle/>
           <a:p>
             <a:r>
-              <a:rPr lang="de-DE" dirty="0"/>
-              <a:t>SUID/SGID</a:t>
-            </a:r>
+              <a:rPr lang="de-DE" dirty="0" err="1"/>
+              <a:t>Capabilities</a:t>
+            </a:r>
+            <a:endParaRPr lang="de-DE" dirty="0"/>
           </a:p>
         </p:txBody>
       </p:sp>
@@ -43222,7 +43640,7 @@
           <p:cNvPr id="8" name="Textfeld 7">
             <a:extLst>
               <a:ext uri="{FF2B5EF4-FFF2-40B4-BE49-F238E27FC236}">
-                <a16:creationId xmlns:a16="http://schemas.microsoft.com/office/drawing/2014/main" id="{66155F9D-C599-4607-1C5B-3CFA704DD5AF}"/>
+                <a16:creationId xmlns:a16="http://schemas.microsoft.com/office/drawing/2014/main" id="{A16AA867-A1B0-22EF-7A33-C2745778FD17}"/>
               </a:ext>
             </a:extLst>
           </p:cNvPr>
@@ -43232,7 +43650,7 @@
         <p:spPr>
           <a:xfrm>
             <a:off x="611039" y="662834"/>
-            <a:ext cx="2880320" cy="3005951"/>
+            <a:ext cx="2880320" cy="2513509"/>
           </a:xfrm>
           <a:prstGeom prst="rect">
             <a:avLst/>
@@ -43252,13 +43670,22 @@
               <a:buSzPct val="100000"/>
             </a:pPr>
             <a:r>
-              <a:rPr lang="de-DE" sz="1600" dirty="0">
+              <a:rPr lang="de-DE" sz="1600" dirty="0" err="1">
                 <a:solidFill>
                   <a:srgbClr val="00B050"/>
                 </a:solidFill>
                 <a:latin typeface="Lucida Sans Typewriter" panose="020B0509030504030204" pitchFamily="49" charset="0"/>
               </a:rPr>
-              <a:t>Berechtigungen ob ein User eine Datei lesen, schreiben oder ausführen darf hängen an den Dateien selbst.</a:t>
+              <a:t>Capabilities</a:t>
+            </a:r>
+            <a:r>
+              <a:rPr lang="de-DE" sz="1600" dirty="0">
+                <a:solidFill>
+                  <a:srgbClr val="00B050"/>
+                </a:solidFill>
+                <a:latin typeface="Lucida Sans Typewriter" panose="020B0509030504030204" pitchFamily="49" charset="0"/>
+              </a:rPr>
+              <a:t> sind eine Möglichkeit Rechte feingranularer zu vergeben.</a:t>
             </a:r>
           </a:p>
           <a:p>
@@ -43289,25 +43716,7 @@
                 </a:solidFill>
                 <a:latin typeface="Lucida Sans Typewriter" panose="020B0509030504030204" pitchFamily="49" charset="0"/>
               </a:rPr>
-              <a:t>Mit dem Befehl `</a:t>
-            </a:r>
-            <a:r>
-              <a:rPr lang="de-DE" sz="1600" dirty="0" err="1">
-                <a:solidFill>
-                  <a:srgbClr val="00B050"/>
-                </a:solidFill>
-                <a:latin typeface="Lucida Sans Typewriter" panose="020B0509030504030204" pitchFamily="49" charset="0"/>
-              </a:rPr>
-              <a:t>ls</a:t>
-            </a:r>
-            <a:r>
-              <a:rPr lang="de-DE" sz="1600" dirty="0">
-                <a:solidFill>
-                  <a:srgbClr val="00B050"/>
-                </a:solidFill>
-                <a:latin typeface="Lucida Sans Typewriter" panose="020B0509030504030204" pitchFamily="49" charset="0"/>
-              </a:rPr>
-              <a:t> -l` kann man sich diese Berechtigungen anzeigen lassen.</a:t>
+              <a:t>Damit können einem Tool einzelne Berechtigungen zugewiesen werden.</a:t>
             </a:r>
           </a:p>
           <a:p>
@@ -43340,275 +43749,10 @@
           </a:p>
         </p:txBody>
       </p:sp>
-      <p:sp>
-        <p:nvSpPr>
-          <p:cNvPr id="11" name="Textfeld 10">
-            <a:extLst>
-              <a:ext uri="{FF2B5EF4-FFF2-40B4-BE49-F238E27FC236}">
-                <a16:creationId xmlns:a16="http://schemas.microsoft.com/office/drawing/2014/main" id="{C2AEE6D3-1A0A-F38D-8927-D6766E860DA3}"/>
-              </a:ext>
-            </a:extLst>
-          </p:cNvPr>
-          <p:cNvSpPr txBox="1"/>
-          <p:nvPr/>
-        </p:nvSpPr>
-        <p:spPr>
-          <a:xfrm>
-            <a:off x="4356689" y="3463625"/>
-            <a:ext cx="5615390" cy="2539157"/>
-          </a:xfrm>
-          <a:prstGeom prst="rect">
-            <a:avLst/>
-          </a:prstGeom>
-          <a:noFill/>
-        </p:spPr>
-        <p:txBody>
-          <a:bodyPr wrap="square" lIns="0" tIns="0" rIns="0" bIns="0" rtlCol="0">
-            <a:spAutoFit/>
-          </a:bodyPr>
-          <a:lstStyle/>
-          <a:p>
-            <a:pPr marL="144000" indent="-144000" algn="l">
-              <a:spcBef>
-                <a:spcPts val="60"/>
-              </a:spcBef>
-              <a:buSzPct val="100000"/>
-              <a:buFont typeface="Wingdings" panose="05000000000000000000" pitchFamily="2" charset="2"/>
-              <a:buChar char="§"/>
-            </a:pPr>
-            <a:r>
-              <a:rPr lang="de-DE" sz="1600" dirty="0"/>
-              <a:t>Dateien mit SUID-Bit werden immer mit den Rechten des </a:t>
-            </a:r>
-            <a:r>
-              <a:rPr lang="de-DE" sz="1600" dirty="0" err="1"/>
-              <a:t>Owners</a:t>
-            </a:r>
-            <a:r>
-              <a:rPr lang="de-DE" sz="1600" dirty="0"/>
-              <a:t> der Datei ausgeführt</a:t>
-            </a:r>
-          </a:p>
-          <a:p>
-            <a:pPr marL="144000" indent="-144000" algn="l">
-              <a:spcBef>
-                <a:spcPts val="60"/>
-              </a:spcBef>
-              <a:buSzPct val="100000"/>
-              <a:buFont typeface="Wingdings" panose="05000000000000000000" pitchFamily="2" charset="2"/>
-              <a:buChar char="§"/>
-            </a:pPr>
-            <a:r>
-              <a:rPr lang="de-DE" sz="1600" dirty="0"/>
-              <a:t>Dateien die mit dem SUID-/ SGID-Bit lassen sich mit dem find Befehl aufspüren:</a:t>
-            </a:r>
-          </a:p>
-          <a:p>
-            <a:pPr marL="144000" indent="-144000" algn="l">
-              <a:spcBef>
-                <a:spcPts val="60"/>
-              </a:spcBef>
-              <a:buSzPct val="100000"/>
-              <a:buFont typeface="Wingdings" panose="05000000000000000000" pitchFamily="2" charset="2"/>
-              <a:buChar char="§"/>
-            </a:pPr>
-            <a:endParaRPr lang="de-DE" sz="1600" dirty="0"/>
-          </a:p>
-          <a:p>
-            <a:pPr algn="l">
-              <a:spcBef>
-                <a:spcPts val="60"/>
-              </a:spcBef>
-              <a:buSzPct val="100000"/>
-            </a:pPr>
-            <a:r>
-              <a:rPr lang="en-US" sz="1600" b="0" i="0" dirty="0">
-                <a:solidFill>
-                  <a:srgbClr val="D7BA7D"/>
-                </a:solidFill>
-                <a:effectLst/>
-                <a:latin typeface="Consolas" panose="020B0609020204030204" pitchFamily="49" charset="0"/>
-              </a:rPr>
-              <a:t>find / -perm -u=s -user root 2&gt;/dev/null</a:t>
-            </a:r>
-          </a:p>
-          <a:p>
-            <a:pPr algn="l">
-              <a:spcBef>
-                <a:spcPts val="60"/>
-              </a:spcBef>
-              <a:buSzPct val="100000"/>
-            </a:pPr>
-            <a:endParaRPr lang="en-US" sz="1600" dirty="0">
-              <a:solidFill>
-                <a:srgbClr val="D7BA7D"/>
-              </a:solidFill>
-              <a:latin typeface="Consolas" panose="020B0609020204030204" pitchFamily="49" charset="0"/>
-            </a:endParaRPr>
-          </a:p>
-          <a:p>
-            <a:pPr algn="l">
-              <a:spcBef>
-                <a:spcPts val="60"/>
-              </a:spcBef>
-              <a:buSzPct val="100000"/>
-            </a:pPr>
-            <a:endParaRPr lang="en-US" sz="1600" dirty="0">
-              <a:solidFill>
-                <a:srgbClr val="D7BA7D"/>
-              </a:solidFill>
-              <a:latin typeface="Consolas" panose="020B0609020204030204" pitchFamily="49" charset="0"/>
-            </a:endParaRPr>
-          </a:p>
-          <a:p>
-            <a:pPr algn="l">
-              <a:spcBef>
-                <a:spcPts val="60"/>
-              </a:spcBef>
-              <a:buSzPct val="100000"/>
-            </a:pPr>
-            <a:r>
-              <a:rPr lang="en-US" sz="1600" dirty="0">
-                <a:latin typeface="+mj-lt"/>
-              </a:rPr>
-              <a:t>Aufgabe: </a:t>
-            </a:r>
-            <a:r>
-              <a:rPr lang="en-US" sz="1600" dirty="0" err="1">
-                <a:latin typeface="+mj-lt"/>
-              </a:rPr>
-              <a:t>findet</a:t>
-            </a:r>
-            <a:r>
-              <a:rPr lang="en-US" sz="1600" dirty="0">
-                <a:latin typeface="+mj-lt"/>
-              </a:rPr>
-              <a:t> </a:t>
-            </a:r>
-            <a:r>
-              <a:rPr lang="en-US" sz="1600" dirty="0" err="1">
-                <a:latin typeface="+mj-lt"/>
-              </a:rPr>
-              <a:t>heraus</a:t>
-            </a:r>
-            <a:r>
-              <a:rPr lang="en-US" sz="1600" dirty="0">
-                <a:latin typeface="+mj-lt"/>
-              </a:rPr>
-              <a:t>, </a:t>
-            </a:r>
-            <a:r>
-              <a:rPr lang="en-US" sz="1600" dirty="0" err="1">
-                <a:latin typeface="+mj-lt"/>
-              </a:rPr>
-              <a:t>wie</a:t>
-            </a:r>
-            <a:r>
-              <a:rPr lang="en-US" sz="1600" dirty="0">
-                <a:latin typeface="+mj-lt"/>
-              </a:rPr>
-              <a:t> </a:t>
-            </a:r>
-            <a:r>
-              <a:rPr lang="en-US" sz="1600" dirty="0" err="1">
-                <a:latin typeface="+mj-lt"/>
-              </a:rPr>
-              <a:t>Ihr</a:t>
-            </a:r>
-            <a:r>
-              <a:rPr lang="en-US" sz="1600" dirty="0">
-                <a:latin typeface="+mj-lt"/>
-              </a:rPr>
-              <a:t> </a:t>
-            </a:r>
-            <a:r>
-              <a:rPr lang="en-US" sz="1600" dirty="0" err="1">
-                <a:latin typeface="+mj-lt"/>
-              </a:rPr>
-              <a:t>mit</a:t>
-            </a:r>
-            <a:r>
-              <a:rPr lang="en-US" sz="1600" dirty="0">
-                <a:latin typeface="+mj-lt"/>
-              </a:rPr>
-              <a:t> den </a:t>
-            </a:r>
-            <a:r>
-              <a:rPr lang="en-US" sz="1600" dirty="0" err="1">
-                <a:latin typeface="+mj-lt"/>
-              </a:rPr>
-              <a:t>gefundenen</a:t>
-            </a:r>
-            <a:r>
-              <a:rPr lang="en-US" sz="1600" dirty="0">
-                <a:latin typeface="+mj-lt"/>
-              </a:rPr>
-              <a:t> </a:t>
-            </a:r>
-            <a:r>
-              <a:rPr lang="en-US" sz="1600" dirty="0" err="1">
-                <a:latin typeface="+mj-lt"/>
-              </a:rPr>
-              <a:t>Programmen</a:t>
-            </a:r>
-            <a:r>
-              <a:rPr lang="en-US" sz="1600" dirty="0">
-                <a:latin typeface="+mj-lt"/>
-              </a:rPr>
-              <a:t> </a:t>
-            </a:r>
-            <a:r>
-              <a:rPr lang="en-US" sz="1600" dirty="0" err="1">
-                <a:latin typeface="+mj-lt"/>
-              </a:rPr>
-              <a:t>eine</a:t>
-            </a:r>
-            <a:r>
-              <a:rPr lang="en-US" sz="1600" dirty="0">
-                <a:latin typeface="+mj-lt"/>
-              </a:rPr>
-              <a:t> </a:t>
-            </a:r>
-            <a:r>
-              <a:rPr lang="en-US" sz="1600" dirty="0" err="1">
-                <a:latin typeface="+mj-lt"/>
-              </a:rPr>
-              <a:t>rootshell</a:t>
-            </a:r>
-            <a:r>
-              <a:rPr lang="en-US" sz="1600" dirty="0">
-                <a:latin typeface="+mj-lt"/>
-              </a:rPr>
-              <a:t> </a:t>
-            </a:r>
-            <a:r>
-              <a:rPr lang="en-US" sz="1600" dirty="0" err="1">
-                <a:latin typeface="+mj-lt"/>
-              </a:rPr>
-              <a:t>spawnen</a:t>
-            </a:r>
-            <a:r>
-              <a:rPr lang="en-US" sz="1600" dirty="0">
-                <a:latin typeface="+mj-lt"/>
-              </a:rPr>
-              <a:t> </a:t>
-            </a:r>
-            <a:r>
-              <a:rPr lang="en-US" sz="1600" dirty="0" err="1">
-                <a:latin typeface="+mj-lt"/>
-              </a:rPr>
-              <a:t>könnt</a:t>
-            </a:r>
-            <a:endParaRPr lang="de-DE" sz="1600" dirty="0" err="1">
-              <a:latin typeface="+mj-lt"/>
-            </a:endParaRPr>
-          </a:p>
-        </p:txBody>
-      </p:sp>
     </p:spTree>
     <p:extLst>
       <p:ext uri="{BB962C8B-B14F-4D97-AF65-F5344CB8AC3E}">
-        <p14:creationId xmlns:p14="http://schemas.microsoft.com/office/powerpoint/2010/main" val="821384128"/>
+        <p14:creationId xmlns:p14="http://schemas.microsoft.com/office/powerpoint/2010/main" val="1586874804"/>
       </p:ext>
     </p:extLst>
   </p:cSld>
@@ -43666,83 +43810,115 @@
           <a:p>
             <a:r>
               <a:rPr lang="de-DE" dirty="0"/>
-              <a:t>Mit dem Befehl `</a:t>
+              <a:t>automatisierte Ausführung von Programmen oder Skripten zu bestimmten Zeitpunkten</a:t>
+            </a:r>
+          </a:p>
+          <a:p>
+            <a:r>
+              <a:rPr lang="de-DE" dirty="0"/>
+              <a:t>definiert in der Cron Tabelle /</a:t>
             </a:r>
             <a:r>
               <a:rPr lang="de-DE" dirty="0" err="1"/>
-              <a:t>getcap</a:t>
-            </a:r>
-            <a:r>
-              <a:rPr lang="de-DE" dirty="0"/>
-              <a:t>` lassen sich </a:t>
+              <a:t>etc</a:t>
+            </a:r>
+            <a:r>
+              <a:rPr lang="de-DE" dirty="0"/>
+              <a:t>/</a:t>
             </a:r>
             <a:r>
               <a:rPr lang="de-DE" dirty="0" err="1"/>
-              <a:t>Executables</a:t>
-            </a:r>
-            <a:r>
-              <a:rPr lang="de-DE" dirty="0"/>
-              <a:t> mit erweiterten </a:t>
+              <a:t>crontab</a:t>
+            </a:r>
+            <a:endParaRPr lang="de-DE" dirty="0"/>
+          </a:p>
+          <a:p>
+            <a:pPr lvl="2"/>
+            <a:r>
+              <a:rPr lang="de-DE" dirty="0"/>
+              <a:t>beinhaltet die </a:t>
             </a:r>
             <a:r>
               <a:rPr lang="de-DE" dirty="0" err="1"/>
-              <a:t>Capabilities</a:t>
-            </a:r>
-            <a:r>
-              <a:rPr lang="de-DE" dirty="0"/>
-              <a:t> aufspüren. (Um die Ausgabe kompakt zu halten werfen wir die Fehlerausgaben weg `2&gt;/</a:t>
+              <a:t>shell</a:t>
+            </a:r>
+            <a:r>
+              <a:rPr lang="de-DE" dirty="0"/>
+              <a:t>, die Cron verwenden soll</a:t>
+            </a:r>
+          </a:p>
+          <a:p>
+            <a:pPr lvl="2"/>
+            <a:r>
+              <a:rPr lang="de-DE" dirty="0"/>
+              <a:t>eine Pfad-Variable</a:t>
+            </a:r>
+          </a:p>
+          <a:p>
+            <a:pPr lvl="2"/>
+            <a:r>
+              <a:rPr lang="de-DE" dirty="0"/>
+              <a:t>eine Menge an Jobs mit Ausführungszeitpunkt, User und Befehl</a:t>
+            </a:r>
+          </a:p>
+          <a:p>
+            <a:r>
+              <a:rPr lang="de-DE" dirty="0"/>
+              <a:t>Cron führt das Kommando mit dem definierten User aus</a:t>
+            </a:r>
+          </a:p>
+          <a:p>
+            <a:endParaRPr lang="de-DE" dirty="0"/>
+          </a:p>
+          <a:p>
+            <a:r>
+              <a:rPr lang="de-DE" dirty="0"/>
+              <a:t>Aufgaben:</a:t>
+            </a:r>
+          </a:p>
+          <a:p>
+            <a:pPr lvl="2"/>
+            <a:r>
+              <a:rPr lang="de-DE" dirty="0"/>
+              <a:t>Pfad-Variable</a:t>
+            </a:r>
+          </a:p>
+          <a:p>
+            <a:pPr lvl="2"/>
+            <a:r>
+              <a:rPr lang="de-DE" dirty="0"/>
+              <a:t>Schwache Berechtigungen</a:t>
+            </a:r>
+          </a:p>
+          <a:p>
+            <a:pPr lvl="2"/>
+            <a:r>
+              <a:rPr lang="de-DE" dirty="0"/>
+              <a:t>Wildcard </a:t>
             </a:r>
             <a:r>
               <a:rPr lang="de-DE" dirty="0" err="1"/>
-              <a:t>dev</a:t>
-            </a:r>
-            <a:r>
-              <a:rPr lang="de-DE" dirty="0"/>
-              <a:t>/null`)</a:t>
-            </a:r>
-          </a:p>
-          <a:p>
-            <a:r>
-              <a:rPr lang="de-DE" dirty="0"/>
-              <a:t>`</a:t>
-            </a:r>
-            <a:r>
-              <a:rPr lang="de-DE" dirty="0" err="1"/>
-              <a:t>getcap</a:t>
-            </a:r>
-            <a:r>
-              <a:rPr lang="de-DE" dirty="0"/>
-              <a:t> -r / 2&gt;/</a:t>
-            </a:r>
-            <a:r>
-              <a:rPr lang="de-DE" dirty="0" err="1"/>
-              <a:t>dev</a:t>
-            </a:r>
-            <a:r>
-              <a:rPr lang="de-DE" dirty="0"/>
-              <a:t>/null`</a:t>
-            </a:r>
-          </a:p>
-          <a:p>
+              <a:t>Unjection</a:t>
+            </a:r>
             <a:endParaRPr lang="de-DE" dirty="0"/>
           </a:p>
           <a:p>
             <a:endParaRPr lang="de-DE" dirty="0"/>
           </a:p>
           <a:p>
+            <a:pPr lvl="2"/>
             <a:endParaRPr lang="de-DE" dirty="0"/>
           </a:p>
           <a:p>
+            <a:pPr lvl="2"/>
             <a:endParaRPr lang="de-DE" dirty="0"/>
           </a:p>
           <a:p>
+            <a:pPr lvl="2"/>
             <a:endParaRPr lang="de-DE" dirty="0"/>
           </a:p>
           <a:p>
-            <a:r>
-              <a:rPr lang="de-DE" dirty="0"/>
-              <a:t>Aufgabe: Ihr kennt das Spiel ;)</a:t>
-            </a:r>
+            <a:endParaRPr lang="de-DE" dirty="0"/>
           </a:p>
         </p:txBody>
       </p:sp>
@@ -43769,7 +43945,7 @@
           <a:p>
             <a:fld id="{5DC9953B-096E-4D14-9CB5-13648C592BB5}" type="datetime1">
               <a:rPr lang="de-DE" smtClean="0"/>
-              <a:t>23.11.2022</a:t>
+              <a:t>24.11.22</a:t>
             </a:fld>
             <a:endParaRPr lang="de-DE" dirty="0"/>
           </a:p>
@@ -43888,131 +44064,21 @@
           <a:lstStyle/>
           <a:p>
             <a:r>
+              <a:rPr lang="de-DE" dirty="0"/>
+              <a:t>Cron </a:t>
+            </a:r>
+            <a:r>
               <a:rPr lang="de-DE" dirty="0" err="1"/>
-              <a:t>Capabilities</a:t>
+              <a:t>jobs</a:t>
             </a:r>
             <a:endParaRPr lang="de-DE" dirty="0"/>
-          </a:p>
-        </p:txBody>
-      </p:sp>
-      <p:sp>
-        <p:nvSpPr>
-          <p:cNvPr id="8" name="Textfeld 7">
-            <a:extLst>
-              <a:ext uri="{FF2B5EF4-FFF2-40B4-BE49-F238E27FC236}">
-                <a16:creationId xmlns:a16="http://schemas.microsoft.com/office/drawing/2014/main" id="{A16AA867-A1B0-22EF-7A33-C2745778FD17}"/>
-              </a:ext>
-            </a:extLst>
-          </p:cNvPr>
-          <p:cNvSpPr txBox="1"/>
-          <p:nvPr/>
-        </p:nvSpPr>
-        <p:spPr>
-          <a:xfrm>
-            <a:off x="611039" y="662834"/>
-            <a:ext cx="2880320" cy="2513509"/>
-          </a:xfrm>
-          <a:prstGeom prst="rect">
-            <a:avLst/>
-          </a:prstGeom>
-          <a:noFill/>
-        </p:spPr>
-        <p:txBody>
-          <a:bodyPr wrap="square" lIns="0" tIns="0" rIns="0" bIns="0" rtlCol="0">
-            <a:spAutoFit/>
-          </a:bodyPr>
-          <a:lstStyle/>
-          <a:p>
-            <a:pPr algn="l">
-              <a:spcBef>
-                <a:spcPts val="60"/>
-              </a:spcBef>
-              <a:buSzPct val="100000"/>
-            </a:pPr>
-            <a:r>
-              <a:rPr lang="de-DE" sz="1600" dirty="0" err="1">
-                <a:solidFill>
-                  <a:srgbClr val="00B050"/>
-                </a:solidFill>
-                <a:latin typeface="Lucida Sans Typewriter" panose="020B0509030504030204" pitchFamily="49" charset="0"/>
-              </a:rPr>
-              <a:t>Capabilities</a:t>
-            </a:r>
-            <a:r>
-              <a:rPr lang="de-DE" sz="1600" dirty="0">
-                <a:solidFill>
-                  <a:srgbClr val="00B050"/>
-                </a:solidFill>
-                <a:latin typeface="Lucida Sans Typewriter" panose="020B0509030504030204" pitchFamily="49" charset="0"/>
-              </a:rPr>
-              <a:t> sind eine Möglichkeit Rechte feingranularer zu vergeben.</a:t>
-            </a:r>
-          </a:p>
-          <a:p>
-            <a:pPr algn="l">
-              <a:spcBef>
-                <a:spcPts val="60"/>
-              </a:spcBef>
-              <a:buSzPct val="100000"/>
-            </a:pPr>
-            <a:endParaRPr lang="de-DE" sz="1600" dirty="0">
-              <a:solidFill>
-                <a:srgbClr val="00B050"/>
-              </a:solidFill>
-              <a:latin typeface="Lucida Sans Typewriter" panose="020B0509030504030204" pitchFamily="49" charset="0"/>
-            </a:endParaRPr>
-          </a:p>
-          <a:p>
-            <a:pPr algn="l">
-              <a:spcBef>
-                <a:spcPts val="60"/>
-              </a:spcBef>
-              <a:buSzPct val="100000"/>
-            </a:pPr>
-            <a:r>
-              <a:rPr lang="de-DE" sz="1600" dirty="0">
-                <a:solidFill>
-                  <a:srgbClr val="00B050"/>
-                </a:solidFill>
-                <a:latin typeface="Lucida Sans Typewriter" panose="020B0509030504030204" pitchFamily="49" charset="0"/>
-              </a:rPr>
-              <a:t>Damit können einem Tool einzelne Berechtigungen zugewiesen werden.</a:t>
-            </a:r>
-          </a:p>
-          <a:p>
-            <a:pPr algn="l">
-              <a:spcBef>
-                <a:spcPts val="60"/>
-              </a:spcBef>
-              <a:buSzPct val="100000"/>
-            </a:pPr>
-            <a:endParaRPr lang="de-DE" sz="1600" dirty="0">
-              <a:solidFill>
-                <a:srgbClr val="00B050"/>
-              </a:solidFill>
-              <a:latin typeface="Lucida Sans Typewriter" panose="020B0509030504030204" pitchFamily="49" charset="0"/>
-            </a:endParaRPr>
-          </a:p>
-          <a:p>
-            <a:pPr algn="l">
-              <a:spcBef>
-                <a:spcPts val="60"/>
-              </a:spcBef>
-              <a:buSzPct val="100000"/>
-            </a:pPr>
-            <a:endParaRPr lang="de-DE" sz="1600" dirty="0">
-              <a:solidFill>
-                <a:srgbClr val="00B050"/>
-              </a:solidFill>
-              <a:latin typeface="Lucida Sans Typewriter" panose="020B0509030504030204" pitchFamily="49" charset="0"/>
-            </a:endParaRPr>
           </a:p>
         </p:txBody>
       </p:sp>
     </p:spTree>
     <p:extLst>
       <p:ext uri="{BB962C8B-B14F-4D97-AF65-F5344CB8AC3E}">
-        <p14:creationId xmlns:p14="http://schemas.microsoft.com/office/powerpoint/2010/main" val="1586874804"/>
+        <p14:creationId xmlns:p14="http://schemas.microsoft.com/office/powerpoint/2010/main" val="3145884605"/>
       </p:ext>
     </p:extLst>
   </p:cSld>
@@ -44031,7 +44097,7 @@
 </file>
 
 <file path=ppt/slides/slide17.xml><?xml version="1.0" encoding="utf-8"?>
-<p:sld xmlns:a="http://schemas.openxmlformats.org/drawingml/2006/main" xmlns:r="http://schemas.openxmlformats.org/officeDocument/2006/relationships" xmlns:p="http://schemas.openxmlformats.org/presentationml/2006/main" show="0">
+<p:sld xmlns:a="http://schemas.openxmlformats.org/drawingml/2006/main" xmlns:r="http://schemas.openxmlformats.org/officeDocument/2006/relationships" xmlns:p="http://schemas.openxmlformats.org/presentationml/2006/main">
   <p:cSld>
     <p:spTree>
       <p:nvGrpSpPr>
@@ -44069,125 +44135,107 @@
           <a:lstStyle/>
           <a:p>
             <a:r>
-              <a:rPr lang="de-DE" dirty="0"/>
-              <a:t>Mit dem Befehl </a:t>
-            </a:r>
-            <a:r>
-              <a:rPr lang="de-DE" dirty="0" err="1"/>
-              <a:t>getcap</a:t>
-            </a:r>
-            <a:r>
-              <a:rPr lang="de-DE" dirty="0"/>
-              <a:t> finden wir eine Kopie von </a:t>
-            </a:r>
-            <a:r>
-              <a:rPr lang="de-DE" dirty="0" err="1"/>
-              <a:t>vim</a:t>
-            </a:r>
-            <a:r>
-              <a:rPr lang="de-DE" dirty="0"/>
-              <a:t> mit erweiterten Rechten</a:t>
-            </a:r>
-          </a:p>
-          <a:p>
-            <a:r>
-              <a:rPr lang="de-DE" dirty="0"/>
-              <a:t>Bei einer Suche in </a:t>
-            </a:r>
-            <a:r>
-              <a:rPr lang="de-DE" dirty="0" err="1">
-                <a:hlinkClick r:id="rId2"/>
+              <a:rPr lang="en-GB" b="1" dirty="0" err="1"/>
+              <a:t>Lesen</a:t>
+            </a:r>
+            <a:endParaRPr lang="en-GB" b="1" dirty="0"/>
+          </a:p>
+          <a:p>
+            <a:pPr lvl="2"/>
+            <a:r>
+              <a:rPr lang="en-GB" dirty="0">
+                <a:hlinkClick r:id="rId3"/>
               </a:rPr>
-              <a:t>gtfobins</a:t>
-            </a:r>
-            <a:r>
-              <a:rPr lang="de-DE" dirty="0"/>
-              <a:t> finden wir wieder einen Angriffsvektor</a:t>
-            </a:r>
-          </a:p>
-          <a:p>
-            <a:r>
-              <a:rPr lang="de-DE" dirty="0"/>
-              <a:t>`./</a:t>
-            </a:r>
-            <a:r>
-              <a:rPr lang="de-DE" dirty="0" err="1"/>
-              <a:t>vim</a:t>
-            </a:r>
-            <a:r>
-              <a:rPr lang="de-DE" dirty="0"/>
-              <a:t> -c ':py3 </a:t>
-            </a:r>
-            <a:r>
-              <a:rPr lang="de-DE" dirty="0" err="1"/>
-              <a:t>import</a:t>
-            </a:r>
-            <a:r>
-              <a:rPr lang="de-DE" dirty="0"/>
-              <a:t> </a:t>
-            </a:r>
-            <a:r>
-              <a:rPr lang="de-DE" dirty="0" err="1"/>
-              <a:t>os</a:t>
-            </a:r>
-            <a:r>
-              <a:rPr lang="de-DE" dirty="0"/>
-              <a:t>; </a:t>
-            </a:r>
-            <a:r>
-              <a:rPr lang="de-DE" dirty="0" err="1"/>
-              <a:t>os.setuid</a:t>
-            </a:r>
-            <a:r>
-              <a:rPr lang="de-DE" dirty="0"/>
-              <a:t>(0); </a:t>
-            </a:r>
-            <a:r>
-              <a:rPr lang="de-DE" dirty="0" err="1"/>
-              <a:t>os.execl</a:t>
-            </a:r>
-            <a:r>
-              <a:rPr lang="de-DE" dirty="0"/>
-              <a:t>("/bin/sh", "sh", "-c", "</a:t>
-            </a:r>
-            <a:r>
-              <a:rPr lang="de-DE" dirty="0" err="1"/>
-              <a:t>reset</a:t>
-            </a:r>
-            <a:r>
-              <a:rPr lang="de-DE" dirty="0"/>
-              <a:t>; </a:t>
-            </a:r>
-            <a:r>
-              <a:rPr lang="de-DE" dirty="0" err="1"/>
-              <a:t>exec</a:t>
-            </a:r>
-            <a:r>
-              <a:rPr lang="de-DE" dirty="0"/>
-              <a:t> sh")'`</a:t>
-            </a:r>
-          </a:p>
-          <a:p>
-            <a:r>
-              <a:rPr lang="de-DE" dirty="0"/>
-              <a:t>Damit setzt </a:t>
-            </a:r>
-            <a:r>
-              <a:rPr lang="de-DE" dirty="0" err="1"/>
-              <a:t>vim</a:t>
-            </a:r>
-            <a:r>
-              <a:rPr lang="de-DE" dirty="0"/>
-              <a:t> für sich selbst die </a:t>
-            </a:r>
-            <a:r>
-              <a:rPr lang="de-DE" dirty="0" err="1"/>
-              <a:t>uid</a:t>
-            </a:r>
-            <a:r>
-              <a:rPr lang="de-DE" dirty="0"/>
-              <a:t> auf 0 und startet mit diesen Rechten eine Shell.</a:t>
-            </a:r>
+              <a:t>https://book.hacktricks.xyz/linux-hardening/privilege-escalation</a:t>
+            </a:r>
+            <a:endParaRPr lang="en-GB" dirty="0"/>
+          </a:p>
+          <a:p>
+            <a:pPr lvl="2"/>
+            <a:r>
+              <a:rPr lang="en-GB" dirty="0">
+                <a:hlinkClick r:id="rId4"/>
+              </a:rPr>
+              <a:t>https://enotes.nickapic.com/Linux-Priv-Esc-285bbed8681645c38c32a6952f4e52af</a:t>
+            </a:r>
+            <a:endParaRPr lang="en-GB" dirty="0"/>
+          </a:p>
+          <a:p>
+            <a:pPr lvl="2"/>
+            <a:r>
+              <a:rPr lang="en-GB" dirty="0">
+                <a:hlinkClick r:id="rId5"/>
+              </a:rPr>
+              <a:t>https://github.com/Aksheet10/Cyber-security-resources#linux</a:t>
+            </a:r>
+            <a:endParaRPr lang="en-GB" dirty="0"/>
+          </a:p>
+          <a:p>
+            <a:pPr marL="216000" lvl="2" indent="0">
+              <a:buNone/>
+            </a:pPr>
+            <a:endParaRPr lang="en-GB" dirty="0"/>
+          </a:p>
+          <a:p>
+            <a:r>
+              <a:rPr lang="en-GB" b="1" dirty="0" err="1"/>
+              <a:t>Lernen</a:t>
+            </a:r>
+            <a:r>
+              <a:rPr lang="en-GB" b="1" dirty="0"/>
+              <a:t> und CTFs</a:t>
+            </a:r>
+          </a:p>
+          <a:p>
+            <a:pPr lvl="2"/>
+            <a:r>
+              <a:rPr lang="en-GB" dirty="0">
+                <a:hlinkClick r:id="rId6"/>
+              </a:rPr>
+              <a:t>https://tryhackme.com</a:t>
+            </a:r>
+            <a:endParaRPr lang="en-GB" dirty="0"/>
+          </a:p>
+          <a:p>
+            <a:pPr lvl="2"/>
+            <a:r>
+              <a:rPr lang="en-GB" dirty="0">
+                <a:hlinkClick r:id="rId7"/>
+              </a:rPr>
+              <a:t>https://app.hackthebox.com</a:t>
+            </a:r>
+            <a:endParaRPr lang="en-GB" dirty="0"/>
+          </a:p>
+          <a:p>
+            <a:pPr lvl="2"/>
+            <a:r>
+              <a:rPr lang="en-GB" dirty="0">
+                <a:hlinkClick r:id="rId8"/>
+              </a:rPr>
+              <a:t>https://academy.hackthebox.com</a:t>
+            </a:r>
+            <a:endParaRPr lang="en-GB" dirty="0"/>
+          </a:p>
+          <a:p>
+            <a:pPr lvl="2"/>
+            <a:r>
+              <a:rPr lang="en-GB" dirty="0">
+                <a:hlinkClick r:id="rId9"/>
+              </a:rPr>
+              <a:t>https://razvioverflow.github.io/starthacking</a:t>
+            </a:r>
+            <a:endParaRPr lang="de-DE" dirty="0"/>
+          </a:p>
+          <a:p>
+            <a:pPr lvl="2"/>
+            <a:endParaRPr lang="de-DE" dirty="0"/>
+          </a:p>
+          <a:p>
+            <a:pPr lvl="2"/>
+            <a:endParaRPr lang="de-DE" dirty="0"/>
+          </a:p>
+          <a:p>
+            <a:endParaRPr lang="de-DE" dirty="0"/>
           </a:p>
         </p:txBody>
       </p:sp>
@@ -44214,7 +44262,7 @@
           <a:p>
             <a:fld id="{5DC9953B-096E-4D14-9CB5-13648C592BB5}" type="datetime1">
               <a:rPr lang="de-DE" smtClean="0"/>
-              <a:t>23.11.2022</a:t>
+              <a:t>24.11.22</a:t>
             </a:fld>
             <a:endParaRPr lang="de-DE" dirty="0"/>
           </a:p>
@@ -44307,7 +44355,10 @@
           <a:bodyPr/>
           <a:lstStyle/>
           <a:p>
-            <a:endParaRPr lang="de-DE"/>
+            <a:r>
+              <a:rPr lang="de-DE" dirty="0"/>
+              <a:t>Wo kann ich weiter machen?</a:t>
+            </a:r>
           </a:p>
         </p:txBody>
       </p:sp>
@@ -44333,145 +44384,57 @@
           <a:lstStyle/>
           <a:p>
             <a:r>
-              <a:rPr lang="de-DE" dirty="0" err="1"/>
-              <a:t>Capabilities</a:t>
-            </a:r>
-            <a:r>
-              <a:rPr lang="de-DE" dirty="0"/>
-              <a:t> (Lösung)</a:t>
-            </a:r>
-          </a:p>
-        </p:txBody>
-      </p:sp>
-      <p:sp>
-        <p:nvSpPr>
-          <p:cNvPr id="8" name="Textfeld 7">
-            <a:extLst>
-              <a:ext uri="{FF2B5EF4-FFF2-40B4-BE49-F238E27FC236}">
-                <a16:creationId xmlns:a16="http://schemas.microsoft.com/office/drawing/2014/main" id="{A16AA867-A1B0-22EF-7A33-C2745778FD17}"/>
-              </a:ext>
-            </a:extLst>
-          </p:cNvPr>
-          <p:cNvSpPr txBox="1"/>
+              <a:rPr lang="de-DE" dirty="0"/>
+              <a:t>Ressourcen</a:t>
+            </a:r>
+          </a:p>
+        </p:txBody>
+      </p:sp>
+      <p:pic>
+        <p:nvPicPr>
+          <p:cNvPr id="9" name="Picture 8">
+            <a:extLst>
+              <a:ext uri="{FF2B5EF4-FFF2-40B4-BE49-F238E27FC236}">
+                <a16:creationId xmlns:a16="http://schemas.microsoft.com/office/drawing/2014/main" id="{5C970720-7D3A-EFE3-1918-ADFDCA147D25}"/>
+              </a:ext>
+            </a:extLst>
+          </p:cNvPr>
+          <p:cNvPicPr>
+            <a:picLocks noChangeAspect="1"/>
+          </p:cNvPicPr>
           <p:nvPr/>
-        </p:nvSpPr>
+        </p:nvPicPr>
+        <p:blipFill>
+          <a:blip r:embed="rId10"/>
+          <a:stretch>
+            <a:fillRect/>
+          </a:stretch>
+        </p:blipFill>
         <p:spPr>
           <a:xfrm>
-            <a:off x="611039" y="662834"/>
-            <a:ext cx="2880320" cy="2513509"/>
+            <a:off x="539031" y="1727944"/>
+            <a:ext cx="2783670" cy="2879824"/>
           </a:xfrm>
           <a:prstGeom prst="rect">
             <a:avLst/>
           </a:prstGeom>
-          <a:noFill/>
         </p:spPr>
-        <p:txBody>
-          <a:bodyPr wrap="square" lIns="0" tIns="0" rIns="0" bIns="0" rtlCol="0">
-            <a:spAutoFit/>
-          </a:bodyPr>
-          <a:lstStyle/>
-          <a:p>
-            <a:pPr algn="l">
-              <a:spcBef>
-                <a:spcPts val="60"/>
-              </a:spcBef>
-              <a:buSzPct val="100000"/>
-            </a:pPr>
-            <a:r>
-              <a:rPr lang="de-DE" sz="1600" dirty="0" err="1">
-                <a:solidFill>
-                  <a:srgbClr val="00B050"/>
-                </a:solidFill>
-                <a:latin typeface="Lucida Sans Typewriter" panose="020B0509030504030204" pitchFamily="49" charset="0"/>
-              </a:rPr>
-              <a:t>Capabilities</a:t>
-            </a:r>
-            <a:r>
-              <a:rPr lang="de-DE" sz="1600" dirty="0">
-                <a:solidFill>
-                  <a:srgbClr val="00B050"/>
-                </a:solidFill>
-                <a:latin typeface="Lucida Sans Typewriter" panose="020B0509030504030204" pitchFamily="49" charset="0"/>
-              </a:rPr>
-              <a:t> sind eine Möglichkeit Rechte feingranularer zu vergeben.</a:t>
-            </a:r>
-          </a:p>
-          <a:p>
-            <a:pPr algn="l">
-              <a:spcBef>
-                <a:spcPts val="60"/>
-              </a:spcBef>
-              <a:buSzPct val="100000"/>
-            </a:pPr>
-            <a:endParaRPr lang="de-DE" sz="1600" dirty="0">
-              <a:solidFill>
-                <a:srgbClr val="00B050"/>
-              </a:solidFill>
-              <a:latin typeface="Lucida Sans Typewriter" panose="020B0509030504030204" pitchFamily="49" charset="0"/>
-            </a:endParaRPr>
-          </a:p>
-          <a:p>
-            <a:pPr algn="l">
-              <a:spcBef>
-                <a:spcPts val="60"/>
-              </a:spcBef>
-              <a:buSzPct val="100000"/>
-            </a:pPr>
-            <a:r>
-              <a:rPr lang="de-DE" sz="1600" dirty="0">
-                <a:solidFill>
-                  <a:srgbClr val="00B050"/>
-                </a:solidFill>
-                <a:latin typeface="Lucida Sans Typewriter" panose="020B0509030504030204" pitchFamily="49" charset="0"/>
-              </a:rPr>
-              <a:t>Damit können einem Tool einzelne Berechtigungen zugewiesen werden.</a:t>
-            </a:r>
-          </a:p>
-          <a:p>
-            <a:pPr algn="l">
-              <a:spcBef>
-                <a:spcPts val="60"/>
-              </a:spcBef>
-              <a:buSzPct val="100000"/>
-            </a:pPr>
-            <a:endParaRPr lang="de-DE" sz="1600" dirty="0">
-              <a:solidFill>
-                <a:srgbClr val="00B050"/>
-              </a:solidFill>
-              <a:latin typeface="Lucida Sans Typewriter" panose="020B0509030504030204" pitchFamily="49" charset="0"/>
-            </a:endParaRPr>
-          </a:p>
-          <a:p>
-            <a:pPr algn="l">
-              <a:spcBef>
-                <a:spcPts val="60"/>
-              </a:spcBef>
-              <a:buSzPct val="100000"/>
-            </a:pPr>
-            <a:endParaRPr lang="de-DE" sz="1600" dirty="0">
-              <a:solidFill>
-                <a:srgbClr val="00B050"/>
-              </a:solidFill>
-              <a:latin typeface="Lucida Sans Typewriter" panose="020B0509030504030204" pitchFamily="49" charset="0"/>
-            </a:endParaRPr>
-          </a:p>
-        </p:txBody>
-      </p:sp>
+      </p:pic>
     </p:spTree>
     <p:extLst>
       <p:ext uri="{BB962C8B-B14F-4D97-AF65-F5344CB8AC3E}">
-        <p14:creationId xmlns:p14="http://schemas.microsoft.com/office/powerpoint/2010/main" val="2858675908"/>
+        <p14:creationId xmlns:p14="http://schemas.microsoft.com/office/powerpoint/2010/main" val="3770165258"/>
       </p:ext>
     </p:extLst>
   </p:cSld>
   <p:clrMapOvr>
     <a:masterClrMapping/>
   </p:clrMapOvr>
-  <mc:AlternateContent xmlns:mc="http://schemas.openxmlformats.org/markup-compatibility/2006" xmlns:p14="http://schemas.microsoft.com/office/powerpoint/2010/main">
-    <mc:Choice Requires="p14">
+  <mc:AlternateContent xmlns:mc="http://schemas.openxmlformats.org/markup-compatibility/2006">
+    <mc:Choice xmlns:p14="http://schemas.microsoft.com/office/powerpoint/2010/main" Requires="p14">
       <p:transition p14:dur="10"/>
     </mc:Choice>
-    <mc:Fallback xmlns="">
+    <mc:Fallback>
       <p:transition/>
     </mc:Fallback>
   </mc:AlternateContent>
@@ -44497,163 +44460,10 @@
       </p:grpSpPr>
       <p:sp>
         <p:nvSpPr>
-          <p:cNvPr id="2" name="Inhaltsplatzhalter 1">
-            <a:extLst>
-              <a:ext uri="{FF2B5EF4-FFF2-40B4-BE49-F238E27FC236}">
-                <a16:creationId xmlns:a16="http://schemas.microsoft.com/office/drawing/2014/main" id="{DE1EE909-DD3A-58D2-3F07-57F08C0C8F5A}"/>
-              </a:ext>
-            </a:extLst>
-          </p:cNvPr>
-          <p:cNvSpPr>
-            <a:spLocks noGrp="1"/>
-          </p:cNvSpPr>
-          <p:nvPr>
-            <p:ph sz="quarter" idx="17"/>
-          </p:nvPr>
-        </p:nvSpPr>
-        <p:spPr/>
-        <p:txBody>
-          <a:bodyPr/>
-          <a:lstStyle/>
-          <a:p>
-            <a:r>
-              <a:rPr lang="de-DE" dirty="0"/>
-              <a:t>Cron Jobs erlauben es, Programme oder Skripte zu bestimmten Zeiten automatisiert ausführen </a:t>
-            </a:r>
-            <a:r>
-              <a:rPr lang="de-DE"/>
-              <a:t>zu lassen</a:t>
-            </a:r>
-            <a:endParaRPr lang="de-DE" dirty="0"/>
-          </a:p>
-        </p:txBody>
-      </p:sp>
-      <p:sp>
-        <p:nvSpPr>
-          <p:cNvPr id="3" name="Datumsplatzhalter 2">
-            <a:extLst>
-              <a:ext uri="{FF2B5EF4-FFF2-40B4-BE49-F238E27FC236}">
-                <a16:creationId xmlns:a16="http://schemas.microsoft.com/office/drawing/2014/main" id="{7CD361C0-F2D6-1522-E197-5519BB3FA076}"/>
-              </a:ext>
-            </a:extLst>
-          </p:cNvPr>
-          <p:cNvSpPr>
-            <a:spLocks noGrp="1"/>
-          </p:cNvSpPr>
-          <p:nvPr>
-            <p:ph type="dt" sz="half" idx="20"/>
-          </p:nvPr>
-        </p:nvSpPr>
-        <p:spPr/>
-        <p:txBody>
-          <a:bodyPr/>
-          <a:lstStyle/>
-          <a:p>
-            <a:fld id="{5DC9953B-096E-4D14-9CB5-13648C592BB5}" type="datetime1">
-              <a:rPr lang="de-DE" smtClean="0"/>
-              <a:t>23.11.2022</a:t>
-            </a:fld>
-            <a:endParaRPr lang="de-DE" dirty="0"/>
-          </a:p>
-        </p:txBody>
-      </p:sp>
-      <p:sp>
-        <p:nvSpPr>
-          <p:cNvPr id="4" name="Fußzeilenplatzhalter 3">
-            <a:extLst>
-              <a:ext uri="{FF2B5EF4-FFF2-40B4-BE49-F238E27FC236}">
-                <a16:creationId xmlns:a16="http://schemas.microsoft.com/office/drawing/2014/main" id="{28E78925-D828-270B-0CBA-A8DB423B730F}"/>
-              </a:ext>
-            </a:extLst>
-          </p:cNvPr>
-          <p:cNvSpPr>
-            <a:spLocks noGrp="1"/>
-          </p:cNvSpPr>
-          <p:nvPr>
-            <p:ph type="ftr" sz="quarter" idx="21"/>
-          </p:nvPr>
-        </p:nvSpPr>
-        <p:spPr/>
-        <p:txBody>
-          <a:bodyPr/>
-          <a:lstStyle/>
-          <a:p>
-            <a:r>
-              <a:rPr lang="de-DE" dirty="0"/>
-              <a:t>Linux Privilege </a:t>
-            </a:r>
-            <a:r>
-              <a:rPr lang="de-DE" dirty="0" err="1"/>
-              <a:t>Escalation</a:t>
-            </a:r>
-            <a:r>
-              <a:rPr lang="de-DE" dirty="0"/>
-              <a:t> Workshop</a:t>
-            </a:r>
-          </a:p>
-        </p:txBody>
-      </p:sp>
-      <p:sp>
-        <p:nvSpPr>
-          <p:cNvPr id="5" name="Foliennummernplatzhalter 4">
-            <a:extLst>
-              <a:ext uri="{FF2B5EF4-FFF2-40B4-BE49-F238E27FC236}">
-                <a16:creationId xmlns:a16="http://schemas.microsoft.com/office/drawing/2014/main" id="{41BF4A9C-2BB7-1B41-117B-4B1659DA7925}"/>
-              </a:ext>
-            </a:extLst>
-          </p:cNvPr>
-          <p:cNvSpPr>
-            <a:spLocks noGrp="1"/>
-          </p:cNvSpPr>
-          <p:nvPr>
-            <p:ph type="sldNum" sz="quarter" idx="22"/>
-          </p:nvPr>
-        </p:nvSpPr>
-        <p:spPr/>
-        <p:txBody>
-          <a:bodyPr/>
-          <a:lstStyle/>
-          <a:p>
-            <a:fld id="{F86FCC4D-0438-154F-9910-1CF4711F776F}" type="slidenum">
-              <a:rPr lang="de-DE" smtClean="0"/>
-              <a:pPr/>
-              <a:t>18</a:t>
-            </a:fld>
-            <a:endParaRPr lang="de-DE" dirty="0"/>
-          </a:p>
-        </p:txBody>
-      </p:sp>
-      <p:sp>
-        <p:nvSpPr>
-          <p:cNvPr id="6" name="Textplatzhalter 5">
-            <a:extLst>
-              <a:ext uri="{FF2B5EF4-FFF2-40B4-BE49-F238E27FC236}">
-                <a16:creationId xmlns:a16="http://schemas.microsoft.com/office/drawing/2014/main" id="{465BDA60-3023-40C3-0DA1-0A8F397F8611}"/>
-              </a:ext>
-            </a:extLst>
-          </p:cNvPr>
-          <p:cNvSpPr>
-            <a:spLocks noGrp="1"/>
-          </p:cNvSpPr>
-          <p:nvPr>
-            <p:ph type="body" sz="quarter" idx="18"/>
-          </p:nvPr>
-        </p:nvSpPr>
-        <p:spPr/>
-        <p:txBody>
-          <a:bodyPr/>
-          <a:lstStyle/>
-          <a:p>
-            <a:endParaRPr lang="de-DE"/>
-          </a:p>
-        </p:txBody>
-      </p:sp>
-      <p:sp>
-        <p:nvSpPr>
-          <p:cNvPr id="7" name="Titel 6">
-            <a:extLst>
-              <a:ext uri="{FF2B5EF4-FFF2-40B4-BE49-F238E27FC236}">
-                <a16:creationId xmlns:a16="http://schemas.microsoft.com/office/drawing/2014/main" id="{21BBA845-AAE3-35B0-CA00-77E888C12A98}"/>
+          <p:cNvPr id="2" name="Titel 1">
+            <a:extLst>
+              <a:ext uri="{FF2B5EF4-FFF2-40B4-BE49-F238E27FC236}">
+                <a16:creationId xmlns:a16="http://schemas.microsoft.com/office/drawing/2014/main" id="{A942346E-449D-4E65-8BF3-3ABC73C268AA}"/>
               </a:ext>
             </a:extLst>
           </p:cNvPr>
@@ -44670,73 +44480,6 @@
           <a:lstStyle/>
           <a:p>
             <a:r>
-              <a:rPr lang="de-DE" dirty="0" err="1"/>
-              <a:t>Cronjobs</a:t>
-            </a:r>
-            <a:endParaRPr lang="de-DE" dirty="0"/>
-          </a:p>
-        </p:txBody>
-      </p:sp>
-    </p:spTree>
-    <p:extLst>
-      <p:ext uri="{BB962C8B-B14F-4D97-AF65-F5344CB8AC3E}">
-        <p14:creationId xmlns:p14="http://schemas.microsoft.com/office/powerpoint/2010/main" val="3145884605"/>
-      </p:ext>
-    </p:extLst>
-  </p:cSld>
-  <p:clrMapOvr>
-    <a:masterClrMapping/>
-  </p:clrMapOvr>
-  <mc:AlternateContent xmlns:mc="http://schemas.openxmlformats.org/markup-compatibility/2006" xmlns:p14="http://schemas.microsoft.com/office/powerpoint/2010/main">
-    <mc:Choice Requires="p14">
-      <p:transition p14:dur="10"/>
-    </mc:Choice>
-    <mc:Fallback xmlns="">
-      <p:transition/>
-    </mc:Fallback>
-  </mc:AlternateContent>
-</p:sld>
-</file>
-
-<file path=ppt/slides/slide19.xml><?xml version="1.0" encoding="utf-8"?>
-<p:sld xmlns:a="http://schemas.openxmlformats.org/drawingml/2006/main" xmlns:r="http://schemas.openxmlformats.org/officeDocument/2006/relationships" xmlns:p="http://schemas.openxmlformats.org/presentationml/2006/main">
-  <p:cSld>
-    <p:spTree>
-      <p:nvGrpSpPr>
-        <p:cNvPr id="1" name=""/>
-        <p:cNvGrpSpPr/>
-        <p:nvPr/>
-      </p:nvGrpSpPr>
-      <p:grpSpPr>
-        <a:xfrm>
-          <a:off x="0" y="0"/>
-          <a:ext cx="0" cy="0"/>
-          <a:chOff x="0" y="0"/>
-          <a:chExt cx="0" cy="0"/>
-        </a:xfrm>
-      </p:grpSpPr>
-      <p:sp>
-        <p:nvSpPr>
-          <p:cNvPr id="2" name="Titel 1">
-            <a:extLst>
-              <a:ext uri="{FF2B5EF4-FFF2-40B4-BE49-F238E27FC236}">
-                <a16:creationId xmlns:a16="http://schemas.microsoft.com/office/drawing/2014/main" id="{A942346E-449D-4E65-8BF3-3ABC73C268AA}"/>
-              </a:ext>
-            </a:extLst>
-          </p:cNvPr>
-          <p:cNvSpPr>
-            <a:spLocks noGrp="1"/>
-          </p:cNvSpPr>
-          <p:nvPr>
-            <p:ph type="title"/>
-          </p:nvPr>
-        </p:nvSpPr>
-        <p:spPr/>
-        <p:txBody>
-          <a:bodyPr/>
-          <a:lstStyle/>
-          <a:p>
-            <a:r>
               <a:rPr lang="de-DE" dirty="0"/>
               <a:t>Vielen Dank für Eure Aufmerksamkeit!</a:t>
             </a:r>
@@ -44762,7 +44505,7 @@
         <p:spPr>
           <a:xfrm>
             <a:off x="3959411" y="3059788"/>
-            <a:ext cx="6876764" cy="1440000"/>
+            <a:ext cx="7308812" cy="1440000"/>
           </a:xfrm>
         </p:spPr>
         <p:txBody>
@@ -44770,7 +44513,7 @@
           <a:lstStyle/>
           <a:p>
             <a:endParaRPr lang="de-DE" dirty="0">
-              <a:hlinkClick r:id="rId2">
+              <a:hlinkClick r:id="rId3">
                 <a:extLst>
                   <a:ext uri="{A12FA001-AC4F-418D-AE19-62706E023703}">
                     <ahyp:hlinkClr xmlns:ahyp="http://schemas.microsoft.com/office/drawing/2018/hyperlinkcolor" val="tx"/>
@@ -44781,23 +44524,46 @@
           </a:p>
           <a:p>
             <a:r>
-              <a:rPr lang="de-DE" dirty="0">
-                <a:hlinkClick r:id="rId2">
-                  <a:extLst>
-                    <a:ext uri="{A12FA001-AC4F-418D-AE19-62706E023703}">
-                      <ahyp:hlinkClr xmlns:ahyp="http://schemas.microsoft.com/office/drawing/2018/hyperlinkcolor" val="tx"/>
-                    </a:ext>
-                  </a:extLst>
-                </a:hlinkClick>
-              </a:rPr>
+              <a:rPr lang="de-DE" dirty="0"/>
               <a:t>https://wiki.iteratec.io/x/iQUVDw</a:t>
             </a:r>
-            <a:endParaRPr lang="de-DE" dirty="0"/>
-          </a:p>
-          <a:p>
-            <a:r>
-              <a:rPr lang="de-DE" dirty="0"/>
-              <a:t>https://iteragit.iteratec.de/jme/linux-privilege-escalation-workshop</a:t>
+          </a:p>
+          <a:p>
+            <a:r>
+              <a:rPr lang="de-DE" dirty="0"/>
+              <a:t>https://</a:t>
+            </a:r>
+            <a:r>
+              <a:rPr lang="de-DE" dirty="0" err="1"/>
+              <a:t>iteragit.iteratec.de</a:t>
+            </a:r>
+            <a:r>
+              <a:rPr lang="de-DE" dirty="0"/>
+              <a:t>/</a:t>
+            </a:r>
+            <a:r>
+              <a:rPr lang="de-DE" dirty="0" err="1"/>
+              <a:t>posswald</a:t>
+            </a:r>
+            <a:r>
+              <a:rPr lang="de-DE" dirty="0"/>
+              <a:t>/</a:t>
+            </a:r>
+            <a:r>
+              <a:rPr lang="de-DE" dirty="0" err="1"/>
+              <a:t>linux</a:t>
+            </a:r>
+            <a:r>
+              <a:rPr lang="de-DE" dirty="0"/>
+              <a:t>-privilege-</a:t>
+            </a:r>
+            <a:r>
+              <a:rPr lang="de-DE" dirty="0" err="1"/>
+              <a:t>escalation</a:t>
+            </a:r>
+            <a:r>
+              <a:rPr lang="de-DE" dirty="0"/>
+              <a:t>-workshop</a:t>
             </a:r>
           </a:p>
         </p:txBody>
@@ -44869,7 +44635,7 @@
           <a:p>
             <a:r>
               <a:rPr lang="de-DE" dirty="0"/>
-              <a:t>Docker Setup</a:t>
+              <a:t>Setup</a:t>
             </a:r>
           </a:p>
           <a:p>
@@ -44954,7 +44720,7 @@
             <a:fld id="{A08A1C78-06F3-42EE-A611-DC03295AE284}" type="datetime1">
               <a:rPr lang="de-DE" smtClean="0"/>
               <a:pPr/>
-              <a:t>23.11.2022</a:t>
+              <a:t>24.11.22</a:t>
             </a:fld>
             <a:endParaRPr lang="de-DE" dirty="0"/>
           </a:p>
@@ -45437,7 +45203,7 @@
           <a:p>
             <a:fld id="{5DC9953B-096E-4D14-9CB5-13648C592BB5}" type="datetime1">
               <a:rPr lang="de-DE" smtClean="0"/>
-              <a:t>23.11.2022</a:t>
+              <a:t>24.11.22</a:t>
             </a:fld>
             <a:endParaRPr lang="de-DE" dirty="0"/>
           </a:p>
@@ -45653,7 +45419,7 @@
           <a:p>
             <a:fld id="{69545B60-613F-44AB-9BBA-A7C4A96C2337}" type="datetime1">
               <a:rPr lang="de-DE" smtClean="0"/>
-              <a:t>23.11.2022</a:t>
+              <a:t>24.11.22</a:t>
             </a:fld>
             <a:endParaRPr lang="de-DE" dirty="0"/>
           </a:p>
@@ -46449,7 +46215,7 @@
             <a:fld id="{A08A1C78-06F3-42EE-A611-DC03295AE284}" type="datetime1">
               <a:rPr lang="de-DE" smtClean="0"/>
               <a:pPr/>
-              <a:t>23.11.2022</a:t>
+              <a:t>24.11.22</a:t>
             </a:fld>
             <a:endParaRPr lang="de-DE" dirty="0"/>
           </a:p>
@@ -47137,7 +46903,7 @@
             <a:fld id="{A08A1C78-06F3-42EE-A611-DC03295AE284}" type="datetime1">
               <a:rPr lang="de-DE" smtClean="0"/>
               <a:pPr/>
-              <a:t>23.11.2022</a:t>
+              <a:t>24.11.22</a:t>
             </a:fld>
             <a:endParaRPr lang="de-DE" dirty="0"/>
           </a:p>
@@ -47864,7 +47630,7 @@
           <a:p>
             <a:fld id="{5DC9953B-096E-4D14-9CB5-13648C592BB5}" type="datetime1">
               <a:rPr lang="de-DE" smtClean="0"/>
-              <a:t>23.11.2022</a:t>
+              <a:t>24.11.22</a:t>
             </a:fld>
             <a:endParaRPr lang="de-DE" dirty="0"/>
           </a:p>
@@ -48845,15 +48611,6 @@
 </file>
 
 <file path=customXml/item1.xml><?xml version="1.0" encoding="utf-8"?>
-<?mso-contentType ?>
-<FormTemplates xmlns="http://schemas.microsoft.com/sharepoint/v3/contenttype/forms">
-  <Display>DocumentLibraryForm</Display>
-  <Edit>DocumentLibraryForm</Edit>
-  <New>DocumentLibraryForm</New>
-</FormTemplates>
-</file>
-
-<file path=customXml/item2.xml><?xml version="1.0" encoding="utf-8"?>
 <ct:contentTypeSchema xmlns:ct="http://schemas.microsoft.com/office/2006/metadata/contentType" xmlns:ma="http://schemas.microsoft.com/office/2006/metadata/properties/metaAttributes" ct:_="" ma:_="" ma:contentTypeName="Dokument" ma:contentTypeID="0x01010084720F72846DC14788103D9800CA5632" ma:contentTypeVersion="5" ma:contentTypeDescription="Ein neues Dokument erstellen." ma:contentTypeScope="" ma:versionID="e4c3b777011aa1f420e943642ed86295">
   <xsd:schema xmlns:xsd="http://www.w3.org/2001/XMLSchema" xmlns:xs="http://www.w3.org/2001/XMLSchema" xmlns:p="http://schemas.microsoft.com/office/2006/metadata/properties" xmlns:ns2="d148daf0-ee5c-47d6-9481-8c15ce1c989e" xmlns:ns3="72b4b0d6-01dc-4b6d-af3a-4bfa39839b5f" targetNamespace="http://schemas.microsoft.com/office/2006/metadata/properties" ma:root="true" ma:fieldsID="11872dca7b7de2113cea18ab46e7d6a6" ns2:_="" ns3:_="">
     <xsd:import namespace="d148daf0-ee5c-47d6-9481-8c15ce1c989e"/>
@@ -49026,6 +48783,15 @@
 </ct:contentTypeSchema>
 </file>
 
+<file path=customXml/item2.xml><?xml version="1.0" encoding="utf-8"?>
+<?mso-contentType ?>
+<FormTemplates xmlns="http://schemas.microsoft.com/sharepoint/v3/contenttype/forms">
+  <Display>DocumentLibraryForm</Display>
+  <Edit>DocumentLibraryForm</Edit>
+  <New>DocumentLibraryForm</New>
+</FormTemplates>
+</file>
+
 <file path=customXml/item3.xml><?xml version="1.0" encoding="utf-8"?>
 <p:properties xmlns:p="http://schemas.microsoft.com/office/2006/metadata/properties" xmlns:xsi="http://www.w3.org/2001/XMLSchema-instance" xmlns:pc="http://schemas.microsoft.com/office/infopath/2007/PartnerControls">
   <documentManagement>
@@ -49035,14 +48801,6 @@
 </file>
 
 <file path=customXml/itemProps1.xml><?xml version="1.0" encoding="utf-8"?>
-<ds:datastoreItem xmlns:ds="http://schemas.openxmlformats.org/officeDocument/2006/customXml" ds:itemID="{F7BC3940-3EE7-47AF-9BE0-C2B78D8BCB9A}">
-  <ds:schemaRefs>
-    <ds:schemaRef ds:uri="http://schemas.microsoft.com/sharepoint/v3/contenttype/forms"/>
-  </ds:schemaRefs>
-</ds:datastoreItem>
-</file>
-
-<file path=customXml/itemProps2.xml><?xml version="1.0" encoding="utf-8"?>
 <ds:datastoreItem xmlns:ds="http://schemas.openxmlformats.org/officeDocument/2006/customXml" ds:itemID="{BC80EBF0-749E-4228-8968-8A7B7E1BCE90}">
   <ds:schemaRefs>
     <ds:schemaRef ds:uri="http://schemas.microsoft.com/office/2006/metadata/contentType"/>
@@ -49057,6 +48815,14 @@
     <ds:schemaRef ds:uri="http://purl.org/dc/elements/1.1/"/>
     <ds:schemaRef ds:uri="http://purl.org/dc/terms/"/>
     <ds:schemaRef ds:uri="http://schemas.microsoft.com/internal/obd"/>
+  </ds:schemaRefs>
+</ds:datastoreItem>
+</file>
+
+<file path=customXml/itemProps2.xml><?xml version="1.0" encoding="utf-8"?>
+<ds:datastoreItem xmlns:ds="http://schemas.openxmlformats.org/officeDocument/2006/customXml" ds:itemID="{F7BC3940-3EE7-47AF-9BE0-C2B78D8BCB9A}">
+  <ds:schemaRefs>
+    <ds:schemaRef ds:uri="http://schemas.microsoft.com/sharepoint/v3/contenttype/forms"/>
   </ds:schemaRefs>
 </ds:datastoreItem>
 </file>

--- a/Powerpoint.pptx
+++ b/Powerpoint.pptx
@@ -5,10 +5,10 @@
     <p:sldMasterId id="2147483672" r:id="rId4"/>
   </p:sldMasterIdLst>
   <p:notesMasterIdLst>
-    <p:notesMasterId r:id="rId23"/>
+    <p:notesMasterId r:id="rId21"/>
   </p:notesMasterIdLst>
   <p:handoutMasterIdLst>
-    <p:handoutMasterId r:id="rId24"/>
+    <p:handoutMasterId r:id="rId22"/>
   </p:handoutMasterIdLst>
   <p:sldIdLst>
     <p:sldId id="417" r:id="rId5"/>
@@ -16,24 +16,22 @@
     <p:sldId id="410" r:id="rId7"/>
     <p:sldId id="471" r:id="rId8"/>
     <p:sldId id="473" r:id="rId9"/>
-    <p:sldId id="475" r:id="rId10"/>
-    <p:sldId id="482" r:id="rId11"/>
-    <p:sldId id="484" r:id="rId12"/>
-    <p:sldId id="476" r:id="rId13"/>
-    <p:sldId id="489" r:id="rId14"/>
-    <p:sldId id="488" r:id="rId15"/>
-    <p:sldId id="487" r:id="rId16"/>
-    <p:sldId id="477" r:id="rId17"/>
-    <p:sldId id="478" r:id="rId18"/>
-    <p:sldId id="479" r:id="rId19"/>
-    <p:sldId id="480" r:id="rId20"/>
-    <p:sldId id="490" r:id="rId21"/>
-    <p:sldId id="470" r:id="rId22"/>
+    <p:sldId id="482" r:id="rId10"/>
+    <p:sldId id="484" r:id="rId11"/>
+    <p:sldId id="476" r:id="rId12"/>
+    <p:sldId id="489" r:id="rId13"/>
+    <p:sldId id="488" r:id="rId14"/>
+    <p:sldId id="487" r:id="rId15"/>
+    <p:sldId id="478" r:id="rId16"/>
+    <p:sldId id="479" r:id="rId17"/>
+    <p:sldId id="480" r:id="rId18"/>
+    <p:sldId id="490" r:id="rId19"/>
+    <p:sldId id="470" r:id="rId20"/>
   </p:sldIdLst>
   <p:sldSz cx="11879263" cy="6335713"/>
   <p:notesSz cx="6858000" cy="9144000"/>
   <p:custDataLst>
-    <p:tags r:id="rId25"/>
+    <p:tags r:id="rId23"/>
   </p:custDataLst>
   <p:defaultTextStyle>
     <a:defPPr>
@@ -140,14 +138,12 @@
             <p14:sldId id="410"/>
             <p14:sldId id="471"/>
             <p14:sldId id="473"/>
-            <p14:sldId id="475"/>
             <p14:sldId id="482"/>
             <p14:sldId id="484"/>
             <p14:sldId id="476"/>
             <p14:sldId id="489"/>
             <p14:sldId id="488"/>
             <p14:sldId id="487"/>
-            <p14:sldId id="477"/>
             <p14:sldId id="478"/>
             <p14:sldId id="479"/>
             <p14:sldId id="480"/>
@@ -993,7 +989,7 @@
       </p:grpSpPr>
       <p:sp>
         <p:nvSpPr>
-          <p:cNvPr id="2" name="Folienbildplatzhalter 1"/>
+          <p:cNvPr id="2" name="Slide Image Placeholder 1"/>
           <p:cNvSpPr>
             <a:spLocks noGrp="1" noRot="1" noChangeAspect="1"/>
           </p:cNvSpPr>
@@ -1010,7 +1006,7 @@
       </p:sp>
       <p:sp>
         <p:nvSpPr>
-          <p:cNvPr id="3" name="Notizenplatzhalter 2"/>
+          <p:cNvPr id="3" name="Notes Placeholder 2"/>
           <p:cNvSpPr>
             <a:spLocks noGrp="1"/>
           </p:cNvSpPr>
@@ -1023,13 +1019,13 @@
           <a:bodyPr/>
           <a:lstStyle/>
           <a:p>
-            <a:endParaRPr lang="de-DE" dirty="0"/>
-          </a:p>
-        </p:txBody>
-      </p:sp>
-      <p:sp>
-        <p:nvSpPr>
-          <p:cNvPr id="4" name="Foliennummernplatzhalter 3"/>
+            <a:endParaRPr lang="en-DE" dirty="0"/>
+          </a:p>
+        </p:txBody>
+      </p:sp>
+      <p:sp>
+        <p:nvSpPr>
+          <p:cNvPr id="4" name="Slide Number Placeholder 3"/>
           <p:cNvSpPr>
             <a:spLocks noGrp="1"/>
           </p:cNvSpPr>
@@ -1045,7 +1041,7 @@
             <a:fld id="{F86FCC4D-0438-154F-9910-1CF4711F776F}" type="slidenum">
               <a:rPr lang="de-DE" smtClean="0"/>
               <a:pPr/>
-              <a:t>13</a:t>
+              <a:t>14</a:t>
             </a:fld>
             <a:endParaRPr lang="de-DE" dirty="0"/>
           </a:p>
@@ -1054,7 +1050,7 @@
     </p:spTree>
     <p:extLst>
       <p:ext uri="{BB962C8B-B14F-4D97-AF65-F5344CB8AC3E}">
-        <p14:creationId xmlns:p14="http://schemas.microsoft.com/office/powerpoint/2010/main" val="3765480756"/>
+        <p14:creationId xmlns:p14="http://schemas.microsoft.com/office/powerpoint/2010/main" val="3084094081"/>
       </p:ext>
     </p:extLst>
   </p:cSld>
@@ -1083,7 +1079,7 @@
       </p:grpSpPr>
       <p:sp>
         <p:nvSpPr>
-          <p:cNvPr id="2" name="Folienbildplatzhalter 1"/>
+          <p:cNvPr id="2" name="Slide Image Placeholder 1"/>
           <p:cNvSpPr>
             <a:spLocks noGrp="1" noRot="1" noChangeAspect="1"/>
           </p:cNvSpPr>
@@ -1100,7 +1096,7 @@
       </p:sp>
       <p:sp>
         <p:nvSpPr>
-          <p:cNvPr id="3" name="Notizenplatzhalter 2"/>
+          <p:cNvPr id="3" name="Notes Placeholder 2"/>
           <p:cNvSpPr>
             <a:spLocks noGrp="1"/>
           </p:cNvSpPr>
@@ -1113,13 +1109,13 @@
           <a:bodyPr/>
           <a:lstStyle/>
           <a:p>
-            <a:endParaRPr lang="de-DE" dirty="0"/>
-          </a:p>
-        </p:txBody>
-      </p:sp>
-      <p:sp>
-        <p:nvSpPr>
-          <p:cNvPr id="4" name="Foliennummernplatzhalter 3"/>
+            <a:endParaRPr lang="en-DE" dirty="0"/>
+          </a:p>
+        </p:txBody>
+      </p:sp>
+      <p:sp>
+        <p:nvSpPr>
+          <p:cNvPr id="4" name="Slide Number Placeholder 3"/>
           <p:cNvSpPr>
             <a:spLocks noGrp="1"/>
           </p:cNvSpPr>
@@ -1135,7 +1131,7 @@
             <a:fld id="{F86FCC4D-0438-154F-9910-1CF4711F776F}" type="slidenum">
               <a:rPr lang="de-DE" smtClean="0"/>
               <a:pPr/>
-              <a:t>14</a:t>
+              <a:t>15</a:t>
             </a:fld>
             <a:endParaRPr lang="de-DE" dirty="0"/>
           </a:p>
@@ -1144,7 +1140,7 @@
     </p:spTree>
     <p:extLst>
       <p:ext uri="{BB962C8B-B14F-4D97-AF65-F5344CB8AC3E}">
-        <p14:creationId xmlns:p14="http://schemas.microsoft.com/office/powerpoint/2010/main" val="232081343"/>
+        <p14:creationId xmlns:p14="http://schemas.microsoft.com/office/powerpoint/2010/main" val="2281653358"/>
       </p:ext>
     </p:extLst>
   </p:cSld>
@@ -1198,7 +1194,7 @@
           <a:bodyPr/>
           <a:lstStyle/>
           <a:p>
-            <a:endParaRPr lang="en-DE" dirty="0"/>
+            <a:endParaRPr lang="en-DE"/>
           </a:p>
         </p:txBody>
       </p:sp>
@@ -1221,181 +1217,6 @@
               <a:rPr lang="de-DE" smtClean="0"/>
               <a:pPr/>
               <a:t>16</a:t>
-            </a:fld>
-            <a:endParaRPr lang="de-DE" dirty="0"/>
-          </a:p>
-        </p:txBody>
-      </p:sp>
-    </p:spTree>
-    <p:extLst>
-      <p:ext uri="{BB962C8B-B14F-4D97-AF65-F5344CB8AC3E}">
-        <p14:creationId xmlns:p14="http://schemas.microsoft.com/office/powerpoint/2010/main" val="3084094081"/>
-      </p:ext>
-    </p:extLst>
-  </p:cSld>
-  <p:clrMapOvr>
-    <a:masterClrMapping/>
-  </p:clrMapOvr>
-</p:notes>
-</file>
-
-<file path=ppt/notesSlides/notesSlide13.xml><?xml version="1.0" encoding="utf-8"?>
-<p:notes xmlns:a="http://schemas.openxmlformats.org/drawingml/2006/main" xmlns:r="http://schemas.openxmlformats.org/officeDocument/2006/relationships" xmlns:p="http://schemas.openxmlformats.org/presentationml/2006/main">
-  <p:cSld>
-    <p:spTree>
-      <p:nvGrpSpPr>
-        <p:cNvPr id="1" name=""/>
-        <p:cNvGrpSpPr/>
-        <p:nvPr/>
-      </p:nvGrpSpPr>
-      <p:grpSpPr>
-        <a:xfrm>
-          <a:off x="0" y="0"/>
-          <a:ext cx="0" cy="0"/>
-          <a:chOff x="0" y="0"/>
-          <a:chExt cx="0" cy="0"/>
-        </a:xfrm>
-      </p:grpSpPr>
-      <p:sp>
-        <p:nvSpPr>
-          <p:cNvPr id="2" name="Slide Image Placeholder 1"/>
-          <p:cNvSpPr>
-            <a:spLocks noGrp="1" noRot="1" noChangeAspect="1"/>
-          </p:cNvSpPr>
-          <p:nvPr>
-            <p:ph type="sldImg"/>
-          </p:nvPr>
-        </p:nvSpPr>
-        <p:spPr>
-          <a:xfrm>
-            <a:off x="2459038" y="1143000"/>
-            <a:ext cx="3862387" cy="2060575"/>
-          </a:xfrm>
-        </p:spPr>
-      </p:sp>
-      <p:sp>
-        <p:nvSpPr>
-          <p:cNvPr id="3" name="Notes Placeholder 2"/>
-          <p:cNvSpPr>
-            <a:spLocks noGrp="1"/>
-          </p:cNvSpPr>
-          <p:nvPr>
-            <p:ph type="body" idx="1"/>
-          </p:nvPr>
-        </p:nvSpPr>
-        <p:spPr/>
-        <p:txBody>
-          <a:bodyPr/>
-          <a:lstStyle/>
-          <a:p>
-            <a:endParaRPr lang="en-DE" dirty="0"/>
-          </a:p>
-        </p:txBody>
-      </p:sp>
-      <p:sp>
-        <p:nvSpPr>
-          <p:cNvPr id="4" name="Slide Number Placeholder 3"/>
-          <p:cNvSpPr>
-            <a:spLocks noGrp="1"/>
-          </p:cNvSpPr>
-          <p:nvPr>
-            <p:ph type="sldNum" sz="quarter" idx="5"/>
-          </p:nvPr>
-        </p:nvSpPr>
-        <p:spPr/>
-        <p:txBody>
-          <a:bodyPr/>
-          <a:lstStyle/>
-          <a:p>
-            <a:fld id="{F86FCC4D-0438-154F-9910-1CF4711F776F}" type="slidenum">
-              <a:rPr lang="de-DE" smtClean="0"/>
-              <a:pPr/>
-              <a:t>17</a:t>
-            </a:fld>
-            <a:endParaRPr lang="de-DE" dirty="0"/>
-          </a:p>
-        </p:txBody>
-      </p:sp>
-    </p:spTree>
-    <p:extLst>
-      <p:ext uri="{BB962C8B-B14F-4D97-AF65-F5344CB8AC3E}">
-        <p14:creationId xmlns:p14="http://schemas.microsoft.com/office/powerpoint/2010/main" val="2281653358"/>
-      </p:ext>
-    </p:extLst>
-  </p:cSld>
-  <p:clrMapOvr>
-    <a:masterClrMapping/>
-  </p:clrMapOvr>
-</p:notes>
-</file>
-
-<file path=ppt/notesSlides/notesSlide14.xml><?xml version="1.0" encoding="utf-8"?>
-<p:notes xmlns:a="http://schemas.openxmlformats.org/drawingml/2006/main" xmlns:r="http://schemas.openxmlformats.org/officeDocument/2006/relationships" xmlns:p="http://schemas.openxmlformats.org/presentationml/2006/main">
-  <p:cSld>
-    <p:spTree>
-      <p:nvGrpSpPr>
-        <p:cNvPr id="1" name=""/>
-        <p:cNvGrpSpPr/>
-        <p:nvPr/>
-      </p:nvGrpSpPr>
-      <p:grpSpPr>
-        <a:xfrm>
-          <a:off x="0" y="0"/>
-          <a:ext cx="0" cy="0"/>
-          <a:chOff x="0" y="0"/>
-          <a:chExt cx="0" cy="0"/>
-        </a:xfrm>
-      </p:grpSpPr>
-      <p:sp>
-        <p:nvSpPr>
-          <p:cNvPr id="2" name="Slide Image Placeholder 1"/>
-          <p:cNvSpPr>
-            <a:spLocks noGrp="1" noRot="1" noChangeAspect="1"/>
-          </p:cNvSpPr>
-          <p:nvPr>
-            <p:ph type="sldImg"/>
-          </p:nvPr>
-        </p:nvSpPr>
-        <p:spPr/>
-      </p:sp>
-      <p:sp>
-        <p:nvSpPr>
-          <p:cNvPr id="3" name="Notes Placeholder 2"/>
-          <p:cNvSpPr>
-            <a:spLocks noGrp="1"/>
-          </p:cNvSpPr>
-          <p:nvPr>
-            <p:ph type="body" idx="1"/>
-          </p:nvPr>
-        </p:nvSpPr>
-        <p:spPr/>
-        <p:txBody>
-          <a:bodyPr/>
-          <a:lstStyle/>
-          <a:p>
-            <a:endParaRPr lang="en-DE"/>
-          </a:p>
-        </p:txBody>
-      </p:sp>
-      <p:sp>
-        <p:nvSpPr>
-          <p:cNvPr id="4" name="Slide Number Placeholder 3"/>
-          <p:cNvSpPr>
-            <a:spLocks noGrp="1"/>
-          </p:cNvSpPr>
-          <p:nvPr>
-            <p:ph type="sldNum" sz="quarter" idx="5"/>
-          </p:nvPr>
-        </p:nvSpPr>
-        <p:spPr/>
-        <p:txBody>
-          <a:bodyPr/>
-          <a:lstStyle/>
-          <a:p>
-            <a:fld id="{F86FCC4D-0438-154F-9910-1CF4711F776F}" type="slidenum">
-              <a:rPr lang="de-DE" smtClean="0"/>
-              <a:pPr/>
-              <a:t>18</a:t>
             </a:fld>
             <a:endParaRPr lang="de-DE" dirty="0"/>
           </a:p>
@@ -1681,7 +1502,7 @@
     </p:spTree>
     <p:extLst>
       <p:ext uri="{BB962C8B-B14F-4D97-AF65-F5344CB8AC3E}">
-        <p14:creationId xmlns:p14="http://schemas.microsoft.com/office/powerpoint/2010/main" val="1319530753"/>
+        <p14:creationId xmlns:p14="http://schemas.microsoft.com/office/powerpoint/2010/main" val="2573383367"/>
       </p:ext>
     </p:extLst>
   </p:cSld>
@@ -1754,22 +1575,15 @@
             <p:ph type="sldNum" sz="quarter" idx="5"/>
           </p:nvPr>
         </p:nvSpPr>
-        <p:spPr>
-          <a:xfrm>
-            <a:off x="3884613" y="8685213"/>
-            <a:ext cx="2971800" cy="458787"/>
-          </a:xfrm>
-          <a:prstGeom prst="rect">
-            <a:avLst/>
-          </a:prstGeom>
-        </p:spPr>
+        <p:spPr/>
         <p:txBody>
           <a:bodyPr/>
           <a:lstStyle/>
           <a:p>
-            <a:fld id="{0319DA43-7D84-FC4B-A10B-2DC5B963A8E3}" type="slidenum">
+            <a:fld id="{F86FCC4D-0438-154F-9910-1CF4711F776F}" type="slidenum">
               <a:rPr lang="de-DE" smtClean="0"/>
-              <a:t>7</a:t>
+              <a:pPr/>
+              <a:t>8</a:t>
             </a:fld>
             <a:endParaRPr lang="de-DE" dirty="0"/>
           </a:p>
@@ -1778,7 +1592,7 @@
     </p:spTree>
     <p:extLst>
       <p:ext uri="{BB962C8B-B14F-4D97-AF65-F5344CB8AC3E}">
-        <p14:creationId xmlns:p14="http://schemas.microsoft.com/office/powerpoint/2010/main" val="2573383367"/>
+        <p14:creationId xmlns:p14="http://schemas.microsoft.com/office/powerpoint/2010/main" val="918959001"/>
       </p:ext>
     </p:extLst>
   </p:cSld>
@@ -1868,7 +1682,7 @@
     </p:spTree>
     <p:extLst>
       <p:ext uri="{BB962C8B-B14F-4D97-AF65-F5344CB8AC3E}">
-        <p14:creationId xmlns:p14="http://schemas.microsoft.com/office/powerpoint/2010/main" val="918959001"/>
+        <p14:creationId xmlns:p14="http://schemas.microsoft.com/office/powerpoint/2010/main" val="2866709870"/>
       </p:ext>
     </p:extLst>
   </p:cSld>
@@ -1958,7 +1772,7 @@
     </p:spTree>
     <p:extLst>
       <p:ext uri="{BB962C8B-B14F-4D97-AF65-F5344CB8AC3E}">
-        <p14:creationId xmlns:p14="http://schemas.microsoft.com/office/powerpoint/2010/main" val="2866709870"/>
+        <p14:creationId xmlns:p14="http://schemas.microsoft.com/office/powerpoint/2010/main" val="4051412122"/>
       </p:ext>
     </p:extLst>
   </p:cSld>
@@ -2048,7 +1862,7 @@
     </p:spTree>
     <p:extLst>
       <p:ext uri="{BB962C8B-B14F-4D97-AF65-F5344CB8AC3E}">
-        <p14:creationId xmlns:p14="http://schemas.microsoft.com/office/powerpoint/2010/main" val="4051412122"/>
+        <p14:creationId xmlns:p14="http://schemas.microsoft.com/office/powerpoint/2010/main" val="3566509579"/>
       </p:ext>
     </p:extLst>
   </p:cSld>
@@ -2138,7 +1952,7 @@
     </p:spTree>
     <p:extLst>
       <p:ext uri="{BB962C8B-B14F-4D97-AF65-F5344CB8AC3E}">
-        <p14:creationId xmlns:p14="http://schemas.microsoft.com/office/powerpoint/2010/main" val="3566509579"/>
+        <p14:creationId xmlns:p14="http://schemas.microsoft.com/office/powerpoint/2010/main" val="232081343"/>
       </p:ext>
     </p:extLst>
   </p:cSld>
@@ -40962,13 +40776,7 @@
           <a:p>
             <a:r>
               <a:rPr lang="de-DE" dirty="0"/>
-              <a:t>Manche Menschen verwenden schwache Passwörter (WAAAS?!?!!)</a:t>
-            </a:r>
-          </a:p>
-          <a:p>
-            <a:r>
-              <a:rPr lang="de-DE" dirty="0"/>
-              <a:t>User sind in der Datei /</a:t>
+              <a:t>Passwörter sind in der /</a:t>
             </a:r>
             <a:r>
               <a:rPr lang="de-DE" dirty="0" err="1"/>
@@ -40980,41 +40788,33 @@
             </a:r>
             <a:r>
               <a:rPr lang="de-DE" dirty="0" err="1"/>
-              <a:t>passwd</a:t>
-            </a:r>
-            <a:r>
-              <a:rPr lang="de-DE" dirty="0"/>
-              <a:t> hinterlegt, Details durch : getrennt</a:t>
-            </a:r>
-          </a:p>
-          <a:p>
-            <a:pPr marL="0" indent="0">
-              <a:buNone/>
-            </a:pPr>
-            <a:r>
-              <a:rPr lang="en-GB" sz="1600" b="0" i="0" dirty="0">
-                <a:solidFill>
-                  <a:srgbClr val="657B83"/>
-                </a:solidFill>
-                <a:effectLst/>
-                <a:latin typeface="Menlo" panose="020B0609030804020204" pitchFamily="49" charset="0"/>
-              </a:rPr>
-              <a:t> john:x:998:998::/home/john:/bin/bash</a:t>
-            </a:r>
-            <a:endParaRPr lang="de-DE" dirty="0"/>
-          </a:p>
-          <a:p>
-            <a:pPr lvl="2"/>
-            <a:r>
-              <a:rPr lang="de-DE" dirty="0"/>
-              <a:t>User Name</a:t>
-            </a:r>
-          </a:p>
-          <a:p>
-            <a:pPr lvl="2"/>
-            <a:r>
-              <a:rPr lang="de-DE" dirty="0"/>
-              <a:t>Verschlüsseltes Password (x: steht in der /</a:t>
+              <a:t>shadow</a:t>
+            </a:r>
+            <a:r>
+              <a:rPr lang="de-DE" dirty="0"/>
+              <a:t> Datei als (</a:t>
+            </a:r>
+            <a:r>
+              <a:rPr lang="de-DE" dirty="0" err="1"/>
+              <a:t>salted</a:t>
+            </a:r>
+            <a:r>
+              <a:rPr lang="de-DE" dirty="0"/>
+              <a:t>) </a:t>
+            </a:r>
+            <a:r>
+              <a:rPr lang="de-DE" dirty="0" err="1"/>
+              <a:t>hash</a:t>
+            </a:r>
+            <a:r>
+              <a:rPr lang="de-DE" dirty="0"/>
+              <a:t> abgelegt</a:t>
+            </a:r>
+          </a:p>
+          <a:p>
+            <a:r>
+              <a:rPr lang="de-DE" dirty="0"/>
+              <a:t>/</a:t>
             </a:r>
             <a:r>
               <a:rPr lang="de-DE" dirty="0" err="1"/>
@@ -41030,69 +40830,108 @@
             </a:r>
             <a:r>
               <a:rPr lang="de-DE" dirty="0"/>
-              <a:t> Datei)</a:t>
+              <a:t> ist normalerweise nur mit root-Rechten lesbar</a:t>
             </a:r>
           </a:p>
           <a:p>
             <a:pPr lvl="2"/>
             <a:r>
               <a:rPr lang="de-DE" dirty="0"/>
-              <a:t>User ID (UID)</a:t>
+              <a:t>Normalerweise. Lass dir den Inhalt ausgeben. </a:t>
+            </a:r>
+            <a:r>
+              <a:rPr lang="de-DE" dirty="0">
+                <a:sym typeface="Wingdings" pitchFamily="2" charset="2"/>
+              </a:rPr>
+              <a:t></a:t>
+            </a:r>
+            <a:endParaRPr lang="de-DE" dirty="0"/>
+          </a:p>
+          <a:p>
+            <a:r>
+              <a:rPr lang="de-DE" dirty="0"/>
+              <a:t>schwache Passwörter können ggf. mit einer Wörterbuch-Attacke geknackt werden</a:t>
+            </a:r>
+          </a:p>
+          <a:p>
+            <a:r>
+              <a:rPr lang="de-DE" dirty="0"/>
+              <a:t>John </a:t>
+            </a:r>
+            <a:r>
+              <a:rPr lang="de-DE" dirty="0" err="1"/>
+              <a:t>the</a:t>
+            </a:r>
+            <a:r>
+              <a:rPr lang="de-DE" dirty="0"/>
+              <a:t> Ripper kann das, in zwei Schritten</a:t>
             </a:r>
           </a:p>
           <a:p>
             <a:pPr lvl="2"/>
             <a:r>
-              <a:rPr lang="de-DE" dirty="0"/>
-              <a:t>User Gruppen ID (GID)</a:t>
+              <a:rPr lang="de-DE" dirty="0" err="1"/>
+              <a:t>Unshadow</a:t>
+            </a:r>
+            <a:r>
+              <a:rPr lang="de-DE" dirty="0"/>
+              <a:t> der </a:t>
+            </a:r>
+            <a:r>
+              <a:rPr lang="de-DE" dirty="0" err="1"/>
+              <a:t>shadow</a:t>
+            </a:r>
+            <a:r>
+              <a:rPr lang="de-DE" dirty="0"/>
+              <a:t> Datei mit der </a:t>
+            </a:r>
+            <a:r>
+              <a:rPr lang="de-DE" dirty="0" err="1"/>
+              <a:t>passwd</a:t>
+            </a:r>
+            <a:r>
+              <a:rPr lang="de-DE" dirty="0"/>
+              <a:t> Datei</a:t>
             </a:r>
           </a:p>
           <a:p>
             <a:pPr lvl="2"/>
             <a:r>
               <a:rPr lang="de-DE" dirty="0"/>
-              <a:t>User voller Name</a:t>
-            </a:r>
-          </a:p>
-          <a:p>
-            <a:pPr lvl="2"/>
-            <a:r>
-              <a:rPr lang="de-DE" dirty="0"/>
-              <a:t>User </a:t>
+              <a:t>Wörterbuch Attacke auf die </a:t>
             </a:r>
             <a:r>
               <a:rPr lang="de-DE" dirty="0" err="1"/>
-              <a:t>home</a:t>
-            </a:r>
-            <a:r>
-              <a:rPr lang="de-DE" dirty="0"/>
-              <a:t> Verzeichnis</a:t>
-            </a:r>
-          </a:p>
-          <a:p>
-            <a:pPr lvl="2"/>
-            <a:r>
-              <a:rPr lang="de-DE" dirty="0"/>
-              <a:t>Login </a:t>
-            </a:r>
+              <a:t>unshadowed</a:t>
+            </a:r>
+            <a:r>
+              <a:rPr lang="de-DE" dirty="0"/>
+              <a:t> Datei</a:t>
+            </a:r>
+          </a:p>
+          <a:p>
+            <a:pPr marL="0" indent="0">
+              <a:buNone/>
+            </a:pPr>
+            <a:endParaRPr lang="de-DE" dirty="0"/>
+          </a:p>
+          <a:p>
+            <a:pPr marL="0" indent="0">
+              <a:buNone/>
+            </a:pPr>
+            <a:endParaRPr lang="de-DE" dirty="0"/>
+          </a:p>
+          <a:p>
+            <a:pPr marL="0" indent="0">
+              <a:buNone/>
+            </a:pPr>
             <a:r>
               <a:rPr lang="de-DE" dirty="0" err="1"/>
-              <a:t>shell</a:t>
-            </a:r>
-            <a:endParaRPr lang="de-DE" dirty="0"/>
-          </a:p>
-          <a:p>
-            <a:r>
-              <a:rPr lang="de-DE" dirty="0"/>
-              <a:t>Auf der Maschine gibt es noch einen User „</a:t>
-            </a:r>
-            <a:r>
-              <a:rPr lang="de-DE" dirty="0" err="1"/>
-              <a:t>debian</a:t>
-            </a:r>
-            <a:r>
-              <a:rPr lang="de-DE" dirty="0"/>
-              <a:t>“, kannst du sein Passwort erraten?</a:t>
+              <a:t>pwned</a:t>
+            </a:r>
+            <a:r>
+              <a:rPr lang="de-DE" dirty="0"/>
+              <a:t>.</a:t>
             </a:r>
           </a:p>
         </p:txBody>
@@ -41213,7 +41052,10 @@
           <a:bodyPr/>
           <a:lstStyle/>
           <a:p>
-            <a:endParaRPr lang="de-DE"/>
+            <a:r>
+              <a:rPr lang="de-DE" dirty="0"/>
+              <a:t>Raten ist für Langweiler!</a:t>
+            </a:r>
           </a:p>
         </p:txBody>
       </p:sp>
@@ -41260,7 +41102,7 @@
         <p:spPr>
           <a:xfrm>
             <a:off x="611039" y="662834"/>
-            <a:ext cx="2880320" cy="764312"/>
+            <a:ext cx="2880320" cy="5286062"/>
           </a:xfrm>
           <a:prstGeom prst="rect">
             <a:avLst/>
@@ -41272,6 +41114,23 @@
             <a:spAutoFit/>
           </a:bodyPr>
           <a:lstStyle/>
+          <a:p>
+            <a:pPr algn="l">
+              <a:spcBef>
+                <a:spcPts val="60"/>
+              </a:spcBef>
+              <a:buSzPct val="100000"/>
+            </a:pPr>
+            <a:r>
+              <a:rPr lang="de-DE" sz="1600" dirty="0">
+                <a:solidFill>
+                  <a:srgbClr val="00B050"/>
+                </a:solidFill>
+                <a:latin typeface="Lucida Sans Typewriter" panose="020B0509030504030204" pitchFamily="49" charset="0"/>
+              </a:rPr>
+              <a:t>Bei Wörterbuch-Attacken werden Passwort-Hashes mit Hashes vergleichen, die aus einer Passwort-Liste generiert werden.</a:t>
+            </a:r>
+          </a:p>
           <a:p>
             <a:pPr algn="l">
               <a:spcBef>
@@ -41293,6 +41152,25 @@
               </a:spcBef>
               <a:buSzPct val="100000"/>
             </a:pPr>
+            <a:r>
+              <a:rPr lang="de-DE" sz="1600" dirty="0">
+                <a:solidFill>
+                  <a:srgbClr val="00B050"/>
+                </a:solidFill>
+                <a:latin typeface="Lucida Sans Typewriter" panose="020B0509030504030204" pitchFamily="49" charset="0"/>
+              </a:rPr>
+              <a:t>Wörterbücher für User, Passwörter und Verzeichnisse: </a:t>
+            </a:r>
+            <a:r>
+              <a:rPr lang="de-DE" sz="1600" dirty="0">
+                <a:solidFill>
+                  <a:srgbClr val="00B050"/>
+                </a:solidFill>
+                <a:latin typeface="Lucida Sans Typewriter" panose="020B0509030504030204" pitchFamily="49" charset="0"/>
+                <a:hlinkClick r:id="rId3"/>
+              </a:rPr>
+              <a:t>https://github.com/danielmiessler/SecLists</a:t>
+            </a:r>
             <a:endParaRPr lang="de-DE" sz="1600" dirty="0">
               <a:solidFill>
                 <a:srgbClr val="00B050"/>
@@ -41314,12 +41192,192 @@
               <a:latin typeface="Lucida Sans Typewriter" panose="020B0509030504030204" pitchFamily="49" charset="0"/>
             </a:endParaRPr>
           </a:p>
+          <a:p>
+            <a:pPr>
+              <a:spcBef>
+                <a:spcPts val="60"/>
+              </a:spcBef>
+              <a:buSzPct val="100000"/>
+            </a:pPr>
+            <a:r>
+              <a:rPr lang="de-DE" sz="1600" dirty="0">
+                <a:solidFill>
+                  <a:srgbClr val="00B050"/>
+                </a:solidFill>
+                <a:latin typeface="Lucida Sans Typewriter" panose="020B0509030504030204" pitchFamily="49" charset="0"/>
+              </a:rPr>
+              <a:t>Eine Liste von 100 beliebten Passwörtern liegt auf der Maschine: /</a:t>
+            </a:r>
+            <a:r>
+              <a:rPr lang="de-DE" sz="1600" dirty="0" err="1">
+                <a:solidFill>
+                  <a:srgbClr val="00B050"/>
+                </a:solidFill>
+                <a:latin typeface="Lucida Sans Typewriter" panose="020B0509030504030204" pitchFamily="49" charset="0"/>
+              </a:rPr>
+              <a:t>home</a:t>
+            </a:r>
+            <a:r>
+              <a:rPr lang="de-DE" sz="1600" dirty="0">
+                <a:solidFill>
+                  <a:srgbClr val="00B050"/>
+                </a:solidFill>
+                <a:latin typeface="Lucida Sans Typewriter" panose="020B0509030504030204" pitchFamily="49" charset="0"/>
+              </a:rPr>
+              <a:t>/</a:t>
+            </a:r>
+            <a:r>
+              <a:rPr lang="de-DE" sz="1600" dirty="0" err="1">
+                <a:solidFill>
+                  <a:srgbClr val="00B050"/>
+                </a:solidFill>
+                <a:latin typeface="Lucida Sans Typewriter" panose="020B0509030504030204" pitchFamily="49" charset="0"/>
+              </a:rPr>
+              <a:t>john</a:t>
+            </a:r>
+            <a:r>
+              <a:rPr lang="de-DE" sz="1600" dirty="0">
+                <a:solidFill>
+                  <a:srgbClr val="00B050"/>
+                </a:solidFill>
+                <a:latin typeface="Lucida Sans Typewriter" panose="020B0509030504030204" pitchFamily="49" charset="0"/>
+              </a:rPr>
+              <a:t>/top_100.txt</a:t>
+            </a:r>
+          </a:p>
+          <a:p>
+            <a:pPr>
+              <a:spcBef>
+                <a:spcPts val="60"/>
+              </a:spcBef>
+              <a:buSzPct val="100000"/>
+            </a:pPr>
+            <a:endParaRPr lang="de-DE" sz="1600" dirty="0">
+              <a:solidFill>
+                <a:srgbClr val="00B050"/>
+              </a:solidFill>
+              <a:latin typeface="Lucida Sans Typewriter" panose="020B0509030504030204" pitchFamily="49" charset="0"/>
+            </a:endParaRPr>
+          </a:p>
+          <a:p>
+            <a:pPr>
+              <a:spcBef>
+                <a:spcPts val="60"/>
+              </a:spcBef>
+              <a:buSzPct val="100000"/>
+            </a:pPr>
+            <a:r>
+              <a:rPr lang="de-DE" sz="1600" dirty="0">
+                <a:solidFill>
+                  <a:srgbClr val="00B050"/>
+                </a:solidFill>
+                <a:latin typeface="Lucida Sans Typewriter" panose="020B0509030504030204" pitchFamily="49" charset="0"/>
+              </a:rPr>
+              <a:t>Beliebte </a:t>
+            </a:r>
+            <a:r>
+              <a:rPr lang="de-DE" sz="1600" dirty="0" err="1">
+                <a:solidFill>
+                  <a:srgbClr val="00B050"/>
+                </a:solidFill>
+                <a:latin typeface="Lucida Sans Typewriter" panose="020B0509030504030204" pitchFamily="49" charset="0"/>
+              </a:rPr>
+              <a:t>Cracking</a:t>
+            </a:r>
+            <a:r>
+              <a:rPr lang="de-DE" sz="1600" dirty="0">
+                <a:solidFill>
+                  <a:srgbClr val="00B050"/>
+                </a:solidFill>
+                <a:latin typeface="Lucida Sans Typewriter" panose="020B0509030504030204" pitchFamily="49" charset="0"/>
+              </a:rPr>
+              <a:t> Tools</a:t>
+            </a:r>
+          </a:p>
+          <a:p>
+            <a:pPr marL="285750" indent="-285750">
+              <a:spcBef>
+                <a:spcPts val="60"/>
+              </a:spcBef>
+              <a:buSzPct val="100000"/>
+              <a:buFontTx/>
+              <a:buChar char="-"/>
+            </a:pPr>
+            <a:r>
+              <a:rPr lang="de-DE" sz="1600" dirty="0" err="1">
+                <a:solidFill>
+                  <a:srgbClr val="00B050"/>
+                </a:solidFill>
+                <a:latin typeface="Lucida Sans Typewriter" panose="020B0509030504030204" pitchFamily="49" charset="0"/>
+              </a:rPr>
+              <a:t>Hashcat</a:t>
+            </a:r>
+            <a:endParaRPr lang="de-DE" sz="1600" dirty="0">
+              <a:solidFill>
+                <a:srgbClr val="00B050"/>
+              </a:solidFill>
+              <a:latin typeface="Lucida Sans Typewriter" panose="020B0509030504030204" pitchFamily="49" charset="0"/>
+            </a:endParaRPr>
+          </a:p>
+          <a:p>
+            <a:pPr marL="285750" indent="-285750">
+              <a:spcBef>
+                <a:spcPts val="60"/>
+              </a:spcBef>
+              <a:buSzPct val="100000"/>
+              <a:buFontTx/>
+              <a:buChar char="-"/>
+            </a:pPr>
+            <a:r>
+              <a:rPr lang="de-DE" sz="1600" dirty="0">
+                <a:solidFill>
+                  <a:srgbClr val="00B050"/>
+                </a:solidFill>
+                <a:latin typeface="Lucida Sans Typewriter" panose="020B0509030504030204" pitchFamily="49" charset="0"/>
+              </a:rPr>
+              <a:t>John </a:t>
+            </a:r>
+            <a:r>
+              <a:rPr lang="de-DE" sz="1600" dirty="0" err="1">
+                <a:solidFill>
+                  <a:srgbClr val="00B050"/>
+                </a:solidFill>
+                <a:latin typeface="Lucida Sans Typewriter" panose="020B0509030504030204" pitchFamily="49" charset="0"/>
+              </a:rPr>
+              <a:t>the</a:t>
+            </a:r>
+            <a:r>
+              <a:rPr lang="de-DE" sz="1600" dirty="0">
+                <a:solidFill>
+                  <a:srgbClr val="00B050"/>
+                </a:solidFill>
+                <a:latin typeface="Lucida Sans Typewriter" panose="020B0509030504030204" pitchFamily="49" charset="0"/>
+              </a:rPr>
+              <a:t> Ripper </a:t>
+            </a:r>
+          </a:p>
+          <a:p>
+            <a:pPr marL="285750" indent="-285750">
+              <a:spcBef>
+                <a:spcPts val="60"/>
+              </a:spcBef>
+              <a:buSzPct val="100000"/>
+              <a:buFontTx/>
+              <a:buChar char="-"/>
+            </a:pPr>
+            <a:endParaRPr lang="de-DE" sz="1600" dirty="0">
+              <a:solidFill>
+                <a:srgbClr val="00B050"/>
+              </a:solidFill>
+              <a:latin typeface="Lucida Sans Typewriter" panose="020B0509030504030204" pitchFamily="49" charset="0"/>
+            </a:endParaRPr>
+          </a:p>
         </p:txBody>
       </p:sp>
     </p:spTree>
     <p:extLst>
       <p:ext uri="{BB962C8B-B14F-4D97-AF65-F5344CB8AC3E}">
-        <p14:creationId xmlns:p14="http://schemas.microsoft.com/office/powerpoint/2010/main" val="969393446"/>
+        <p14:creationId xmlns:p14="http://schemas.microsoft.com/office/powerpoint/2010/main" val="202515668"/>
       </p:ext>
     </p:extLst>
   </p:cSld>
@@ -41377,7 +41435,98 @@
           <a:p>
             <a:r>
               <a:rPr lang="de-DE" dirty="0"/>
-              <a:t>Passwörter sind in der /</a:t>
+              <a:t>Welche Programme darf ich mit </a:t>
+            </a:r>
+            <a:r>
+              <a:rPr lang="de-DE" dirty="0" err="1"/>
+              <a:t>sudo</a:t>
+            </a:r>
+            <a:r>
+              <a:rPr lang="de-DE" dirty="0"/>
+              <a:t> ausführen?</a:t>
+            </a:r>
+          </a:p>
+          <a:p>
+            <a:pPr lvl="2"/>
+            <a:r>
+              <a:rPr lang="de-DE" dirty="0" err="1"/>
+              <a:t>sudo</a:t>
+            </a:r>
+            <a:r>
+              <a:rPr lang="de-DE" dirty="0"/>
+              <a:t> -l</a:t>
+            </a:r>
+          </a:p>
+          <a:p>
+            <a:r>
+              <a:rPr lang="de-DE" dirty="0"/>
+              <a:t>Darf das Programm Dateien lesen?</a:t>
+            </a:r>
+          </a:p>
+          <a:p>
+            <a:r>
+              <a:rPr lang="de-DE" dirty="0"/>
+              <a:t>Darf das Programm Dateien schreiben?</a:t>
+            </a:r>
+          </a:p>
+          <a:p>
+            <a:r>
+              <a:rPr lang="de-DE" dirty="0"/>
+              <a:t>Kann das Programm Befehle ausführen?</a:t>
+            </a:r>
+          </a:p>
+          <a:p>
+            <a:r>
+              <a:rPr lang="de-DE" dirty="0"/>
+              <a:t>Sammlung von </a:t>
+            </a:r>
+            <a:r>
+              <a:rPr lang="de-DE" dirty="0" err="1"/>
+              <a:t>Binaries</a:t>
+            </a:r>
+            <a:r>
+              <a:rPr lang="de-DE" dirty="0"/>
+              <a:t> und ihre Exploits: </a:t>
+            </a:r>
+            <a:r>
+              <a:rPr lang="de-DE" dirty="0" err="1"/>
+              <a:t>gtfobins.github.io</a:t>
+            </a:r>
+            <a:r>
+              <a:rPr lang="de-DE" dirty="0"/>
+              <a:t>/</a:t>
+            </a:r>
+          </a:p>
+          <a:p>
+            <a:r>
+              <a:rPr lang="de-DE" dirty="0"/>
+              <a:t>LD_PRELOAD erlaubt es Programmen, geteilte Bibliotheken (sog. </a:t>
+            </a:r>
+            <a:r>
+              <a:rPr lang="de-DE" dirty="0" err="1"/>
+              <a:t>shared</a:t>
+            </a:r>
+            <a:r>
+              <a:rPr lang="de-DE" dirty="0"/>
+              <a:t> </a:t>
+            </a:r>
+            <a:r>
+              <a:rPr lang="de-DE" dirty="0" err="1"/>
+              <a:t>objects</a:t>
+            </a:r>
+            <a:r>
+              <a:rPr lang="de-DE" dirty="0"/>
+              <a:t>) zu verwenden</a:t>
+            </a:r>
+          </a:p>
+          <a:p>
+            <a:r>
+              <a:rPr lang="de-DE" dirty="0" err="1"/>
+              <a:t>Konfigurtiert</a:t>
+            </a:r>
+            <a:r>
+              <a:rPr lang="de-DE" dirty="0"/>
+              <a:t> in /</a:t>
             </a:r>
             <a:r>
               <a:rPr lang="de-DE" dirty="0" err="1"/>
@@ -41389,194 +41538,58 @@
             </a:r>
             <a:r>
               <a:rPr lang="de-DE" dirty="0" err="1"/>
-              <a:t>shadow</a:t>
-            </a:r>
-            <a:r>
-              <a:rPr lang="de-DE" dirty="0"/>
-              <a:t> Datei als (</a:t>
+              <a:t>sudoers</a:t>
+            </a:r>
+            <a:endParaRPr lang="de-DE" dirty="0"/>
+          </a:p>
+          <a:p>
+            <a:pPr lvl="2"/>
+            <a:r>
+              <a:rPr lang="de-DE" dirty="0"/>
+              <a:t>Wenn die Datei nicht lesbar ist, bleibt nur ausprobieren</a:t>
+            </a:r>
+          </a:p>
+          <a:p>
+            <a:r>
+              <a:rPr lang="de-DE" dirty="0"/>
+              <a:t>Aufgabe:</a:t>
+            </a:r>
+          </a:p>
+          <a:p>
+            <a:pPr lvl="2"/>
+            <a:r>
+              <a:rPr lang="de-DE" dirty="0"/>
+              <a:t>Welche Programme sind für </a:t>
             </a:r>
             <a:r>
               <a:rPr lang="de-DE" dirty="0" err="1"/>
-              <a:t>salted</a:t>
-            </a:r>
-            <a:r>
-              <a:rPr lang="de-DE" dirty="0"/>
-              <a:t>) </a:t>
+              <a:t>sudo</a:t>
+            </a:r>
+            <a:r>
+              <a:rPr lang="de-DE" dirty="0"/>
+              <a:t> konfiguriert?</a:t>
+            </a:r>
+          </a:p>
+          <a:p>
+            <a:pPr lvl="2"/>
+            <a:r>
+              <a:rPr lang="de-DE" dirty="0"/>
+              <a:t>Finde ihren Exploit auf </a:t>
             </a:r>
             <a:r>
               <a:rPr lang="de-DE" dirty="0" err="1"/>
-              <a:t>hash</a:t>
-            </a:r>
-            <a:r>
-              <a:rPr lang="de-DE" dirty="0"/>
-              <a:t> abgelegt</a:t>
-            </a:r>
-          </a:p>
-          <a:p>
-            <a:r>
-              <a:rPr lang="de-DE" dirty="0"/>
-              <a:t>/</a:t>
-            </a:r>
-            <a:r>
-              <a:rPr lang="de-DE" dirty="0" err="1"/>
-              <a:t>etc</a:t>
-            </a:r>
-            <a:r>
-              <a:rPr lang="de-DE" dirty="0"/>
-              <a:t>/</a:t>
-            </a:r>
-            <a:r>
-              <a:rPr lang="de-DE" dirty="0" err="1"/>
-              <a:t>shadow</a:t>
-            </a:r>
-            <a:r>
-              <a:rPr lang="de-DE" dirty="0"/>
-              <a:t> ist normalerweise nur mit root-Rechten lesbar</a:t>
-            </a:r>
-          </a:p>
-          <a:p>
-            <a:pPr lvl="2"/>
-            <a:r>
-              <a:rPr lang="de-DE" dirty="0"/>
-              <a:t>Normalerweise. Lass dir den Inhalt ausgeben </a:t>
-            </a:r>
-            <a:r>
-              <a:rPr lang="de-DE" dirty="0">
-                <a:sym typeface="Wingdings" pitchFamily="2" charset="2"/>
-              </a:rPr>
-              <a:t></a:t>
-            </a:r>
+              <a:t>gtfobins</a:t>
+            </a:r>
+            <a:r>
+              <a:rPr lang="de-DE" dirty="0"/>
+              <a:t> und erlange root-Rechte</a:t>
+            </a:r>
+          </a:p>
+          <a:p>
+            <a:pPr marL="216000" lvl="2" indent="0">
+              <a:buNone/>
+            </a:pPr>
             <a:endParaRPr lang="de-DE" dirty="0"/>
-          </a:p>
-          <a:p>
-            <a:r>
-              <a:rPr lang="de-DE" dirty="0"/>
-              <a:t>schwache Passwörter können ggf. mit einer Wörterbuch-Attacke geknackt werden</a:t>
-            </a:r>
-          </a:p>
-          <a:p>
-            <a:r>
-              <a:rPr lang="de-DE" dirty="0"/>
-              <a:t>John </a:t>
-            </a:r>
-            <a:r>
-              <a:rPr lang="de-DE" dirty="0" err="1"/>
-              <a:t>the</a:t>
-            </a:r>
-            <a:r>
-              <a:rPr lang="de-DE" dirty="0"/>
-              <a:t> Ripper kann das, in zwei Schritten</a:t>
-            </a:r>
-          </a:p>
-          <a:p>
-            <a:pPr lvl="2"/>
-            <a:r>
-              <a:rPr lang="de-DE" dirty="0" err="1"/>
-              <a:t>Unshadow</a:t>
-            </a:r>
-            <a:r>
-              <a:rPr lang="de-DE" dirty="0"/>
-              <a:t> der </a:t>
-            </a:r>
-            <a:r>
-              <a:rPr lang="de-DE" dirty="0" err="1"/>
-              <a:t>shadow</a:t>
-            </a:r>
-            <a:r>
-              <a:rPr lang="de-DE" dirty="0"/>
-              <a:t> Datei mit der </a:t>
-            </a:r>
-            <a:r>
-              <a:rPr lang="de-DE" dirty="0" err="1"/>
-              <a:t>passwd</a:t>
-            </a:r>
-            <a:r>
-              <a:rPr lang="de-DE" dirty="0"/>
-              <a:t> Datei</a:t>
-            </a:r>
-          </a:p>
-          <a:p>
-            <a:pPr marL="216000" lvl="2" indent="0">
-              <a:buNone/>
-            </a:pPr>
-            <a:r>
-              <a:rPr lang="en-GB" sz="1400" b="0" i="0" dirty="0">
-                <a:solidFill>
-                  <a:srgbClr val="657B83"/>
-                </a:solidFill>
-                <a:effectLst/>
-                <a:latin typeface="Menlo" panose="020B0609030804020204" pitchFamily="49" charset="0"/>
-              </a:rPr>
-              <a:t>unshadow /etc/passwd /etc/shadow &gt; /home/john/</a:t>
-            </a:r>
-            <a:r>
-              <a:rPr lang="en-GB" sz="1400" b="0" i="0" dirty="0" err="1">
-                <a:solidFill>
-                  <a:srgbClr val="657B83"/>
-                </a:solidFill>
-                <a:effectLst/>
-                <a:latin typeface="Menlo" panose="020B0609030804020204" pitchFamily="49" charset="0"/>
-              </a:rPr>
-              <a:t>unshadowed</a:t>
-            </a:r>
-            <a:endParaRPr lang="de-DE" dirty="0"/>
-          </a:p>
-          <a:p>
-            <a:pPr lvl="2"/>
-            <a:r>
-              <a:rPr lang="de-DE" dirty="0"/>
-              <a:t>Wörterbuch Attacke auf die </a:t>
-            </a:r>
-            <a:r>
-              <a:rPr lang="de-DE" dirty="0" err="1"/>
-              <a:t>unshadowed</a:t>
-            </a:r>
-            <a:r>
-              <a:rPr lang="de-DE" dirty="0"/>
-              <a:t> Datei</a:t>
-            </a:r>
-          </a:p>
-          <a:p>
-            <a:pPr marL="216000" lvl="2" indent="0">
-              <a:buNone/>
-            </a:pPr>
-            <a:r>
-              <a:rPr lang="en-GB" sz="1400" b="0" i="0" dirty="0">
-                <a:solidFill>
-                  <a:srgbClr val="657B83"/>
-                </a:solidFill>
-                <a:effectLst/>
-                <a:latin typeface="Menlo" panose="020B0609030804020204" pitchFamily="49" charset="0"/>
-              </a:rPr>
-              <a:t>john --wordlist=/home/john/top_100.txt /home/john/</a:t>
-            </a:r>
-            <a:r>
-              <a:rPr lang="en-GB" sz="1400" b="0" i="0" dirty="0" err="1">
-                <a:solidFill>
-                  <a:srgbClr val="657B83"/>
-                </a:solidFill>
-                <a:effectLst/>
-                <a:latin typeface="Menlo" panose="020B0609030804020204" pitchFamily="49" charset="0"/>
-              </a:rPr>
-              <a:t>unshadowed</a:t>
-            </a:r>
-            <a:endParaRPr lang="de-DE" sz="1200" dirty="0"/>
-          </a:p>
-          <a:p>
-            <a:endParaRPr lang="de-DE" dirty="0"/>
-          </a:p>
-          <a:p>
-            <a:pPr marL="0" indent="0">
-              <a:buNone/>
-            </a:pPr>
-            <a:r>
-              <a:rPr lang="de-DE" dirty="0" err="1"/>
-              <a:t>pwned</a:t>
-            </a:r>
-            <a:r>
-              <a:rPr lang="de-DE" dirty="0"/>
-              <a:t>.</a:t>
-            </a:r>
           </a:p>
         </p:txBody>
       </p:sp>
@@ -41696,10 +41709,7 @@
           <a:bodyPr/>
           <a:lstStyle/>
           <a:p>
-            <a:r>
-              <a:rPr lang="de-DE" dirty="0"/>
-              <a:t>Raten ist für Langweiler!</a:t>
-            </a:r>
+            <a:endParaRPr lang="de-DE"/>
           </a:p>
         </p:txBody>
       </p:sp>
@@ -41725,9 +41735,10 @@
           <a:lstStyle/>
           <a:p>
             <a:r>
-              <a:rPr lang="de-DE" dirty="0"/>
-              <a:t>Schwache Passwörter</a:t>
-            </a:r>
+              <a:rPr lang="de-DE" dirty="0" err="1"/>
+              <a:t>Sudo</a:t>
+            </a:r>
+            <a:endParaRPr lang="de-DE" dirty="0"/>
           </a:p>
         </p:txBody>
       </p:sp>
@@ -41746,7 +41757,7 @@
         <p:spPr>
           <a:xfrm>
             <a:off x="611039" y="662834"/>
-            <a:ext cx="2880320" cy="5765681"/>
+            <a:ext cx="2880320" cy="3757439"/>
           </a:xfrm>
           <a:prstGeom prst="rect">
             <a:avLst/>
@@ -41766,13 +41777,22 @@
               <a:buSzPct val="100000"/>
             </a:pPr>
             <a:r>
-              <a:rPr lang="de-DE" sz="1600" dirty="0">
+              <a:rPr lang="de-DE" sz="1600" dirty="0" err="1">
                 <a:solidFill>
                   <a:srgbClr val="00B050"/>
                 </a:solidFill>
                 <a:latin typeface="Lucida Sans Typewriter" panose="020B0509030504030204" pitchFamily="49" charset="0"/>
               </a:rPr>
-              <a:t>Bei Wörterbuch-Attacken werden Passwort-Hashes mit Hashes vergleichen, die aus einer Passwort-Liste generiert werden.</a:t>
+              <a:t>Sudo</a:t>
+            </a:r>
+            <a:r>
+              <a:rPr lang="de-DE" sz="1600" dirty="0">
+                <a:solidFill>
+                  <a:srgbClr val="00B050"/>
+                </a:solidFill>
+                <a:latin typeface="Lucida Sans Typewriter" panose="020B0509030504030204" pitchFamily="49" charset="0"/>
+              </a:rPr>
+              <a:t> erlaubt es einem Anwender Programme mit root-Rechten auszuführen.</a:t>
             </a:r>
           </a:p>
           <a:p>
@@ -41803,24 +41823,8 @@
                 </a:solidFill>
                 <a:latin typeface="Lucida Sans Typewriter" panose="020B0509030504030204" pitchFamily="49" charset="0"/>
               </a:rPr>
-              <a:t>Eine Umfangreiche Sammlung von Wörterbüchern  für User, Passwörter und Verzeichnisse bietet </a:t>
-            </a:r>
-            <a:r>
-              <a:rPr lang="de-DE" sz="1600" dirty="0">
-                <a:solidFill>
-                  <a:srgbClr val="00B050"/>
-                </a:solidFill>
-                <a:latin typeface="Lucida Sans Typewriter" panose="020B0509030504030204" pitchFamily="49" charset="0"/>
-                <a:hlinkClick r:id="rId3"/>
-              </a:rPr>
-              <a:t>https://github.com/danielmiessler/SecLists</a:t>
-            </a:r>
-            <a:endParaRPr lang="de-DE" sz="1600" dirty="0">
-              <a:solidFill>
-                <a:srgbClr val="00B050"/>
-              </a:solidFill>
-              <a:latin typeface="Lucida Sans Typewriter" panose="020B0509030504030204" pitchFamily="49" charset="0"/>
-            </a:endParaRPr>
+              <a:t>So kann ein Administrator einzelnen Anwendern die Möglichkeit geben trotz eingeschränktem Zugriff bestimmte Programme ausführen zu können.</a:t>
+            </a:r>
           </a:p>
           <a:p>
             <a:pPr algn="l">
@@ -41837,60 +41841,7 @@
             </a:endParaRPr>
           </a:p>
           <a:p>
-            <a:pPr>
-              <a:spcBef>
-                <a:spcPts val="60"/>
-              </a:spcBef>
-              <a:buSzPct val="100000"/>
-            </a:pPr>
-            <a:r>
-              <a:rPr lang="de-DE" sz="1600" dirty="0">
-                <a:solidFill>
-                  <a:srgbClr val="00B050"/>
-                </a:solidFill>
-                <a:latin typeface="Lucida Sans Typewriter" panose="020B0509030504030204" pitchFamily="49" charset="0"/>
-              </a:rPr>
-              <a:t>Eine Liste von 100 beliebten Passwörtern liegt auf der Maschine: /</a:t>
-            </a:r>
-            <a:r>
-              <a:rPr lang="de-DE" sz="1600" dirty="0" err="1">
-                <a:solidFill>
-                  <a:srgbClr val="00B050"/>
-                </a:solidFill>
-                <a:latin typeface="Lucida Sans Typewriter" panose="020B0509030504030204" pitchFamily="49" charset="0"/>
-              </a:rPr>
-              <a:t>home</a:t>
-            </a:r>
-            <a:r>
-              <a:rPr lang="de-DE" sz="1600" dirty="0">
-                <a:solidFill>
-                  <a:srgbClr val="00B050"/>
-                </a:solidFill>
-                <a:latin typeface="Lucida Sans Typewriter" panose="020B0509030504030204" pitchFamily="49" charset="0"/>
-              </a:rPr>
-              <a:t>/</a:t>
-            </a:r>
-            <a:r>
-              <a:rPr lang="de-DE" sz="1600" dirty="0" err="1">
-                <a:solidFill>
-                  <a:srgbClr val="00B050"/>
-                </a:solidFill>
-                <a:latin typeface="Lucida Sans Typewriter" panose="020B0509030504030204" pitchFamily="49" charset="0"/>
-              </a:rPr>
-              <a:t>john</a:t>
-            </a:r>
-            <a:r>
-              <a:rPr lang="de-DE" sz="1600" dirty="0">
-                <a:solidFill>
-                  <a:srgbClr val="00B050"/>
-                </a:solidFill>
-                <a:latin typeface="Lucida Sans Typewriter" panose="020B0509030504030204" pitchFamily="49" charset="0"/>
-              </a:rPr>
-              <a:t>/top_100.txt</a:t>
-            </a:r>
-          </a:p>
-          <a:p>
-            <a:pPr>
+            <a:pPr algn="l">
               <a:spcBef>
                 <a:spcPts val="60"/>
               </a:spcBef>
@@ -41904,92 +41855,11 @@
             </a:endParaRPr>
           </a:p>
           <a:p>
-            <a:pPr>
+            <a:pPr algn="l">
               <a:spcBef>
                 <a:spcPts val="60"/>
               </a:spcBef>
               <a:buSzPct val="100000"/>
-            </a:pPr>
-            <a:r>
-              <a:rPr lang="de-DE" sz="1600" dirty="0">
-                <a:solidFill>
-                  <a:srgbClr val="00B050"/>
-                </a:solidFill>
-                <a:latin typeface="Lucida Sans Typewriter" panose="020B0509030504030204" pitchFamily="49" charset="0"/>
-              </a:rPr>
-              <a:t>Beliebte Tools</a:t>
-            </a:r>
-          </a:p>
-          <a:p>
-            <a:pPr marL="285750" indent="-285750">
-              <a:spcBef>
-                <a:spcPts val="60"/>
-              </a:spcBef>
-              <a:buSzPct val="100000"/>
-              <a:buFontTx/>
-              <a:buChar char="-"/>
-            </a:pPr>
-            <a:r>
-              <a:rPr lang="de-DE" sz="1600" dirty="0" err="1">
-                <a:solidFill>
-                  <a:srgbClr val="00B050"/>
-                </a:solidFill>
-                <a:latin typeface="Lucida Sans Typewriter" panose="020B0509030504030204" pitchFamily="49" charset="0"/>
-              </a:rPr>
-              <a:t>Hashcat</a:t>
-            </a:r>
-            <a:endParaRPr lang="de-DE" sz="1600" dirty="0">
-              <a:solidFill>
-                <a:srgbClr val="00B050"/>
-              </a:solidFill>
-              <a:latin typeface="Lucida Sans Typewriter" panose="020B0509030504030204" pitchFamily="49" charset="0"/>
-            </a:endParaRPr>
-          </a:p>
-          <a:p>
-            <a:pPr marL="285750" indent="-285750">
-              <a:spcBef>
-                <a:spcPts val="60"/>
-              </a:spcBef>
-              <a:buSzPct val="100000"/>
-              <a:buFontTx/>
-              <a:buChar char="-"/>
-            </a:pPr>
-            <a:r>
-              <a:rPr lang="de-DE" sz="1600" dirty="0">
-                <a:solidFill>
-                  <a:srgbClr val="00B050"/>
-                </a:solidFill>
-                <a:latin typeface="Lucida Sans Typewriter" panose="020B0509030504030204" pitchFamily="49" charset="0"/>
-              </a:rPr>
-              <a:t>John </a:t>
-            </a:r>
-            <a:r>
-              <a:rPr lang="de-DE" sz="1600" dirty="0" err="1">
-                <a:solidFill>
-                  <a:srgbClr val="00B050"/>
-                </a:solidFill>
-                <a:latin typeface="Lucida Sans Typewriter" panose="020B0509030504030204" pitchFamily="49" charset="0"/>
-              </a:rPr>
-              <a:t>the</a:t>
-            </a:r>
-            <a:r>
-              <a:rPr lang="de-DE" sz="1600" dirty="0">
-                <a:solidFill>
-                  <a:srgbClr val="00B050"/>
-                </a:solidFill>
-                <a:latin typeface="Lucida Sans Typewriter" panose="020B0509030504030204" pitchFamily="49" charset="0"/>
-              </a:rPr>
-              <a:t> Ripper </a:t>
-            </a:r>
-          </a:p>
-          <a:p>
-            <a:pPr marL="285750" indent="-285750">
-              <a:spcBef>
-                <a:spcPts val="60"/>
-              </a:spcBef>
-              <a:buSzPct val="100000"/>
-              <a:buFontTx/>
-              <a:buChar char="-"/>
             </a:pPr>
             <a:endParaRPr lang="de-DE" sz="1600" dirty="0">
               <a:solidFill>
@@ -42003,7 +41873,7 @@
     </p:spTree>
     <p:extLst>
       <p:ext uri="{BB962C8B-B14F-4D97-AF65-F5344CB8AC3E}">
-        <p14:creationId xmlns:p14="http://schemas.microsoft.com/office/powerpoint/2010/main" val="202515668"/>
+        <p14:creationId xmlns:p14="http://schemas.microsoft.com/office/powerpoint/2010/main" val="1458898213"/>
       </p:ext>
     </p:extLst>
   </p:cSld>
@@ -42040,104 +41910,6 @@
       </p:grpSpPr>
       <p:sp>
         <p:nvSpPr>
-          <p:cNvPr id="2" name="Inhaltsplatzhalter 1">
-            <a:extLst>
-              <a:ext uri="{FF2B5EF4-FFF2-40B4-BE49-F238E27FC236}">
-                <a16:creationId xmlns:a16="http://schemas.microsoft.com/office/drawing/2014/main" id="{DE1EE909-DD3A-58D2-3F07-57F08C0C8F5A}"/>
-              </a:ext>
-            </a:extLst>
-          </p:cNvPr>
-          <p:cNvSpPr>
-            <a:spLocks noGrp="1"/>
-          </p:cNvSpPr>
-          <p:nvPr>
-            <p:ph sz="quarter" idx="17"/>
-          </p:nvPr>
-        </p:nvSpPr>
-        <p:spPr/>
-        <p:txBody>
-          <a:bodyPr/>
-          <a:lstStyle/>
-          <a:p>
-            <a:r>
-              <a:rPr lang="de-DE" dirty="0"/>
-              <a:t>Welche Programme für einem Anwender in </a:t>
-            </a:r>
-            <a:r>
-              <a:rPr lang="de-DE" dirty="0" err="1"/>
-              <a:t>sudo</a:t>
-            </a:r>
-            <a:r>
-              <a:rPr lang="de-DE" dirty="0"/>
-              <a:t> konfiguriert sind erfährt man mit dem `</a:t>
-            </a:r>
-            <a:r>
-              <a:rPr lang="de-DE" dirty="0" err="1"/>
-              <a:t>sudo</a:t>
-            </a:r>
-            <a:r>
-              <a:rPr lang="de-DE" dirty="0"/>
-              <a:t> -l` Befehl.</a:t>
-            </a:r>
-          </a:p>
-          <a:p>
-            <a:r>
-              <a:rPr lang="de-DE" dirty="0"/>
-              <a:t>Bei einigen Programmen gibt es jedoch die Möglichkeit, Dateien zu lesen oder eine </a:t>
-            </a:r>
-            <a:r>
-              <a:rPr lang="de-DE" dirty="0" err="1"/>
-              <a:t>shell</a:t>
-            </a:r>
-            <a:r>
-              <a:rPr lang="de-DE" dirty="0"/>
-              <a:t> zu spawnen - und wenn das Programm mit root-Rechten ausgeführt wurde, Dateien mit root Lesezugriff (bspw. /</a:t>
-            </a:r>
-            <a:r>
-              <a:rPr lang="de-DE" dirty="0" err="1"/>
-              <a:t>etc</a:t>
-            </a:r>
-            <a:r>
-              <a:rPr lang="de-DE" dirty="0"/>
-              <a:t>/</a:t>
-            </a:r>
-            <a:r>
-              <a:rPr lang="de-DE" dirty="0" err="1"/>
-              <a:t>shadow</a:t>
-            </a:r>
-            <a:r>
-              <a:rPr lang="de-DE" dirty="0"/>
-              <a:t>) zu lesen/schreiben oder eine root-</a:t>
-            </a:r>
-            <a:r>
-              <a:rPr lang="de-DE" dirty="0" err="1"/>
-              <a:t>shell</a:t>
-            </a:r>
-            <a:r>
-              <a:rPr lang="de-DE" dirty="0"/>
-              <a:t> zu spawnen.</a:t>
-            </a:r>
-          </a:p>
-          <a:p>
-            <a:r>
-              <a:rPr lang="de-DE" dirty="0"/>
-              <a:t>Eine Sammlung dieser Programme und wie man diese Schwachstelle ausnutzt findet man auf </a:t>
-            </a:r>
-            <a:r>
-              <a:rPr lang="de-DE" dirty="0" err="1">
-                <a:hlinkClick r:id="rId3"/>
-              </a:rPr>
-              <a:t>gtfobin</a:t>
-            </a:r>
-            <a:r>
-              <a:rPr lang="de-DE" dirty="0"/>
-              <a:t>.</a:t>
-            </a:r>
-          </a:p>
-        </p:txBody>
-      </p:sp>
-      <p:sp>
-        <p:nvSpPr>
           <p:cNvPr id="3" name="Datumsplatzhalter 2">
             <a:extLst>
               <a:ext uri="{FF2B5EF4-FFF2-40B4-BE49-F238E27FC236}">
@@ -42278,19 +42050,18 @@
           <a:lstStyle/>
           <a:p>
             <a:r>
-              <a:rPr lang="de-DE" dirty="0" err="1"/>
-              <a:t>Sudo</a:t>
-            </a:r>
-            <a:endParaRPr lang="de-DE" dirty="0"/>
-          </a:p>
-        </p:txBody>
-      </p:sp>
-      <p:sp>
-        <p:nvSpPr>
-          <p:cNvPr id="11" name="Textfeld 10">
-            <a:extLst>
-              <a:ext uri="{FF2B5EF4-FFF2-40B4-BE49-F238E27FC236}">
-                <a16:creationId xmlns:a16="http://schemas.microsoft.com/office/drawing/2014/main" id="{F94D0C8C-57FA-4FD3-E7BF-D59E98F3F4C2}"/>
+              <a:rPr lang="de-DE" dirty="0"/>
+              <a:t>SUID/SGID</a:t>
+            </a:r>
+          </a:p>
+        </p:txBody>
+      </p:sp>
+      <p:sp>
+        <p:nvSpPr>
+          <p:cNvPr id="8" name="Textfeld 7">
+            <a:extLst>
+              <a:ext uri="{FF2B5EF4-FFF2-40B4-BE49-F238E27FC236}">
+                <a16:creationId xmlns:a16="http://schemas.microsoft.com/office/drawing/2014/main" id="{66155F9D-C599-4607-1C5B-3CFA704DD5AF}"/>
               </a:ext>
             </a:extLst>
           </p:cNvPr>
@@ -42300,7 +42071,7 @@
         <p:spPr>
           <a:xfrm>
             <a:off x="611039" y="662834"/>
-            <a:ext cx="2880320" cy="3757439"/>
+            <a:ext cx="2880320" cy="3005951"/>
           </a:xfrm>
           <a:prstGeom prst="rect">
             <a:avLst/>
@@ -42320,22 +42091,13 @@
               <a:buSzPct val="100000"/>
             </a:pPr>
             <a:r>
-              <a:rPr lang="de-DE" sz="1600" dirty="0" err="1">
+              <a:rPr lang="de-DE" sz="1600" dirty="0">
                 <a:solidFill>
                   <a:srgbClr val="00B050"/>
                 </a:solidFill>
                 <a:latin typeface="Lucida Sans Typewriter" panose="020B0509030504030204" pitchFamily="49" charset="0"/>
               </a:rPr>
-              <a:t>Sudo</a:t>
-            </a:r>
-            <a:r>
-              <a:rPr lang="de-DE" sz="1600" dirty="0">
-                <a:solidFill>
-                  <a:srgbClr val="00B050"/>
-                </a:solidFill>
-                <a:latin typeface="Lucida Sans Typewriter" panose="020B0509030504030204" pitchFamily="49" charset="0"/>
-              </a:rPr>
-              <a:t> erlaubt es einem Anwender Programme mit root-Rechten auszuführen.</a:t>
+              <a:t>Berechtigungen ob ein User eine Datei lesen, schreiben oder ausführen darf hängen an den Dateien selbst.</a:t>
             </a:r>
           </a:p>
           <a:p>
@@ -42366,7 +42128,25 @@
                 </a:solidFill>
                 <a:latin typeface="Lucida Sans Typewriter" panose="020B0509030504030204" pitchFamily="49" charset="0"/>
               </a:rPr>
-              <a:t>So kann ein Administrator einzelnen Anwendern die Möglichkeit geben trotz eingeschränktem Zugriff bestimmte Programme ausführen zu können.</a:t>
+              <a:t>Mit dem Befehl `</a:t>
+            </a:r>
+            <a:r>
+              <a:rPr lang="de-DE" sz="1600" dirty="0" err="1">
+                <a:solidFill>
+                  <a:srgbClr val="00B050"/>
+                </a:solidFill>
+                <a:latin typeface="Lucida Sans Typewriter" panose="020B0509030504030204" pitchFamily="49" charset="0"/>
+              </a:rPr>
+              <a:t>ls</a:t>
+            </a:r>
+            <a:r>
+              <a:rPr lang="de-DE" sz="1600" dirty="0">
+                <a:solidFill>
+                  <a:srgbClr val="00B050"/>
+                </a:solidFill>
+                <a:latin typeface="Lucida Sans Typewriter" panose="020B0509030504030204" pitchFamily="49" charset="0"/>
+              </a:rPr>
+              <a:t> -l` kann man sich diese Berechtigungen anzeigen lassen.</a:t>
             </a:r>
           </a:p>
           <a:p>
@@ -42397,6 +42177,254 @@
               <a:latin typeface="Lucida Sans Typewriter" panose="020B0509030504030204" pitchFamily="49" charset="0"/>
             </a:endParaRPr>
           </a:p>
+        </p:txBody>
+      </p:sp>
+      <p:sp>
+        <p:nvSpPr>
+          <p:cNvPr id="9" name="Content Placeholder 8">
+            <a:extLst>
+              <a:ext uri="{FF2B5EF4-FFF2-40B4-BE49-F238E27FC236}">
+                <a16:creationId xmlns:a16="http://schemas.microsoft.com/office/drawing/2014/main" id="{7FE5FC39-0BA8-150A-DC50-CCBE340ED18D}"/>
+              </a:ext>
+            </a:extLst>
+          </p:cNvPr>
+          <p:cNvSpPr>
+            <a:spLocks noGrp="1"/>
+          </p:cNvSpPr>
+          <p:nvPr>
+            <p:ph sz="quarter" idx="17"/>
+          </p:nvPr>
+        </p:nvSpPr>
+        <p:spPr/>
+        <p:txBody>
+          <a:bodyPr/>
+          <a:lstStyle/>
+          <a:p>
+            <a:pPr>
+              <a:spcBef>
+                <a:spcPts val="60"/>
+              </a:spcBef>
+            </a:pPr>
+            <a:r>
+              <a:rPr lang="de-DE" dirty="0"/>
+              <a:t>In Linux hängen Berechtigungen an Dateien</a:t>
+            </a:r>
+          </a:p>
+          <a:p>
+            <a:pPr lvl="2">
+              <a:spcBef>
+                <a:spcPts val="60"/>
+              </a:spcBef>
+            </a:pPr>
+            <a:r>
+              <a:rPr lang="de-DE" dirty="0"/>
+              <a:t>Berechtigungen: lesen, schreiben, ausführen</a:t>
+            </a:r>
+          </a:p>
+          <a:p>
+            <a:pPr lvl="2">
+              <a:spcBef>
+                <a:spcPts val="60"/>
+              </a:spcBef>
+            </a:pPr>
+            <a:r>
+              <a:rPr lang="de-DE" dirty="0"/>
+              <a:t>Ziel: Besitzer, Gruppe, Andere</a:t>
+            </a:r>
+          </a:p>
+          <a:p>
+            <a:pPr marL="0" indent="0" algn="l">
+              <a:spcBef>
+                <a:spcPts val="60"/>
+              </a:spcBef>
+              <a:buSzPct val="100000"/>
+              <a:buNone/>
+            </a:pPr>
+            <a:r>
+              <a:rPr lang="en-GB" dirty="0"/>
+              <a:t>        </a:t>
+            </a:r>
+            <a:r>
+              <a:rPr lang="en-GB" dirty="0" err="1"/>
+              <a:t>drwxr</a:t>
+            </a:r>
+            <a:r>
+              <a:rPr lang="en-GB" dirty="0"/>
+              <a:t>-</a:t>
+            </a:r>
+            <a:r>
+              <a:rPr lang="en-GB" dirty="0" err="1"/>
+              <a:t>xr</a:t>
+            </a:r>
+            <a:r>
+              <a:rPr lang="en-GB" dirty="0"/>
+              <a:t>-x   4   john   user   128 B   Wed Sep   docker/</a:t>
+            </a:r>
+            <a:endParaRPr lang="de-DE" sz="1600" dirty="0"/>
+          </a:p>
+          <a:p>
+            <a:pPr marL="144000" indent="-144000" algn="l">
+              <a:spcBef>
+                <a:spcPts val="60"/>
+              </a:spcBef>
+              <a:buSzPct val="100000"/>
+              <a:buFont typeface="Wingdings" panose="05000000000000000000" pitchFamily="2" charset="2"/>
+              <a:buChar char="§"/>
+            </a:pPr>
+            <a:r>
+              <a:rPr lang="de-DE" sz="1600" dirty="0"/>
+              <a:t>Dateien mit SUID-Bit werden mit den Rechten des Besitzers ausgeführt</a:t>
+            </a:r>
+          </a:p>
+          <a:p>
+            <a:pPr lvl="2">
+              <a:spcBef>
+                <a:spcPts val="60"/>
+              </a:spcBef>
+            </a:pPr>
+            <a:r>
+              <a:rPr lang="de-DE" dirty="0"/>
+              <a:t>Beispiel: </a:t>
+            </a:r>
+            <a:r>
+              <a:rPr lang="de-DE" dirty="0" err="1"/>
+              <a:t>passwd</a:t>
+            </a:r>
+            <a:endParaRPr lang="de-DE" dirty="0"/>
+          </a:p>
+          <a:p>
+            <a:pPr marL="216000" lvl="2" indent="0">
+              <a:spcBef>
+                <a:spcPts val="60"/>
+              </a:spcBef>
+              <a:buNone/>
+            </a:pPr>
+            <a:r>
+              <a:rPr lang="en-GB" dirty="0"/>
+              <a:t>    -</a:t>
+            </a:r>
+            <a:r>
+              <a:rPr lang="en-GB" dirty="0" err="1"/>
+              <a:t>rwsr</a:t>
+            </a:r>
+            <a:r>
+              <a:rPr lang="en-GB" dirty="0"/>
+              <a:t>-</a:t>
+            </a:r>
+            <a:r>
+              <a:rPr lang="en-GB" dirty="0" err="1"/>
+              <a:t>xr</a:t>
+            </a:r>
+            <a:r>
+              <a:rPr lang="en-GB" dirty="0"/>
+              <a:t>-x   1    root   root   63960   Feb 7 2020   /</a:t>
+            </a:r>
+            <a:r>
+              <a:rPr lang="en-GB" dirty="0" err="1"/>
+              <a:t>usr</a:t>
+            </a:r>
+            <a:r>
+              <a:rPr lang="en-GB" dirty="0"/>
+              <a:t>/bin/passwd</a:t>
+            </a:r>
+            <a:endParaRPr lang="de-DE" dirty="0"/>
+          </a:p>
+          <a:p>
+            <a:pPr marL="144000" indent="-144000" algn="l">
+              <a:spcBef>
+                <a:spcPts val="60"/>
+              </a:spcBef>
+              <a:buSzPct val="100000"/>
+              <a:buFont typeface="Wingdings" panose="05000000000000000000" pitchFamily="2" charset="2"/>
+              <a:buChar char="§"/>
+            </a:pPr>
+            <a:r>
+              <a:rPr lang="de-DE" sz="1600" dirty="0"/>
+              <a:t>Dateien mit dem SUID-Bit lassen sich mit dem find Befehl aufspüren:</a:t>
+            </a:r>
+          </a:p>
+          <a:p>
+            <a:pPr marL="0" indent="0" algn="l">
+              <a:spcBef>
+                <a:spcPts val="60"/>
+              </a:spcBef>
+              <a:buSzPct val="100000"/>
+              <a:buNone/>
+            </a:pPr>
+            <a:r>
+              <a:rPr lang="en-US" dirty="0"/>
+              <a:t>       find / -perm -u=s -user root 2&gt;/dev/null</a:t>
+            </a:r>
+          </a:p>
+          <a:p>
+            <a:pPr>
+              <a:spcBef>
+                <a:spcPts val="60"/>
+              </a:spcBef>
+            </a:pPr>
+            <a:r>
+              <a:rPr lang="en-US" dirty="0" err="1"/>
+              <a:t>gtfobins</a:t>
+            </a:r>
+            <a:r>
+              <a:rPr lang="en-US" dirty="0"/>
+              <a:t> </a:t>
+            </a:r>
+            <a:r>
+              <a:rPr lang="en-US" dirty="0" err="1"/>
+              <a:t>hilft</a:t>
+            </a:r>
+            <a:r>
+              <a:rPr lang="en-US" dirty="0"/>
+              <a:t> </a:t>
+            </a:r>
+            <a:r>
+              <a:rPr lang="en-US" dirty="0" err="1"/>
+              <a:t>uns</a:t>
+            </a:r>
+            <a:r>
+              <a:rPr lang="en-US" dirty="0"/>
+              <a:t> </a:t>
+            </a:r>
+            <a:r>
+              <a:rPr lang="en-US" dirty="0" err="1"/>
+              <a:t>wieder</a:t>
+            </a:r>
+            <a:r>
+              <a:rPr lang="en-US" dirty="0"/>
+              <a:t> </a:t>
+            </a:r>
+            <a:r>
+              <a:rPr lang="en-US" dirty="0" err="1"/>
+              <a:t>weiter</a:t>
+            </a:r>
+            <a:r>
+              <a:rPr lang="en-US" dirty="0"/>
+              <a:t> </a:t>
+            </a:r>
+            <a:r>
+              <a:rPr lang="en-US" dirty="0">
+                <a:sym typeface="Wingdings" pitchFamily="2" charset="2"/>
+              </a:rPr>
+              <a:t></a:t>
+            </a:r>
+            <a:endParaRPr lang="en-US" dirty="0"/>
+          </a:p>
+          <a:p>
+            <a:pPr marL="0" indent="0" algn="l">
+              <a:spcBef>
+                <a:spcPts val="60"/>
+              </a:spcBef>
+              <a:buSzPct val="100000"/>
+              <a:buNone/>
+            </a:pPr>
+            <a:endParaRPr lang="en-US" sz="1600" dirty="0">
+              <a:solidFill>
+                <a:srgbClr val="D7BA7D"/>
+              </a:solidFill>
+              <a:latin typeface="Consolas" panose="020B0609020204030204" pitchFamily="49" charset="0"/>
+            </a:endParaRPr>
+          </a:p>
           <a:p>
             <a:pPr algn="l">
               <a:spcBef>
@@ -42404,19 +42432,151 @@
               </a:spcBef>
               <a:buSzPct val="100000"/>
             </a:pPr>
+            <a:r>
+              <a:rPr lang="en-US" sz="1600" dirty="0">
+                <a:latin typeface="+mj-lt"/>
+              </a:rPr>
+              <a:t>Aufgabe: </a:t>
+            </a:r>
+            <a:r>
+              <a:rPr lang="en-US" sz="1600" dirty="0" err="1">
+                <a:latin typeface="+mj-lt"/>
+              </a:rPr>
+              <a:t>findet</a:t>
+            </a:r>
+            <a:r>
+              <a:rPr lang="en-US" sz="1600" dirty="0">
+                <a:latin typeface="+mj-lt"/>
+              </a:rPr>
+              <a:t> </a:t>
+            </a:r>
+            <a:r>
+              <a:rPr lang="en-US" sz="1600" dirty="0" err="1">
+                <a:latin typeface="+mj-lt"/>
+              </a:rPr>
+              <a:t>heraus</a:t>
+            </a:r>
+            <a:r>
+              <a:rPr lang="en-US" sz="1600" dirty="0">
+                <a:latin typeface="+mj-lt"/>
+              </a:rPr>
+              <a:t>, </a:t>
+            </a:r>
+            <a:r>
+              <a:rPr lang="en-US" sz="1600" dirty="0" err="1">
+                <a:latin typeface="+mj-lt"/>
+              </a:rPr>
+              <a:t>wie</a:t>
+            </a:r>
+            <a:r>
+              <a:rPr lang="en-US" sz="1600" dirty="0">
+                <a:latin typeface="+mj-lt"/>
+              </a:rPr>
+              <a:t> </a:t>
+            </a:r>
+            <a:r>
+              <a:rPr lang="en-US" sz="1600" dirty="0" err="1">
+                <a:latin typeface="+mj-lt"/>
+              </a:rPr>
+              <a:t>Ihr</a:t>
+            </a:r>
+            <a:r>
+              <a:rPr lang="en-US" sz="1600" dirty="0">
+                <a:latin typeface="+mj-lt"/>
+              </a:rPr>
+              <a:t> </a:t>
+            </a:r>
+            <a:r>
+              <a:rPr lang="en-US" sz="1600" dirty="0" err="1">
+                <a:latin typeface="+mj-lt"/>
+              </a:rPr>
+              <a:t>mit</a:t>
+            </a:r>
+            <a:r>
+              <a:rPr lang="en-US" sz="1600" dirty="0">
+                <a:latin typeface="+mj-lt"/>
+              </a:rPr>
+              <a:t> den </a:t>
+            </a:r>
+            <a:r>
+              <a:rPr lang="en-US" sz="1600" dirty="0" err="1">
+                <a:latin typeface="+mj-lt"/>
+              </a:rPr>
+              <a:t>gefundenen</a:t>
+            </a:r>
+            <a:r>
+              <a:rPr lang="en-US" sz="1600" dirty="0">
+                <a:latin typeface="+mj-lt"/>
+              </a:rPr>
+              <a:t> </a:t>
+            </a:r>
+            <a:r>
+              <a:rPr lang="en-US" sz="1600" dirty="0" err="1">
+                <a:latin typeface="+mj-lt"/>
+              </a:rPr>
+              <a:t>Programmen</a:t>
+            </a:r>
+            <a:r>
+              <a:rPr lang="en-US" sz="1600" dirty="0">
+                <a:latin typeface="+mj-lt"/>
+              </a:rPr>
+              <a:t> </a:t>
+            </a:r>
+            <a:r>
+              <a:rPr lang="en-US" sz="1600" dirty="0" err="1">
+                <a:latin typeface="+mj-lt"/>
+              </a:rPr>
+              <a:t>eine</a:t>
+            </a:r>
+            <a:r>
+              <a:rPr lang="en-US" sz="1600" dirty="0">
+                <a:latin typeface="+mj-lt"/>
+              </a:rPr>
+              <a:t> </a:t>
+            </a:r>
+            <a:r>
+              <a:rPr lang="en-US" sz="1600" dirty="0" err="1">
+                <a:latin typeface="+mj-lt"/>
+              </a:rPr>
+              <a:t>rootshell</a:t>
+            </a:r>
+            <a:r>
+              <a:rPr lang="en-US" sz="1600" dirty="0">
+                <a:latin typeface="+mj-lt"/>
+              </a:rPr>
+              <a:t> </a:t>
+            </a:r>
+            <a:r>
+              <a:rPr lang="en-US" sz="1600" dirty="0" err="1">
+                <a:latin typeface="+mj-lt"/>
+              </a:rPr>
+              <a:t>spawnen</a:t>
+            </a:r>
+            <a:r>
+              <a:rPr lang="en-US" sz="1600" dirty="0">
+                <a:latin typeface="+mj-lt"/>
+              </a:rPr>
+              <a:t> </a:t>
+            </a:r>
+            <a:r>
+              <a:rPr lang="en-US" sz="1600" dirty="0" err="1">
+                <a:latin typeface="+mj-lt"/>
+              </a:rPr>
+              <a:t>könnt</a:t>
+            </a:r>
             <a:endParaRPr lang="de-DE" sz="1600" dirty="0">
-              <a:solidFill>
-                <a:srgbClr val="00B050"/>
-              </a:solidFill>
-              <a:latin typeface="Lucida Sans Typewriter" panose="020B0509030504030204" pitchFamily="49" charset="0"/>
+              <a:latin typeface="+mj-lt"/>
             </a:endParaRPr>
+          </a:p>
+          <a:p>
+            <a:endParaRPr lang="en-DE" dirty="0"/>
           </a:p>
         </p:txBody>
       </p:sp>
     </p:spTree>
     <p:extLst>
       <p:ext uri="{BB962C8B-B14F-4D97-AF65-F5344CB8AC3E}">
-        <p14:creationId xmlns:p14="http://schemas.microsoft.com/office/powerpoint/2010/main" val="1458898213"/>
+        <p14:creationId xmlns:p14="http://schemas.microsoft.com/office/powerpoint/2010/main" val="821384128"/>
       </p:ext>
     </p:extLst>
   </p:cSld>
@@ -42473,75 +42633,94 @@
           <a:lstStyle/>
           <a:p>
             <a:r>
-              <a:rPr lang="de-DE" dirty="0"/>
-              <a:t>LD_PRELOAD erlaubt es Programmen, geteilte Bibliotheken (sog. </a:t>
-            </a:r>
-            <a:r>
               <a:rPr lang="de-DE" dirty="0" err="1"/>
-              <a:t>shared</a:t>
-            </a:r>
-            <a:r>
-              <a:rPr lang="de-DE" dirty="0"/>
-              <a:t> </a:t>
+              <a:t>Capabilities</a:t>
+            </a:r>
+            <a:r>
+              <a:rPr lang="de-DE" dirty="0"/>
+              <a:t> bieten einem Prozess eine Untermenge der root-Rechten</a:t>
+            </a:r>
+          </a:p>
+          <a:p>
+            <a:r>
+              <a:rPr lang="de-DE" dirty="0"/>
+              <a:t>Mit dem Befehl `</a:t>
             </a:r>
             <a:r>
               <a:rPr lang="de-DE" dirty="0" err="1"/>
-              <a:t>objects</a:t>
-            </a:r>
-            <a:r>
-              <a:rPr lang="de-DE" dirty="0"/>
-              <a:t>) zu verwenden</a:t>
-            </a:r>
-          </a:p>
-          <a:p>
+              <a:t>getcap</a:t>
+            </a:r>
+            <a:r>
+              <a:rPr lang="de-DE" dirty="0"/>
+              <a:t>` lassen sich </a:t>
+            </a:r>
             <a:r>
               <a:rPr lang="de-DE" dirty="0" err="1"/>
-              <a:t>Konfigurtiert</a:t>
-            </a:r>
-            <a:r>
-              <a:rPr lang="de-DE" dirty="0"/>
-              <a:t> in /</a:t>
+              <a:t>Executables</a:t>
+            </a:r>
+            <a:r>
+              <a:rPr lang="de-DE" dirty="0"/>
+              <a:t> mit erweiterten </a:t>
             </a:r>
             <a:r>
               <a:rPr lang="de-DE" dirty="0" err="1"/>
-              <a:t>etc</a:t>
-            </a:r>
-            <a:r>
-              <a:rPr lang="de-DE" dirty="0"/>
-              <a:t>/</a:t>
+              <a:t>Capabilities</a:t>
+            </a:r>
+            <a:r>
+              <a:rPr lang="de-DE" dirty="0"/>
+              <a:t> aufspüren. (Um die Ausgabe kompakt zu halten werfen wir die Fehlerausgaben weg `2&gt;/</a:t>
             </a:r>
             <a:r>
               <a:rPr lang="de-DE" dirty="0" err="1"/>
-              <a:t>sudoers</a:t>
-            </a:r>
+              <a:t>dev</a:t>
+            </a:r>
+            <a:r>
+              <a:rPr lang="de-DE" dirty="0"/>
+              <a:t>/null`)</a:t>
+            </a:r>
+          </a:p>
+          <a:p>
+            <a:r>
+              <a:rPr lang="de-DE" dirty="0"/>
+              <a:t>`</a:t>
+            </a:r>
+            <a:r>
+              <a:rPr lang="de-DE" dirty="0" err="1"/>
+              <a:t>getcap</a:t>
+            </a:r>
+            <a:r>
+              <a:rPr lang="de-DE" dirty="0"/>
+              <a:t> -r / 2&gt;/</a:t>
+            </a:r>
+            <a:r>
+              <a:rPr lang="de-DE" dirty="0" err="1"/>
+              <a:t>dev</a:t>
+            </a:r>
+            <a:r>
+              <a:rPr lang="de-DE" dirty="0"/>
+              <a:t>/null`</a:t>
+            </a:r>
+          </a:p>
+          <a:p>
             <a:endParaRPr lang="de-DE" dirty="0"/>
           </a:p>
           <a:p>
-            <a:pPr lvl="2"/>
-            <a:r>
-              <a:rPr lang="de-DE" dirty="0"/>
-              <a:t>Wenn die Datei nicht lesbar ist, bleibt nur ausprobieren</a:t>
-            </a:r>
-          </a:p>
-          <a:p>
-            <a:r>
-              <a:rPr lang="de-DE" dirty="0"/>
-              <a:t>Aufgabe: nutzt </a:t>
-            </a:r>
-            <a:r>
-              <a:rPr lang="de-DE" dirty="0" err="1"/>
-              <a:t>gtfobins</a:t>
-            </a:r>
-            <a:r>
-              <a:rPr lang="de-DE" dirty="0"/>
-              <a:t> um herauszufinden wie ihr das ausnutzen könnt</a:t>
-            </a:r>
-          </a:p>
-          <a:p>
-            <a:pPr marL="0" indent="0">
-              <a:buNone/>
-            </a:pPr>
             <a:endParaRPr lang="de-DE" dirty="0"/>
+          </a:p>
+          <a:p>
+            <a:endParaRPr lang="de-DE" dirty="0"/>
+          </a:p>
+          <a:p>
+            <a:endParaRPr lang="de-DE" dirty="0"/>
+          </a:p>
+          <a:p>
+            <a:endParaRPr lang="de-DE" dirty="0"/>
+          </a:p>
+          <a:p>
+            <a:r>
+              <a:rPr lang="de-DE" dirty="0"/>
+              <a:t>Aufgabe: Ihr kennt das Spiel ;-)</a:t>
+            </a:r>
           </a:p>
         </p:txBody>
       </p:sp>
@@ -42687,9 +42866,10 @@
           <a:lstStyle/>
           <a:p>
             <a:r>
-              <a:rPr lang="de-DE" dirty="0"/>
-              <a:t>LD_PRELOAD</a:t>
-            </a:r>
+              <a:rPr lang="de-DE" dirty="0" err="1"/>
+              <a:t>Capabilities</a:t>
+            </a:r>
+            <a:endParaRPr lang="de-DE" dirty="0"/>
           </a:p>
         </p:txBody>
       </p:sp>
@@ -42698,7 +42878,7 @@
           <p:cNvPr id="8" name="Textfeld 7">
             <a:extLst>
               <a:ext uri="{FF2B5EF4-FFF2-40B4-BE49-F238E27FC236}">
-                <a16:creationId xmlns:a16="http://schemas.microsoft.com/office/drawing/2014/main" id="{E8884E0F-A724-A931-0722-7B2684337CA9}"/>
+                <a16:creationId xmlns:a16="http://schemas.microsoft.com/office/drawing/2014/main" id="{A16AA867-A1B0-22EF-7A33-C2745778FD17}"/>
               </a:ext>
             </a:extLst>
           </p:cNvPr>
@@ -42708,7 +42888,7 @@
         <p:spPr>
           <a:xfrm>
             <a:off x="611039" y="662834"/>
-            <a:ext cx="2880320" cy="246221"/>
+            <a:ext cx="2880320" cy="2513509"/>
           </a:xfrm>
           <a:prstGeom prst="rect">
             <a:avLst/>
@@ -42728,21 +42908,89 @@
               <a:buSzPct val="100000"/>
             </a:pPr>
             <a:r>
-              <a:rPr lang="de-DE" sz="1600" dirty="0">
+              <a:rPr lang="de-DE" sz="1600" dirty="0" err="1">
                 <a:solidFill>
                   <a:srgbClr val="00B050"/>
                 </a:solidFill>
                 <a:latin typeface="Lucida Sans Typewriter" panose="020B0509030504030204" pitchFamily="49" charset="0"/>
               </a:rPr>
-              <a:t>TODO</a:t>
-            </a:r>
+              <a:t>Capabilities</a:t>
+            </a:r>
+            <a:r>
+              <a:rPr lang="de-DE" sz="1600" dirty="0">
+                <a:solidFill>
+                  <a:srgbClr val="00B050"/>
+                </a:solidFill>
+                <a:latin typeface="Lucida Sans Typewriter" panose="020B0509030504030204" pitchFamily="49" charset="0"/>
+              </a:rPr>
+              <a:t> sind eine Möglichkeit Rechte feingranularer zu vergeben.</a:t>
+            </a:r>
+          </a:p>
+          <a:p>
+            <a:pPr algn="l">
+              <a:spcBef>
+                <a:spcPts val="60"/>
+              </a:spcBef>
+              <a:buSzPct val="100000"/>
+            </a:pPr>
+            <a:endParaRPr lang="de-DE" sz="1600" dirty="0">
+              <a:solidFill>
+                <a:srgbClr val="00B050"/>
+              </a:solidFill>
+              <a:latin typeface="Lucida Sans Typewriter" panose="020B0509030504030204" pitchFamily="49" charset="0"/>
+            </a:endParaRPr>
+          </a:p>
+          <a:p>
+            <a:pPr algn="l">
+              <a:spcBef>
+                <a:spcPts val="60"/>
+              </a:spcBef>
+              <a:buSzPct val="100000"/>
+            </a:pPr>
+            <a:r>
+              <a:rPr lang="de-DE" sz="1600" dirty="0">
+                <a:solidFill>
+                  <a:srgbClr val="00B050"/>
+                </a:solidFill>
+                <a:latin typeface="Lucida Sans Typewriter" panose="020B0509030504030204" pitchFamily="49" charset="0"/>
+              </a:rPr>
+              <a:t>Damit können einem Tool einzelne Berechtigungen zugewiesen werden.</a:t>
+            </a:r>
+          </a:p>
+          <a:p>
+            <a:pPr algn="l">
+              <a:spcBef>
+                <a:spcPts val="60"/>
+              </a:spcBef>
+              <a:buSzPct val="100000"/>
+            </a:pPr>
+            <a:endParaRPr lang="de-DE" sz="1600" dirty="0">
+              <a:solidFill>
+                <a:srgbClr val="00B050"/>
+              </a:solidFill>
+              <a:latin typeface="Lucida Sans Typewriter" panose="020B0509030504030204" pitchFamily="49" charset="0"/>
+            </a:endParaRPr>
+          </a:p>
+          <a:p>
+            <a:pPr algn="l">
+              <a:spcBef>
+                <a:spcPts val="60"/>
+              </a:spcBef>
+              <a:buSzPct val="100000"/>
+            </a:pPr>
+            <a:endParaRPr lang="de-DE" sz="1600" dirty="0">
+              <a:solidFill>
+                <a:srgbClr val="00B050"/>
+              </a:solidFill>
+              <a:latin typeface="Lucida Sans Typewriter" panose="020B0509030504030204" pitchFamily="49" charset="0"/>
+            </a:endParaRPr>
           </a:p>
         </p:txBody>
       </p:sp>
     </p:spTree>
     <p:extLst>
       <p:ext uri="{BB962C8B-B14F-4D97-AF65-F5344CB8AC3E}">
-        <p14:creationId xmlns:p14="http://schemas.microsoft.com/office/powerpoint/2010/main" val="3601666898"/>
+        <p14:creationId xmlns:p14="http://schemas.microsoft.com/office/powerpoint/2010/main" val="1586874804"/>
       </p:ext>
     </p:extLst>
   </p:cSld>
@@ -42777,21 +43025,307 @@
           <a:chExt cx="0" cy="0"/>
         </a:xfrm>
       </p:grpSpPr>
-      <p:pic>
-        <p:nvPicPr>
-          <p:cNvPr id="10" name="Inhaltsplatzhalter 9">
-            <a:extLst>
-              <a:ext uri="{FF2B5EF4-FFF2-40B4-BE49-F238E27FC236}">
-                <a16:creationId xmlns:a16="http://schemas.microsoft.com/office/drawing/2014/main" id="{5C58D52D-47ED-FD04-0F85-F0222E18496B}"/>
-              </a:ext>
-            </a:extLst>
-          </p:cNvPr>
-          <p:cNvPicPr>
-            <a:picLocks noGrp="1" noChangeAspect="1"/>
-          </p:cNvPicPr>
+      <p:sp>
+        <p:nvSpPr>
+          <p:cNvPr id="2" name="Inhaltsplatzhalter 1">
+            <a:extLst>
+              <a:ext uri="{FF2B5EF4-FFF2-40B4-BE49-F238E27FC236}">
+                <a16:creationId xmlns:a16="http://schemas.microsoft.com/office/drawing/2014/main" id="{DE1EE909-DD3A-58D2-3F07-57F08C0C8F5A}"/>
+              </a:ext>
+            </a:extLst>
+          </p:cNvPr>
+          <p:cNvSpPr>
+            <a:spLocks noGrp="1"/>
+          </p:cNvSpPr>
           <p:nvPr>
             <p:ph sz="quarter" idx="17"/>
           </p:nvPr>
+        </p:nvSpPr>
+        <p:spPr/>
+        <p:txBody>
+          <a:bodyPr/>
+          <a:lstStyle/>
+          <a:p>
+            <a:r>
+              <a:rPr lang="de-DE" dirty="0"/>
+              <a:t>automatisierte Ausführung von Programmen oder Skripten zu bestimmten Zeitpunkten</a:t>
+            </a:r>
+          </a:p>
+          <a:p>
+            <a:r>
+              <a:rPr lang="de-DE" dirty="0"/>
+              <a:t>definiert in der Cron Tabelle /</a:t>
+            </a:r>
+            <a:r>
+              <a:rPr lang="de-DE" dirty="0" err="1"/>
+              <a:t>etc</a:t>
+            </a:r>
+            <a:r>
+              <a:rPr lang="de-DE" dirty="0"/>
+              <a:t>/</a:t>
+            </a:r>
+            <a:r>
+              <a:rPr lang="de-DE" dirty="0" err="1"/>
+              <a:t>crontab</a:t>
+            </a:r>
+            <a:endParaRPr lang="de-DE" dirty="0"/>
+          </a:p>
+          <a:p>
+            <a:pPr lvl="2"/>
+            <a:r>
+              <a:rPr lang="de-DE" dirty="0"/>
+              <a:t>beinhaltet die </a:t>
+            </a:r>
+            <a:r>
+              <a:rPr lang="de-DE" dirty="0" err="1"/>
+              <a:t>shell</a:t>
+            </a:r>
+            <a:r>
+              <a:rPr lang="de-DE" dirty="0"/>
+              <a:t>, die Cron verwenden soll</a:t>
+            </a:r>
+          </a:p>
+          <a:p>
+            <a:pPr lvl="2"/>
+            <a:r>
+              <a:rPr lang="de-DE" dirty="0"/>
+              <a:t>eine Pfad-Variable</a:t>
+            </a:r>
+          </a:p>
+          <a:p>
+            <a:pPr lvl="2"/>
+            <a:r>
+              <a:rPr lang="de-DE" dirty="0"/>
+              <a:t>eine Menge an Jobs mit Ausführungszeitpunkt, User und Befehl</a:t>
+            </a:r>
+          </a:p>
+          <a:p>
+            <a:r>
+              <a:rPr lang="de-DE" dirty="0"/>
+              <a:t>Cron führt das Kommando mit dem definierten User aus</a:t>
+            </a:r>
+          </a:p>
+          <a:p>
+            <a:endParaRPr lang="de-DE" dirty="0"/>
+          </a:p>
+          <a:p>
+            <a:r>
+              <a:rPr lang="de-DE" dirty="0"/>
+              <a:t>Aufgaben:</a:t>
+            </a:r>
+          </a:p>
+          <a:p>
+            <a:pPr lvl="2"/>
+            <a:r>
+              <a:rPr lang="de-DE" dirty="0"/>
+              <a:t>Pfad-Variable</a:t>
+            </a:r>
+          </a:p>
+          <a:p>
+            <a:pPr lvl="2"/>
+            <a:r>
+              <a:rPr lang="de-DE" dirty="0"/>
+              <a:t>Schwache Berechtigungen</a:t>
+            </a:r>
+          </a:p>
+          <a:p>
+            <a:pPr lvl="2"/>
+            <a:r>
+              <a:rPr lang="de-DE" dirty="0"/>
+              <a:t>Wildcard </a:t>
+            </a:r>
+            <a:r>
+              <a:rPr lang="de-DE" dirty="0" err="1"/>
+              <a:t>Unjection</a:t>
+            </a:r>
+            <a:endParaRPr lang="de-DE" dirty="0"/>
+          </a:p>
+          <a:p>
+            <a:endParaRPr lang="de-DE" dirty="0"/>
+          </a:p>
+          <a:p>
+            <a:pPr lvl="2"/>
+            <a:endParaRPr lang="de-DE" dirty="0"/>
+          </a:p>
+          <a:p>
+            <a:pPr lvl="2"/>
+            <a:endParaRPr lang="de-DE" dirty="0"/>
+          </a:p>
+          <a:p>
+            <a:pPr lvl="2"/>
+            <a:endParaRPr lang="de-DE" dirty="0"/>
+          </a:p>
+          <a:p>
+            <a:endParaRPr lang="de-DE" dirty="0"/>
+          </a:p>
+        </p:txBody>
+      </p:sp>
+      <p:sp>
+        <p:nvSpPr>
+          <p:cNvPr id="3" name="Datumsplatzhalter 2">
+            <a:extLst>
+              <a:ext uri="{FF2B5EF4-FFF2-40B4-BE49-F238E27FC236}">
+                <a16:creationId xmlns:a16="http://schemas.microsoft.com/office/drawing/2014/main" id="{7CD361C0-F2D6-1522-E197-5519BB3FA076}"/>
+              </a:ext>
+            </a:extLst>
+          </p:cNvPr>
+          <p:cNvSpPr>
+            <a:spLocks noGrp="1"/>
+          </p:cNvSpPr>
+          <p:nvPr>
+            <p:ph type="dt" sz="half" idx="20"/>
+          </p:nvPr>
+        </p:nvSpPr>
+        <p:spPr/>
+        <p:txBody>
+          <a:bodyPr/>
+          <a:lstStyle/>
+          <a:p>
+            <a:fld id="{5DC9953B-096E-4D14-9CB5-13648C592BB5}" type="datetime1">
+              <a:rPr lang="de-DE" smtClean="0"/>
+              <a:t>24.11.22</a:t>
+            </a:fld>
+            <a:endParaRPr lang="de-DE" dirty="0"/>
+          </a:p>
+        </p:txBody>
+      </p:sp>
+      <p:sp>
+        <p:nvSpPr>
+          <p:cNvPr id="4" name="Fußzeilenplatzhalter 3">
+            <a:extLst>
+              <a:ext uri="{FF2B5EF4-FFF2-40B4-BE49-F238E27FC236}">
+                <a16:creationId xmlns:a16="http://schemas.microsoft.com/office/drawing/2014/main" id="{28E78925-D828-270B-0CBA-A8DB423B730F}"/>
+              </a:ext>
+            </a:extLst>
+          </p:cNvPr>
+          <p:cNvSpPr>
+            <a:spLocks noGrp="1"/>
+          </p:cNvSpPr>
+          <p:nvPr>
+            <p:ph type="ftr" sz="quarter" idx="21"/>
+          </p:nvPr>
+        </p:nvSpPr>
+        <p:spPr/>
+        <p:txBody>
+          <a:bodyPr/>
+          <a:lstStyle/>
+          <a:p>
+            <a:r>
+              <a:rPr lang="de-DE" dirty="0"/>
+              <a:t>Linux Privilege </a:t>
+            </a:r>
+            <a:r>
+              <a:rPr lang="de-DE" dirty="0" err="1"/>
+              <a:t>Escalation</a:t>
+            </a:r>
+            <a:r>
+              <a:rPr lang="de-DE" dirty="0"/>
+              <a:t> Workshop</a:t>
+            </a:r>
+          </a:p>
+        </p:txBody>
+      </p:sp>
+      <p:sp>
+        <p:nvSpPr>
+          <p:cNvPr id="5" name="Foliennummernplatzhalter 4">
+            <a:extLst>
+              <a:ext uri="{FF2B5EF4-FFF2-40B4-BE49-F238E27FC236}">
+                <a16:creationId xmlns:a16="http://schemas.microsoft.com/office/drawing/2014/main" id="{41BF4A9C-2BB7-1B41-117B-4B1659DA7925}"/>
+              </a:ext>
+            </a:extLst>
+          </p:cNvPr>
+          <p:cNvSpPr>
+            <a:spLocks noGrp="1"/>
+          </p:cNvSpPr>
+          <p:nvPr>
+            <p:ph type="sldNum" sz="quarter" idx="22"/>
+          </p:nvPr>
+        </p:nvSpPr>
+        <p:spPr/>
+        <p:txBody>
+          <a:bodyPr/>
+          <a:lstStyle/>
+          <a:p>
+            <a:fld id="{F86FCC4D-0438-154F-9910-1CF4711F776F}" type="slidenum">
+              <a:rPr lang="de-DE" smtClean="0"/>
+              <a:pPr/>
+              <a:t>14</a:t>
+            </a:fld>
+            <a:endParaRPr lang="de-DE" dirty="0"/>
+          </a:p>
+        </p:txBody>
+      </p:sp>
+      <p:sp>
+        <p:nvSpPr>
+          <p:cNvPr id="6" name="Textplatzhalter 5">
+            <a:extLst>
+              <a:ext uri="{FF2B5EF4-FFF2-40B4-BE49-F238E27FC236}">
+                <a16:creationId xmlns:a16="http://schemas.microsoft.com/office/drawing/2014/main" id="{465BDA60-3023-40C3-0DA1-0A8F397F8611}"/>
+              </a:ext>
+            </a:extLst>
+          </p:cNvPr>
+          <p:cNvSpPr>
+            <a:spLocks noGrp="1"/>
+          </p:cNvSpPr>
+          <p:nvPr>
+            <p:ph type="body" sz="quarter" idx="18"/>
+          </p:nvPr>
+        </p:nvSpPr>
+        <p:spPr/>
+        <p:txBody>
+          <a:bodyPr/>
+          <a:lstStyle/>
+          <a:p>
+            <a:endParaRPr lang="de-DE"/>
+          </a:p>
+        </p:txBody>
+      </p:sp>
+      <p:sp>
+        <p:nvSpPr>
+          <p:cNvPr id="7" name="Titel 6">
+            <a:extLst>
+              <a:ext uri="{FF2B5EF4-FFF2-40B4-BE49-F238E27FC236}">
+                <a16:creationId xmlns:a16="http://schemas.microsoft.com/office/drawing/2014/main" id="{21BBA845-AAE3-35B0-CA00-77E888C12A98}"/>
+              </a:ext>
+            </a:extLst>
+          </p:cNvPr>
+          <p:cNvSpPr>
+            <a:spLocks noGrp="1"/>
+          </p:cNvSpPr>
+          <p:nvPr>
+            <p:ph type="title"/>
+          </p:nvPr>
+        </p:nvSpPr>
+        <p:spPr/>
+        <p:txBody>
+          <a:bodyPr/>
+          <a:lstStyle/>
+          <a:p>
+            <a:r>
+              <a:rPr lang="de-DE" dirty="0"/>
+              <a:t>Cron </a:t>
+            </a:r>
+            <a:r>
+              <a:rPr lang="de-DE" dirty="0" err="1"/>
+              <a:t>jobs</a:t>
+            </a:r>
+            <a:endParaRPr lang="de-DE" dirty="0"/>
+          </a:p>
+        </p:txBody>
+      </p:sp>
+      <p:pic>
+        <p:nvPicPr>
+          <p:cNvPr id="8" name="Picture 7">
+            <a:extLst>
+              <a:ext uri="{FF2B5EF4-FFF2-40B4-BE49-F238E27FC236}">
+                <a16:creationId xmlns:a16="http://schemas.microsoft.com/office/drawing/2014/main" id="{D71E4376-2DC2-2D23-1633-355E80E2571E}"/>
+              </a:ext>
+            </a:extLst>
+          </p:cNvPr>
+          <p:cNvPicPr>
+            <a:picLocks noChangeAspect="1"/>
+          </p:cNvPicPr>
+          <p:nvPr/>
         </p:nvPicPr>
         <p:blipFill>
           <a:blip r:embed="rId3"/>
@@ -42801,551 +43335,18 @@
         </p:blipFill>
         <p:spPr>
           <a:xfrm>
-            <a:off x="4337806" y="2165809"/>
-            <a:ext cx="6732588" cy="706279"/>
-          </a:xfrm>
-        </p:spPr>
-      </p:pic>
-      <p:sp>
-        <p:nvSpPr>
-          <p:cNvPr id="3" name="Datumsplatzhalter 2">
-            <a:extLst>
-              <a:ext uri="{FF2B5EF4-FFF2-40B4-BE49-F238E27FC236}">
-                <a16:creationId xmlns:a16="http://schemas.microsoft.com/office/drawing/2014/main" id="{7CD361C0-F2D6-1522-E197-5519BB3FA076}"/>
-              </a:ext>
-            </a:extLst>
-          </p:cNvPr>
-          <p:cNvSpPr>
-            <a:spLocks noGrp="1"/>
-          </p:cNvSpPr>
-          <p:nvPr>
-            <p:ph type="dt" sz="half" idx="20"/>
-          </p:nvPr>
-        </p:nvSpPr>
-        <p:spPr/>
-        <p:txBody>
-          <a:bodyPr/>
-          <a:lstStyle/>
-          <a:p>
-            <a:fld id="{5DC9953B-096E-4D14-9CB5-13648C592BB5}" type="datetime1">
-              <a:rPr lang="de-DE" smtClean="0"/>
-              <a:t>24.11.22</a:t>
-            </a:fld>
-            <a:endParaRPr lang="de-DE" dirty="0"/>
-          </a:p>
-        </p:txBody>
-      </p:sp>
-      <p:sp>
-        <p:nvSpPr>
-          <p:cNvPr id="4" name="Fußzeilenplatzhalter 3">
-            <a:extLst>
-              <a:ext uri="{FF2B5EF4-FFF2-40B4-BE49-F238E27FC236}">
-                <a16:creationId xmlns:a16="http://schemas.microsoft.com/office/drawing/2014/main" id="{28E78925-D828-270B-0CBA-A8DB423B730F}"/>
-              </a:ext>
-            </a:extLst>
-          </p:cNvPr>
-          <p:cNvSpPr>
-            <a:spLocks noGrp="1"/>
-          </p:cNvSpPr>
-          <p:nvPr>
-            <p:ph type="ftr" sz="quarter" idx="21"/>
-          </p:nvPr>
-        </p:nvSpPr>
-        <p:spPr/>
-        <p:txBody>
-          <a:bodyPr/>
-          <a:lstStyle/>
-          <a:p>
-            <a:r>
-              <a:rPr lang="de-DE" dirty="0"/>
-              <a:t>Linux Privilege </a:t>
-            </a:r>
-            <a:r>
-              <a:rPr lang="de-DE" dirty="0" err="1"/>
-              <a:t>Escalation</a:t>
-            </a:r>
-            <a:r>
-              <a:rPr lang="de-DE" dirty="0"/>
-              <a:t> Workshop</a:t>
-            </a:r>
-          </a:p>
-        </p:txBody>
-      </p:sp>
-      <p:sp>
-        <p:nvSpPr>
-          <p:cNvPr id="5" name="Foliennummernplatzhalter 4">
-            <a:extLst>
-              <a:ext uri="{FF2B5EF4-FFF2-40B4-BE49-F238E27FC236}">
-                <a16:creationId xmlns:a16="http://schemas.microsoft.com/office/drawing/2014/main" id="{41BF4A9C-2BB7-1B41-117B-4B1659DA7925}"/>
-              </a:ext>
-            </a:extLst>
-          </p:cNvPr>
-          <p:cNvSpPr>
-            <a:spLocks noGrp="1"/>
-          </p:cNvSpPr>
-          <p:nvPr>
-            <p:ph type="sldNum" sz="quarter" idx="22"/>
-          </p:nvPr>
-        </p:nvSpPr>
-        <p:spPr/>
-        <p:txBody>
-          <a:bodyPr/>
-          <a:lstStyle/>
-          <a:p>
-            <a:fld id="{F86FCC4D-0438-154F-9910-1CF4711F776F}" type="slidenum">
-              <a:rPr lang="de-DE" smtClean="0"/>
-              <a:pPr/>
-              <a:t>14</a:t>
-            </a:fld>
-            <a:endParaRPr lang="de-DE" dirty="0"/>
-          </a:p>
-        </p:txBody>
-      </p:sp>
-      <p:sp>
-        <p:nvSpPr>
-          <p:cNvPr id="6" name="Textplatzhalter 5">
-            <a:extLst>
-              <a:ext uri="{FF2B5EF4-FFF2-40B4-BE49-F238E27FC236}">
-                <a16:creationId xmlns:a16="http://schemas.microsoft.com/office/drawing/2014/main" id="{465BDA60-3023-40C3-0DA1-0A8F397F8611}"/>
-              </a:ext>
-            </a:extLst>
-          </p:cNvPr>
-          <p:cNvSpPr>
-            <a:spLocks noGrp="1"/>
-          </p:cNvSpPr>
-          <p:nvPr>
-            <p:ph type="body" sz="quarter" idx="18"/>
-          </p:nvPr>
-        </p:nvSpPr>
-        <p:spPr/>
-        <p:txBody>
-          <a:bodyPr/>
-          <a:lstStyle/>
-          <a:p>
-            <a:endParaRPr lang="de-DE"/>
-          </a:p>
-        </p:txBody>
-      </p:sp>
-      <p:sp>
-        <p:nvSpPr>
-          <p:cNvPr id="7" name="Titel 6">
-            <a:extLst>
-              <a:ext uri="{FF2B5EF4-FFF2-40B4-BE49-F238E27FC236}">
-                <a16:creationId xmlns:a16="http://schemas.microsoft.com/office/drawing/2014/main" id="{21BBA845-AAE3-35B0-CA00-77E888C12A98}"/>
-              </a:ext>
-            </a:extLst>
-          </p:cNvPr>
-          <p:cNvSpPr>
-            <a:spLocks noGrp="1"/>
-          </p:cNvSpPr>
-          <p:nvPr>
-            <p:ph type="title"/>
-          </p:nvPr>
-        </p:nvSpPr>
-        <p:spPr/>
-        <p:txBody>
-          <a:bodyPr/>
-          <a:lstStyle/>
-          <a:p>
-            <a:r>
-              <a:rPr lang="de-DE" dirty="0"/>
-              <a:t>SUID/SGID</a:t>
-            </a:r>
-          </a:p>
-        </p:txBody>
-      </p:sp>
-      <p:sp>
-        <p:nvSpPr>
-          <p:cNvPr id="8" name="Textfeld 7">
-            <a:extLst>
-              <a:ext uri="{FF2B5EF4-FFF2-40B4-BE49-F238E27FC236}">
-                <a16:creationId xmlns:a16="http://schemas.microsoft.com/office/drawing/2014/main" id="{66155F9D-C599-4607-1C5B-3CFA704DD5AF}"/>
-              </a:ext>
-            </a:extLst>
-          </p:cNvPr>
-          <p:cNvSpPr txBox="1"/>
-          <p:nvPr/>
-        </p:nvSpPr>
-        <p:spPr>
-          <a:xfrm>
-            <a:off x="611039" y="662834"/>
-            <a:ext cx="2880320" cy="3005951"/>
+            <a:off x="338681" y="791592"/>
+            <a:ext cx="3378200" cy="4559300"/>
           </a:xfrm>
           <a:prstGeom prst="rect">
             <a:avLst/>
           </a:prstGeom>
-          <a:noFill/>
         </p:spPr>
-        <p:txBody>
-          <a:bodyPr wrap="square" lIns="0" tIns="0" rIns="0" bIns="0" rtlCol="0">
-            <a:spAutoFit/>
-          </a:bodyPr>
-          <a:lstStyle/>
-          <a:p>
-            <a:pPr algn="l">
-              <a:spcBef>
-                <a:spcPts val="60"/>
-              </a:spcBef>
-              <a:buSzPct val="100000"/>
-            </a:pPr>
-            <a:r>
-              <a:rPr lang="de-DE" sz="1600" dirty="0">
-                <a:solidFill>
-                  <a:srgbClr val="00B050"/>
-                </a:solidFill>
-                <a:latin typeface="Lucida Sans Typewriter" panose="020B0509030504030204" pitchFamily="49" charset="0"/>
-              </a:rPr>
-              <a:t>Berechtigungen ob ein User eine Datei lesen, schreiben oder ausführen darf hängen an den Dateien selbst.</a:t>
-            </a:r>
-          </a:p>
-          <a:p>
-            <a:pPr algn="l">
-              <a:spcBef>
-                <a:spcPts val="60"/>
-              </a:spcBef>
-              <a:buSzPct val="100000"/>
-            </a:pPr>
-            <a:endParaRPr lang="de-DE" sz="1600" dirty="0">
-              <a:solidFill>
-                <a:srgbClr val="00B050"/>
-              </a:solidFill>
-              <a:latin typeface="Lucida Sans Typewriter" panose="020B0509030504030204" pitchFamily="49" charset="0"/>
-            </a:endParaRPr>
-          </a:p>
-          <a:p>
-            <a:pPr algn="l">
-              <a:spcBef>
-                <a:spcPts val="60"/>
-              </a:spcBef>
-              <a:buSzPct val="100000"/>
-            </a:pPr>
-            <a:r>
-              <a:rPr lang="de-DE" sz="1600" dirty="0">
-                <a:solidFill>
-                  <a:srgbClr val="00B050"/>
-                </a:solidFill>
-                <a:latin typeface="Lucida Sans Typewriter" panose="020B0509030504030204" pitchFamily="49" charset="0"/>
-              </a:rPr>
-              <a:t>Mit dem Befehl `</a:t>
-            </a:r>
-            <a:r>
-              <a:rPr lang="de-DE" sz="1600" dirty="0" err="1">
-                <a:solidFill>
-                  <a:srgbClr val="00B050"/>
-                </a:solidFill>
-                <a:latin typeface="Lucida Sans Typewriter" panose="020B0509030504030204" pitchFamily="49" charset="0"/>
-              </a:rPr>
-              <a:t>ls</a:t>
-            </a:r>
-            <a:r>
-              <a:rPr lang="de-DE" sz="1600" dirty="0">
-                <a:solidFill>
-                  <a:srgbClr val="00B050"/>
-                </a:solidFill>
-                <a:latin typeface="Lucida Sans Typewriter" panose="020B0509030504030204" pitchFamily="49" charset="0"/>
-              </a:rPr>
-              <a:t> -l` kann man sich diese Berechtigungen anzeigen lassen.</a:t>
-            </a:r>
-          </a:p>
-          <a:p>
-            <a:pPr algn="l">
-              <a:spcBef>
-                <a:spcPts val="60"/>
-              </a:spcBef>
-              <a:buSzPct val="100000"/>
-            </a:pPr>
-            <a:endParaRPr lang="de-DE" sz="1600" dirty="0">
-              <a:solidFill>
-                <a:srgbClr val="00B050"/>
-              </a:solidFill>
-              <a:latin typeface="Lucida Sans Typewriter" panose="020B0509030504030204" pitchFamily="49" charset="0"/>
-            </a:endParaRPr>
-          </a:p>
-          <a:p>
-            <a:pPr algn="l">
-              <a:spcBef>
-                <a:spcPts val="60"/>
-              </a:spcBef>
-              <a:buSzPct val="100000"/>
-            </a:pPr>
-            <a:endParaRPr lang="de-DE" sz="1600" dirty="0">
-              <a:solidFill>
-                <a:srgbClr val="00B050"/>
-              </a:solidFill>
-              <a:latin typeface="Lucida Sans Typewriter" panose="020B0509030504030204" pitchFamily="49" charset="0"/>
-            </a:endParaRPr>
-          </a:p>
-        </p:txBody>
-      </p:sp>
-      <p:sp>
-        <p:nvSpPr>
-          <p:cNvPr id="11" name="Textfeld 10">
-            <a:extLst>
-              <a:ext uri="{FF2B5EF4-FFF2-40B4-BE49-F238E27FC236}">
-                <a16:creationId xmlns:a16="http://schemas.microsoft.com/office/drawing/2014/main" id="{C2AEE6D3-1A0A-F38D-8927-D6766E860DA3}"/>
-              </a:ext>
-            </a:extLst>
-          </p:cNvPr>
-          <p:cNvSpPr txBox="1"/>
-          <p:nvPr/>
-        </p:nvSpPr>
-        <p:spPr>
-          <a:xfrm>
-            <a:off x="4356689" y="3463625"/>
-            <a:ext cx="5615390" cy="2539157"/>
-          </a:xfrm>
-          <a:prstGeom prst="rect">
-            <a:avLst/>
-          </a:prstGeom>
-          <a:noFill/>
-        </p:spPr>
-        <p:txBody>
-          <a:bodyPr wrap="square" lIns="0" tIns="0" rIns="0" bIns="0" rtlCol="0">
-            <a:spAutoFit/>
-          </a:bodyPr>
-          <a:lstStyle/>
-          <a:p>
-            <a:pPr marL="144000" indent="-144000" algn="l">
-              <a:spcBef>
-                <a:spcPts val="60"/>
-              </a:spcBef>
-              <a:buSzPct val="100000"/>
-              <a:buFont typeface="Wingdings" panose="05000000000000000000" pitchFamily="2" charset="2"/>
-              <a:buChar char="§"/>
-            </a:pPr>
-            <a:r>
-              <a:rPr lang="de-DE" sz="1600" dirty="0"/>
-              <a:t>Dateien mit SUID-Bit werden immer mit den Rechten des </a:t>
-            </a:r>
-            <a:r>
-              <a:rPr lang="de-DE" sz="1600" dirty="0" err="1"/>
-              <a:t>Owners</a:t>
-            </a:r>
-            <a:r>
-              <a:rPr lang="de-DE" sz="1600" dirty="0"/>
-              <a:t> der Datei ausgeführt</a:t>
-            </a:r>
-          </a:p>
-          <a:p>
-            <a:pPr marL="144000" indent="-144000" algn="l">
-              <a:spcBef>
-                <a:spcPts val="60"/>
-              </a:spcBef>
-              <a:buSzPct val="100000"/>
-              <a:buFont typeface="Wingdings" panose="05000000000000000000" pitchFamily="2" charset="2"/>
-              <a:buChar char="§"/>
-            </a:pPr>
-            <a:r>
-              <a:rPr lang="de-DE" sz="1600" dirty="0"/>
-              <a:t>Dateien die mit dem SUID-/ SGID-Bit lassen sich mit dem find Befehl aufspüren:</a:t>
-            </a:r>
-          </a:p>
-          <a:p>
-            <a:pPr marL="144000" indent="-144000" algn="l">
-              <a:spcBef>
-                <a:spcPts val="60"/>
-              </a:spcBef>
-              <a:buSzPct val="100000"/>
-              <a:buFont typeface="Wingdings" panose="05000000000000000000" pitchFamily="2" charset="2"/>
-              <a:buChar char="§"/>
-            </a:pPr>
-            <a:endParaRPr lang="de-DE" sz="1600" dirty="0"/>
-          </a:p>
-          <a:p>
-            <a:pPr algn="l">
-              <a:spcBef>
-                <a:spcPts val="60"/>
-              </a:spcBef>
-              <a:buSzPct val="100000"/>
-            </a:pPr>
-            <a:r>
-              <a:rPr lang="en-US" sz="1600" b="0" i="0" dirty="0">
-                <a:solidFill>
-                  <a:srgbClr val="D7BA7D"/>
-                </a:solidFill>
-                <a:effectLst/>
-                <a:latin typeface="Consolas" panose="020B0609020204030204" pitchFamily="49" charset="0"/>
-              </a:rPr>
-              <a:t>find / -perm -u=s -user root 2&gt;/dev/null</a:t>
-            </a:r>
-          </a:p>
-          <a:p>
-            <a:pPr algn="l">
-              <a:spcBef>
-                <a:spcPts val="60"/>
-              </a:spcBef>
-              <a:buSzPct val="100000"/>
-            </a:pPr>
-            <a:endParaRPr lang="en-US" sz="1600" dirty="0">
-              <a:solidFill>
-                <a:srgbClr val="D7BA7D"/>
-              </a:solidFill>
-              <a:latin typeface="Consolas" panose="020B0609020204030204" pitchFamily="49" charset="0"/>
-            </a:endParaRPr>
-          </a:p>
-          <a:p>
-            <a:pPr algn="l">
-              <a:spcBef>
-                <a:spcPts val="60"/>
-              </a:spcBef>
-              <a:buSzPct val="100000"/>
-            </a:pPr>
-            <a:endParaRPr lang="en-US" sz="1600" dirty="0">
-              <a:solidFill>
-                <a:srgbClr val="D7BA7D"/>
-              </a:solidFill>
-              <a:latin typeface="Consolas" panose="020B0609020204030204" pitchFamily="49" charset="0"/>
-            </a:endParaRPr>
-          </a:p>
-          <a:p>
-            <a:pPr algn="l">
-              <a:spcBef>
-                <a:spcPts val="60"/>
-              </a:spcBef>
-              <a:buSzPct val="100000"/>
-            </a:pPr>
-            <a:r>
-              <a:rPr lang="en-US" sz="1600" dirty="0">
-                <a:latin typeface="+mj-lt"/>
-              </a:rPr>
-              <a:t>Aufgabe: </a:t>
-            </a:r>
-            <a:r>
-              <a:rPr lang="en-US" sz="1600" dirty="0" err="1">
-                <a:latin typeface="+mj-lt"/>
-              </a:rPr>
-              <a:t>findet</a:t>
-            </a:r>
-            <a:r>
-              <a:rPr lang="en-US" sz="1600" dirty="0">
-                <a:latin typeface="+mj-lt"/>
-              </a:rPr>
-              <a:t> </a:t>
-            </a:r>
-            <a:r>
-              <a:rPr lang="en-US" sz="1600" dirty="0" err="1">
-                <a:latin typeface="+mj-lt"/>
-              </a:rPr>
-              <a:t>heraus</a:t>
-            </a:r>
-            <a:r>
-              <a:rPr lang="en-US" sz="1600" dirty="0">
-                <a:latin typeface="+mj-lt"/>
-              </a:rPr>
-              <a:t>, </a:t>
-            </a:r>
-            <a:r>
-              <a:rPr lang="en-US" sz="1600" dirty="0" err="1">
-                <a:latin typeface="+mj-lt"/>
-              </a:rPr>
-              <a:t>wie</a:t>
-            </a:r>
-            <a:r>
-              <a:rPr lang="en-US" sz="1600" dirty="0">
-                <a:latin typeface="+mj-lt"/>
-              </a:rPr>
-              <a:t> </a:t>
-            </a:r>
-            <a:r>
-              <a:rPr lang="en-US" sz="1600" dirty="0" err="1">
-                <a:latin typeface="+mj-lt"/>
-              </a:rPr>
-              <a:t>Ihr</a:t>
-            </a:r>
-            <a:r>
-              <a:rPr lang="en-US" sz="1600" dirty="0">
-                <a:latin typeface="+mj-lt"/>
-              </a:rPr>
-              <a:t> </a:t>
-            </a:r>
-            <a:r>
-              <a:rPr lang="en-US" sz="1600" dirty="0" err="1">
-                <a:latin typeface="+mj-lt"/>
-              </a:rPr>
-              <a:t>mit</a:t>
-            </a:r>
-            <a:r>
-              <a:rPr lang="en-US" sz="1600" dirty="0">
-                <a:latin typeface="+mj-lt"/>
-              </a:rPr>
-              <a:t> den </a:t>
-            </a:r>
-            <a:r>
-              <a:rPr lang="en-US" sz="1600" dirty="0" err="1">
-                <a:latin typeface="+mj-lt"/>
-              </a:rPr>
-              <a:t>gefundenen</a:t>
-            </a:r>
-            <a:r>
-              <a:rPr lang="en-US" sz="1600" dirty="0">
-                <a:latin typeface="+mj-lt"/>
-              </a:rPr>
-              <a:t> </a:t>
-            </a:r>
-            <a:r>
-              <a:rPr lang="en-US" sz="1600" dirty="0" err="1">
-                <a:latin typeface="+mj-lt"/>
-              </a:rPr>
-              <a:t>Programmen</a:t>
-            </a:r>
-            <a:r>
-              <a:rPr lang="en-US" sz="1600" dirty="0">
-                <a:latin typeface="+mj-lt"/>
-              </a:rPr>
-              <a:t> </a:t>
-            </a:r>
-            <a:r>
-              <a:rPr lang="en-US" sz="1600" dirty="0" err="1">
-                <a:latin typeface="+mj-lt"/>
-              </a:rPr>
-              <a:t>eine</a:t>
-            </a:r>
-            <a:r>
-              <a:rPr lang="en-US" sz="1600" dirty="0">
-                <a:latin typeface="+mj-lt"/>
-              </a:rPr>
-              <a:t> </a:t>
-            </a:r>
-            <a:r>
-              <a:rPr lang="en-US" sz="1600" dirty="0" err="1">
-                <a:latin typeface="+mj-lt"/>
-              </a:rPr>
-              <a:t>rootshell</a:t>
-            </a:r>
-            <a:r>
-              <a:rPr lang="en-US" sz="1600" dirty="0">
-                <a:latin typeface="+mj-lt"/>
-              </a:rPr>
-              <a:t> </a:t>
-            </a:r>
-            <a:r>
-              <a:rPr lang="en-US" sz="1600" dirty="0" err="1">
-                <a:latin typeface="+mj-lt"/>
-              </a:rPr>
-              <a:t>spawnen</a:t>
-            </a:r>
-            <a:r>
-              <a:rPr lang="en-US" sz="1600" dirty="0">
-                <a:latin typeface="+mj-lt"/>
-              </a:rPr>
-              <a:t> </a:t>
-            </a:r>
-            <a:r>
-              <a:rPr lang="en-US" sz="1600" dirty="0" err="1">
-                <a:latin typeface="+mj-lt"/>
-              </a:rPr>
-              <a:t>könnt</a:t>
-            </a:r>
-            <a:endParaRPr lang="de-DE" sz="1600" dirty="0" err="1">
-              <a:latin typeface="+mj-lt"/>
-            </a:endParaRPr>
-          </a:p>
-        </p:txBody>
-      </p:sp>
+      </p:pic>
     </p:spTree>
     <p:extLst>
       <p:ext uri="{BB962C8B-B14F-4D97-AF65-F5344CB8AC3E}">
-        <p14:creationId xmlns:p14="http://schemas.microsoft.com/office/powerpoint/2010/main" val="821384128"/>
+        <p14:creationId xmlns:p14="http://schemas.microsoft.com/office/powerpoint/2010/main" val="3145884605"/>
       </p:ext>
     </p:extLst>
   </p:cSld>
@@ -43401,88 +43402,108 @@
           <a:bodyPr/>
           <a:lstStyle/>
           <a:p>
+            <a:r>
+              <a:rPr lang="en-GB" b="1" dirty="0" err="1"/>
+              <a:t>Lesen</a:t>
+            </a:r>
+            <a:endParaRPr lang="en-GB" b="1" dirty="0"/>
+          </a:p>
+          <a:p>
+            <a:pPr lvl="2"/>
+            <a:r>
+              <a:rPr lang="en-GB" dirty="0">
+                <a:hlinkClick r:id="rId3"/>
+              </a:rPr>
+              <a:t>https://book.hacktricks.xyz/linux-hardening/privilege-escalation</a:t>
+            </a:r>
+            <a:endParaRPr lang="en-GB" dirty="0"/>
+          </a:p>
+          <a:p>
+            <a:pPr lvl="2"/>
+            <a:r>
+              <a:rPr lang="en-GB" dirty="0">
+                <a:hlinkClick r:id="rId4"/>
+              </a:rPr>
+              <a:t>https://enotes.nickapic.com/Linux-Priv-Esc-285bbed8681645c38c32a6952f4e52af</a:t>
+            </a:r>
+            <a:endParaRPr lang="en-GB" dirty="0"/>
+          </a:p>
+          <a:p>
+            <a:pPr lvl="2"/>
+            <a:r>
+              <a:rPr lang="en-GB" dirty="0">
+                <a:hlinkClick r:id="rId5"/>
+              </a:rPr>
+              <a:t>https://github.com/Aksheet10/Cyber-security-resources#linux</a:t>
+            </a:r>
+            <a:endParaRPr lang="en-GB" dirty="0"/>
+          </a:p>
+          <a:p>
+            <a:pPr marL="216000" lvl="2" indent="0">
+              <a:buNone/>
+            </a:pPr>
+            <a:endParaRPr lang="en-GB" dirty="0"/>
+          </a:p>
+          <a:p>
+            <a:r>
+              <a:rPr lang="en-GB" b="1" dirty="0" err="1"/>
+              <a:t>Lernen</a:t>
+            </a:r>
+            <a:r>
+              <a:rPr lang="en-GB" b="1" dirty="0"/>
+              <a:t> und CTFs</a:t>
+            </a:r>
+          </a:p>
+          <a:p>
+            <a:pPr lvl="2"/>
+            <a:r>
+              <a:rPr lang="en-GB" dirty="0">
+                <a:hlinkClick r:id="rId6"/>
+              </a:rPr>
+              <a:t>https://tryhackme.com</a:t>
+            </a:r>
+            <a:endParaRPr lang="en-GB" dirty="0"/>
+          </a:p>
+          <a:p>
+            <a:pPr lvl="2"/>
+            <a:r>
+              <a:rPr lang="en-GB" dirty="0">
+                <a:hlinkClick r:id="rId7"/>
+              </a:rPr>
+              <a:t>https://app.hackthebox.com</a:t>
+            </a:r>
+            <a:endParaRPr lang="en-GB" dirty="0"/>
+          </a:p>
+          <a:p>
+            <a:pPr lvl="2"/>
+            <a:r>
+              <a:rPr lang="en-GB" dirty="0">
+                <a:hlinkClick r:id="rId8"/>
+              </a:rPr>
+              <a:t>https://academy.hackthebox.com</a:t>
+            </a:r>
+            <a:endParaRPr lang="en-GB" dirty="0"/>
+          </a:p>
+          <a:p>
+            <a:pPr lvl="2"/>
+            <a:r>
+              <a:rPr lang="en-GB" dirty="0">
+                <a:hlinkClick r:id="rId9"/>
+              </a:rPr>
+              <a:t>https://razvioverflow.github.io/starthacking</a:t>
+            </a:r>
             <a:endParaRPr lang="de-DE" dirty="0"/>
           </a:p>
           <a:p>
-            <a:r>
-              <a:rPr lang="de-DE" dirty="0"/>
-              <a:t>Mit dem Befehl `</a:t>
-            </a:r>
-            <a:r>
-              <a:rPr lang="de-DE" dirty="0" err="1"/>
-              <a:t>getcap</a:t>
-            </a:r>
-            <a:r>
-              <a:rPr lang="de-DE" dirty="0"/>
-              <a:t>` lassen sich </a:t>
-            </a:r>
-            <a:r>
-              <a:rPr lang="de-DE" dirty="0" err="1"/>
-              <a:t>Executables</a:t>
-            </a:r>
-            <a:r>
-              <a:rPr lang="de-DE" dirty="0"/>
-              <a:t> mit erweiterten </a:t>
-            </a:r>
-            <a:r>
-              <a:rPr lang="de-DE" dirty="0" err="1"/>
-              <a:t>Capabilities</a:t>
-            </a:r>
-            <a:r>
-              <a:rPr lang="de-DE" dirty="0"/>
-              <a:t> aufspüren. (Um die Ausgabe kompakt zu halten werfen wir die Fehlerausgaben weg `2&gt;/</a:t>
-            </a:r>
-            <a:r>
-              <a:rPr lang="de-DE" dirty="0" err="1"/>
-              <a:t>dev</a:t>
-            </a:r>
-            <a:r>
-              <a:rPr lang="de-DE" dirty="0"/>
-              <a:t>/null`)</a:t>
-            </a:r>
-          </a:p>
-          <a:p>
-            <a:r>
-              <a:rPr lang="de-DE" dirty="0"/>
-              <a:t>`</a:t>
-            </a:r>
-            <a:r>
-              <a:rPr lang="de-DE" dirty="0" err="1"/>
-              <a:t>getcap</a:t>
-            </a:r>
-            <a:r>
-              <a:rPr lang="de-DE" dirty="0"/>
-              <a:t> -r / 2&gt;/</a:t>
-            </a:r>
-            <a:r>
-              <a:rPr lang="de-DE" dirty="0" err="1"/>
-              <a:t>dev</a:t>
-            </a:r>
-            <a:r>
-              <a:rPr lang="de-DE" dirty="0"/>
-              <a:t>/null`</a:t>
-            </a:r>
-          </a:p>
-          <a:p>
+            <a:pPr lvl="2"/>
             <a:endParaRPr lang="de-DE" dirty="0"/>
           </a:p>
           <a:p>
+            <a:pPr lvl="2"/>
             <a:endParaRPr lang="de-DE" dirty="0"/>
           </a:p>
           <a:p>
             <a:endParaRPr lang="de-DE" dirty="0"/>
-          </a:p>
-          <a:p>
-            <a:endParaRPr lang="de-DE" dirty="0"/>
-          </a:p>
-          <a:p>
-            <a:endParaRPr lang="de-DE" dirty="0"/>
-          </a:p>
-          <a:p>
-            <a:r>
-              <a:rPr lang="de-DE" dirty="0"/>
-              <a:t>Aufgabe: Ihr kennt das Spiel ;)</a:t>
-            </a:r>
           </a:p>
         </p:txBody>
       </p:sp>
@@ -43576,759 +43597,6 @@
               <a:rPr lang="de-DE" smtClean="0"/>
               <a:pPr/>
               <a:t>15</a:t>
-            </a:fld>
-            <a:endParaRPr lang="de-DE" dirty="0"/>
-          </a:p>
-        </p:txBody>
-      </p:sp>
-      <p:sp>
-        <p:nvSpPr>
-          <p:cNvPr id="6" name="Textplatzhalter 5">
-            <a:extLst>
-              <a:ext uri="{FF2B5EF4-FFF2-40B4-BE49-F238E27FC236}">
-                <a16:creationId xmlns:a16="http://schemas.microsoft.com/office/drawing/2014/main" id="{465BDA60-3023-40C3-0DA1-0A8F397F8611}"/>
-              </a:ext>
-            </a:extLst>
-          </p:cNvPr>
-          <p:cNvSpPr>
-            <a:spLocks noGrp="1"/>
-          </p:cNvSpPr>
-          <p:nvPr>
-            <p:ph type="body" sz="quarter" idx="18"/>
-          </p:nvPr>
-        </p:nvSpPr>
-        <p:spPr/>
-        <p:txBody>
-          <a:bodyPr/>
-          <a:lstStyle/>
-          <a:p>
-            <a:endParaRPr lang="de-DE"/>
-          </a:p>
-        </p:txBody>
-      </p:sp>
-      <p:sp>
-        <p:nvSpPr>
-          <p:cNvPr id="7" name="Titel 6">
-            <a:extLst>
-              <a:ext uri="{FF2B5EF4-FFF2-40B4-BE49-F238E27FC236}">
-                <a16:creationId xmlns:a16="http://schemas.microsoft.com/office/drawing/2014/main" id="{21BBA845-AAE3-35B0-CA00-77E888C12A98}"/>
-              </a:ext>
-            </a:extLst>
-          </p:cNvPr>
-          <p:cNvSpPr>
-            <a:spLocks noGrp="1"/>
-          </p:cNvSpPr>
-          <p:nvPr>
-            <p:ph type="title"/>
-          </p:nvPr>
-        </p:nvSpPr>
-        <p:spPr/>
-        <p:txBody>
-          <a:bodyPr/>
-          <a:lstStyle/>
-          <a:p>
-            <a:r>
-              <a:rPr lang="de-DE" dirty="0" err="1"/>
-              <a:t>Capabilities</a:t>
-            </a:r>
-            <a:endParaRPr lang="de-DE" dirty="0"/>
-          </a:p>
-        </p:txBody>
-      </p:sp>
-      <p:sp>
-        <p:nvSpPr>
-          <p:cNvPr id="8" name="Textfeld 7">
-            <a:extLst>
-              <a:ext uri="{FF2B5EF4-FFF2-40B4-BE49-F238E27FC236}">
-                <a16:creationId xmlns:a16="http://schemas.microsoft.com/office/drawing/2014/main" id="{A16AA867-A1B0-22EF-7A33-C2745778FD17}"/>
-              </a:ext>
-            </a:extLst>
-          </p:cNvPr>
-          <p:cNvSpPr txBox="1"/>
-          <p:nvPr/>
-        </p:nvSpPr>
-        <p:spPr>
-          <a:xfrm>
-            <a:off x="611039" y="662834"/>
-            <a:ext cx="2880320" cy="2513509"/>
-          </a:xfrm>
-          <a:prstGeom prst="rect">
-            <a:avLst/>
-          </a:prstGeom>
-          <a:noFill/>
-        </p:spPr>
-        <p:txBody>
-          <a:bodyPr wrap="square" lIns="0" tIns="0" rIns="0" bIns="0" rtlCol="0">
-            <a:spAutoFit/>
-          </a:bodyPr>
-          <a:lstStyle/>
-          <a:p>
-            <a:pPr algn="l">
-              <a:spcBef>
-                <a:spcPts val="60"/>
-              </a:spcBef>
-              <a:buSzPct val="100000"/>
-            </a:pPr>
-            <a:r>
-              <a:rPr lang="de-DE" sz="1600" dirty="0" err="1">
-                <a:solidFill>
-                  <a:srgbClr val="00B050"/>
-                </a:solidFill>
-                <a:latin typeface="Lucida Sans Typewriter" panose="020B0509030504030204" pitchFamily="49" charset="0"/>
-              </a:rPr>
-              <a:t>Capabilities</a:t>
-            </a:r>
-            <a:r>
-              <a:rPr lang="de-DE" sz="1600" dirty="0">
-                <a:solidFill>
-                  <a:srgbClr val="00B050"/>
-                </a:solidFill>
-                <a:latin typeface="Lucida Sans Typewriter" panose="020B0509030504030204" pitchFamily="49" charset="0"/>
-              </a:rPr>
-              <a:t> sind eine Möglichkeit Rechte feingranularer zu vergeben.</a:t>
-            </a:r>
-          </a:p>
-          <a:p>
-            <a:pPr algn="l">
-              <a:spcBef>
-                <a:spcPts val="60"/>
-              </a:spcBef>
-              <a:buSzPct val="100000"/>
-            </a:pPr>
-            <a:endParaRPr lang="de-DE" sz="1600" dirty="0">
-              <a:solidFill>
-                <a:srgbClr val="00B050"/>
-              </a:solidFill>
-              <a:latin typeface="Lucida Sans Typewriter" panose="020B0509030504030204" pitchFamily="49" charset="0"/>
-            </a:endParaRPr>
-          </a:p>
-          <a:p>
-            <a:pPr algn="l">
-              <a:spcBef>
-                <a:spcPts val="60"/>
-              </a:spcBef>
-              <a:buSzPct val="100000"/>
-            </a:pPr>
-            <a:r>
-              <a:rPr lang="de-DE" sz="1600" dirty="0">
-                <a:solidFill>
-                  <a:srgbClr val="00B050"/>
-                </a:solidFill>
-                <a:latin typeface="Lucida Sans Typewriter" panose="020B0509030504030204" pitchFamily="49" charset="0"/>
-              </a:rPr>
-              <a:t>Damit können einem Tool einzelne Berechtigungen zugewiesen werden.</a:t>
-            </a:r>
-          </a:p>
-          <a:p>
-            <a:pPr algn="l">
-              <a:spcBef>
-                <a:spcPts val="60"/>
-              </a:spcBef>
-              <a:buSzPct val="100000"/>
-            </a:pPr>
-            <a:endParaRPr lang="de-DE" sz="1600" dirty="0">
-              <a:solidFill>
-                <a:srgbClr val="00B050"/>
-              </a:solidFill>
-              <a:latin typeface="Lucida Sans Typewriter" panose="020B0509030504030204" pitchFamily="49" charset="0"/>
-            </a:endParaRPr>
-          </a:p>
-          <a:p>
-            <a:pPr algn="l">
-              <a:spcBef>
-                <a:spcPts val="60"/>
-              </a:spcBef>
-              <a:buSzPct val="100000"/>
-            </a:pPr>
-            <a:endParaRPr lang="de-DE" sz="1600" dirty="0">
-              <a:solidFill>
-                <a:srgbClr val="00B050"/>
-              </a:solidFill>
-              <a:latin typeface="Lucida Sans Typewriter" panose="020B0509030504030204" pitchFamily="49" charset="0"/>
-            </a:endParaRPr>
-          </a:p>
-        </p:txBody>
-      </p:sp>
-    </p:spTree>
-    <p:extLst>
-      <p:ext uri="{BB962C8B-B14F-4D97-AF65-F5344CB8AC3E}">
-        <p14:creationId xmlns:p14="http://schemas.microsoft.com/office/powerpoint/2010/main" val="1586874804"/>
-      </p:ext>
-    </p:extLst>
-  </p:cSld>
-  <p:clrMapOvr>
-    <a:masterClrMapping/>
-  </p:clrMapOvr>
-  <mc:AlternateContent xmlns:mc="http://schemas.openxmlformats.org/markup-compatibility/2006" xmlns:p14="http://schemas.microsoft.com/office/powerpoint/2010/main">
-    <mc:Choice Requires="p14">
-      <p:transition p14:dur="10"/>
-    </mc:Choice>
-    <mc:Fallback xmlns="">
-      <p:transition/>
-    </mc:Fallback>
-  </mc:AlternateContent>
-</p:sld>
-</file>
-
-<file path=ppt/slides/slide16.xml><?xml version="1.0" encoding="utf-8"?>
-<p:sld xmlns:a="http://schemas.openxmlformats.org/drawingml/2006/main" xmlns:r="http://schemas.openxmlformats.org/officeDocument/2006/relationships" xmlns:p="http://schemas.openxmlformats.org/presentationml/2006/main">
-  <p:cSld>
-    <p:spTree>
-      <p:nvGrpSpPr>
-        <p:cNvPr id="1" name=""/>
-        <p:cNvGrpSpPr/>
-        <p:nvPr/>
-      </p:nvGrpSpPr>
-      <p:grpSpPr>
-        <a:xfrm>
-          <a:off x="0" y="0"/>
-          <a:ext cx="0" cy="0"/>
-          <a:chOff x="0" y="0"/>
-          <a:chExt cx="0" cy="0"/>
-        </a:xfrm>
-      </p:grpSpPr>
-      <p:sp>
-        <p:nvSpPr>
-          <p:cNvPr id="2" name="Inhaltsplatzhalter 1">
-            <a:extLst>
-              <a:ext uri="{FF2B5EF4-FFF2-40B4-BE49-F238E27FC236}">
-                <a16:creationId xmlns:a16="http://schemas.microsoft.com/office/drawing/2014/main" id="{DE1EE909-DD3A-58D2-3F07-57F08C0C8F5A}"/>
-              </a:ext>
-            </a:extLst>
-          </p:cNvPr>
-          <p:cNvSpPr>
-            <a:spLocks noGrp="1"/>
-          </p:cNvSpPr>
-          <p:nvPr>
-            <p:ph sz="quarter" idx="17"/>
-          </p:nvPr>
-        </p:nvSpPr>
-        <p:spPr/>
-        <p:txBody>
-          <a:bodyPr/>
-          <a:lstStyle/>
-          <a:p>
-            <a:r>
-              <a:rPr lang="de-DE" dirty="0"/>
-              <a:t>automatisierte Ausführung von Programmen oder Skripten zu bestimmten Zeitpunkten</a:t>
-            </a:r>
-          </a:p>
-          <a:p>
-            <a:r>
-              <a:rPr lang="de-DE" dirty="0"/>
-              <a:t>definiert in der Cron Tabelle /</a:t>
-            </a:r>
-            <a:r>
-              <a:rPr lang="de-DE" dirty="0" err="1"/>
-              <a:t>etc</a:t>
-            </a:r>
-            <a:r>
-              <a:rPr lang="de-DE" dirty="0"/>
-              <a:t>/</a:t>
-            </a:r>
-            <a:r>
-              <a:rPr lang="de-DE" dirty="0" err="1"/>
-              <a:t>crontab</a:t>
-            </a:r>
-            <a:endParaRPr lang="de-DE" dirty="0"/>
-          </a:p>
-          <a:p>
-            <a:pPr lvl="2"/>
-            <a:r>
-              <a:rPr lang="de-DE" dirty="0"/>
-              <a:t>beinhaltet die </a:t>
-            </a:r>
-            <a:r>
-              <a:rPr lang="de-DE" dirty="0" err="1"/>
-              <a:t>shell</a:t>
-            </a:r>
-            <a:r>
-              <a:rPr lang="de-DE" dirty="0"/>
-              <a:t>, die Cron verwenden soll</a:t>
-            </a:r>
-          </a:p>
-          <a:p>
-            <a:pPr lvl="2"/>
-            <a:r>
-              <a:rPr lang="de-DE" dirty="0"/>
-              <a:t>eine Pfad-Variable</a:t>
-            </a:r>
-          </a:p>
-          <a:p>
-            <a:pPr lvl="2"/>
-            <a:r>
-              <a:rPr lang="de-DE" dirty="0"/>
-              <a:t>eine Menge an Jobs mit Ausführungszeitpunkt, User und Befehl</a:t>
-            </a:r>
-          </a:p>
-          <a:p>
-            <a:r>
-              <a:rPr lang="de-DE" dirty="0"/>
-              <a:t>Cron führt das Kommando mit dem definierten User aus</a:t>
-            </a:r>
-          </a:p>
-          <a:p>
-            <a:endParaRPr lang="de-DE" dirty="0"/>
-          </a:p>
-          <a:p>
-            <a:r>
-              <a:rPr lang="de-DE" dirty="0"/>
-              <a:t>Aufgaben:</a:t>
-            </a:r>
-          </a:p>
-          <a:p>
-            <a:pPr lvl="2"/>
-            <a:r>
-              <a:rPr lang="de-DE" dirty="0"/>
-              <a:t>Pfad-Variable</a:t>
-            </a:r>
-          </a:p>
-          <a:p>
-            <a:pPr lvl="2"/>
-            <a:r>
-              <a:rPr lang="de-DE" dirty="0"/>
-              <a:t>Schwache Berechtigungen</a:t>
-            </a:r>
-          </a:p>
-          <a:p>
-            <a:pPr lvl="2"/>
-            <a:r>
-              <a:rPr lang="de-DE" dirty="0"/>
-              <a:t>Wildcard </a:t>
-            </a:r>
-            <a:r>
-              <a:rPr lang="de-DE" dirty="0" err="1"/>
-              <a:t>Unjection</a:t>
-            </a:r>
-            <a:endParaRPr lang="de-DE" dirty="0"/>
-          </a:p>
-          <a:p>
-            <a:endParaRPr lang="de-DE" dirty="0"/>
-          </a:p>
-          <a:p>
-            <a:pPr lvl="2"/>
-            <a:endParaRPr lang="de-DE" dirty="0"/>
-          </a:p>
-          <a:p>
-            <a:pPr lvl="2"/>
-            <a:endParaRPr lang="de-DE" dirty="0"/>
-          </a:p>
-          <a:p>
-            <a:pPr lvl="2"/>
-            <a:endParaRPr lang="de-DE" dirty="0"/>
-          </a:p>
-          <a:p>
-            <a:endParaRPr lang="de-DE" dirty="0"/>
-          </a:p>
-        </p:txBody>
-      </p:sp>
-      <p:sp>
-        <p:nvSpPr>
-          <p:cNvPr id="3" name="Datumsplatzhalter 2">
-            <a:extLst>
-              <a:ext uri="{FF2B5EF4-FFF2-40B4-BE49-F238E27FC236}">
-                <a16:creationId xmlns:a16="http://schemas.microsoft.com/office/drawing/2014/main" id="{7CD361C0-F2D6-1522-E197-5519BB3FA076}"/>
-              </a:ext>
-            </a:extLst>
-          </p:cNvPr>
-          <p:cNvSpPr>
-            <a:spLocks noGrp="1"/>
-          </p:cNvSpPr>
-          <p:nvPr>
-            <p:ph type="dt" sz="half" idx="20"/>
-          </p:nvPr>
-        </p:nvSpPr>
-        <p:spPr/>
-        <p:txBody>
-          <a:bodyPr/>
-          <a:lstStyle/>
-          <a:p>
-            <a:fld id="{5DC9953B-096E-4D14-9CB5-13648C592BB5}" type="datetime1">
-              <a:rPr lang="de-DE" smtClean="0"/>
-              <a:t>24.11.22</a:t>
-            </a:fld>
-            <a:endParaRPr lang="de-DE" dirty="0"/>
-          </a:p>
-        </p:txBody>
-      </p:sp>
-      <p:sp>
-        <p:nvSpPr>
-          <p:cNvPr id="4" name="Fußzeilenplatzhalter 3">
-            <a:extLst>
-              <a:ext uri="{FF2B5EF4-FFF2-40B4-BE49-F238E27FC236}">
-                <a16:creationId xmlns:a16="http://schemas.microsoft.com/office/drawing/2014/main" id="{28E78925-D828-270B-0CBA-A8DB423B730F}"/>
-              </a:ext>
-            </a:extLst>
-          </p:cNvPr>
-          <p:cNvSpPr>
-            <a:spLocks noGrp="1"/>
-          </p:cNvSpPr>
-          <p:nvPr>
-            <p:ph type="ftr" sz="quarter" idx="21"/>
-          </p:nvPr>
-        </p:nvSpPr>
-        <p:spPr/>
-        <p:txBody>
-          <a:bodyPr/>
-          <a:lstStyle/>
-          <a:p>
-            <a:r>
-              <a:rPr lang="de-DE" dirty="0"/>
-              <a:t>Linux Privilege </a:t>
-            </a:r>
-            <a:r>
-              <a:rPr lang="de-DE" dirty="0" err="1"/>
-              <a:t>Escalation</a:t>
-            </a:r>
-            <a:r>
-              <a:rPr lang="de-DE" dirty="0"/>
-              <a:t> Workshop</a:t>
-            </a:r>
-          </a:p>
-        </p:txBody>
-      </p:sp>
-      <p:sp>
-        <p:nvSpPr>
-          <p:cNvPr id="5" name="Foliennummernplatzhalter 4">
-            <a:extLst>
-              <a:ext uri="{FF2B5EF4-FFF2-40B4-BE49-F238E27FC236}">
-                <a16:creationId xmlns:a16="http://schemas.microsoft.com/office/drawing/2014/main" id="{41BF4A9C-2BB7-1B41-117B-4B1659DA7925}"/>
-              </a:ext>
-            </a:extLst>
-          </p:cNvPr>
-          <p:cNvSpPr>
-            <a:spLocks noGrp="1"/>
-          </p:cNvSpPr>
-          <p:nvPr>
-            <p:ph type="sldNum" sz="quarter" idx="22"/>
-          </p:nvPr>
-        </p:nvSpPr>
-        <p:spPr/>
-        <p:txBody>
-          <a:bodyPr/>
-          <a:lstStyle/>
-          <a:p>
-            <a:fld id="{F86FCC4D-0438-154F-9910-1CF4711F776F}" type="slidenum">
-              <a:rPr lang="de-DE" smtClean="0"/>
-              <a:pPr/>
-              <a:t>16</a:t>
-            </a:fld>
-            <a:endParaRPr lang="de-DE" dirty="0"/>
-          </a:p>
-        </p:txBody>
-      </p:sp>
-      <p:sp>
-        <p:nvSpPr>
-          <p:cNvPr id="6" name="Textplatzhalter 5">
-            <a:extLst>
-              <a:ext uri="{FF2B5EF4-FFF2-40B4-BE49-F238E27FC236}">
-                <a16:creationId xmlns:a16="http://schemas.microsoft.com/office/drawing/2014/main" id="{465BDA60-3023-40C3-0DA1-0A8F397F8611}"/>
-              </a:ext>
-            </a:extLst>
-          </p:cNvPr>
-          <p:cNvSpPr>
-            <a:spLocks noGrp="1"/>
-          </p:cNvSpPr>
-          <p:nvPr>
-            <p:ph type="body" sz="quarter" idx="18"/>
-          </p:nvPr>
-        </p:nvSpPr>
-        <p:spPr/>
-        <p:txBody>
-          <a:bodyPr/>
-          <a:lstStyle/>
-          <a:p>
-            <a:endParaRPr lang="de-DE"/>
-          </a:p>
-        </p:txBody>
-      </p:sp>
-      <p:sp>
-        <p:nvSpPr>
-          <p:cNvPr id="7" name="Titel 6">
-            <a:extLst>
-              <a:ext uri="{FF2B5EF4-FFF2-40B4-BE49-F238E27FC236}">
-                <a16:creationId xmlns:a16="http://schemas.microsoft.com/office/drawing/2014/main" id="{21BBA845-AAE3-35B0-CA00-77E888C12A98}"/>
-              </a:ext>
-            </a:extLst>
-          </p:cNvPr>
-          <p:cNvSpPr>
-            <a:spLocks noGrp="1"/>
-          </p:cNvSpPr>
-          <p:nvPr>
-            <p:ph type="title"/>
-          </p:nvPr>
-        </p:nvSpPr>
-        <p:spPr/>
-        <p:txBody>
-          <a:bodyPr/>
-          <a:lstStyle/>
-          <a:p>
-            <a:r>
-              <a:rPr lang="de-DE" dirty="0"/>
-              <a:t>Cron </a:t>
-            </a:r>
-            <a:r>
-              <a:rPr lang="de-DE" dirty="0" err="1"/>
-              <a:t>jobs</a:t>
-            </a:r>
-            <a:endParaRPr lang="de-DE" dirty="0"/>
-          </a:p>
-        </p:txBody>
-      </p:sp>
-    </p:spTree>
-    <p:extLst>
-      <p:ext uri="{BB962C8B-B14F-4D97-AF65-F5344CB8AC3E}">
-        <p14:creationId xmlns:p14="http://schemas.microsoft.com/office/powerpoint/2010/main" val="3145884605"/>
-      </p:ext>
-    </p:extLst>
-  </p:cSld>
-  <p:clrMapOvr>
-    <a:masterClrMapping/>
-  </p:clrMapOvr>
-  <mc:AlternateContent xmlns:mc="http://schemas.openxmlformats.org/markup-compatibility/2006" xmlns:p14="http://schemas.microsoft.com/office/powerpoint/2010/main">
-    <mc:Choice Requires="p14">
-      <p:transition p14:dur="10"/>
-    </mc:Choice>
-    <mc:Fallback xmlns="">
-      <p:transition/>
-    </mc:Fallback>
-  </mc:AlternateContent>
-</p:sld>
-</file>
-
-<file path=ppt/slides/slide17.xml><?xml version="1.0" encoding="utf-8"?>
-<p:sld xmlns:a="http://schemas.openxmlformats.org/drawingml/2006/main" xmlns:r="http://schemas.openxmlformats.org/officeDocument/2006/relationships" xmlns:p="http://schemas.openxmlformats.org/presentationml/2006/main">
-  <p:cSld>
-    <p:spTree>
-      <p:nvGrpSpPr>
-        <p:cNvPr id="1" name=""/>
-        <p:cNvGrpSpPr/>
-        <p:nvPr/>
-      </p:nvGrpSpPr>
-      <p:grpSpPr>
-        <a:xfrm>
-          <a:off x="0" y="0"/>
-          <a:ext cx="0" cy="0"/>
-          <a:chOff x="0" y="0"/>
-          <a:chExt cx="0" cy="0"/>
-        </a:xfrm>
-      </p:grpSpPr>
-      <p:sp>
-        <p:nvSpPr>
-          <p:cNvPr id="2" name="Inhaltsplatzhalter 1">
-            <a:extLst>
-              <a:ext uri="{FF2B5EF4-FFF2-40B4-BE49-F238E27FC236}">
-                <a16:creationId xmlns:a16="http://schemas.microsoft.com/office/drawing/2014/main" id="{DE1EE909-DD3A-58D2-3F07-57F08C0C8F5A}"/>
-              </a:ext>
-            </a:extLst>
-          </p:cNvPr>
-          <p:cNvSpPr>
-            <a:spLocks noGrp="1"/>
-          </p:cNvSpPr>
-          <p:nvPr>
-            <p:ph sz="quarter" idx="17"/>
-          </p:nvPr>
-        </p:nvSpPr>
-        <p:spPr/>
-        <p:txBody>
-          <a:bodyPr/>
-          <a:lstStyle/>
-          <a:p>
-            <a:r>
-              <a:rPr lang="en-GB" b="1" dirty="0" err="1"/>
-              <a:t>Lesen</a:t>
-            </a:r>
-            <a:endParaRPr lang="en-GB" b="1" dirty="0"/>
-          </a:p>
-          <a:p>
-            <a:pPr lvl="2"/>
-            <a:r>
-              <a:rPr lang="en-GB" dirty="0">
-                <a:hlinkClick r:id="rId3"/>
-              </a:rPr>
-              <a:t>https://book.hacktricks.xyz/linux-hardening/privilege-escalation</a:t>
-            </a:r>
-            <a:endParaRPr lang="en-GB" dirty="0"/>
-          </a:p>
-          <a:p>
-            <a:pPr lvl="2"/>
-            <a:r>
-              <a:rPr lang="en-GB" dirty="0">
-                <a:hlinkClick r:id="rId4"/>
-              </a:rPr>
-              <a:t>https://enotes.nickapic.com/Linux-Priv-Esc-285bbed8681645c38c32a6952f4e52af</a:t>
-            </a:r>
-            <a:endParaRPr lang="en-GB" dirty="0"/>
-          </a:p>
-          <a:p>
-            <a:pPr lvl="2"/>
-            <a:r>
-              <a:rPr lang="en-GB" dirty="0">
-                <a:hlinkClick r:id="rId5"/>
-              </a:rPr>
-              <a:t>https://github.com/Aksheet10/Cyber-security-resources#linux</a:t>
-            </a:r>
-            <a:endParaRPr lang="en-GB" dirty="0"/>
-          </a:p>
-          <a:p>
-            <a:pPr marL="216000" lvl="2" indent="0">
-              <a:buNone/>
-            </a:pPr>
-            <a:endParaRPr lang="en-GB" dirty="0"/>
-          </a:p>
-          <a:p>
-            <a:r>
-              <a:rPr lang="en-GB" b="1" dirty="0" err="1"/>
-              <a:t>Lernen</a:t>
-            </a:r>
-            <a:r>
-              <a:rPr lang="en-GB" b="1" dirty="0"/>
-              <a:t> und CTFs</a:t>
-            </a:r>
-          </a:p>
-          <a:p>
-            <a:pPr lvl="2"/>
-            <a:r>
-              <a:rPr lang="en-GB" dirty="0">
-                <a:hlinkClick r:id="rId6"/>
-              </a:rPr>
-              <a:t>https://tryhackme.com</a:t>
-            </a:r>
-            <a:endParaRPr lang="en-GB" dirty="0"/>
-          </a:p>
-          <a:p>
-            <a:pPr lvl="2"/>
-            <a:r>
-              <a:rPr lang="en-GB" dirty="0">
-                <a:hlinkClick r:id="rId7"/>
-              </a:rPr>
-              <a:t>https://app.hackthebox.com</a:t>
-            </a:r>
-            <a:endParaRPr lang="en-GB" dirty="0"/>
-          </a:p>
-          <a:p>
-            <a:pPr lvl="2"/>
-            <a:r>
-              <a:rPr lang="en-GB" dirty="0">
-                <a:hlinkClick r:id="rId8"/>
-              </a:rPr>
-              <a:t>https://academy.hackthebox.com</a:t>
-            </a:r>
-            <a:endParaRPr lang="en-GB" dirty="0"/>
-          </a:p>
-          <a:p>
-            <a:pPr lvl="2"/>
-            <a:r>
-              <a:rPr lang="en-GB" dirty="0">
-                <a:hlinkClick r:id="rId9"/>
-              </a:rPr>
-              <a:t>https://razvioverflow.github.io/starthacking</a:t>
-            </a:r>
-            <a:endParaRPr lang="de-DE" dirty="0"/>
-          </a:p>
-          <a:p>
-            <a:pPr lvl="2"/>
-            <a:endParaRPr lang="de-DE" dirty="0"/>
-          </a:p>
-          <a:p>
-            <a:pPr lvl="2"/>
-            <a:endParaRPr lang="de-DE" dirty="0"/>
-          </a:p>
-          <a:p>
-            <a:endParaRPr lang="de-DE" dirty="0"/>
-          </a:p>
-        </p:txBody>
-      </p:sp>
-      <p:sp>
-        <p:nvSpPr>
-          <p:cNvPr id="3" name="Datumsplatzhalter 2">
-            <a:extLst>
-              <a:ext uri="{FF2B5EF4-FFF2-40B4-BE49-F238E27FC236}">
-                <a16:creationId xmlns:a16="http://schemas.microsoft.com/office/drawing/2014/main" id="{7CD361C0-F2D6-1522-E197-5519BB3FA076}"/>
-              </a:ext>
-            </a:extLst>
-          </p:cNvPr>
-          <p:cNvSpPr>
-            <a:spLocks noGrp="1"/>
-          </p:cNvSpPr>
-          <p:nvPr>
-            <p:ph type="dt" sz="half" idx="20"/>
-          </p:nvPr>
-        </p:nvSpPr>
-        <p:spPr/>
-        <p:txBody>
-          <a:bodyPr/>
-          <a:lstStyle/>
-          <a:p>
-            <a:fld id="{5DC9953B-096E-4D14-9CB5-13648C592BB5}" type="datetime1">
-              <a:rPr lang="de-DE" smtClean="0"/>
-              <a:t>24.11.22</a:t>
-            </a:fld>
-            <a:endParaRPr lang="de-DE" dirty="0"/>
-          </a:p>
-        </p:txBody>
-      </p:sp>
-      <p:sp>
-        <p:nvSpPr>
-          <p:cNvPr id="4" name="Fußzeilenplatzhalter 3">
-            <a:extLst>
-              <a:ext uri="{FF2B5EF4-FFF2-40B4-BE49-F238E27FC236}">
-                <a16:creationId xmlns:a16="http://schemas.microsoft.com/office/drawing/2014/main" id="{28E78925-D828-270B-0CBA-A8DB423B730F}"/>
-              </a:ext>
-            </a:extLst>
-          </p:cNvPr>
-          <p:cNvSpPr>
-            <a:spLocks noGrp="1"/>
-          </p:cNvSpPr>
-          <p:nvPr>
-            <p:ph type="ftr" sz="quarter" idx="21"/>
-          </p:nvPr>
-        </p:nvSpPr>
-        <p:spPr/>
-        <p:txBody>
-          <a:bodyPr/>
-          <a:lstStyle/>
-          <a:p>
-            <a:r>
-              <a:rPr lang="de-DE" dirty="0"/>
-              <a:t>Linux Privilege </a:t>
-            </a:r>
-            <a:r>
-              <a:rPr lang="de-DE" dirty="0" err="1"/>
-              <a:t>Escalation</a:t>
-            </a:r>
-            <a:r>
-              <a:rPr lang="de-DE" dirty="0"/>
-              <a:t> Workshop</a:t>
-            </a:r>
-          </a:p>
-        </p:txBody>
-      </p:sp>
-      <p:sp>
-        <p:nvSpPr>
-          <p:cNvPr id="5" name="Foliennummernplatzhalter 4">
-            <a:extLst>
-              <a:ext uri="{FF2B5EF4-FFF2-40B4-BE49-F238E27FC236}">
-                <a16:creationId xmlns:a16="http://schemas.microsoft.com/office/drawing/2014/main" id="{41BF4A9C-2BB7-1B41-117B-4B1659DA7925}"/>
-              </a:ext>
-            </a:extLst>
-          </p:cNvPr>
-          <p:cNvSpPr>
-            <a:spLocks noGrp="1"/>
-          </p:cNvSpPr>
-          <p:nvPr>
-            <p:ph type="sldNum" sz="quarter" idx="22"/>
-          </p:nvPr>
-        </p:nvSpPr>
-        <p:spPr/>
-        <p:txBody>
-          <a:bodyPr/>
-          <a:lstStyle/>
-          <a:p>
-            <a:fld id="{F86FCC4D-0438-154F-9910-1CF4711F776F}" type="slidenum">
-              <a:rPr lang="de-DE" smtClean="0"/>
-              <a:pPr/>
-              <a:t>17</a:t>
             </a:fld>
             <a:endParaRPr lang="de-DE" dirty="0"/>
           </a:p>
@@ -44430,18 +43698,18 @@
   <p:clrMapOvr>
     <a:masterClrMapping/>
   </p:clrMapOvr>
-  <mc:AlternateContent xmlns:mc="http://schemas.openxmlformats.org/markup-compatibility/2006">
-    <mc:Choice xmlns:p14="http://schemas.microsoft.com/office/powerpoint/2010/main" Requires="p14">
+  <mc:AlternateContent xmlns:mc="http://schemas.openxmlformats.org/markup-compatibility/2006" xmlns:p14="http://schemas.microsoft.com/office/powerpoint/2010/main">
+    <mc:Choice Requires="p14">
       <p:transition p14:dur="10"/>
     </mc:Choice>
-    <mc:Fallback>
+    <mc:Fallback xmlns="">
       <p:transition/>
     </mc:Fallback>
   </mc:AlternateContent>
 </p:sld>
 </file>
 
-<file path=ppt/slides/slide18.xml><?xml version="1.0" encoding="utf-8"?>
+<file path=ppt/slides/slide16.xml><?xml version="1.0" encoding="utf-8"?>
 <p:sld xmlns:a="http://schemas.openxmlformats.org/drawingml/2006/main" xmlns:r="http://schemas.openxmlformats.org/officeDocument/2006/relationships" xmlns:p="http://schemas.openxmlformats.org/presentationml/2006/main">
   <p:cSld>
     <p:spTree>
@@ -44993,47 +44261,91 @@
             </a:r>
           </a:p>
           <a:p>
-            <a:endParaRPr lang="de-DE" dirty="0"/>
-          </a:p>
-          <a:p>
             <a:r>
               <a:rPr lang="en-US" dirty="0"/>
-              <a:t>docker pull </a:t>
+              <a:t>Repo </a:t>
             </a:r>
             <a:r>
               <a:rPr lang="en-US" dirty="0" err="1"/>
-              <a:t>lpeworkshop</a:t>
+              <a:t>auschecken</a:t>
             </a:r>
             <a:r>
               <a:rPr lang="en-US" dirty="0"/>
+              <a:t>: </a:t>
+            </a:r>
+            <a:r>
+              <a:rPr lang="en-US" dirty="0">
+                <a:hlinkClick r:id="rId3"/>
+              </a:rPr>
+              <a:t>https://iteragit.iteratec.de/posswald/linux-privilege-escalation-workshop</a:t>
+            </a:r>
+            <a:endParaRPr lang="en-US" dirty="0"/>
+          </a:p>
+          <a:p>
+            <a:r>
+              <a:rPr lang="en-US" dirty="0"/>
+              <a:t>Docker Image </a:t>
+            </a:r>
+            <a:r>
+              <a:rPr lang="en-US" dirty="0" err="1"/>
+              <a:t>bauen</a:t>
+            </a:r>
+            <a:r>
+              <a:rPr lang="en-US" dirty="0"/>
+              <a:t> und Container </a:t>
+            </a:r>
+            <a:r>
+              <a:rPr lang="en-US" dirty="0" err="1"/>
+              <a:t>starten</a:t>
+            </a:r>
+            <a:endParaRPr lang="en-US" dirty="0"/>
+          </a:p>
+          <a:p>
+            <a:pPr marL="216000" lvl="2" indent="0">
+              <a:buNone/>
+            </a:pPr>
+            <a:r>
+              <a:rPr lang="en-GB" dirty="0"/>
+              <a:t>build ./docker -t </a:t>
+            </a:r>
+            <a:r>
+              <a:rPr lang="en-GB" dirty="0" err="1"/>
+              <a:t>lpe</a:t>
+            </a:r>
+            <a:r>
+              <a:rPr lang="en-GB" dirty="0"/>
               <a:t>/</a:t>
             </a:r>
             <a:r>
-              <a:rPr lang="en-US" dirty="0" err="1"/>
+              <a:rPr lang="en-GB" dirty="0" err="1"/>
               <a:t>hacking:latest</a:t>
             </a:r>
-            <a:endParaRPr lang="en-US" dirty="0"/>
-          </a:p>
-          <a:p>
-            <a:r>
-              <a:rPr lang="en-US" dirty="0"/>
+            <a:endParaRPr lang="en-GB" dirty="0"/>
+          </a:p>
+          <a:p>
+            <a:pPr marL="216000" lvl="2" indent="0">
+              <a:buNone/>
+            </a:pPr>
+            <a:r>
+              <a:rPr lang="en-GB" dirty="0"/>
               <a:t>docker run --rm -it </a:t>
             </a:r>
             <a:r>
-              <a:rPr lang="en-US" dirty="0" err="1"/>
-              <a:t>lpeworkshop</a:t>
-            </a:r>
-            <a:r>
-              <a:rPr lang="en-US" dirty="0"/>
+              <a:rPr lang="en-GB" dirty="0" err="1"/>
+              <a:t>lpe</a:t>
+            </a:r>
+            <a:r>
+              <a:rPr lang="en-GB" dirty="0"/>
               <a:t>/</a:t>
             </a:r>
             <a:r>
-              <a:rPr lang="en-US" dirty="0" err="1"/>
+              <a:rPr lang="en-GB" dirty="0" err="1"/>
               <a:t>hacking:latest</a:t>
             </a:r>
-            <a:endParaRPr lang="en-US" dirty="0"/>
-          </a:p>
-          <a:p>
+            <a:r>
+              <a:rPr lang="en-GB" dirty="0"/>
+              <a:t> </a:t>
+            </a:r>
             <a:endParaRPr lang="en-US" dirty="0"/>
           </a:p>
           <a:p>
@@ -45043,6 +44355,7 @@
             </a:r>
           </a:p>
           <a:p>
+            <a:pPr lvl="2"/>
             <a:r>
               <a:rPr lang="en-US" dirty="0" err="1"/>
               <a:t>Virtualbox</a:t>
@@ -45063,13 +44376,18 @@
               <a:rPr lang="en-US" dirty="0" err="1"/>
               <a:t>importieren</a:t>
             </a:r>
+            <a:endParaRPr lang="en-US" dirty="0"/>
+          </a:p>
+          <a:p>
+            <a:pPr lvl="2"/>
+            <a:r>
+              <a:rPr lang="en-US" dirty="0" err="1"/>
+              <a:t>ssh</a:t>
+            </a:r>
             <a:r>
               <a:rPr lang="en-US" dirty="0"/>
-              <a:t> …</a:t>
-            </a:r>
-          </a:p>
-          <a:p>
-            <a:endParaRPr lang="en-US" dirty="0"/>
+              <a:t> –p 5678 john@127.0.0.1</a:t>
+            </a:r>
           </a:p>
           <a:p>
             <a:r>
@@ -45343,7 +44661,7 @@
           <p:nvPr/>
         </p:nvPicPr>
         <p:blipFill>
-          <a:blip r:embed="rId3"/>
+          <a:blip r:embed="rId4"/>
           <a:stretch>
             <a:fillRect/>
           </a:stretch>
@@ -45725,6 +45043,16 @@
               <a:buNone/>
             </a:pPr>
             <a:r>
+              <a:rPr lang="fr-FR" b="0" dirty="0">
+                <a:solidFill>
+                  <a:srgbClr val="CE9178"/>
+                </a:solidFill>
+                <a:effectLst/>
+                <a:latin typeface="Consolas" panose="020B0609020204030204" pitchFamily="49" charset="0"/>
+              </a:rPr>
+              <a:t> </a:t>
+            </a:r>
+            <a:r>
               <a:rPr lang="fr-FR" b="0" dirty="0" err="1">
                 <a:solidFill>
                   <a:srgbClr val="CE9178"/>
@@ -45757,6 +45085,16 @@
               <a:buNone/>
             </a:pPr>
             <a:r>
+              <a:rPr lang="fr-FR" b="0" dirty="0">
+                <a:solidFill>
+                  <a:srgbClr val="CE9178"/>
+                </a:solidFill>
+                <a:effectLst/>
+                <a:latin typeface="Consolas" panose="020B0609020204030204" pitchFamily="49" charset="0"/>
+              </a:rPr>
+              <a:t> </a:t>
+            </a:r>
+            <a:r>
               <a:rPr lang="fr-FR" b="0" dirty="0" err="1">
                 <a:solidFill>
                   <a:srgbClr val="CE9178"/>
@@ -45779,6 +45117,16 @@
               <a:buNone/>
             </a:pPr>
             <a:r>
+              <a:rPr lang="fr-FR" b="0" dirty="0">
+                <a:solidFill>
+                  <a:srgbClr val="CE9178"/>
+                </a:solidFill>
+                <a:effectLst/>
+                <a:latin typeface="Consolas" panose="020B0609020204030204" pitchFamily="49" charset="0"/>
+              </a:rPr>
+              <a:t> </a:t>
+            </a:r>
+            <a:r>
               <a:rPr lang="fr-FR" b="0" dirty="0" err="1">
                 <a:solidFill>
                   <a:srgbClr val="CE9178"/>
@@ -45818,7 +45166,7 @@
                 <a:effectLst/>
                 <a:latin typeface="Consolas" panose="020B0609020204030204" pitchFamily="49" charset="0"/>
               </a:rPr>
-              <a:t>ls -la</a:t>
+              <a:t> ls –la</a:t>
             </a:r>
             <a:endParaRPr lang="fr-FR" b="0" dirty="0">
               <a:solidFill>
@@ -45840,7 +45188,85 @@
                 <a:effectLst/>
                 <a:latin typeface="Consolas" panose="020B0609020204030204" pitchFamily="49" charset="0"/>
               </a:rPr>
-              <a:t>id</a:t>
+              <a:t> /</a:t>
+            </a:r>
+            <a:r>
+              <a:rPr lang="fr-FR" b="0" dirty="0" err="1">
+                <a:solidFill>
+                  <a:srgbClr val="CE9178"/>
+                </a:solidFill>
+                <a:effectLst/>
+                <a:latin typeface="Consolas" panose="020B0609020204030204" pitchFamily="49" charset="0"/>
+              </a:rPr>
+              <a:t>etc</a:t>
+            </a:r>
+            <a:r>
+              <a:rPr lang="fr-FR" b="0" dirty="0">
+                <a:solidFill>
+                  <a:srgbClr val="CE9178"/>
+                </a:solidFill>
+                <a:effectLst/>
+                <a:latin typeface="Consolas" panose="020B0609020204030204" pitchFamily="49" charset="0"/>
+              </a:rPr>
+              <a:t>/</a:t>
+            </a:r>
+            <a:r>
+              <a:rPr lang="fr-FR" b="0" dirty="0" err="1">
+                <a:solidFill>
+                  <a:srgbClr val="CE9178"/>
+                </a:solidFill>
+                <a:effectLst/>
+                <a:latin typeface="Consolas" panose="020B0609020204030204" pitchFamily="49" charset="0"/>
+              </a:rPr>
+              <a:t>passwd</a:t>
+            </a:r>
+            <a:endParaRPr lang="fr-FR" b="0" dirty="0">
+              <a:solidFill>
+                <a:srgbClr val="CE9178"/>
+              </a:solidFill>
+              <a:effectLst/>
+              <a:latin typeface="Consolas" panose="020B0609020204030204" pitchFamily="49" charset="0"/>
+            </a:endParaRPr>
+          </a:p>
+          <a:p>
+            <a:pPr marL="0" indent="0">
+              <a:buNone/>
+            </a:pPr>
+            <a:r>
+              <a:rPr lang="fr-FR" dirty="0">
+                <a:solidFill>
+                  <a:srgbClr val="CE9178"/>
+                </a:solidFill>
+                <a:latin typeface="Consolas" panose="020B0609020204030204" pitchFamily="49" charset="0"/>
+              </a:rPr>
+              <a:t> /</a:t>
+            </a:r>
+            <a:r>
+              <a:rPr lang="fr-FR" dirty="0" err="1">
+                <a:solidFill>
+                  <a:srgbClr val="CE9178"/>
+                </a:solidFill>
+                <a:latin typeface="Consolas" panose="020B0609020204030204" pitchFamily="49" charset="0"/>
+              </a:rPr>
+              <a:t>etc</a:t>
+            </a:r>
+            <a:r>
+              <a:rPr lang="fr-FR" dirty="0">
+                <a:solidFill>
+                  <a:srgbClr val="CE9178"/>
+                </a:solidFill>
+                <a:latin typeface="Consolas" panose="020B0609020204030204" pitchFamily="49" charset="0"/>
+              </a:rPr>
+              <a:t>/</a:t>
+            </a:r>
+            <a:r>
+              <a:rPr lang="fr-FR" dirty="0" err="1">
+                <a:solidFill>
+                  <a:srgbClr val="CE9178"/>
+                </a:solidFill>
+                <a:latin typeface="Consolas" panose="020B0609020204030204" pitchFamily="49" charset="0"/>
+              </a:rPr>
+              <a:t>shadow</a:t>
             </a:r>
             <a:endParaRPr lang="fr-FR" b="0" dirty="0">
               <a:solidFill>
@@ -45862,7 +45288,7 @@
                 <a:effectLst/>
                 <a:latin typeface="Consolas" panose="020B0609020204030204" pitchFamily="49" charset="0"/>
               </a:rPr>
-              <a:t>/</a:t>
+              <a:t> </a:t>
             </a:r>
             <a:r>
               <a:rPr lang="fr-FR" b="0" dirty="0" err="1">
@@ -45872,27 +45298,7 @@
                 <a:effectLst/>
                 <a:latin typeface="Consolas" panose="020B0609020204030204" pitchFamily="49" charset="0"/>
               </a:rPr>
-              <a:t>etc</a:t>
-            </a:r>
-            <a:r>
-              <a:rPr lang="fr-FR" b="0" dirty="0">
-                <a:solidFill>
-                  <a:srgbClr val="CE9178"/>
-                </a:solidFill>
-                <a:effectLst/>
-                <a:latin typeface="Consolas" panose="020B0609020204030204" pitchFamily="49" charset="0"/>
-              </a:rPr>
-              <a:t>/</a:t>
-            </a:r>
-            <a:r>
-              <a:rPr lang="fr-FR" b="0" dirty="0" err="1">
-                <a:solidFill>
-                  <a:srgbClr val="CE9178"/>
-                </a:solidFill>
-                <a:effectLst/>
-                <a:latin typeface="Consolas" panose="020B0609020204030204" pitchFamily="49" charset="0"/>
-              </a:rPr>
-              <a:t>passwd</a:t>
+              <a:t>history</a:t>
             </a:r>
             <a:endParaRPr lang="fr-FR" b="0" dirty="0">
               <a:solidFill>
@@ -45906,28 +45312,6 @@
             <a:pPr marL="0" indent="0">
               <a:buNone/>
             </a:pPr>
-            <a:r>
-              <a:rPr lang="fr-FR" b="0" dirty="0" err="1">
-                <a:solidFill>
-                  <a:srgbClr val="CE9178"/>
-                </a:solidFill>
-                <a:effectLst/>
-                <a:latin typeface="Consolas" panose="020B0609020204030204" pitchFamily="49" charset="0"/>
-              </a:rPr>
-              <a:t>history</a:t>
-            </a:r>
-            <a:endParaRPr lang="fr-FR" b="0" dirty="0">
-              <a:solidFill>
-                <a:srgbClr val="D4D4D4"/>
-              </a:solidFill>
-              <a:effectLst/>
-              <a:latin typeface="Consolas" panose="020B0609020204030204" pitchFamily="49" charset="0"/>
-            </a:endParaRPr>
-          </a:p>
-          <a:p>
-            <a:pPr marL="0" indent="0">
-              <a:buNone/>
-            </a:pPr>
             <a:endParaRPr lang="de-DE" dirty="0"/>
           </a:p>
         </p:txBody>
@@ -45992,6 +45376,17 @@
             </a:r>
           </a:p>
           <a:p>
+            <a:pPr marL="0" indent="0">
+              <a:buNone/>
+            </a:pPr>
+            <a:endParaRPr lang="de-DE" dirty="0">
+              <a:solidFill>
+                <a:srgbClr val="00B050"/>
+              </a:solidFill>
+              <a:latin typeface="Lucida Sans Typewriter" panose="020B0604020202020204" pitchFamily="49" charset="0"/>
+            </a:endParaRPr>
+          </a:p>
+          <a:p>
             <a:pPr>
               <a:buFont typeface="Arial" panose="020B0604020202020204" pitchFamily="34" charset="0"/>
               <a:buChar char="•"/>
@@ -46033,7 +45428,37 @@
                 </a:solidFill>
                 <a:latin typeface="Lucida Sans Typewriter" panose="020B0604020202020204" pitchFamily="49" charset="0"/>
               </a:rPr>
-              <a:t>Mit diesen Infos lassen sich bspw. Kernel Exploits identifizieren.</a:t>
+              <a:t>Welche Dateien und Verzeichnisse gibt es?</a:t>
+            </a:r>
+          </a:p>
+          <a:p>
+            <a:pPr>
+              <a:buFont typeface="Arial" panose="020B0604020202020204" pitchFamily="34" charset="0"/>
+              <a:buChar char="•"/>
+            </a:pPr>
+            <a:r>
+              <a:rPr lang="de-DE" dirty="0">
+                <a:solidFill>
+                  <a:srgbClr val="00B050"/>
+                </a:solidFill>
+                <a:latin typeface="Lucida Sans Typewriter" panose="020B0604020202020204" pitchFamily="49" charset="0"/>
+              </a:rPr>
+              <a:t>Welche User gibt es?</a:t>
+            </a:r>
+          </a:p>
+          <a:p>
+            <a:pPr>
+              <a:buFont typeface="Arial" panose="020B0604020202020204" pitchFamily="34" charset="0"/>
+              <a:buChar char="•"/>
+            </a:pPr>
+            <a:r>
+              <a:rPr lang="de-DE" dirty="0">
+                <a:solidFill>
+                  <a:srgbClr val="00B050"/>
+                </a:solidFill>
+                <a:latin typeface="Lucida Sans Typewriter" panose="020B0604020202020204" pitchFamily="49" charset="0"/>
+              </a:rPr>
+              <a:t>Mit diesen Infos lassen sich Schwachstellen identifizieren.</a:t>
             </a:r>
           </a:p>
         </p:txBody>
@@ -46071,6 +45496,16 @@
             <a:pPr marL="0" indent="0">
               <a:buNone/>
             </a:pPr>
+            <a:r>
+              <a:rPr lang="de-DE" b="0" dirty="0">
+                <a:solidFill>
+                  <a:srgbClr val="CE9178"/>
+                </a:solidFill>
+                <a:effectLst/>
+                <a:latin typeface="Consolas" panose="020B0609020204030204" pitchFamily="49" charset="0"/>
+              </a:rPr>
+              <a:t> </a:t>
+            </a:r>
             <a:r>
               <a:rPr lang="de-DE" b="0" dirty="0" err="1">
                 <a:solidFill>
@@ -46094,6 +45529,16 @@
               <a:buNone/>
             </a:pPr>
             <a:r>
+              <a:rPr lang="de-DE" b="0" dirty="0">
+                <a:solidFill>
+                  <a:srgbClr val="CE9178"/>
+                </a:solidFill>
+                <a:effectLst/>
+                <a:latin typeface="Consolas" panose="020B0609020204030204" pitchFamily="49" charset="0"/>
+              </a:rPr>
+              <a:t> </a:t>
+            </a:r>
+            <a:r>
               <a:rPr lang="de-DE" b="0" dirty="0" err="1">
                 <a:solidFill>
                   <a:srgbClr val="CE9178"/>
@@ -46121,6 +45566,261 @@
             <a:pPr marL="0" indent="0">
               <a:buNone/>
             </a:pPr>
+            <a:endParaRPr lang="de-DE" dirty="0"/>
+          </a:p>
+          <a:p>
+            <a:pPr marL="0" indent="0">
+              <a:buNone/>
+            </a:pPr>
+            <a:r>
+              <a:rPr lang="de-DE" dirty="0"/>
+              <a:t>Dateien</a:t>
+            </a:r>
+          </a:p>
+          <a:p>
+            <a:pPr marL="0" indent="0">
+              <a:buNone/>
+            </a:pPr>
+            <a:r>
+              <a:rPr lang="de-DE" sz="1600" b="0" dirty="0">
+                <a:solidFill>
+                  <a:srgbClr val="CE9178"/>
+                </a:solidFill>
+                <a:effectLst/>
+                <a:latin typeface="Consolas" panose="020B0609020204030204" pitchFamily="49" charset="0"/>
+              </a:rPr>
+              <a:t> find /</a:t>
+            </a:r>
+            <a:r>
+              <a:rPr lang="de-DE" sz="1600" b="0" dirty="0" err="1">
+                <a:solidFill>
+                  <a:srgbClr val="CE9178"/>
+                </a:solidFill>
+                <a:effectLst/>
+                <a:latin typeface="Consolas" panose="020B0609020204030204" pitchFamily="49" charset="0"/>
+              </a:rPr>
+              <a:t>home</a:t>
+            </a:r>
+            <a:r>
+              <a:rPr lang="de-DE" sz="1600" b="0" dirty="0">
+                <a:solidFill>
+                  <a:srgbClr val="CE9178"/>
+                </a:solidFill>
+                <a:effectLst/>
+                <a:latin typeface="Consolas" panose="020B0609020204030204" pitchFamily="49" charset="0"/>
+              </a:rPr>
+              <a:t> -name </a:t>
+            </a:r>
+            <a:r>
+              <a:rPr lang="de-DE" sz="1600" b="0" dirty="0" err="1">
+                <a:solidFill>
+                  <a:srgbClr val="CE9178"/>
+                </a:solidFill>
+                <a:effectLst/>
+                <a:latin typeface="Consolas" panose="020B0609020204030204" pitchFamily="49" charset="0"/>
+              </a:rPr>
+              <a:t>flag.txt</a:t>
+            </a:r>
+            <a:endParaRPr lang="de-DE" sz="1600" b="0" dirty="0">
+              <a:solidFill>
+                <a:srgbClr val="CE9178"/>
+              </a:solidFill>
+              <a:effectLst/>
+              <a:latin typeface="Consolas" panose="020B0609020204030204" pitchFamily="49" charset="0"/>
+            </a:endParaRPr>
+          </a:p>
+          <a:p>
+            <a:pPr marL="0" indent="0">
+              <a:buNone/>
+            </a:pPr>
+            <a:r>
+              <a:rPr lang="de-DE" sz="1600" b="0" dirty="0">
+                <a:solidFill>
+                  <a:srgbClr val="CE9178"/>
+                </a:solidFill>
+                <a:effectLst/>
+                <a:latin typeface="Consolas" panose="020B0609020204030204" pitchFamily="49" charset="0"/>
+              </a:rPr>
+              <a:t> find / -type d -name </a:t>
+            </a:r>
+            <a:r>
+              <a:rPr lang="de-DE" sz="1600" b="0" dirty="0" err="1">
+                <a:solidFill>
+                  <a:srgbClr val="CE9178"/>
+                </a:solidFill>
+                <a:effectLst/>
+                <a:latin typeface="Consolas" panose="020B0609020204030204" pitchFamily="49" charset="0"/>
+              </a:rPr>
+              <a:t>config</a:t>
+            </a:r>
+            <a:endParaRPr lang="de-DE" sz="1600" b="0" dirty="0">
+              <a:solidFill>
+                <a:srgbClr val="CE9178"/>
+              </a:solidFill>
+              <a:effectLst/>
+              <a:latin typeface="Consolas" panose="020B0609020204030204" pitchFamily="49" charset="0"/>
+            </a:endParaRPr>
+          </a:p>
+          <a:p>
+            <a:pPr marL="0" indent="0">
+              <a:buNone/>
+            </a:pPr>
+            <a:r>
+              <a:rPr lang="de-DE" sz="1600" b="0" dirty="0">
+                <a:solidFill>
+                  <a:srgbClr val="CE9178"/>
+                </a:solidFill>
+                <a:effectLst/>
+                <a:latin typeface="Consolas" panose="020B0609020204030204" pitchFamily="49" charset="0"/>
+              </a:rPr>
+              <a:t> find / -type f -perm 0777</a:t>
+            </a:r>
+          </a:p>
+          <a:p>
+            <a:pPr marL="0" indent="0">
+              <a:buNone/>
+            </a:pPr>
+            <a:r>
+              <a:rPr lang="de-DE" sz="1600" b="0" dirty="0">
+                <a:solidFill>
+                  <a:srgbClr val="CE9178"/>
+                </a:solidFill>
+                <a:effectLst/>
+                <a:latin typeface="Consolas" panose="020B0609020204030204" pitchFamily="49" charset="0"/>
+              </a:rPr>
+              <a:t> find / -perm a=x</a:t>
+            </a:r>
+            <a:endParaRPr lang="de-DE" dirty="0">
+              <a:solidFill>
+                <a:srgbClr val="D4D4D4"/>
+              </a:solidFill>
+              <a:latin typeface="Consolas" panose="020B0609020204030204" pitchFamily="49" charset="0"/>
+            </a:endParaRPr>
+          </a:p>
+          <a:p>
+            <a:pPr marL="0" indent="0">
+              <a:buNone/>
+            </a:pPr>
+            <a:r>
+              <a:rPr lang="de-DE" sz="1600" b="0" dirty="0">
+                <a:solidFill>
+                  <a:srgbClr val="CE9178"/>
+                </a:solidFill>
+                <a:effectLst/>
+                <a:latin typeface="Consolas" panose="020B0609020204030204" pitchFamily="49" charset="0"/>
+              </a:rPr>
+              <a:t> find /</a:t>
+            </a:r>
+            <a:r>
+              <a:rPr lang="de-DE" sz="1600" b="0" dirty="0" err="1">
+                <a:solidFill>
+                  <a:srgbClr val="CE9178"/>
+                </a:solidFill>
+                <a:effectLst/>
+                <a:latin typeface="Consolas" panose="020B0609020204030204" pitchFamily="49" charset="0"/>
+              </a:rPr>
+              <a:t>home</a:t>
+            </a:r>
+            <a:r>
+              <a:rPr lang="de-DE" sz="1600" b="0" dirty="0">
+                <a:solidFill>
+                  <a:srgbClr val="CE9178"/>
+                </a:solidFill>
+                <a:effectLst/>
+                <a:latin typeface="Consolas" panose="020B0609020204030204" pitchFamily="49" charset="0"/>
+              </a:rPr>
+              <a:t> -user </a:t>
+            </a:r>
+            <a:r>
+              <a:rPr lang="de-DE" sz="1600" b="0" dirty="0" err="1">
+                <a:solidFill>
+                  <a:srgbClr val="CE9178"/>
+                </a:solidFill>
+                <a:effectLst/>
+                <a:latin typeface="Consolas" panose="020B0609020204030204" pitchFamily="49" charset="0"/>
+              </a:rPr>
+              <a:t>debian</a:t>
+            </a:r>
+            <a:r>
+              <a:rPr lang="de-DE" sz="1600" b="0" dirty="0">
+                <a:solidFill>
+                  <a:srgbClr val="D4D4D4"/>
+                </a:solidFill>
+                <a:effectLst/>
+                <a:latin typeface="Consolas" panose="020B0609020204030204" pitchFamily="49" charset="0"/>
+              </a:rPr>
+              <a:t> </a:t>
+            </a:r>
+          </a:p>
+          <a:p>
+            <a:pPr marL="0" indent="0">
+              <a:buNone/>
+            </a:pPr>
+            <a:r>
+              <a:rPr lang="de-DE" sz="1600" b="0" dirty="0">
+                <a:solidFill>
+                  <a:srgbClr val="CE9178"/>
+                </a:solidFill>
+                <a:effectLst/>
+                <a:latin typeface="Consolas" panose="020B0609020204030204" pitchFamily="49" charset="0"/>
+              </a:rPr>
+              <a:t> find / -perm -o </a:t>
+            </a:r>
+            <a:r>
+              <a:rPr lang="de-DE" sz="1600" b="0" dirty="0" err="1">
+                <a:solidFill>
+                  <a:srgbClr val="CE9178"/>
+                </a:solidFill>
+                <a:effectLst/>
+                <a:latin typeface="Consolas" panose="020B0609020204030204" pitchFamily="49" charset="0"/>
+              </a:rPr>
+              <a:t>w</a:t>
+            </a:r>
+            <a:r>
+              <a:rPr lang="de-DE" sz="1600" b="0" dirty="0">
+                <a:solidFill>
+                  <a:srgbClr val="CE9178"/>
+                </a:solidFill>
+                <a:effectLst/>
+                <a:latin typeface="Consolas" panose="020B0609020204030204" pitchFamily="49" charset="0"/>
+              </a:rPr>
+              <a:t> -type d</a:t>
+            </a:r>
+          </a:p>
+          <a:p>
+            <a:pPr marL="0" indent="0">
+              <a:buNone/>
+            </a:pPr>
+            <a:r>
+              <a:rPr lang="de-DE" sz="1600" b="0" dirty="0">
+                <a:solidFill>
+                  <a:srgbClr val="CE9178"/>
+                </a:solidFill>
+                <a:effectLst/>
+                <a:latin typeface="Consolas" panose="020B0609020204030204" pitchFamily="49" charset="0"/>
+              </a:rPr>
+              <a:t> find / -perm -</a:t>
+            </a:r>
+            <a:r>
+              <a:rPr lang="de-DE" sz="1600" b="0" dirty="0" err="1">
+                <a:solidFill>
+                  <a:srgbClr val="CE9178"/>
+                </a:solidFill>
+                <a:effectLst/>
+                <a:latin typeface="Consolas" panose="020B0609020204030204" pitchFamily="49" charset="0"/>
+              </a:rPr>
+              <a:t>u</a:t>
+            </a:r>
+            <a:r>
+              <a:rPr lang="de-DE" sz="1600" b="0" dirty="0">
+                <a:solidFill>
+                  <a:srgbClr val="CE9178"/>
+                </a:solidFill>
+                <a:effectLst/>
+                <a:latin typeface="Consolas" panose="020B0609020204030204" pitchFamily="49" charset="0"/>
+              </a:rPr>
+              <a:t>=s -type f</a:t>
+            </a:r>
             <a:endParaRPr lang="de-DE" dirty="0"/>
           </a:p>
         </p:txBody>
@@ -46309,330 +46009,72 @@
           <a:lstStyle/>
           <a:p>
             <a:r>
-              <a:rPr lang="de-DE" sz="1500" b="0" dirty="0">
-                <a:solidFill>
-                  <a:srgbClr val="CE9178"/>
-                </a:solidFill>
-                <a:effectLst/>
-                <a:latin typeface="Consolas" panose="020B0609020204030204" pitchFamily="49" charset="0"/>
+              <a:rPr lang="de-DE" dirty="0" err="1">
+                <a:hlinkClick r:id="rId3"/>
               </a:rPr>
-              <a:t>find /</a:t>
-            </a:r>
-            <a:r>
-              <a:rPr lang="de-DE" sz="1500" b="0" dirty="0" err="1">
-                <a:solidFill>
-                  <a:srgbClr val="CE9178"/>
-                </a:solidFill>
-                <a:effectLst/>
-                <a:latin typeface="Consolas" panose="020B0609020204030204" pitchFamily="49" charset="0"/>
+              <a:t>LinPeas</a:t>
+            </a:r>
+            <a:endParaRPr lang="de-DE" dirty="0"/>
+          </a:p>
+          <a:p>
+            <a:r>
+              <a:rPr lang="de-DE" dirty="0" err="1">
+                <a:hlinkClick r:id="rId4"/>
               </a:rPr>
-              <a:t>home</a:t>
-            </a:r>
-            <a:r>
-              <a:rPr lang="de-DE" sz="1500" b="0" dirty="0">
-                <a:solidFill>
-                  <a:srgbClr val="CE9178"/>
-                </a:solidFill>
-                <a:effectLst/>
-                <a:latin typeface="Consolas" panose="020B0609020204030204" pitchFamily="49" charset="0"/>
+              <a:t>LinEnum</a:t>
+            </a:r>
+            <a:endParaRPr lang="de-DE" dirty="0"/>
+          </a:p>
+          <a:p>
+            <a:r>
+              <a:rPr lang="de-DE" dirty="0">
+                <a:hlinkClick r:id="rId5"/>
               </a:rPr>
-              <a:t> -name </a:t>
-            </a:r>
-            <a:r>
-              <a:rPr lang="de-DE" sz="1500" b="0" dirty="0" err="1">
-                <a:solidFill>
-                  <a:srgbClr val="CE9178"/>
-                </a:solidFill>
-                <a:effectLst/>
-                <a:latin typeface="Consolas" panose="020B0609020204030204" pitchFamily="49" charset="0"/>
+              <a:t>LES (Linux Exploit </a:t>
+            </a:r>
+            <a:r>
+              <a:rPr lang="de-DE" dirty="0" err="1">
+                <a:hlinkClick r:id="rId5"/>
               </a:rPr>
-              <a:t>flag.txt</a:t>
-            </a:r>
-            <a:r>
-              <a:rPr lang="de-DE" sz="1500" b="0" dirty="0">
-                <a:solidFill>
-                  <a:srgbClr val="D4D4D4"/>
-                </a:solidFill>
-                <a:effectLst/>
-                <a:latin typeface="Consolas" panose="020B0609020204030204" pitchFamily="49" charset="0"/>
+              <a:t>Suggester</a:t>
+            </a:r>
+            <a:r>
+              <a:rPr lang="de-DE" dirty="0">
+                <a:hlinkClick r:id="rId5"/>
               </a:rPr>
-              <a:t> Datei “</a:t>
-            </a:r>
-            <a:r>
-              <a:rPr lang="de-DE" sz="1500" b="0" dirty="0" err="1">
-                <a:solidFill>
-                  <a:srgbClr val="D4D4D4"/>
-                </a:solidFill>
-                <a:effectLst/>
-                <a:latin typeface="Consolas" panose="020B0609020204030204" pitchFamily="49" charset="0"/>
+              <a:t>)</a:t>
+            </a:r>
+            <a:endParaRPr lang="de-DE" dirty="0"/>
+          </a:p>
+          <a:p>
+            <a:r>
+              <a:rPr lang="de-DE" dirty="0">
+                <a:hlinkClick r:id="rId6"/>
               </a:rPr>
-              <a:t>flag.txt</a:t>
-            </a:r>
-            <a:r>
-              <a:rPr lang="de-DE" sz="1500" b="0" dirty="0">
-                <a:solidFill>
-                  <a:srgbClr val="D4D4D4"/>
-                </a:solidFill>
-                <a:effectLst/>
-                <a:latin typeface="Consolas" panose="020B0609020204030204" pitchFamily="49" charset="0"/>
+              <a:t>Linux Smart Enumeration</a:t>
+            </a:r>
+            <a:endParaRPr lang="de-DE" dirty="0"/>
+          </a:p>
+          <a:p>
+            <a:r>
+              <a:rPr lang="de-DE" dirty="0">
+                <a:hlinkClick r:id="rId7"/>
               </a:rPr>
-              <a:t>” im /</a:t>
-            </a:r>
-            <a:r>
-              <a:rPr lang="de-DE" sz="1500" b="0" dirty="0" err="1">
-                <a:solidFill>
-                  <a:srgbClr val="D4D4D4"/>
-                </a:solidFill>
-                <a:effectLst/>
-                <a:latin typeface="Consolas" panose="020B0609020204030204" pitchFamily="49" charset="0"/>
+              <a:t>Linux </a:t>
+            </a:r>
+            <a:r>
+              <a:rPr lang="de-DE" dirty="0" err="1">
+                <a:hlinkClick r:id="rId7"/>
               </a:rPr>
-              <a:t>home</a:t>
-            </a:r>
-            <a:r>
-              <a:rPr lang="de-DE" sz="1500" b="0" dirty="0">
-                <a:solidFill>
-                  <a:srgbClr val="D4D4D4"/>
-                </a:solidFill>
-                <a:effectLst/>
-                <a:latin typeface="Consolas" panose="020B0609020204030204" pitchFamily="49" charset="0"/>
+              <a:t>Priv</a:t>
+            </a:r>
+            <a:r>
+              <a:rPr lang="de-DE" dirty="0">
+                <a:hlinkClick r:id="rId7"/>
               </a:rPr>
-              <a:t> Verzeichnis</a:t>
-            </a:r>
-          </a:p>
-          <a:p>
-            <a:r>
-              <a:rPr lang="de-DE" sz="1500" b="0" dirty="0">
-                <a:solidFill>
-                  <a:srgbClr val="CE9178"/>
-                </a:solidFill>
-                <a:effectLst/>
-                <a:latin typeface="Consolas" panose="020B0609020204030204" pitchFamily="49" charset="0"/>
-              </a:rPr>
-              <a:t>find / -type d -name </a:t>
-            </a:r>
-            <a:r>
-              <a:rPr lang="de-DE" sz="1500" b="0" dirty="0" err="1">
-                <a:solidFill>
-                  <a:srgbClr val="CE9178"/>
-                </a:solidFill>
-                <a:effectLst/>
-                <a:latin typeface="Consolas" panose="020B0609020204030204" pitchFamily="49" charset="0"/>
-              </a:rPr>
-              <a:t>config</a:t>
-            </a:r>
-            <a:r>
-              <a:rPr lang="de-DE" sz="1500" b="0" dirty="0">
-                <a:solidFill>
-                  <a:srgbClr val="D4D4D4"/>
-                </a:solidFill>
-                <a:effectLst/>
-                <a:latin typeface="Consolas" panose="020B0609020204030204" pitchFamily="49" charset="0"/>
-              </a:rPr>
-              <a:t> Verzeichnis "</a:t>
-            </a:r>
-            <a:r>
-              <a:rPr lang="de-DE" sz="1500" b="0" dirty="0" err="1">
-                <a:solidFill>
-                  <a:srgbClr val="D4D4D4"/>
-                </a:solidFill>
-                <a:effectLst/>
-                <a:latin typeface="Consolas" panose="020B0609020204030204" pitchFamily="49" charset="0"/>
-              </a:rPr>
-              <a:t>config</a:t>
-            </a:r>
-            <a:r>
-              <a:rPr lang="de-DE" sz="1500" b="0" dirty="0">
-                <a:solidFill>
-                  <a:srgbClr val="D4D4D4"/>
-                </a:solidFill>
-                <a:effectLst/>
-                <a:latin typeface="Consolas" panose="020B0609020204030204" pitchFamily="49" charset="0"/>
-              </a:rPr>
-              <a:t>" unter “/”</a:t>
-            </a:r>
-          </a:p>
-          <a:p>
-            <a:r>
-              <a:rPr lang="de-DE" sz="1500" b="0" dirty="0">
-                <a:solidFill>
-                  <a:srgbClr val="CE9178"/>
-                </a:solidFill>
-                <a:effectLst/>
-                <a:latin typeface="Consolas" panose="020B0609020204030204" pitchFamily="49" charset="0"/>
-              </a:rPr>
-              <a:t>find / -type f -perm 0777</a:t>
-            </a:r>
-            <a:r>
-              <a:rPr lang="de-DE" sz="1500" b="0" dirty="0">
-                <a:solidFill>
-                  <a:srgbClr val="D4D4D4"/>
-                </a:solidFill>
-                <a:effectLst/>
-                <a:latin typeface="Consolas" panose="020B0609020204030204" pitchFamily="49" charset="0"/>
-              </a:rPr>
-              <a:t> Alle Dateien mit 777 Berechtigung (lesen, schreiben und ausführen für alle Benutzer)</a:t>
-            </a:r>
-          </a:p>
-          <a:p>
-            <a:r>
-              <a:rPr lang="de-DE" sz="1500" b="0" dirty="0">
-                <a:solidFill>
-                  <a:srgbClr val="CE9178"/>
-                </a:solidFill>
-                <a:effectLst/>
-                <a:latin typeface="Consolas" panose="020B0609020204030204" pitchFamily="49" charset="0"/>
-              </a:rPr>
-              <a:t>find / -perm a=x</a:t>
-            </a:r>
-            <a:r>
-              <a:rPr lang="de-DE" sz="1500" b="0" dirty="0">
-                <a:solidFill>
-                  <a:srgbClr val="D4D4D4"/>
-                </a:solidFill>
-                <a:effectLst/>
-                <a:latin typeface="Consolas" panose="020B0609020204030204" pitchFamily="49" charset="0"/>
-              </a:rPr>
-              <a:t> Ausführbare Dateien</a:t>
-            </a:r>
-          </a:p>
-          <a:p>
-            <a:r>
-              <a:rPr lang="de-DE" sz="1500" b="0" dirty="0">
-                <a:solidFill>
-                  <a:srgbClr val="CE9178"/>
-                </a:solidFill>
-                <a:effectLst/>
-                <a:latin typeface="Consolas" panose="020B0609020204030204" pitchFamily="49" charset="0"/>
-              </a:rPr>
-              <a:t>find /</a:t>
-            </a:r>
-            <a:r>
-              <a:rPr lang="de-DE" sz="1500" b="0" dirty="0" err="1">
-                <a:solidFill>
-                  <a:srgbClr val="CE9178"/>
-                </a:solidFill>
-                <a:effectLst/>
-                <a:latin typeface="Consolas" panose="020B0609020204030204" pitchFamily="49" charset="0"/>
-              </a:rPr>
-              <a:t>home</a:t>
-            </a:r>
-            <a:r>
-              <a:rPr lang="de-DE" sz="1500" b="0" dirty="0">
-                <a:solidFill>
-                  <a:srgbClr val="CE9178"/>
-                </a:solidFill>
-                <a:effectLst/>
-                <a:latin typeface="Consolas" panose="020B0609020204030204" pitchFamily="49" charset="0"/>
-              </a:rPr>
-              <a:t> -user </a:t>
-            </a:r>
-            <a:r>
-              <a:rPr lang="de-DE" sz="1500" b="0" dirty="0" err="1">
-                <a:solidFill>
-                  <a:srgbClr val="CE9178"/>
-                </a:solidFill>
-                <a:effectLst/>
-                <a:latin typeface="Consolas" panose="020B0609020204030204" pitchFamily="49" charset="0"/>
-              </a:rPr>
-              <a:t>debian</a:t>
-            </a:r>
-            <a:r>
-              <a:rPr lang="de-DE" sz="1500" b="0" dirty="0">
-                <a:solidFill>
-                  <a:srgbClr val="D4D4D4"/>
-                </a:solidFill>
-                <a:effectLst/>
-                <a:latin typeface="Consolas" panose="020B0609020204030204" pitchFamily="49" charset="0"/>
-              </a:rPr>
-              <a:t> Dateien des Benutzers “</a:t>
-            </a:r>
-            <a:r>
-              <a:rPr lang="de-DE" sz="1500" b="0" dirty="0" err="1">
-                <a:solidFill>
-                  <a:srgbClr val="D4D4D4"/>
-                </a:solidFill>
-                <a:effectLst/>
-                <a:latin typeface="Consolas" panose="020B0609020204030204" pitchFamily="49" charset="0"/>
-              </a:rPr>
-              <a:t>debian</a:t>
-            </a:r>
-            <a:r>
-              <a:rPr lang="de-DE" sz="1500" b="0" dirty="0">
-                <a:solidFill>
-                  <a:srgbClr val="D4D4D4"/>
-                </a:solidFill>
-                <a:effectLst/>
-                <a:latin typeface="Consolas" panose="020B0609020204030204" pitchFamily="49" charset="0"/>
-              </a:rPr>
-              <a:t>” unter “/</a:t>
-            </a:r>
-            <a:r>
-              <a:rPr lang="de-DE" sz="1500" b="0" dirty="0" err="1">
-                <a:solidFill>
-                  <a:srgbClr val="D4D4D4"/>
-                </a:solidFill>
-                <a:effectLst/>
-                <a:latin typeface="Consolas" panose="020B0609020204030204" pitchFamily="49" charset="0"/>
-              </a:rPr>
-              <a:t>home</a:t>
-            </a:r>
-            <a:r>
-              <a:rPr lang="de-DE" sz="1500" b="0" dirty="0">
-                <a:solidFill>
-                  <a:srgbClr val="D4D4D4"/>
-                </a:solidFill>
-                <a:effectLst/>
-                <a:latin typeface="Consolas" panose="020B0609020204030204" pitchFamily="49" charset="0"/>
-              </a:rPr>
-              <a:t>”</a:t>
-            </a:r>
-          </a:p>
-          <a:p>
-            <a:r>
-              <a:rPr lang="de-DE" sz="1500" b="0" dirty="0">
-                <a:solidFill>
-                  <a:srgbClr val="CE9178"/>
-                </a:solidFill>
-                <a:effectLst/>
-                <a:latin typeface="Consolas" panose="020B0609020204030204" pitchFamily="49" charset="0"/>
-              </a:rPr>
-              <a:t>find / -perm -o w -type d</a:t>
-            </a:r>
-            <a:r>
-              <a:rPr lang="de-DE" sz="1500" b="0" dirty="0">
-                <a:solidFill>
-                  <a:srgbClr val="D4D4D4"/>
-                </a:solidFill>
-                <a:effectLst/>
-                <a:latin typeface="Consolas" panose="020B0609020204030204" pitchFamily="49" charset="0"/>
-              </a:rPr>
-              <a:t> Alle für alle Benutzer schreibbaren Verzeichnisse</a:t>
-            </a:r>
-          </a:p>
-          <a:p>
-            <a:r>
-              <a:rPr lang="de-DE" sz="1500" b="0" dirty="0">
-                <a:solidFill>
-                  <a:srgbClr val="CE9178"/>
-                </a:solidFill>
-                <a:effectLst/>
-                <a:latin typeface="Consolas" panose="020B0609020204030204" pitchFamily="49" charset="0"/>
-              </a:rPr>
-              <a:t>find / -perm -u=s -type f</a:t>
-            </a:r>
-            <a:r>
-              <a:rPr lang="de-DE" sz="1500" b="0" dirty="0">
-                <a:solidFill>
-                  <a:srgbClr val="D4D4D4"/>
-                </a:solidFill>
-                <a:effectLst/>
-                <a:latin typeface="Consolas" panose="020B0609020204030204" pitchFamily="49" charset="0"/>
-              </a:rPr>
-              <a:t> Alle Dateien mit gesetztem SUID Bit</a:t>
-            </a:r>
-          </a:p>
-          <a:p>
-            <a:endParaRPr lang="de-DE" sz="1500" dirty="0"/>
+              <a:t> Checker</a:t>
+            </a:r>
+            <a:endParaRPr lang="de-DE" dirty="0"/>
           </a:p>
         </p:txBody>
       </p:sp>
@@ -46690,9 +46132,9 @@
                 <a:solidFill>
                   <a:srgbClr val="00B050"/>
                 </a:solidFill>
-                <a:latin typeface="Lucida Sans Typewriter" panose="020B0604020202020204" pitchFamily="49" charset="0"/>
+                <a:latin typeface="Lucida Sans Typewriter" panose="020B0509030504030204" pitchFamily="49" charset="0"/>
               </a:rPr>
-              <a:t>Welche Dateien und Verzeichnisse gibt es?</a:t>
+              <a:t>Es gibt auch Skripte und Tools, welche einem die Enumeration abnehmen. Das kann sehr viel Zeit sparen, möglicherweise übersehen diese Tools allerdings etwas.</a:t>
             </a:r>
           </a:p>
           <a:p>
@@ -46717,13 +46159,53 @@
                 </a:solidFill>
                 <a:latin typeface="Lucida Sans Typewriter" panose="020B0509030504030204" pitchFamily="49" charset="0"/>
               </a:rPr>
-              <a:t>Mit find lässt sich das gesamte System durchsuchen</a:t>
-            </a:r>
-          </a:p>
-          <a:p>
-            <a:pPr marL="0" indent="0">
-              <a:buNone/>
-            </a:pPr>
+              <a:t>Die Skripte liegen zum ausprobieren auf der Maschine im Ordner /</a:t>
+            </a:r>
+            <a:r>
+              <a:rPr lang="de-DE" dirty="0" err="1">
+                <a:solidFill>
+                  <a:srgbClr val="00B050"/>
+                </a:solidFill>
+                <a:latin typeface="Lucida Sans Typewriter" panose="020B0509030504030204" pitchFamily="49" charset="0"/>
+              </a:rPr>
+              <a:t>home</a:t>
+            </a:r>
+            <a:r>
+              <a:rPr lang="de-DE" dirty="0">
+                <a:solidFill>
+                  <a:srgbClr val="00B050"/>
+                </a:solidFill>
+                <a:latin typeface="Lucida Sans Typewriter" panose="020B0509030504030204" pitchFamily="49" charset="0"/>
+              </a:rPr>
+              <a:t>/</a:t>
+            </a:r>
+            <a:r>
+              <a:rPr lang="de-DE" dirty="0" err="1">
+                <a:solidFill>
+                  <a:srgbClr val="00B050"/>
+                </a:solidFill>
+                <a:latin typeface="Lucida Sans Typewriter" panose="020B0509030504030204" pitchFamily="49" charset="0"/>
+              </a:rPr>
+              <a:t>john</a:t>
+            </a:r>
+            <a:r>
+              <a:rPr lang="de-DE" dirty="0">
+                <a:solidFill>
+                  <a:srgbClr val="00B050"/>
+                </a:solidFill>
+                <a:latin typeface="Lucida Sans Typewriter" panose="020B0509030504030204" pitchFamily="49" charset="0"/>
+              </a:rPr>
+              <a:t>/</a:t>
+            </a:r>
+            <a:r>
+              <a:rPr lang="de-DE" dirty="0" err="1">
+                <a:solidFill>
+                  <a:srgbClr val="00B050"/>
+                </a:solidFill>
+                <a:latin typeface="Lucida Sans Typewriter" panose="020B0509030504030204" pitchFamily="49" charset="0"/>
+              </a:rPr>
+              <a:t>enum</a:t>
+            </a:r>
             <a:endParaRPr lang="de-DE" dirty="0">
               <a:solidFill>
                 <a:srgbClr val="00B050"/>
@@ -46731,86 +46213,6 @@
               <a:latin typeface="Lucida Sans Typewriter" panose="020B0509030504030204" pitchFamily="49" charset="0"/>
             </a:endParaRPr>
           </a:p>
-          <a:p>
-            <a:pPr marL="0" indent="0">
-              <a:buNone/>
-            </a:pPr>
-            <a:endParaRPr lang="de-DE" dirty="0">
-              <a:solidFill>
-                <a:srgbClr val="00B050"/>
-              </a:solidFill>
-              <a:latin typeface="Lucida Sans Typewriter" panose="020B0509030504030204" pitchFamily="49" charset="0"/>
-            </a:endParaRPr>
-          </a:p>
-          <a:p>
-            <a:pPr marL="0" indent="0">
-              <a:buNone/>
-            </a:pPr>
-            <a:r>
-              <a:rPr lang="de-DE" dirty="0">
-                <a:solidFill>
-                  <a:srgbClr val="00B050"/>
-                </a:solidFill>
-                <a:latin typeface="Lucida Sans Typewriter" panose="020B0509030504030204" pitchFamily="49" charset="0"/>
-              </a:rPr>
-              <a:t>Tipp:</a:t>
-            </a:r>
-          </a:p>
-          <a:p>
-            <a:pPr marL="0" indent="0">
-              <a:buNone/>
-            </a:pPr>
-            <a:r>
-              <a:rPr lang="de-DE" dirty="0">
-                <a:solidFill>
-                  <a:srgbClr val="00B050"/>
-                </a:solidFill>
-                <a:latin typeface="Consolas" panose="020B0609020204030204" pitchFamily="49" charset="0"/>
-              </a:rPr>
-              <a:t>`</a:t>
-            </a:r>
-            <a:r>
-              <a:rPr lang="de-DE" b="0" dirty="0">
-                <a:solidFill>
-                  <a:srgbClr val="00B050"/>
-                </a:solidFill>
-                <a:effectLst/>
-                <a:latin typeface="Consolas" panose="020B0609020204030204" pitchFamily="49" charset="0"/>
-              </a:rPr>
-              <a:t>...  2&gt;/</a:t>
-            </a:r>
-            <a:r>
-              <a:rPr lang="de-DE" b="0" dirty="0" err="1">
-                <a:solidFill>
-                  <a:srgbClr val="00B050"/>
-                </a:solidFill>
-                <a:effectLst/>
-                <a:latin typeface="Consolas" panose="020B0609020204030204" pitchFamily="49" charset="0"/>
-              </a:rPr>
-              <a:t>dev</a:t>
-            </a:r>
-            <a:r>
-              <a:rPr lang="de-DE" b="0" dirty="0">
-                <a:solidFill>
-                  <a:srgbClr val="00B050"/>
-                </a:solidFill>
-                <a:effectLst/>
-                <a:latin typeface="Consolas" panose="020B0609020204030204" pitchFamily="49" charset="0"/>
-              </a:rPr>
-              <a:t>/null` leitet Fehler ins digitale Nirvana um</a:t>
-            </a:r>
-          </a:p>
-          <a:p>
-            <a:pPr marL="0" indent="0">
-              <a:buNone/>
-            </a:pPr>
-            <a:endParaRPr lang="de-DE" dirty="0">
-              <a:solidFill>
-                <a:srgbClr val="00B050"/>
-              </a:solidFill>
-              <a:latin typeface="Lucida Sans Typewriter" panose="020B0509030504030204" pitchFamily="49" charset="0"/>
-            </a:endParaRPr>
-          </a:p>
         </p:txBody>
       </p:sp>
       <p:sp>
@@ -46836,7 +46238,7 @@
           <a:p>
             <a:r>
               <a:rPr lang="de-DE" dirty="0"/>
-              <a:t>Enumeration (2)</a:t>
+              <a:t>Enumeration (automatisiert)</a:t>
             </a:r>
           </a:p>
         </p:txBody>
@@ -46844,7 +46246,7 @@
     </p:spTree>
     <p:extLst>
       <p:ext uri="{BB962C8B-B14F-4D97-AF65-F5344CB8AC3E}">
-        <p14:creationId xmlns:p14="http://schemas.microsoft.com/office/powerpoint/2010/main" val="3440783024"/>
+        <p14:creationId xmlns:p14="http://schemas.microsoft.com/office/powerpoint/2010/main" val="1318923679"/>
       </p:ext>
     </p:extLst>
   </p:cSld>
@@ -46879,336 +46281,37 @@
           <a:chExt cx="0" cy="0"/>
         </a:xfrm>
       </p:grpSpPr>
-      <p:sp>
-        <p:nvSpPr>
-          <p:cNvPr id="3" name="Datumsplatzhalter 2">
-            <a:extLst>
-              <a:ext uri="{FF2B5EF4-FFF2-40B4-BE49-F238E27FC236}">
-                <a16:creationId xmlns:a16="http://schemas.microsoft.com/office/drawing/2014/main" id="{A0EC85B1-3C45-483D-9CF9-271D17B871AB}"/>
-              </a:ext>
-            </a:extLst>
-          </p:cNvPr>
-          <p:cNvSpPr>
-            <a:spLocks noGrp="1"/>
-          </p:cNvSpPr>
+      <p:pic>
+        <p:nvPicPr>
+          <p:cNvPr id="13" name="Bildplatzhalter 12" descr="Ein Bild, das Text enthält.&#10;&#10;Automatisch generierte Beschreibung">
+            <a:extLst>
+              <a:ext uri="{FF2B5EF4-FFF2-40B4-BE49-F238E27FC236}">
+                <a16:creationId xmlns:a16="http://schemas.microsoft.com/office/drawing/2014/main" id="{4769C27D-7E84-16FF-A32E-12FED3CCB379}"/>
+              </a:ext>
+            </a:extLst>
+          </p:cNvPr>
+          <p:cNvPicPr>
+            <a:picLocks noGrp="1" noChangeAspect="1"/>
+          </p:cNvPicPr>
           <p:nvPr>
-            <p:ph type="dt" sz="half" idx="14"/>
+            <p:ph type="pic" sz="quarter" idx="15"/>
           </p:nvPr>
-        </p:nvSpPr>
+        </p:nvPicPr>
+        <p:blipFill>
+          <a:blip r:embed="rId2"/>
+          <a:srcRect l="8158" r="8158"/>
+          <a:stretch>
+            <a:fillRect/>
+          </a:stretch>
+        </p:blipFill>
         <p:spPr/>
-        <p:txBody>
-          <a:bodyPr/>
-          <a:lstStyle/>
-          <a:p>
-            <a:fld id="{A08A1C78-06F3-42EE-A611-DC03295AE284}" type="datetime1">
-              <a:rPr lang="de-DE" smtClean="0"/>
-              <a:pPr/>
-              <a:t>24.11.22</a:t>
-            </a:fld>
-            <a:endParaRPr lang="de-DE" dirty="0"/>
-          </a:p>
-        </p:txBody>
-      </p:sp>
-      <p:sp>
-        <p:nvSpPr>
-          <p:cNvPr id="4" name="Fußzeilenplatzhalter 3">
-            <a:extLst>
-              <a:ext uri="{FF2B5EF4-FFF2-40B4-BE49-F238E27FC236}">
-                <a16:creationId xmlns:a16="http://schemas.microsoft.com/office/drawing/2014/main" id="{A2E4D442-C7E6-4081-B5D4-D739F74585B6}"/>
-              </a:ext>
-            </a:extLst>
-          </p:cNvPr>
-          <p:cNvSpPr>
-            <a:spLocks noGrp="1"/>
-          </p:cNvSpPr>
-          <p:nvPr>
-            <p:ph type="ftr" sz="quarter" idx="15"/>
-          </p:nvPr>
-        </p:nvSpPr>
-        <p:spPr/>
-        <p:txBody>
-          <a:bodyPr/>
-          <a:lstStyle/>
-          <a:p>
-            <a:r>
-              <a:rPr lang="de-DE" dirty="0"/>
-              <a:t>Linux Privilege </a:t>
-            </a:r>
-            <a:r>
-              <a:rPr lang="de-DE" dirty="0" err="1"/>
-              <a:t>Escalation</a:t>
-            </a:r>
-            <a:r>
-              <a:rPr lang="de-DE" dirty="0"/>
-              <a:t> Workshop</a:t>
-            </a:r>
-          </a:p>
-        </p:txBody>
-      </p:sp>
-      <p:sp>
-        <p:nvSpPr>
-          <p:cNvPr id="5" name="Foliennummernplatzhalter 4">
-            <a:extLst>
-              <a:ext uri="{FF2B5EF4-FFF2-40B4-BE49-F238E27FC236}">
-                <a16:creationId xmlns:a16="http://schemas.microsoft.com/office/drawing/2014/main" id="{5EE620A7-64B7-4F56-A530-263670DC6BFF}"/>
-              </a:ext>
-            </a:extLst>
-          </p:cNvPr>
-          <p:cNvSpPr>
-            <a:spLocks noGrp="1"/>
-          </p:cNvSpPr>
-          <p:nvPr>
-            <p:ph type="sldNum" sz="quarter" idx="16"/>
-          </p:nvPr>
-        </p:nvSpPr>
-        <p:spPr/>
-        <p:txBody>
-          <a:bodyPr/>
-          <a:lstStyle/>
-          <a:p>
-            <a:fld id="{F86FCC4D-0438-154F-9910-1CF4711F776F}" type="slidenum">
-              <a:rPr lang="de-DE" smtClean="0"/>
-              <a:pPr/>
-              <a:t>7</a:t>
-            </a:fld>
-            <a:endParaRPr lang="de-DE" dirty="0"/>
-          </a:p>
-        </p:txBody>
-      </p:sp>
-      <p:sp>
-        <p:nvSpPr>
-          <p:cNvPr id="6" name="Inhaltsplatzhalter 5">
-            <a:extLst>
-              <a:ext uri="{FF2B5EF4-FFF2-40B4-BE49-F238E27FC236}">
-                <a16:creationId xmlns:a16="http://schemas.microsoft.com/office/drawing/2014/main" id="{C147A54D-230C-49CC-8ED5-B3F9D9515C51}"/>
-              </a:ext>
-            </a:extLst>
-          </p:cNvPr>
-          <p:cNvSpPr>
-            <a:spLocks noGrp="1"/>
-          </p:cNvSpPr>
-          <p:nvPr>
-            <p:ph sz="quarter" idx="17"/>
-          </p:nvPr>
-        </p:nvSpPr>
-        <p:spPr/>
-        <p:txBody>
-          <a:bodyPr/>
-          <a:lstStyle/>
-          <a:p>
-            <a:r>
-              <a:rPr lang="de-DE" dirty="0" err="1">
-                <a:hlinkClick r:id="rId3"/>
-              </a:rPr>
-              <a:t>LinPeas</a:t>
-            </a:r>
-            <a:endParaRPr lang="de-DE" dirty="0"/>
-          </a:p>
-          <a:p>
-            <a:r>
-              <a:rPr lang="de-DE" dirty="0" err="1">
-                <a:hlinkClick r:id="rId4"/>
-              </a:rPr>
-              <a:t>LinEnum</a:t>
-            </a:r>
-            <a:endParaRPr lang="de-DE" dirty="0"/>
-          </a:p>
-          <a:p>
-            <a:r>
-              <a:rPr lang="de-DE" dirty="0">
-                <a:hlinkClick r:id="rId5"/>
-              </a:rPr>
-              <a:t>LES (Linux Exploit </a:t>
-            </a:r>
-            <a:r>
-              <a:rPr lang="de-DE" dirty="0" err="1">
-                <a:hlinkClick r:id="rId5"/>
-              </a:rPr>
-              <a:t>Suggester</a:t>
-            </a:r>
-            <a:r>
-              <a:rPr lang="de-DE" dirty="0">
-                <a:hlinkClick r:id="rId5"/>
-              </a:rPr>
-              <a:t>)</a:t>
-            </a:r>
-            <a:endParaRPr lang="de-DE" dirty="0"/>
-          </a:p>
-          <a:p>
-            <a:r>
-              <a:rPr lang="de-DE" dirty="0">
-                <a:hlinkClick r:id="rId6"/>
-              </a:rPr>
-              <a:t>Linux Smart Enumeration</a:t>
-            </a:r>
-            <a:endParaRPr lang="de-DE" dirty="0"/>
-          </a:p>
-          <a:p>
-            <a:r>
-              <a:rPr lang="de-DE" dirty="0">
-                <a:hlinkClick r:id="rId7"/>
-              </a:rPr>
-              <a:t>Linux </a:t>
-            </a:r>
-            <a:r>
-              <a:rPr lang="de-DE" dirty="0" err="1">
-                <a:hlinkClick r:id="rId7"/>
-              </a:rPr>
-              <a:t>Priv</a:t>
-            </a:r>
-            <a:r>
-              <a:rPr lang="de-DE" dirty="0">
-                <a:hlinkClick r:id="rId7"/>
-              </a:rPr>
-              <a:t> Checker</a:t>
-            </a:r>
-            <a:endParaRPr lang="de-DE" dirty="0"/>
-          </a:p>
-        </p:txBody>
-      </p:sp>
-      <p:sp>
-        <p:nvSpPr>
-          <p:cNvPr id="7" name="Textplatzhalter 6">
-            <a:extLst>
-              <a:ext uri="{FF2B5EF4-FFF2-40B4-BE49-F238E27FC236}">
-                <a16:creationId xmlns:a16="http://schemas.microsoft.com/office/drawing/2014/main" id="{7A0E8C60-8F40-45E7-AFB1-6AC729BD0840}"/>
-              </a:ext>
-            </a:extLst>
-          </p:cNvPr>
-          <p:cNvSpPr>
-            <a:spLocks noGrp="1"/>
-          </p:cNvSpPr>
-          <p:nvPr>
-            <p:ph type="body" sz="quarter" idx="18"/>
-          </p:nvPr>
-        </p:nvSpPr>
-        <p:spPr/>
-        <p:txBody>
-          <a:bodyPr/>
-          <a:lstStyle/>
-          <a:p>
-            <a:endParaRPr lang="de-DE" dirty="0"/>
-          </a:p>
-        </p:txBody>
-      </p:sp>
-      <p:sp>
-        <p:nvSpPr>
-          <p:cNvPr id="9" name="Inhaltsplatzhalter 8">
-            <a:extLst>
-              <a:ext uri="{FF2B5EF4-FFF2-40B4-BE49-F238E27FC236}">
-                <a16:creationId xmlns:a16="http://schemas.microsoft.com/office/drawing/2014/main" id="{3906AB88-8516-45A1-84F0-9B8ED75DF224}"/>
-              </a:ext>
-            </a:extLst>
-          </p:cNvPr>
-          <p:cNvSpPr>
-            <a:spLocks noGrp="1"/>
-          </p:cNvSpPr>
-          <p:nvPr>
-            <p:ph sz="quarter" idx="20"/>
-          </p:nvPr>
-        </p:nvSpPr>
-        <p:spPr/>
-        <p:txBody>
-          <a:bodyPr/>
-          <a:lstStyle/>
-          <a:p>
-            <a:pPr marL="0" indent="0">
-              <a:buNone/>
-            </a:pPr>
-            <a:r>
-              <a:rPr lang="de-DE" dirty="0">
-                <a:solidFill>
-                  <a:srgbClr val="00B050"/>
-                </a:solidFill>
-                <a:latin typeface="Lucida Sans Typewriter" panose="020B0509030504030204" pitchFamily="49" charset="0"/>
-              </a:rPr>
-              <a:t>Es gibt auch Skripte und Tools, welche einem die Enumeration abnehmen. Das kann sehr viel Zeit sparen, möglicherweise übersehen diese Tools allerdings etwas.</a:t>
-            </a:r>
-          </a:p>
-          <a:p>
-            <a:pPr marL="0" indent="0">
-              <a:buNone/>
-            </a:pPr>
-            <a:endParaRPr lang="de-DE" dirty="0">
-              <a:solidFill>
-                <a:srgbClr val="00B050"/>
-              </a:solidFill>
-              <a:latin typeface="Lucida Sans Typewriter" panose="020B0509030504030204" pitchFamily="49" charset="0"/>
-            </a:endParaRPr>
-          </a:p>
-          <a:p>
-            <a:pPr marL="0" indent="0">
-              <a:buNone/>
-            </a:pPr>
-            <a:r>
-              <a:rPr lang="de-DE" dirty="0">
-                <a:solidFill>
-                  <a:srgbClr val="00B050"/>
-                </a:solidFill>
-                <a:latin typeface="Lucida Sans Typewriter" panose="020B0509030504030204" pitchFamily="49" charset="0"/>
-              </a:rPr>
-              <a:t>Die Skripte liegen zum ausprobieren auf der Maschine im Ordner /</a:t>
-            </a:r>
-            <a:r>
-              <a:rPr lang="de-DE" dirty="0" err="1">
-                <a:solidFill>
-                  <a:srgbClr val="00B050"/>
-                </a:solidFill>
-                <a:latin typeface="Lucida Sans Typewriter" panose="020B0509030504030204" pitchFamily="49" charset="0"/>
-              </a:rPr>
-              <a:t>home</a:t>
-            </a:r>
-            <a:r>
-              <a:rPr lang="de-DE" dirty="0">
-                <a:solidFill>
-                  <a:srgbClr val="00B050"/>
-                </a:solidFill>
-                <a:latin typeface="Lucida Sans Typewriter" panose="020B0509030504030204" pitchFamily="49" charset="0"/>
-              </a:rPr>
-              <a:t>/</a:t>
-            </a:r>
-            <a:r>
-              <a:rPr lang="de-DE" dirty="0" err="1">
-                <a:solidFill>
-                  <a:srgbClr val="00B050"/>
-                </a:solidFill>
-                <a:latin typeface="Lucida Sans Typewriter" panose="020B0509030504030204" pitchFamily="49" charset="0"/>
-              </a:rPr>
-              <a:t>john</a:t>
-            </a:r>
-            <a:r>
-              <a:rPr lang="de-DE" dirty="0">
-                <a:solidFill>
-                  <a:srgbClr val="00B050"/>
-                </a:solidFill>
-                <a:latin typeface="Lucida Sans Typewriter" panose="020B0509030504030204" pitchFamily="49" charset="0"/>
-              </a:rPr>
-              <a:t>/</a:t>
-            </a:r>
-            <a:r>
-              <a:rPr lang="de-DE" dirty="0" err="1">
-                <a:solidFill>
-                  <a:srgbClr val="00B050"/>
-                </a:solidFill>
-                <a:latin typeface="Lucida Sans Typewriter" panose="020B0509030504030204" pitchFamily="49" charset="0"/>
-              </a:rPr>
-              <a:t>enum</a:t>
-            </a:r>
-            <a:endParaRPr lang="de-DE" dirty="0">
-              <a:solidFill>
-                <a:srgbClr val="00B050"/>
-              </a:solidFill>
-              <a:latin typeface="Lucida Sans Typewriter" panose="020B0509030504030204" pitchFamily="49" charset="0"/>
-            </a:endParaRPr>
-          </a:p>
-        </p:txBody>
-      </p:sp>
-      <p:sp>
-        <p:nvSpPr>
-          <p:cNvPr id="2" name="Titel 1">
-            <a:extLst>
-              <a:ext uri="{FF2B5EF4-FFF2-40B4-BE49-F238E27FC236}">
-                <a16:creationId xmlns:a16="http://schemas.microsoft.com/office/drawing/2014/main" id="{ABB9F452-D742-461C-AD36-ECCD3040D9FB}"/>
+      </p:pic>
+      <p:sp>
+        <p:nvSpPr>
+          <p:cNvPr id="3" name="Titel 2">
+            <a:extLst>
+              <a:ext uri="{FF2B5EF4-FFF2-40B4-BE49-F238E27FC236}">
+                <a16:creationId xmlns:a16="http://schemas.microsoft.com/office/drawing/2014/main" id="{85913985-0D2C-9974-C76B-CDB9614DDE1A}"/>
               </a:ext>
             </a:extLst>
           </p:cNvPr>
@@ -47219,22 +46322,196 @@
             <p:ph type="title"/>
           </p:nvPr>
         </p:nvSpPr>
+        <p:spPr>
+          <a:xfrm>
+            <a:off x="395016" y="611572"/>
+            <a:ext cx="3168000" cy="2916324"/>
+          </a:xfrm>
+        </p:spPr>
+        <p:txBody>
+          <a:bodyPr/>
+          <a:lstStyle/>
+          <a:p>
+            <a:br>
+              <a:rPr lang="de-DE" dirty="0"/>
+            </a:br>
+            <a:r>
+              <a:rPr lang="de-DE" dirty="0"/>
+              <a:t>Ich will jetzt endlich selber </a:t>
+            </a:r>
+            <a:r>
+              <a:rPr lang="de-DE" dirty="0" err="1"/>
+              <a:t>cybern</a:t>
+            </a:r>
+            <a:r>
+              <a:rPr lang="de-DE" dirty="0"/>
+              <a:t> !</a:t>
+            </a:r>
+            <a:r>
+              <a:rPr lang="de-DE" dirty="0" err="1"/>
+              <a:t>einself</a:t>
+            </a:r>
+            <a:r>
+              <a:rPr lang="de-DE" dirty="0"/>
+              <a:t>!!</a:t>
+            </a:r>
+          </a:p>
+        </p:txBody>
+      </p:sp>
+      <p:sp>
+        <p:nvSpPr>
+          <p:cNvPr id="5" name="Textplatzhalter 4">
+            <a:extLst>
+              <a:ext uri="{FF2B5EF4-FFF2-40B4-BE49-F238E27FC236}">
+                <a16:creationId xmlns:a16="http://schemas.microsoft.com/office/drawing/2014/main" id="{0177920A-F546-784E-F869-2F1924E3A868}"/>
+              </a:ext>
+            </a:extLst>
+          </p:cNvPr>
+          <p:cNvSpPr>
+            <a:spLocks noGrp="1"/>
+          </p:cNvSpPr>
+          <p:nvPr>
+            <p:ph type="body" sz="quarter" idx="17"/>
+          </p:nvPr>
+        </p:nvSpPr>
         <p:spPr/>
         <p:txBody>
-          <a:bodyPr anchor="t"/>
+          <a:bodyPr/>
           <a:lstStyle/>
           <a:p>
-            <a:r>
-              <a:rPr lang="de-DE" dirty="0"/>
-              <a:t>Enumeration (automatisiert)</a:t>
-            </a:r>
+            <a:endParaRPr lang="de-DE"/>
+          </a:p>
+        </p:txBody>
+      </p:sp>
+      <p:sp>
+        <p:nvSpPr>
+          <p:cNvPr id="6" name="Textplatzhalter 5">
+            <a:extLst>
+              <a:ext uri="{FF2B5EF4-FFF2-40B4-BE49-F238E27FC236}">
+                <a16:creationId xmlns:a16="http://schemas.microsoft.com/office/drawing/2014/main" id="{8DDAAA9B-3F39-BDC2-2800-A3EC1947E2E6}"/>
+              </a:ext>
+            </a:extLst>
+          </p:cNvPr>
+          <p:cNvSpPr>
+            <a:spLocks noGrp="1"/>
+          </p:cNvSpPr>
+          <p:nvPr>
+            <p:ph type="body" sz="quarter" idx="20"/>
+          </p:nvPr>
+        </p:nvSpPr>
+        <p:spPr/>
+        <p:txBody>
+          <a:bodyPr/>
+          <a:lstStyle/>
+          <a:p>
+            <a:endParaRPr lang="de-DE"/>
+          </a:p>
+        </p:txBody>
+      </p:sp>
+      <p:sp>
+        <p:nvSpPr>
+          <p:cNvPr id="7" name="Textplatzhalter 6">
+            <a:extLst>
+              <a:ext uri="{FF2B5EF4-FFF2-40B4-BE49-F238E27FC236}">
+                <a16:creationId xmlns:a16="http://schemas.microsoft.com/office/drawing/2014/main" id="{45444E99-E9EC-27AF-8340-12DDA061C6B8}"/>
+              </a:ext>
+            </a:extLst>
+          </p:cNvPr>
+          <p:cNvSpPr>
+            <a:spLocks noGrp="1"/>
+          </p:cNvSpPr>
+          <p:nvPr>
+            <p:ph type="body" sz="quarter" idx="23"/>
+          </p:nvPr>
+        </p:nvSpPr>
+        <p:spPr/>
+        <p:txBody>
+          <a:bodyPr/>
+          <a:lstStyle/>
+          <a:p>
+            <a:endParaRPr lang="de-DE"/>
+          </a:p>
+        </p:txBody>
+      </p:sp>
+      <p:sp>
+        <p:nvSpPr>
+          <p:cNvPr id="8" name="Textplatzhalter 7">
+            <a:extLst>
+              <a:ext uri="{FF2B5EF4-FFF2-40B4-BE49-F238E27FC236}">
+                <a16:creationId xmlns:a16="http://schemas.microsoft.com/office/drawing/2014/main" id="{6BEC2D9B-8EFA-5EB3-19E2-4B0C83DB064B}"/>
+              </a:ext>
+            </a:extLst>
+          </p:cNvPr>
+          <p:cNvSpPr>
+            <a:spLocks noGrp="1"/>
+          </p:cNvSpPr>
+          <p:nvPr>
+            <p:ph type="body" sz="quarter" idx="24"/>
+          </p:nvPr>
+        </p:nvSpPr>
+        <p:spPr/>
+        <p:txBody>
+          <a:bodyPr/>
+          <a:lstStyle/>
+          <a:p>
+            <a:endParaRPr lang="de-DE"/>
+          </a:p>
+        </p:txBody>
+      </p:sp>
+      <p:sp>
+        <p:nvSpPr>
+          <p:cNvPr id="9" name="Textplatzhalter 8">
+            <a:extLst>
+              <a:ext uri="{FF2B5EF4-FFF2-40B4-BE49-F238E27FC236}">
+                <a16:creationId xmlns:a16="http://schemas.microsoft.com/office/drawing/2014/main" id="{D5DC7909-B1FF-2323-780E-785AFF57A98A}"/>
+              </a:ext>
+            </a:extLst>
+          </p:cNvPr>
+          <p:cNvSpPr>
+            <a:spLocks noGrp="1"/>
+          </p:cNvSpPr>
+          <p:nvPr>
+            <p:ph type="body" sz="quarter" idx="25"/>
+          </p:nvPr>
+        </p:nvSpPr>
+        <p:spPr/>
+        <p:txBody>
+          <a:bodyPr/>
+          <a:lstStyle/>
+          <a:p>
+            <a:endParaRPr lang="de-DE"/>
+          </a:p>
+        </p:txBody>
+      </p:sp>
+      <p:sp>
+        <p:nvSpPr>
+          <p:cNvPr id="10" name="Textplatzhalter 9">
+            <a:extLst>
+              <a:ext uri="{FF2B5EF4-FFF2-40B4-BE49-F238E27FC236}">
+                <a16:creationId xmlns:a16="http://schemas.microsoft.com/office/drawing/2014/main" id="{C1CF168D-6D6A-8BF2-F195-E15F3BC61377}"/>
+              </a:ext>
+            </a:extLst>
+          </p:cNvPr>
+          <p:cNvSpPr>
+            <a:spLocks noGrp="1"/>
+          </p:cNvSpPr>
+          <p:nvPr>
+            <p:ph type="body" sz="quarter" idx="26"/>
+          </p:nvPr>
+        </p:nvSpPr>
+        <p:spPr/>
+        <p:txBody>
+          <a:bodyPr/>
+          <a:lstStyle/>
+          <a:p>
+            <a:endParaRPr lang="de-DE" dirty="0"/>
           </a:p>
         </p:txBody>
       </p:sp>
     </p:spTree>
     <p:extLst>
       <p:ext uri="{BB962C8B-B14F-4D97-AF65-F5344CB8AC3E}">
-        <p14:creationId xmlns:p14="http://schemas.microsoft.com/office/powerpoint/2010/main" val="1318923679"/>
+        <p14:creationId xmlns:p14="http://schemas.microsoft.com/office/powerpoint/2010/main" val="2908605936"/>
       </p:ext>
     </p:extLst>
   </p:cSld>
@@ -47269,37 +46546,205 @@
           <a:chExt cx="0" cy="0"/>
         </a:xfrm>
       </p:grpSpPr>
-      <p:pic>
-        <p:nvPicPr>
-          <p:cNvPr id="13" name="Bildplatzhalter 12" descr="Ein Bild, das Text enthält.&#10;&#10;Automatisch generierte Beschreibung">
-            <a:extLst>
-              <a:ext uri="{FF2B5EF4-FFF2-40B4-BE49-F238E27FC236}">
-                <a16:creationId xmlns:a16="http://schemas.microsoft.com/office/drawing/2014/main" id="{4769C27D-7E84-16FF-A32E-12FED3CCB379}"/>
-              </a:ext>
-            </a:extLst>
-          </p:cNvPr>
-          <p:cNvPicPr>
-            <a:picLocks noGrp="1" noChangeAspect="1"/>
-          </p:cNvPicPr>
+      <p:sp>
+        <p:nvSpPr>
+          <p:cNvPr id="2" name="Inhaltsplatzhalter 1">
+            <a:extLst>
+              <a:ext uri="{FF2B5EF4-FFF2-40B4-BE49-F238E27FC236}">
+                <a16:creationId xmlns:a16="http://schemas.microsoft.com/office/drawing/2014/main" id="{DE1EE909-DD3A-58D2-3F07-57F08C0C8F5A}"/>
+              </a:ext>
+            </a:extLst>
+          </p:cNvPr>
+          <p:cNvSpPr>
+            <a:spLocks noGrp="1"/>
+          </p:cNvSpPr>
           <p:nvPr>
-            <p:ph type="pic" sz="quarter" idx="15"/>
+            <p:ph sz="quarter" idx="17"/>
           </p:nvPr>
-        </p:nvPicPr>
-        <p:blipFill>
-          <a:blip r:embed="rId2"/>
-          <a:srcRect l="8158" r="8158"/>
-          <a:stretch>
-            <a:fillRect/>
-          </a:stretch>
-        </p:blipFill>
+        </p:nvSpPr>
         <p:spPr/>
-      </p:pic>
-      <p:sp>
-        <p:nvSpPr>
-          <p:cNvPr id="3" name="Titel 2">
-            <a:extLst>
-              <a:ext uri="{FF2B5EF4-FFF2-40B4-BE49-F238E27FC236}">
-                <a16:creationId xmlns:a16="http://schemas.microsoft.com/office/drawing/2014/main" id="{85913985-0D2C-9974-C76B-CDB9614DDE1A}"/>
+        <p:txBody>
+          <a:bodyPr/>
+          <a:lstStyle/>
+          <a:p>
+            <a:r>
+              <a:rPr lang="de-DE" dirty="0"/>
+              <a:t>In Linux werden alle ausgeführten Befehle im sog. </a:t>
+            </a:r>
+            <a:r>
+              <a:rPr lang="de-DE" dirty="0" err="1"/>
+              <a:t>Historyfile</a:t>
+            </a:r>
+            <a:r>
+              <a:rPr lang="de-DE" dirty="0"/>
+              <a:t> unter ~/.</a:t>
+            </a:r>
+            <a:r>
+              <a:rPr lang="de-DE" dirty="0" err="1"/>
+              <a:t>history</a:t>
+            </a:r>
+            <a:r>
+              <a:rPr lang="de-DE" dirty="0"/>
+              <a:t> gespeichert</a:t>
+            </a:r>
+          </a:p>
+          <a:p>
+            <a:r>
+              <a:rPr lang="de-DE" dirty="0"/>
+              <a:t>Damit kann man alles nachverfolgen was in der bash eingegeben wurde.</a:t>
+            </a:r>
+          </a:p>
+          <a:p>
+            <a:r>
+              <a:rPr lang="de-DE" dirty="0"/>
+              <a:t>Mit dem Befehl </a:t>
+            </a:r>
+            <a:r>
+              <a:rPr lang="de-DE" dirty="0" err="1"/>
+              <a:t>history</a:t>
+            </a:r>
+            <a:r>
+              <a:rPr lang="de-DE" dirty="0"/>
+              <a:t> kann man sich alle Befehle anzeigen lassen auch Passwörter!</a:t>
+            </a:r>
+          </a:p>
+          <a:p>
+            <a:endParaRPr lang="de-DE" dirty="0"/>
+          </a:p>
+          <a:p>
+            <a:r>
+              <a:rPr lang="de-DE" dirty="0"/>
+              <a:t>Aufgabe: wo hat sich John kürzlich eingeloggt und sein Passwort als Parameter mitgegeben?</a:t>
+            </a:r>
+          </a:p>
+        </p:txBody>
+      </p:sp>
+      <p:sp>
+        <p:nvSpPr>
+          <p:cNvPr id="3" name="Datumsplatzhalter 2">
+            <a:extLst>
+              <a:ext uri="{FF2B5EF4-FFF2-40B4-BE49-F238E27FC236}">
+                <a16:creationId xmlns:a16="http://schemas.microsoft.com/office/drawing/2014/main" id="{7CD361C0-F2D6-1522-E197-5519BB3FA076}"/>
+              </a:ext>
+            </a:extLst>
+          </p:cNvPr>
+          <p:cNvSpPr>
+            <a:spLocks noGrp="1"/>
+          </p:cNvSpPr>
+          <p:nvPr>
+            <p:ph type="dt" sz="half" idx="20"/>
+          </p:nvPr>
+        </p:nvSpPr>
+        <p:spPr/>
+        <p:txBody>
+          <a:bodyPr/>
+          <a:lstStyle/>
+          <a:p>
+            <a:fld id="{5DC9953B-096E-4D14-9CB5-13648C592BB5}" type="datetime1">
+              <a:rPr lang="de-DE" smtClean="0"/>
+              <a:t>24.11.22</a:t>
+            </a:fld>
+            <a:endParaRPr lang="de-DE" dirty="0"/>
+          </a:p>
+        </p:txBody>
+      </p:sp>
+      <p:sp>
+        <p:nvSpPr>
+          <p:cNvPr id="4" name="Fußzeilenplatzhalter 3">
+            <a:extLst>
+              <a:ext uri="{FF2B5EF4-FFF2-40B4-BE49-F238E27FC236}">
+                <a16:creationId xmlns:a16="http://schemas.microsoft.com/office/drawing/2014/main" id="{28E78925-D828-270B-0CBA-A8DB423B730F}"/>
+              </a:ext>
+            </a:extLst>
+          </p:cNvPr>
+          <p:cNvSpPr>
+            <a:spLocks noGrp="1"/>
+          </p:cNvSpPr>
+          <p:nvPr>
+            <p:ph type="ftr" sz="quarter" idx="21"/>
+          </p:nvPr>
+        </p:nvSpPr>
+        <p:spPr/>
+        <p:txBody>
+          <a:bodyPr/>
+          <a:lstStyle/>
+          <a:p>
+            <a:r>
+              <a:rPr lang="de-DE" dirty="0"/>
+              <a:t>Linux Privilege </a:t>
+            </a:r>
+            <a:r>
+              <a:rPr lang="de-DE" dirty="0" err="1"/>
+              <a:t>Escalation</a:t>
+            </a:r>
+            <a:r>
+              <a:rPr lang="de-DE" dirty="0"/>
+              <a:t> Workshop</a:t>
+            </a:r>
+          </a:p>
+        </p:txBody>
+      </p:sp>
+      <p:sp>
+        <p:nvSpPr>
+          <p:cNvPr id="5" name="Foliennummernplatzhalter 4">
+            <a:extLst>
+              <a:ext uri="{FF2B5EF4-FFF2-40B4-BE49-F238E27FC236}">
+                <a16:creationId xmlns:a16="http://schemas.microsoft.com/office/drawing/2014/main" id="{41BF4A9C-2BB7-1B41-117B-4B1659DA7925}"/>
+              </a:ext>
+            </a:extLst>
+          </p:cNvPr>
+          <p:cNvSpPr>
+            <a:spLocks noGrp="1"/>
+          </p:cNvSpPr>
+          <p:nvPr>
+            <p:ph type="sldNum" sz="quarter" idx="22"/>
+          </p:nvPr>
+        </p:nvSpPr>
+        <p:spPr/>
+        <p:txBody>
+          <a:bodyPr/>
+          <a:lstStyle/>
+          <a:p>
+            <a:fld id="{F86FCC4D-0438-154F-9910-1CF4711F776F}" type="slidenum">
+              <a:rPr lang="de-DE" smtClean="0"/>
+              <a:pPr/>
+              <a:t>8</a:t>
+            </a:fld>
+            <a:endParaRPr lang="de-DE" dirty="0"/>
+          </a:p>
+        </p:txBody>
+      </p:sp>
+      <p:sp>
+        <p:nvSpPr>
+          <p:cNvPr id="6" name="Textplatzhalter 5">
+            <a:extLst>
+              <a:ext uri="{FF2B5EF4-FFF2-40B4-BE49-F238E27FC236}">
+                <a16:creationId xmlns:a16="http://schemas.microsoft.com/office/drawing/2014/main" id="{465BDA60-3023-40C3-0DA1-0A8F397F8611}"/>
+              </a:ext>
+            </a:extLst>
+          </p:cNvPr>
+          <p:cNvSpPr>
+            <a:spLocks noGrp="1"/>
+          </p:cNvSpPr>
+          <p:nvPr>
+            <p:ph type="body" sz="quarter" idx="18"/>
+          </p:nvPr>
+        </p:nvSpPr>
+        <p:spPr/>
+        <p:txBody>
+          <a:bodyPr/>
+          <a:lstStyle/>
+          <a:p>
+            <a:endParaRPr lang="de-DE"/>
+          </a:p>
+        </p:txBody>
+      </p:sp>
+      <p:sp>
+        <p:nvSpPr>
+          <p:cNvPr id="7" name="Titel 6">
+            <a:extLst>
+              <a:ext uri="{FF2B5EF4-FFF2-40B4-BE49-F238E27FC236}">
+                <a16:creationId xmlns:a16="http://schemas.microsoft.com/office/drawing/2014/main" id="{21BBA845-AAE3-35B0-CA00-77E888C12A98}"/>
               </a:ext>
             </a:extLst>
           </p:cNvPr>
@@ -47310,196 +46755,138 @@
             <p:ph type="title"/>
           </p:nvPr>
         </p:nvSpPr>
+        <p:spPr/>
+        <p:txBody>
+          <a:bodyPr/>
+          <a:lstStyle/>
+          <a:p>
+            <a:r>
+              <a:rPr lang="de-DE" dirty="0" err="1"/>
+              <a:t>History</a:t>
+            </a:r>
+            <a:endParaRPr lang="de-DE" dirty="0"/>
+          </a:p>
+        </p:txBody>
+      </p:sp>
+      <p:sp>
+        <p:nvSpPr>
+          <p:cNvPr id="8" name="Textfeld 7">
+            <a:extLst>
+              <a:ext uri="{FF2B5EF4-FFF2-40B4-BE49-F238E27FC236}">
+                <a16:creationId xmlns:a16="http://schemas.microsoft.com/office/drawing/2014/main" id="{6CC51679-E1F2-8853-0C94-4665DD63F764}"/>
+              </a:ext>
+            </a:extLst>
+          </p:cNvPr>
+          <p:cNvSpPr txBox="1"/>
+          <p:nvPr/>
+        </p:nvSpPr>
         <p:spPr>
           <a:xfrm>
-            <a:off x="395016" y="611572"/>
-            <a:ext cx="3168000" cy="2916324"/>
+            <a:off x="611039" y="2087736"/>
+            <a:ext cx="2880320" cy="492443"/>
           </a:xfrm>
+          <a:prstGeom prst="rect">
+            <a:avLst/>
+          </a:prstGeom>
+          <a:noFill/>
         </p:spPr>
         <p:txBody>
-          <a:bodyPr/>
+          <a:bodyPr wrap="square" lIns="0" tIns="0" rIns="0" bIns="0" rtlCol="0">
+            <a:spAutoFit/>
+          </a:bodyPr>
           <a:lstStyle/>
           <a:p>
-            <a:br>
-              <a:rPr lang="de-DE" dirty="0"/>
-            </a:br>
-            <a:r>
-              <a:rPr lang="de-DE" dirty="0"/>
-              <a:t>Ich will jetzt endlich selber </a:t>
-            </a:r>
-            <a:r>
-              <a:rPr lang="de-DE" dirty="0" err="1"/>
-              <a:t>cybern</a:t>
-            </a:r>
-            <a:r>
-              <a:rPr lang="de-DE" dirty="0"/>
-              <a:t> !</a:t>
-            </a:r>
-            <a:r>
-              <a:rPr lang="de-DE" dirty="0" err="1"/>
-              <a:t>einself</a:t>
-            </a:r>
-            <a:r>
-              <a:rPr lang="de-DE" dirty="0"/>
-              <a:t>!!</a:t>
-            </a:r>
-          </a:p>
-        </p:txBody>
-      </p:sp>
-      <p:sp>
-        <p:nvSpPr>
-          <p:cNvPr id="5" name="Textplatzhalter 4">
-            <a:extLst>
-              <a:ext uri="{FF2B5EF4-FFF2-40B4-BE49-F238E27FC236}">
-                <a16:creationId xmlns:a16="http://schemas.microsoft.com/office/drawing/2014/main" id="{0177920A-F546-784E-F869-2F1924E3A868}"/>
-              </a:ext>
-            </a:extLst>
-          </p:cNvPr>
-          <p:cNvSpPr>
-            <a:spLocks noGrp="1"/>
-          </p:cNvSpPr>
-          <p:nvPr>
-            <p:ph type="body" sz="quarter" idx="17"/>
-          </p:nvPr>
-        </p:nvSpPr>
-        <p:spPr/>
-        <p:txBody>
-          <a:bodyPr/>
-          <a:lstStyle/>
-          <a:p>
-            <a:endParaRPr lang="de-DE"/>
-          </a:p>
-        </p:txBody>
-      </p:sp>
-      <p:sp>
-        <p:nvSpPr>
-          <p:cNvPr id="6" name="Textplatzhalter 5">
-            <a:extLst>
-              <a:ext uri="{FF2B5EF4-FFF2-40B4-BE49-F238E27FC236}">
-                <a16:creationId xmlns:a16="http://schemas.microsoft.com/office/drawing/2014/main" id="{8DDAAA9B-3F39-BDC2-2800-A3EC1947E2E6}"/>
-              </a:ext>
-            </a:extLst>
-          </p:cNvPr>
-          <p:cNvSpPr>
-            <a:spLocks noGrp="1"/>
-          </p:cNvSpPr>
-          <p:nvPr>
-            <p:ph type="body" sz="quarter" idx="20"/>
-          </p:nvPr>
-        </p:nvSpPr>
-        <p:spPr/>
-        <p:txBody>
-          <a:bodyPr/>
-          <a:lstStyle/>
-          <a:p>
-            <a:endParaRPr lang="de-DE"/>
-          </a:p>
-        </p:txBody>
-      </p:sp>
-      <p:sp>
-        <p:nvSpPr>
-          <p:cNvPr id="7" name="Textplatzhalter 6">
-            <a:extLst>
-              <a:ext uri="{FF2B5EF4-FFF2-40B4-BE49-F238E27FC236}">
-                <a16:creationId xmlns:a16="http://schemas.microsoft.com/office/drawing/2014/main" id="{45444E99-E9EC-27AF-8340-12DDA061C6B8}"/>
-              </a:ext>
-            </a:extLst>
-          </p:cNvPr>
-          <p:cNvSpPr>
-            <a:spLocks noGrp="1"/>
-          </p:cNvSpPr>
-          <p:nvPr>
-            <p:ph type="body" sz="quarter" idx="23"/>
-          </p:nvPr>
-        </p:nvSpPr>
-        <p:spPr/>
-        <p:txBody>
-          <a:bodyPr/>
-          <a:lstStyle/>
-          <a:p>
-            <a:endParaRPr lang="de-DE"/>
-          </a:p>
-        </p:txBody>
-      </p:sp>
-      <p:sp>
-        <p:nvSpPr>
-          <p:cNvPr id="8" name="Textplatzhalter 7">
-            <a:extLst>
-              <a:ext uri="{FF2B5EF4-FFF2-40B4-BE49-F238E27FC236}">
-                <a16:creationId xmlns:a16="http://schemas.microsoft.com/office/drawing/2014/main" id="{6BEC2D9B-8EFA-5EB3-19E2-4B0C83DB064B}"/>
-              </a:ext>
-            </a:extLst>
-          </p:cNvPr>
-          <p:cNvSpPr>
-            <a:spLocks noGrp="1"/>
-          </p:cNvSpPr>
-          <p:nvPr>
-            <p:ph type="body" sz="quarter" idx="24"/>
-          </p:nvPr>
-        </p:nvSpPr>
-        <p:spPr/>
-        <p:txBody>
-          <a:bodyPr/>
-          <a:lstStyle/>
-          <a:p>
-            <a:endParaRPr lang="de-DE"/>
-          </a:p>
-        </p:txBody>
-      </p:sp>
-      <p:sp>
-        <p:nvSpPr>
-          <p:cNvPr id="9" name="Textplatzhalter 8">
-            <a:extLst>
-              <a:ext uri="{FF2B5EF4-FFF2-40B4-BE49-F238E27FC236}">
-                <a16:creationId xmlns:a16="http://schemas.microsoft.com/office/drawing/2014/main" id="{D5DC7909-B1FF-2323-780E-785AFF57A98A}"/>
-              </a:ext>
-            </a:extLst>
-          </p:cNvPr>
-          <p:cNvSpPr>
-            <a:spLocks noGrp="1"/>
-          </p:cNvSpPr>
-          <p:nvPr>
-            <p:ph type="body" sz="quarter" idx="25"/>
-          </p:nvPr>
-        </p:nvSpPr>
-        <p:spPr/>
-        <p:txBody>
-          <a:bodyPr/>
-          <a:lstStyle/>
-          <a:p>
-            <a:endParaRPr lang="de-DE"/>
-          </a:p>
-        </p:txBody>
-      </p:sp>
-      <p:sp>
-        <p:nvSpPr>
-          <p:cNvPr id="10" name="Textplatzhalter 9">
-            <a:extLst>
-              <a:ext uri="{FF2B5EF4-FFF2-40B4-BE49-F238E27FC236}">
-                <a16:creationId xmlns:a16="http://schemas.microsoft.com/office/drawing/2014/main" id="{C1CF168D-6D6A-8BF2-F195-E15F3BC61377}"/>
-              </a:ext>
-            </a:extLst>
-          </p:cNvPr>
-          <p:cNvSpPr>
-            <a:spLocks noGrp="1"/>
-          </p:cNvSpPr>
-          <p:nvPr>
-            <p:ph type="body" sz="quarter" idx="26"/>
-          </p:nvPr>
-        </p:nvSpPr>
-        <p:spPr/>
-        <p:txBody>
-          <a:bodyPr/>
-          <a:lstStyle/>
-          <a:p>
-            <a:endParaRPr lang="de-DE" dirty="0"/>
+            <a:pPr algn="l">
+              <a:spcBef>
+                <a:spcPts val="60"/>
+              </a:spcBef>
+              <a:buSzPct val="100000"/>
+            </a:pPr>
+            <a:r>
+              <a:rPr lang="de-DE" sz="1600" dirty="0">
+                <a:solidFill>
+                  <a:srgbClr val="00B050"/>
+                </a:solidFill>
+                <a:latin typeface="Lucida Sans Typewriter" panose="020B0509030504030204" pitchFamily="49" charset="0"/>
+              </a:rPr>
+              <a:t>Be </a:t>
+            </a:r>
+            <a:r>
+              <a:rPr lang="de-DE" sz="1600" dirty="0" err="1">
+                <a:solidFill>
+                  <a:srgbClr val="00B050"/>
+                </a:solidFill>
+                <a:latin typeface="Lucida Sans Typewriter" panose="020B0509030504030204" pitchFamily="49" charset="0"/>
+              </a:rPr>
+              <a:t>carefull</a:t>
+            </a:r>
+            <a:r>
+              <a:rPr lang="de-DE" sz="1600" dirty="0">
+                <a:solidFill>
+                  <a:srgbClr val="00B050"/>
+                </a:solidFill>
+                <a:latin typeface="Lucida Sans Typewriter" panose="020B0509030504030204" pitchFamily="49" charset="0"/>
+              </a:rPr>
+              <a:t> </a:t>
+            </a:r>
+            <a:r>
+              <a:rPr lang="de-DE" sz="1600" dirty="0" err="1">
+                <a:solidFill>
+                  <a:srgbClr val="00B050"/>
+                </a:solidFill>
+                <a:latin typeface="Lucida Sans Typewriter" panose="020B0509030504030204" pitchFamily="49" charset="0"/>
+              </a:rPr>
+              <a:t>what</a:t>
+            </a:r>
+            <a:r>
+              <a:rPr lang="de-DE" sz="1600" dirty="0">
+                <a:solidFill>
+                  <a:srgbClr val="00B050"/>
+                </a:solidFill>
+                <a:latin typeface="Lucida Sans Typewriter" panose="020B0509030504030204" pitchFamily="49" charset="0"/>
+              </a:rPr>
+              <a:t> </a:t>
+            </a:r>
+            <a:r>
+              <a:rPr lang="de-DE" sz="1600" dirty="0" err="1">
+                <a:solidFill>
+                  <a:srgbClr val="00B050"/>
+                </a:solidFill>
+                <a:latin typeface="Lucida Sans Typewriter" panose="020B0509030504030204" pitchFamily="49" charset="0"/>
+              </a:rPr>
+              <a:t>you</a:t>
+            </a:r>
+            <a:r>
+              <a:rPr lang="de-DE" sz="1600" dirty="0">
+                <a:solidFill>
+                  <a:srgbClr val="00B050"/>
+                </a:solidFill>
+                <a:latin typeface="Lucida Sans Typewriter" panose="020B0509030504030204" pitchFamily="49" charset="0"/>
+              </a:rPr>
+              <a:t> </a:t>
+            </a:r>
+            <a:r>
+              <a:rPr lang="de-DE" sz="1600" dirty="0" err="1">
+                <a:solidFill>
+                  <a:srgbClr val="00B050"/>
+                </a:solidFill>
+                <a:latin typeface="Lucida Sans Typewriter" panose="020B0509030504030204" pitchFamily="49" charset="0"/>
+              </a:rPr>
+              <a:t>say</a:t>
+            </a:r>
+            <a:endParaRPr lang="de-DE" sz="1600" dirty="0">
+              <a:solidFill>
+                <a:srgbClr val="00B050"/>
+              </a:solidFill>
+              <a:latin typeface="Lucida Sans Typewriter" panose="020B0509030504030204" pitchFamily="49" charset="0"/>
+            </a:endParaRPr>
           </a:p>
         </p:txBody>
       </p:sp>
     </p:spTree>
     <p:extLst>
       <p:ext uri="{BB962C8B-B14F-4D97-AF65-F5344CB8AC3E}">
-        <p14:creationId xmlns:p14="http://schemas.microsoft.com/office/powerpoint/2010/main" val="2908605936"/>
+        <p14:creationId xmlns:p14="http://schemas.microsoft.com/office/powerpoint/2010/main" val="3831032581"/>
       </p:ext>
     </p:extLst>
   </p:cSld>
@@ -47557,52 +46944,137 @@
           <a:p>
             <a:r>
               <a:rPr lang="de-DE" dirty="0"/>
-              <a:t>In Linux werden alle ausgeführten Befehle im sog. </a:t>
+              <a:t>Manche Menschen verwenden schwache Passwörter (WAAAS?!?!!)</a:t>
+            </a:r>
+          </a:p>
+          <a:p>
+            <a:r>
+              <a:rPr lang="de-DE" dirty="0"/>
+              <a:t>User sind in der Datei /</a:t>
             </a:r>
             <a:r>
               <a:rPr lang="de-DE" dirty="0" err="1"/>
-              <a:t>Historyfile</a:t>
-            </a:r>
-            <a:r>
-              <a:rPr lang="de-DE" dirty="0"/>
-              <a:t> unter ~/.</a:t>
+              <a:t>etc</a:t>
+            </a:r>
+            <a:r>
+              <a:rPr lang="de-DE" dirty="0"/>
+              <a:t>/</a:t>
             </a:r>
             <a:r>
               <a:rPr lang="de-DE" dirty="0" err="1"/>
-              <a:t>history</a:t>
-            </a:r>
-            <a:r>
-              <a:rPr lang="de-DE" dirty="0"/>
-              <a:t> gespeichert</a:t>
-            </a:r>
-          </a:p>
-          <a:p>
-            <a:r>
-              <a:rPr lang="de-DE" dirty="0"/>
-              <a:t>Damit kann man alles nachverfolgen was in der bash eingegeben wurde.</a:t>
-            </a:r>
-          </a:p>
-          <a:p>
-            <a:r>
-              <a:rPr lang="de-DE" dirty="0"/>
-              <a:t>Mit dem Befehl </a:t>
+              <a:t>passwd</a:t>
+            </a:r>
+            <a:r>
+              <a:rPr lang="de-DE" dirty="0"/>
+              <a:t> hinterlegt, Details durch : getrennt</a:t>
+            </a:r>
+          </a:p>
+          <a:p>
+            <a:pPr marL="0" indent="0">
+              <a:buNone/>
+            </a:pPr>
+            <a:r>
+              <a:rPr lang="en-GB" sz="1600" b="0" i="0" dirty="0">
+                <a:solidFill>
+                  <a:srgbClr val="657B83"/>
+                </a:solidFill>
+                <a:effectLst/>
+                <a:latin typeface="Menlo" panose="020B0609030804020204" pitchFamily="49" charset="0"/>
+              </a:rPr>
+              <a:t> john:x:998:998::/home/john:/bin/bash</a:t>
+            </a:r>
+            <a:endParaRPr lang="de-DE" dirty="0"/>
+          </a:p>
+          <a:p>
+            <a:pPr lvl="2"/>
+            <a:r>
+              <a:rPr lang="de-DE" dirty="0"/>
+              <a:t>User Name</a:t>
+            </a:r>
+          </a:p>
+          <a:p>
+            <a:pPr lvl="2"/>
+            <a:r>
+              <a:rPr lang="de-DE" dirty="0"/>
+              <a:t>Verschlüsseltes Password (x: steht in der /</a:t>
             </a:r>
             <a:r>
               <a:rPr lang="de-DE" dirty="0" err="1"/>
-              <a:t>History</a:t>
-            </a:r>
-            <a:r>
-              <a:rPr lang="de-DE" dirty="0"/>
-              <a:t> kann man sich alle Befehle anzeigen lassen auch Passwörter!</a:t>
-            </a:r>
-          </a:p>
-          <a:p>
+              <a:t>etc</a:t>
+            </a:r>
+            <a:r>
+              <a:rPr lang="de-DE" dirty="0"/>
+              <a:t>/</a:t>
+            </a:r>
+            <a:r>
+              <a:rPr lang="de-DE" dirty="0" err="1"/>
+              <a:t>shadow</a:t>
+            </a:r>
+            <a:r>
+              <a:rPr lang="de-DE" dirty="0"/>
+              <a:t> Datei)</a:t>
+            </a:r>
+          </a:p>
+          <a:p>
+            <a:pPr lvl="2"/>
+            <a:r>
+              <a:rPr lang="de-DE" dirty="0"/>
+              <a:t>User ID (UID)</a:t>
+            </a:r>
+          </a:p>
+          <a:p>
+            <a:pPr lvl="2"/>
+            <a:r>
+              <a:rPr lang="de-DE" dirty="0"/>
+              <a:t>User Gruppen ID (GID)</a:t>
+            </a:r>
+          </a:p>
+          <a:p>
+            <a:pPr lvl="2"/>
+            <a:r>
+              <a:rPr lang="de-DE" dirty="0"/>
+              <a:t>User voller Name</a:t>
+            </a:r>
+          </a:p>
+          <a:p>
+            <a:pPr lvl="2"/>
+            <a:r>
+              <a:rPr lang="de-DE" dirty="0"/>
+              <a:t>User </a:t>
+            </a:r>
+            <a:r>
+              <a:rPr lang="de-DE" dirty="0" err="1"/>
+              <a:t>home</a:t>
+            </a:r>
+            <a:r>
+              <a:rPr lang="de-DE" dirty="0"/>
+              <a:t> Verzeichnis</a:t>
+            </a:r>
+          </a:p>
+          <a:p>
+            <a:pPr lvl="2"/>
+            <a:r>
+              <a:rPr lang="de-DE" dirty="0"/>
+              <a:t>Login </a:t>
+            </a:r>
+            <a:r>
+              <a:rPr lang="de-DE" dirty="0" err="1"/>
+              <a:t>shell</a:t>
+            </a:r>
             <a:endParaRPr lang="de-DE" dirty="0"/>
           </a:p>
           <a:p>
             <a:r>
               <a:rPr lang="de-DE" dirty="0"/>
-              <a:t>Aufgabe: wo hat sich John kürzlich eingeloggt und sein Passwort als Parameter mitgegeben?</a:t>
+              <a:t>Auf der Maschine gibt es noch einen User „</a:t>
+            </a:r>
+            <a:r>
+              <a:rPr lang="de-DE" dirty="0" err="1"/>
+              <a:t>debian</a:t>
+            </a:r>
+            <a:r>
+              <a:rPr lang="de-DE" dirty="0"/>
+              <a:t>“, kannst du sein Passwort erraten?</a:t>
             </a:r>
           </a:p>
         </p:txBody>
@@ -47749,19 +47221,18 @@
           <a:lstStyle/>
           <a:p>
             <a:r>
-              <a:rPr lang="de-DE" dirty="0" err="1"/>
-              <a:t>History</a:t>
-            </a:r>
-            <a:endParaRPr lang="de-DE" dirty="0"/>
-          </a:p>
-        </p:txBody>
-      </p:sp>
-      <p:sp>
-        <p:nvSpPr>
-          <p:cNvPr id="8" name="Textfeld 7">
-            <a:extLst>
-              <a:ext uri="{FF2B5EF4-FFF2-40B4-BE49-F238E27FC236}">
-                <a16:creationId xmlns:a16="http://schemas.microsoft.com/office/drawing/2014/main" id="{6CC51679-E1F2-8853-0C94-4665DD63F764}"/>
+              <a:rPr lang="de-DE" dirty="0"/>
+              <a:t>Schwache Passwörter</a:t>
+            </a:r>
+          </a:p>
+        </p:txBody>
+      </p:sp>
+      <p:sp>
+        <p:nvSpPr>
+          <p:cNvPr id="11" name="Textfeld 10">
+            <a:extLst>
+              <a:ext uri="{FF2B5EF4-FFF2-40B4-BE49-F238E27FC236}">
+                <a16:creationId xmlns:a16="http://schemas.microsoft.com/office/drawing/2014/main" id="{F94D0C8C-57FA-4FD3-E7BF-D59E98F3F4C2}"/>
               </a:ext>
             </a:extLst>
           </p:cNvPr>
@@ -47770,8 +47241,8 @@
         </p:nvSpPr>
         <p:spPr>
           <a:xfrm>
-            <a:off x="611039" y="2087736"/>
-            <a:ext cx="2880320" cy="492443"/>
+            <a:off x="611039" y="662834"/>
+            <a:ext cx="2880320" cy="764312"/>
           </a:xfrm>
           <a:prstGeom prst="rect">
             <a:avLst/>
@@ -47790,78 +47261,6 @@
               </a:spcBef>
               <a:buSzPct val="100000"/>
             </a:pPr>
-            <a:r>
-              <a:rPr lang="de-DE" sz="1600" dirty="0">
-                <a:solidFill>
-                  <a:srgbClr val="00B050"/>
-                </a:solidFill>
-                <a:latin typeface="Lucida Sans Typewriter" panose="020B0509030504030204" pitchFamily="49" charset="0"/>
-              </a:rPr>
-              <a:t>Be </a:t>
-            </a:r>
-            <a:r>
-              <a:rPr lang="de-DE" sz="1600" dirty="0" err="1">
-                <a:solidFill>
-                  <a:srgbClr val="00B050"/>
-                </a:solidFill>
-                <a:latin typeface="Lucida Sans Typewriter" panose="020B0509030504030204" pitchFamily="49" charset="0"/>
-              </a:rPr>
-              <a:t>carefull</a:t>
-            </a:r>
-            <a:r>
-              <a:rPr lang="de-DE" sz="1600" dirty="0">
-                <a:solidFill>
-                  <a:srgbClr val="00B050"/>
-                </a:solidFill>
-                <a:latin typeface="Lucida Sans Typewriter" panose="020B0509030504030204" pitchFamily="49" charset="0"/>
-              </a:rPr>
-              <a:t> </a:t>
-            </a:r>
-            <a:r>
-              <a:rPr lang="de-DE" sz="1600" dirty="0" err="1">
-                <a:solidFill>
-                  <a:srgbClr val="00B050"/>
-                </a:solidFill>
-                <a:latin typeface="Lucida Sans Typewriter" panose="020B0509030504030204" pitchFamily="49" charset="0"/>
-              </a:rPr>
-              <a:t>what</a:t>
-            </a:r>
-            <a:r>
-              <a:rPr lang="de-DE" sz="1600" dirty="0">
-                <a:solidFill>
-                  <a:srgbClr val="00B050"/>
-                </a:solidFill>
-                <a:latin typeface="Lucida Sans Typewriter" panose="020B0509030504030204" pitchFamily="49" charset="0"/>
-              </a:rPr>
-              <a:t> </a:t>
-            </a:r>
-            <a:r>
-              <a:rPr lang="de-DE" sz="1600" dirty="0" err="1">
-                <a:solidFill>
-                  <a:srgbClr val="00B050"/>
-                </a:solidFill>
-                <a:latin typeface="Lucida Sans Typewriter" panose="020B0509030504030204" pitchFamily="49" charset="0"/>
-              </a:rPr>
-              <a:t>you</a:t>
-            </a:r>
-            <a:r>
-              <a:rPr lang="de-DE" sz="1600" dirty="0">
-                <a:solidFill>
-                  <a:srgbClr val="00B050"/>
-                </a:solidFill>
-                <a:latin typeface="Lucida Sans Typewriter" panose="020B0509030504030204" pitchFamily="49" charset="0"/>
-              </a:rPr>
-              <a:t> </a:t>
-            </a:r>
-            <a:r>
-              <a:rPr lang="de-DE" sz="1600" dirty="0" err="1">
-                <a:solidFill>
-                  <a:srgbClr val="00B050"/>
-                </a:solidFill>
-                <a:latin typeface="Lucida Sans Typewriter" panose="020B0509030504030204" pitchFamily="49" charset="0"/>
-              </a:rPr>
-              <a:t>say</a:t>
-            </a:r>
             <a:endParaRPr lang="de-DE" sz="1600" dirty="0">
               <a:solidFill>
                 <a:srgbClr val="00B050"/>
@@ -47869,12 +47268,40 @@
               <a:latin typeface="Lucida Sans Typewriter" panose="020B0509030504030204" pitchFamily="49" charset="0"/>
             </a:endParaRPr>
           </a:p>
+          <a:p>
+            <a:pPr algn="l">
+              <a:spcBef>
+                <a:spcPts val="60"/>
+              </a:spcBef>
+              <a:buSzPct val="100000"/>
+            </a:pPr>
+            <a:endParaRPr lang="de-DE" sz="1600" dirty="0">
+              <a:solidFill>
+                <a:srgbClr val="00B050"/>
+              </a:solidFill>
+              <a:latin typeface="Lucida Sans Typewriter" panose="020B0509030504030204" pitchFamily="49" charset="0"/>
+            </a:endParaRPr>
+          </a:p>
+          <a:p>
+            <a:pPr algn="l">
+              <a:spcBef>
+                <a:spcPts val="60"/>
+              </a:spcBef>
+              <a:buSzPct val="100000"/>
+            </a:pPr>
+            <a:endParaRPr lang="de-DE" sz="1600" dirty="0">
+              <a:solidFill>
+                <a:srgbClr val="00B050"/>
+              </a:solidFill>
+              <a:latin typeface="Lucida Sans Typewriter" panose="020B0509030504030204" pitchFamily="49" charset="0"/>
+            </a:endParaRPr>
+          </a:p>
         </p:txBody>
       </p:sp>
     </p:spTree>
     <p:extLst>
       <p:ext uri="{BB962C8B-B14F-4D97-AF65-F5344CB8AC3E}">
-        <p14:creationId xmlns:p14="http://schemas.microsoft.com/office/powerpoint/2010/main" val="3831032581"/>
+        <p14:creationId xmlns:p14="http://schemas.microsoft.com/office/powerpoint/2010/main" val="969393446"/>
       </p:ext>
     </p:extLst>
   </p:cSld>
@@ -48611,6 +48038,23 @@
 </file>
 
 <file path=customXml/item1.xml><?xml version="1.0" encoding="utf-8"?>
+<p:properties xmlns:p="http://schemas.microsoft.com/office/2006/metadata/properties" xmlns:xsi="http://www.w3.org/2001/XMLSchema-instance" xmlns:pc="http://schemas.microsoft.com/office/infopath/2007/PartnerControls">
+  <documentManagement>
+    <Format xmlns="d148daf0-ee5c-47d6-9481-8c15ce1c989e">powerpoint</Format>
+  </documentManagement>
+</p:properties>
+</file>
+
+<file path=customXml/item2.xml><?xml version="1.0" encoding="utf-8"?>
+<?mso-contentType ?>
+<FormTemplates xmlns="http://schemas.microsoft.com/sharepoint/v3/contenttype/forms">
+  <Display>DocumentLibraryForm</Display>
+  <Edit>DocumentLibraryForm</Edit>
+  <New>DocumentLibraryForm</New>
+</FormTemplates>
+</file>
+
+<file path=customXml/item3.xml><?xml version="1.0" encoding="utf-8"?>
 <ct:contentTypeSchema xmlns:ct="http://schemas.microsoft.com/office/2006/metadata/contentType" xmlns:ma="http://schemas.microsoft.com/office/2006/metadata/properties/metaAttributes" ct:_="" ma:_="" ma:contentTypeName="Dokument" ma:contentTypeID="0x01010084720F72846DC14788103D9800CA5632" ma:contentTypeVersion="5" ma:contentTypeDescription="Ein neues Dokument erstellen." ma:contentTypeScope="" ma:versionID="e4c3b777011aa1f420e943642ed86295">
   <xsd:schema xmlns:xsd="http://www.w3.org/2001/XMLSchema" xmlns:xs="http://www.w3.org/2001/XMLSchema" xmlns:p="http://schemas.microsoft.com/office/2006/metadata/properties" xmlns:ns2="d148daf0-ee5c-47d6-9481-8c15ce1c989e" xmlns:ns3="72b4b0d6-01dc-4b6d-af3a-4bfa39839b5f" targetNamespace="http://schemas.microsoft.com/office/2006/metadata/properties" ma:root="true" ma:fieldsID="11872dca7b7de2113cea18ab46e7d6a6" ns2:_="" ns3:_="">
     <xsd:import namespace="d148daf0-ee5c-47d6-9481-8c15ce1c989e"/>
@@ -48783,24 +48227,32 @@
 </ct:contentTypeSchema>
 </file>
 
-<file path=customXml/item2.xml><?xml version="1.0" encoding="utf-8"?>
-<?mso-contentType ?>
-<FormTemplates xmlns="http://schemas.microsoft.com/sharepoint/v3/contenttype/forms">
-  <Display>DocumentLibraryForm</Display>
-  <Edit>DocumentLibraryForm</Edit>
-  <New>DocumentLibraryForm</New>
-</FormTemplates>
+<file path=customXml/itemProps1.xml><?xml version="1.0" encoding="utf-8"?>
+<ds:datastoreItem xmlns:ds="http://schemas.openxmlformats.org/officeDocument/2006/customXml" ds:itemID="{4C2620C2-F233-4B80-A86B-296123E423E3}">
+  <ds:schemaRefs>
+    <ds:schemaRef ds:uri="d148daf0-ee5c-47d6-9481-8c15ce1c989e"/>
+    <ds:schemaRef ds:uri="http://schemas.microsoft.com/office/2006/documentManagement/types"/>
+    <ds:schemaRef ds:uri="http://purl.org/dc/elements/1.1/"/>
+    <ds:schemaRef ds:uri="http://purl.org/dc/terms/"/>
+    <ds:schemaRef ds:uri="http://www.w3.org/XML/1998/namespace"/>
+    <ds:schemaRef ds:uri="http://schemas.microsoft.com/office/infopath/2007/PartnerControls"/>
+    <ds:schemaRef ds:uri="http://purl.org/dc/dcmitype/"/>
+    <ds:schemaRef ds:uri="http://schemas.openxmlformats.org/package/2006/metadata/core-properties"/>
+    <ds:schemaRef ds:uri="72b4b0d6-01dc-4b6d-af3a-4bfa39839b5f"/>
+    <ds:schemaRef ds:uri="http://schemas.microsoft.com/office/2006/metadata/properties"/>
+  </ds:schemaRefs>
+</ds:datastoreItem>
 </file>
 
-<file path=customXml/item3.xml><?xml version="1.0" encoding="utf-8"?>
-<p:properties xmlns:p="http://schemas.microsoft.com/office/2006/metadata/properties" xmlns:xsi="http://www.w3.org/2001/XMLSchema-instance" xmlns:pc="http://schemas.microsoft.com/office/infopath/2007/PartnerControls">
-  <documentManagement>
-    <Format xmlns="d148daf0-ee5c-47d6-9481-8c15ce1c989e">powerpoint</Format>
-  </documentManagement>
-</p:properties>
+<file path=customXml/itemProps2.xml><?xml version="1.0" encoding="utf-8"?>
+<ds:datastoreItem xmlns:ds="http://schemas.openxmlformats.org/officeDocument/2006/customXml" ds:itemID="{F7BC3940-3EE7-47AF-9BE0-C2B78D8BCB9A}">
+  <ds:schemaRefs>
+    <ds:schemaRef ds:uri="http://schemas.microsoft.com/sharepoint/v3/contenttype/forms"/>
+  </ds:schemaRefs>
+</ds:datastoreItem>
 </file>
 
-<file path=customXml/itemProps1.xml><?xml version="1.0" encoding="utf-8"?>
+<file path=customXml/itemProps3.xml><?xml version="1.0" encoding="utf-8"?>
 <ds:datastoreItem xmlns:ds="http://schemas.openxmlformats.org/officeDocument/2006/customXml" ds:itemID="{BC80EBF0-749E-4228-8968-8A7B7E1BCE90}">
   <ds:schemaRefs>
     <ds:schemaRef ds:uri="http://schemas.microsoft.com/office/2006/metadata/contentType"/>
@@ -48817,29 +48269,4 @@
     <ds:schemaRef ds:uri="http://schemas.microsoft.com/internal/obd"/>
   </ds:schemaRefs>
 </ds:datastoreItem>
-</file>
-
-<file path=customXml/itemProps2.xml><?xml version="1.0" encoding="utf-8"?>
-<ds:datastoreItem xmlns:ds="http://schemas.openxmlformats.org/officeDocument/2006/customXml" ds:itemID="{F7BC3940-3EE7-47AF-9BE0-C2B78D8BCB9A}">
-  <ds:schemaRefs>
-    <ds:schemaRef ds:uri="http://schemas.microsoft.com/sharepoint/v3/contenttype/forms"/>
-  </ds:schemaRefs>
-</ds:datastoreItem>
-</file>
-
-<file path=customXml/itemProps3.xml><?xml version="1.0" encoding="utf-8"?>
-<ds:datastoreItem xmlns:ds="http://schemas.openxmlformats.org/officeDocument/2006/customXml" ds:itemID="{4C2620C2-F233-4B80-A86B-296123E423E3}">
-  <ds:schemaRefs>
-    <ds:schemaRef ds:uri="d148daf0-ee5c-47d6-9481-8c15ce1c989e"/>
-    <ds:schemaRef ds:uri="http://schemas.microsoft.com/office/2006/documentManagement/types"/>
-    <ds:schemaRef ds:uri="http://purl.org/dc/elements/1.1/"/>
-    <ds:schemaRef ds:uri="http://purl.org/dc/terms/"/>
-    <ds:schemaRef ds:uri="http://www.w3.org/XML/1998/namespace"/>
-    <ds:schemaRef ds:uri="http://schemas.microsoft.com/office/infopath/2007/PartnerControls"/>
-    <ds:schemaRef ds:uri="http://purl.org/dc/dcmitype/"/>
-    <ds:schemaRef ds:uri="http://schemas.openxmlformats.org/package/2006/metadata/core-properties"/>
-    <ds:schemaRef ds:uri="72b4b0d6-01dc-4b6d-af3a-4bfa39839b5f"/>
-    <ds:schemaRef ds:uri="http://schemas.microsoft.com/office/2006/metadata/properties"/>
-  </ds:schemaRefs>
-</ds:datastoreItem>
 </file>